--- a/portfolio-tracker/presentation/portfolio-tracker.pptx
+++ b/portfolio-tracker/presentation/portfolio-tracker.pptx
@@ -3426,14 +3426,12 @@
         <p:spPr>
           <a:xfrm>
             <a:off x="0" y="0"/>
-            <a:ext cx="12188952" cy="6858000"/>
-          </a:xfrm>
-          <a:prstGeom prst="rect">
-            <a:avLst/>
-          </a:prstGeom>
-          <a:solidFill>
-            <a:srgbClr val="FFFFFF"/>
-          </a:solidFill>
+            <a:ext cx="12188952" cy="914400"/>
+          </a:xfrm>
+          <a:prstGeom prst="rect">
+            <a:avLst/>
+          </a:prstGeom>
+          <a:noFill/>
           <a:ln>
             <a:noFill/>
           </a:ln>
@@ -3462,13 +3460,47 @@
       </p:sp>
       <p:sp>
         <p:nvSpPr>
-          <p:cNvPr id="3" name="Rectangle 2"/>
+          <p:cNvPr id="3" name="TextBox 2"/>
+          <p:cNvSpPr txBox="1"/>
+          <p:nvPr/>
+        </p:nvSpPr>
+        <p:spPr>
+          <a:xfrm>
+            <a:off x="457200" y="73152"/>
+            <a:ext cx="10972800" cy="566928"/>
+          </a:xfrm>
+          <a:prstGeom prst="rect">
+            <a:avLst/>
+          </a:prstGeom>
+          <a:noFill/>
+        </p:spPr>
+        <p:txBody>
+          <a:bodyPr wrap="square">
+            <a:spAutoFit/>
+          </a:bodyPr>
+          <a:lstStyle/>
+          <a:p>
+            <a:pPr algn="l"/>
+            <a:r>
+              <a:rPr sz="2400" b="1">
+                <a:solidFill>
+                  <a:srgbClr val="3F51B5"/>
+                </a:solidFill>
+              </a:rPr>
+              <a:t>ADR-0001  —  모바일 프레임워크 선택</a:t>
+            </a:r>
+          </a:p>
+        </p:txBody>
+      </p:sp>
+      <p:sp>
+        <p:nvSpPr>
+          <p:cNvPr id="4" name="Rectangle 3"/>
           <p:cNvSpPr/>
           <p:nvPr/>
         </p:nvSpPr>
         <p:spPr>
           <a:xfrm>
-            <a:off x="0" y="4206240"/>
+            <a:off x="0" y="868680"/>
             <a:ext cx="12188952" cy="45720"/>
           </a:xfrm>
           <a:prstGeom prst="rect">
@@ -3505,23 +3537,91 @@
       </p:sp>
       <p:sp>
         <p:nvSpPr>
-          <p:cNvPr id="4" name="Rectangle 3"/>
+          <p:cNvPr id="5" name="TextBox 4"/>
+          <p:cNvSpPr txBox="1"/>
+          <p:nvPr/>
+        </p:nvSpPr>
+        <p:spPr>
+          <a:xfrm>
+            <a:off x="11247120" y="6492240"/>
+            <a:ext cx="822960" cy="274320"/>
+          </a:xfrm>
+          <a:prstGeom prst="rect">
+            <a:avLst/>
+          </a:prstGeom>
+          <a:noFill/>
+        </p:spPr>
+        <p:txBody>
+          <a:bodyPr wrap="square">
+            <a:spAutoFit/>
+          </a:bodyPr>
+          <a:lstStyle/>
+          <a:p>
+            <a:pPr algn="ctr"/>
+            <a:r>
+              <a:rPr sz="1000" b="0">
+                <a:solidFill>
+                  <a:srgbClr val="9E9E9E"/>
+                </a:solidFill>
+              </a:rPr>
+              <a:t>10 / 13</a:t>
+            </a:r>
+          </a:p>
+        </p:txBody>
+      </p:sp>
+      <p:sp>
+        <p:nvSpPr>
+          <p:cNvPr id="6" name="TextBox 5"/>
+          <p:cNvSpPr txBox="1"/>
+          <p:nvPr/>
+        </p:nvSpPr>
+        <p:spPr>
+          <a:xfrm>
+            <a:off x="457200" y="987552"/>
+            <a:ext cx="10972800" cy="347472"/>
+          </a:xfrm>
+          <a:prstGeom prst="rect">
+            <a:avLst/>
+          </a:prstGeom>
+          <a:noFill/>
+        </p:spPr>
+        <p:txBody>
+          <a:bodyPr wrap="square">
+            <a:spAutoFit/>
+          </a:bodyPr>
+          <a:lstStyle/>
+          <a:p>
+            <a:pPr algn="l"/>
+            <a:r>
+              <a:rPr sz="1200" b="0">
+                <a:solidFill>
+                  <a:srgbClr val="9E9E9E"/>
+                </a:solidFill>
+              </a:rPr>
+              <a:t>선택지 비교</a:t>
+            </a:r>
+          </a:p>
+        </p:txBody>
+      </p:sp>
+      <p:sp>
+        <p:nvSpPr>
+          <p:cNvPr id="7" name="Rectangle 6"/>
           <p:cNvSpPr/>
           <p:nvPr/>
         </p:nvSpPr>
         <p:spPr>
           <a:xfrm>
-            <a:off x="0" y="4251960"/>
-            <a:ext cx="12188952" cy="2606040"/>
-          </a:xfrm>
-          <a:prstGeom prst="rect">
-            <a:avLst/>
-          </a:prstGeom>
-          <a:solidFill>
-            <a:srgbClr val="F5F5F5"/>
-          </a:solidFill>
-          <a:ln>
-            <a:noFill/>
+            <a:off x="457200" y="1389888"/>
+            <a:ext cx="11247120" cy="1024128"/>
+          </a:xfrm>
+          <a:prstGeom prst="rect">
+            <a:avLst/>
+          </a:prstGeom>
+          <a:noFill/>
+          <a:ln w="10160">
+            <a:solidFill>
+              <a:srgbClr val="E0E0E0"/>
+            </a:solidFill>
           </a:ln>
         </p:spPr>
         <p:style>
@@ -3548,136 +3648,265 @@
       </p:sp>
       <p:sp>
         <p:nvSpPr>
-          <p:cNvPr id="5" name="TextBox 4"/>
-          <p:cNvSpPr txBox="1"/>
-          <p:nvPr/>
-        </p:nvSpPr>
-        <p:spPr>
-          <a:xfrm>
-            <a:off x="914400" y="1371600"/>
-            <a:ext cx="10058400" cy="1371600"/>
-          </a:xfrm>
-          <a:prstGeom prst="rect">
-            <a:avLst/>
-          </a:prstGeom>
-          <a:noFill/>
-        </p:spPr>
-        <p:txBody>
-          <a:bodyPr wrap="square">
-            <a:spAutoFit/>
-          </a:bodyPr>
-          <a:lstStyle/>
-          <a:p>
-            <a:pPr algn="ctr"/>
-            <a:r>
-              <a:rPr sz="5200" b="1">
-                <a:solidFill>
-                  <a:srgbClr val="3F51B5"/>
-                </a:solidFill>
-              </a:rPr>
-              <a:t>질문 받습니다</a:t>
-            </a:r>
-          </a:p>
-        </p:txBody>
-      </p:sp>
-      <p:sp>
-        <p:nvSpPr>
-          <p:cNvPr id="6" name="TextBox 5"/>
-          <p:cNvSpPr txBox="1"/>
-          <p:nvPr/>
-        </p:nvSpPr>
-        <p:spPr>
-          <a:xfrm>
-            <a:off x="914400" y="2926080"/>
-            <a:ext cx="10058400" cy="548640"/>
-          </a:xfrm>
-          <a:prstGeom prst="rect">
-            <a:avLst/>
-          </a:prstGeom>
-          <a:noFill/>
-        </p:spPr>
-        <p:txBody>
-          <a:bodyPr wrap="square">
-            <a:spAutoFit/>
-          </a:bodyPr>
-          <a:lstStyle/>
-          <a:p>
-            <a:pPr algn="ctr"/>
+          <p:cNvPr id="8" name="TextBox 7"/>
+          <p:cNvSpPr txBox="1"/>
+          <p:nvPr/>
+        </p:nvSpPr>
+        <p:spPr>
+          <a:xfrm>
+            <a:off x="594360" y="1499616"/>
+            <a:ext cx="11064240" cy="886968"/>
+          </a:xfrm>
+          <a:prstGeom prst="rect">
+            <a:avLst/>
+          </a:prstGeom>
+          <a:noFill/>
+        </p:spPr>
+        <p:txBody>
+          <a:bodyPr wrap="square">
+            <a:spAutoFit/>
+          </a:bodyPr>
+          <a:lstStyle/>
+          <a:p>
+            <a:pPr algn="l"/>
             <a:r>
               <a:rPr sz="1600" b="0">
                 <a:solidFill>
                   <a:srgbClr val="9E9E9E"/>
                 </a:solidFill>
               </a:rPr>
-              <a:t>ADR 세부 내용은 다음 슬라이드에 수록되어 있습니다</a:t>
-            </a:r>
-          </a:p>
-        </p:txBody>
-      </p:sp>
-      <p:sp>
-        <p:nvSpPr>
-          <p:cNvPr id="7" name="TextBox 6"/>
-          <p:cNvSpPr txBox="1"/>
-          <p:nvPr/>
-        </p:nvSpPr>
-        <p:spPr>
-          <a:xfrm>
-            <a:off x="914400" y="4663440"/>
-            <a:ext cx="10058400" cy="457200"/>
-          </a:xfrm>
-          <a:prstGeom prst="rect">
-            <a:avLst/>
-          </a:prstGeom>
-          <a:noFill/>
-        </p:spPr>
-        <p:txBody>
-          <a:bodyPr wrap="square">
-            <a:spAutoFit/>
-          </a:bodyPr>
-          <a:lstStyle/>
-          <a:p>
-            <a:pPr algn="ctr"/>
-            <a:r>
-              <a:rPr sz="1300" b="0">
+              <a:t>React Native</a:t>
+            </a:r>
+          </a:p>
+        </p:txBody>
+      </p:sp>
+      <p:sp>
+        <p:nvSpPr>
+          <p:cNvPr id="9" name="Rectangle 8"/>
+          <p:cNvSpPr/>
+          <p:nvPr/>
+        </p:nvSpPr>
+        <p:spPr>
+          <a:xfrm>
+            <a:off x="457200" y="2651760"/>
+            <a:ext cx="11247120" cy="1024128"/>
+          </a:xfrm>
+          <a:prstGeom prst="rect">
+            <a:avLst/>
+          </a:prstGeom>
+          <a:noFill/>
+          <a:ln w="10160">
+            <a:solidFill>
+              <a:srgbClr val="E0E0E0"/>
+            </a:solidFill>
+          </a:ln>
+        </p:spPr>
+        <p:style>
+          <a:lnRef idx="1">
+            <a:schemeClr val="accent1"/>
+          </a:lnRef>
+          <a:fillRef idx="3">
+            <a:schemeClr val="accent1"/>
+          </a:fillRef>
+          <a:effectRef idx="2">
+            <a:schemeClr val="accent1"/>
+          </a:effectRef>
+          <a:fontRef idx="minor">
+            <a:schemeClr val="lt1"/>
+          </a:fontRef>
+        </p:style>
+        <p:txBody>
+          <a:bodyPr rtlCol="0" anchor="ctr"/>
+          <a:lstStyle/>
+          <a:p>
+            <a:pPr algn="ctr"/>
+          </a:p>
+        </p:txBody>
+      </p:sp>
+      <p:sp>
+        <p:nvSpPr>
+          <p:cNvPr id="10" name="TextBox 9"/>
+          <p:cNvSpPr txBox="1"/>
+          <p:nvPr/>
+        </p:nvSpPr>
+        <p:spPr>
+          <a:xfrm>
+            <a:off x="594360" y="2761488"/>
+            <a:ext cx="11064240" cy="886968"/>
+          </a:xfrm>
+          <a:prstGeom prst="rect">
+            <a:avLst/>
+          </a:prstGeom>
+          <a:noFill/>
+        </p:spPr>
+        <p:txBody>
+          <a:bodyPr wrap="square">
+            <a:spAutoFit/>
+          </a:bodyPr>
+          <a:lstStyle/>
+          <a:p>
+            <a:pPr algn="l"/>
+            <a:r>
+              <a:rPr sz="1600" b="0">
                 <a:solidFill>
                   <a:srgbClr val="9E9E9E"/>
                 </a:solidFill>
               </a:rPr>
-              <a:t>Portfolio Tracker  ·  Jooseonghyeon  ·  2026.05</a:t>
-            </a:r>
-          </a:p>
-        </p:txBody>
-      </p:sp>
-      <p:sp>
-        <p:nvSpPr>
-          <p:cNvPr id="8" name="TextBox 7"/>
-          <p:cNvSpPr txBox="1"/>
-          <p:nvPr/>
-        </p:nvSpPr>
-        <p:spPr>
-          <a:xfrm>
-            <a:off x="11247120" y="6492240"/>
-            <a:ext cx="822960" cy="274320"/>
-          </a:xfrm>
-          <a:prstGeom prst="rect">
-            <a:avLst/>
-          </a:prstGeom>
-          <a:noFill/>
-        </p:spPr>
-        <p:txBody>
-          <a:bodyPr wrap="square">
-            <a:spAutoFit/>
-          </a:bodyPr>
-          <a:lstStyle/>
-          <a:p>
-            <a:pPr algn="ctr"/>
-            <a:r>
-              <a:rPr sz="1000" b="0">
+              <a:t>안드로이드 전용 개발</a:t>
+            </a:r>
+          </a:p>
+        </p:txBody>
+      </p:sp>
+      <p:sp>
+        <p:nvSpPr>
+          <p:cNvPr id="11" name="Rectangle 10"/>
+          <p:cNvSpPr/>
+          <p:nvPr/>
+        </p:nvSpPr>
+        <p:spPr>
+          <a:xfrm>
+            <a:off x="457200" y="3913631"/>
+            <a:ext cx="11247120" cy="1024128"/>
+          </a:xfrm>
+          <a:prstGeom prst="rect">
+            <a:avLst/>
+          </a:prstGeom>
+          <a:noFill/>
+          <a:ln w="10160">
+            <a:solidFill>
+              <a:srgbClr val="E0E0E0"/>
+            </a:solidFill>
+          </a:ln>
+        </p:spPr>
+        <p:style>
+          <a:lnRef idx="1">
+            <a:schemeClr val="accent1"/>
+          </a:lnRef>
+          <a:fillRef idx="3">
+            <a:schemeClr val="accent1"/>
+          </a:fillRef>
+          <a:effectRef idx="2">
+            <a:schemeClr val="accent1"/>
+          </a:effectRef>
+          <a:fontRef idx="minor">
+            <a:schemeClr val="lt1"/>
+          </a:fontRef>
+        </p:style>
+        <p:txBody>
+          <a:bodyPr rtlCol="0" anchor="ctr"/>
+          <a:lstStyle/>
+          <a:p>
+            <a:pPr algn="ctr"/>
+          </a:p>
+        </p:txBody>
+      </p:sp>
+      <p:sp>
+        <p:nvSpPr>
+          <p:cNvPr id="12" name="TextBox 11"/>
+          <p:cNvSpPr txBox="1"/>
+          <p:nvPr/>
+        </p:nvSpPr>
+        <p:spPr>
+          <a:xfrm>
+            <a:off x="594360" y="4023359"/>
+            <a:ext cx="11064240" cy="886968"/>
+          </a:xfrm>
+          <a:prstGeom prst="rect">
+            <a:avLst/>
+          </a:prstGeom>
+          <a:noFill/>
+        </p:spPr>
+        <p:txBody>
+          <a:bodyPr wrap="square">
+            <a:spAutoFit/>
+          </a:bodyPr>
+          <a:lstStyle/>
+          <a:p>
+            <a:pPr algn="l"/>
+            <a:r>
+              <a:rPr sz="1600" b="0">
                 <a:solidFill>
                   <a:srgbClr val="9E9E9E"/>
                 </a:solidFill>
               </a:rPr>
-              <a:t>10 / 13</a:t>
+              <a:t>아이폰 전용 개발</a:t>
+            </a:r>
+          </a:p>
+        </p:txBody>
+      </p:sp>
+      <p:sp>
+        <p:nvSpPr>
+          <p:cNvPr id="13" name="Rectangle 12"/>
+          <p:cNvSpPr/>
+          <p:nvPr/>
+        </p:nvSpPr>
+        <p:spPr>
+          <a:xfrm>
+            <a:off x="457200" y="5175504"/>
+            <a:ext cx="11247120" cy="1024128"/>
+          </a:xfrm>
+          <a:prstGeom prst="rect">
+            <a:avLst/>
+          </a:prstGeom>
+          <a:solidFill>
+            <a:srgbClr val="3F51B5"/>
+          </a:solidFill>
+          <a:ln>
+            <a:noFill/>
+          </a:ln>
+        </p:spPr>
+        <p:style>
+          <a:lnRef idx="1">
+            <a:schemeClr val="accent1"/>
+          </a:lnRef>
+          <a:fillRef idx="3">
+            <a:schemeClr val="accent1"/>
+          </a:fillRef>
+          <a:effectRef idx="2">
+            <a:schemeClr val="accent1"/>
+          </a:effectRef>
+          <a:fontRef idx="minor">
+            <a:schemeClr val="lt1"/>
+          </a:fontRef>
+        </p:style>
+        <p:txBody>
+          <a:bodyPr rtlCol="0" anchor="ctr"/>
+          <a:lstStyle/>
+          <a:p>
+            <a:pPr algn="ctr"/>
+          </a:p>
+        </p:txBody>
+      </p:sp>
+      <p:sp>
+        <p:nvSpPr>
+          <p:cNvPr id="14" name="TextBox 13"/>
+          <p:cNvSpPr txBox="1"/>
+          <p:nvPr/>
+        </p:nvSpPr>
+        <p:spPr>
+          <a:xfrm>
+            <a:off x="594360" y="5285232"/>
+            <a:ext cx="11064240" cy="886968"/>
+          </a:xfrm>
+          <a:prstGeom prst="rect">
+            <a:avLst/>
+          </a:prstGeom>
+          <a:noFill/>
+        </p:spPr>
+        <p:txBody>
+          <a:bodyPr wrap="square">
+            <a:spAutoFit/>
+          </a:bodyPr>
+          <a:lstStyle/>
+          <a:p>
+            <a:pPr algn="l"/>
+            <a:r>
+              <a:rPr sz="1600" b="1">
+                <a:solidFill>
+                  <a:srgbClr val="FFFFFF"/>
+                </a:solidFill>
+              </a:rPr>
+              <a:t>✓  Flutter</a:t>
             </a:r>
           </a:p>
         </p:txBody>
@@ -3770,7 +3999,7 @@
                   <a:srgbClr val="3F51B5"/>
                 </a:solidFill>
               </a:rPr>
-              <a:t>ADR-0001  —  모바일 프레임워크 선택</a:t>
+              <a:t>ADR-0002  —  아키텍처 패턴 선택</a:t>
             </a:r>
           </a:p>
         </p:txBody>
@@ -3861,7 +4090,7 @@
         <p:spPr>
           <a:xfrm>
             <a:off x="457200" y="987552"/>
-            <a:ext cx="10972800" cy="347472"/>
+            <a:ext cx="5486400" cy="347472"/>
           </a:xfrm>
           <a:prstGeom prst="rect">
             <a:avLst/>
@@ -3895,7 +4124,7 @@
         <p:spPr>
           <a:xfrm>
             <a:off x="457200" y="1389888"/>
-            <a:ext cx="11247120" cy="1024128"/>
+            <a:ext cx="5486400" cy="1024128"/>
           </a:xfrm>
           <a:prstGeom prst="rect">
             <a:avLst/>
@@ -3938,7 +4167,7 @@
         <p:spPr>
           <a:xfrm>
             <a:off x="594360" y="1499616"/>
-            <a:ext cx="11064240" cy="886968"/>
+            <a:ext cx="5303520" cy="886968"/>
           </a:xfrm>
           <a:prstGeom prst="rect">
             <a:avLst/>
@@ -3958,7 +4187,7 @@
                   <a:srgbClr val="9E9E9E"/>
                 </a:solidFill>
               </a:rPr>
-              <a:t>React Native</a:t>
+              <a:t>역할 구분 없이 한 파일</a:t>
             </a:r>
           </a:p>
         </p:txBody>
@@ -3972,7 +4201,7 @@
         <p:spPr>
           <a:xfrm>
             <a:off x="457200" y="2651760"/>
-            <a:ext cx="11247120" cy="1024128"/>
+            <a:ext cx="5486400" cy="1024128"/>
           </a:xfrm>
           <a:prstGeom prst="rect">
             <a:avLst/>
@@ -4015,7 +4244,7 @@
         <p:spPr>
           <a:xfrm>
             <a:off x="594360" y="2761488"/>
-            <a:ext cx="11064240" cy="886968"/>
+            <a:ext cx="5303520" cy="886968"/>
           </a:xfrm>
           <a:prstGeom prst="rect">
             <a:avLst/>
@@ -4035,7 +4264,7 @@
                   <a:srgbClr val="9E9E9E"/>
                 </a:solidFill>
               </a:rPr>
-              <a:t>안드로이드 전용 개발</a:t>
+              <a:t>MVC 방식</a:t>
             </a:r>
           </a:p>
         </p:txBody>
@@ -4049,7 +4278,7 @@
         <p:spPr>
           <a:xfrm>
             <a:off x="457200" y="3913631"/>
-            <a:ext cx="11247120" cy="1024128"/>
+            <a:ext cx="5486400" cy="1024128"/>
           </a:xfrm>
           <a:prstGeom prst="rect">
             <a:avLst/>
@@ -4092,7 +4321,7 @@
         <p:spPr>
           <a:xfrm>
             <a:off x="594360" y="4023359"/>
-            <a:ext cx="11064240" cy="886968"/>
+            <a:ext cx="5303520" cy="886968"/>
           </a:xfrm>
           <a:prstGeom prst="rect">
             <a:avLst/>
@@ -4112,7 +4341,7 @@
                   <a:srgbClr val="9E9E9E"/>
                 </a:solidFill>
               </a:rPr>
-              <a:t>아이폰 전용 개발</a:t>
+              <a:t>6 ~ 8개 레이어</a:t>
             </a:r>
           </a:p>
         </p:txBody>
@@ -4126,7 +4355,7 @@
         <p:spPr>
           <a:xfrm>
             <a:off x="457200" y="5175504"/>
-            <a:ext cx="11247120" cy="1024128"/>
+            <a:ext cx="5486400" cy="1024128"/>
           </a:xfrm>
           <a:prstGeom prst="rect">
             <a:avLst/>
@@ -4169,7 +4398,7 @@
         <p:spPr>
           <a:xfrm>
             <a:off x="594360" y="5285232"/>
-            <a:ext cx="11064240" cy="886968"/>
+            <a:ext cx="5303520" cy="886968"/>
           </a:xfrm>
           <a:prstGeom prst="rect">
             <a:avLst/>
@@ -4189,7 +4418,1226 @@
                   <a:srgbClr val="FFFFFF"/>
                 </a:solidFill>
               </a:rPr>
-              <a:t>✓  Flutter</a:t>
+              <a:t>✓  4레이어 구조</a:t>
+            </a:r>
+          </a:p>
+        </p:txBody>
+      </p:sp>
+      <p:sp>
+        <p:nvSpPr>
+          <p:cNvPr id="15" name="TextBox 14"/>
+          <p:cNvSpPr txBox="1"/>
+          <p:nvPr/>
+        </p:nvSpPr>
+        <p:spPr>
+          <a:xfrm>
+            <a:off x="6400800" y="987552"/>
+            <a:ext cx="5394960" cy="347472"/>
+          </a:xfrm>
+          <a:prstGeom prst="rect">
+            <a:avLst/>
+          </a:prstGeom>
+          <a:noFill/>
+        </p:spPr>
+        <p:txBody>
+          <a:bodyPr wrap="square">
+            <a:spAutoFit/>
+          </a:bodyPr>
+          <a:lstStyle/>
+          <a:p>
+            <a:pPr algn="l"/>
+            <a:r>
+              <a:rPr sz="1200" b="0">
+                <a:solidFill>
+                  <a:srgbClr val="9E9E9E"/>
+                </a:solidFill>
+              </a:rPr>
+              <a:t>선택된 4레이어 구조</a:t>
+            </a:r>
+          </a:p>
+        </p:txBody>
+      </p:sp>
+      <p:sp>
+        <p:nvSpPr>
+          <p:cNvPr id="16" name="Rectangle 15"/>
+          <p:cNvSpPr/>
+          <p:nvPr/>
+        </p:nvSpPr>
+        <p:spPr>
+          <a:xfrm>
+            <a:off x="6400800" y="1389888"/>
+            <a:ext cx="1371600" cy="822960"/>
+          </a:xfrm>
+          <a:prstGeom prst="rect">
+            <a:avLst/>
+          </a:prstGeom>
+          <a:solidFill>
+            <a:srgbClr val="F5F5F5"/>
+          </a:solidFill>
+          <a:ln w="10160">
+            <a:solidFill>
+              <a:srgbClr val="E0E0E0"/>
+            </a:solidFill>
+          </a:ln>
+        </p:spPr>
+        <p:style>
+          <a:lnRef idx="1">
+            <a:schemeClr val="accent1"/>
+          </a:lnRef>
+          <a:fillRef idx="3">
+            <a:schemeClr val="accent1"/>
+          </a:fillRef>
+          <a:effectRef idx="2">
+            <a:schemeClr val="accent1"/>
+          </a:effectRef>
+          <a:fontRef idx="minor">
+            <a:schemeClr val="lt1"/>
+          </a:fontRef>
+        </p:style>
+        <p:txBody>
+          <a:bodyPr rtlCol="0" anchor="ctr"/>
+          <a:lstStyle/>
+          <a:p>
+            <a:pPr algn="ctr"/>
+          </a:p>
+        </p:txBody>
+      </p:sp>
+      <p:sp>
+        <p:nvSpPr>
+          <p:cNvPr id="17" name="TextBox 16"/>
+          <p:cNvSpPr txBox="1"/>
+          <p:nvPr/>
+        </p:nvSpPr>
+        <p:spPr>
+          <a:xfrm>
+            <a:off x="6510528" y="1591056"/>
+            <a:ext cx="1188720" cy="438912"/>
+          </a:xfrm>
+          <a:prstGeom prst="rect">
+            <a:avLst/>
+          </a:prstGeom>
+          <a:noFill/>
+        </p:spPr>
+        <p:txBody>
+          <a:bodyPr wrap="square">
+            <a:spAutoFit/>
+          </a:bodyPr>
+          <a:lstStyle/>
+          <a:p>
+            <a:pPr algn="l"/>
+            <a:r>
+              <a:rPr sz="1200" b="1">
+                <a:solidFill>
+                  <a:srgbClr val="3F51B5"/>
+                </a:solidFill>
+              </a:rPr>
+              <a:t>레이어</a:t>
+            </a:r>
+          </a:p>
+        </p:txBody>
+      </p:sp>
+      <p:sp>
+        <p:nvSpPr>
+          <p:cNvPr id="18" name="Rectangle 17"/>
+          <p:cNvSpPr/>
+          <p:nvPr/>
+        </p:nvSpPr>
+        <p:spPr>
+          <a:xfrm>
+            <a:off x="7818120" y="1389888"/>
+            <a:ext cx="2560320" cy="822960"/>
+          </a:xfrm>
+          <a:prstGeom prst="rect">
+            <a:avLst/>
+          </a:prstGeom>
+          <a:solidFill>
+            <a:srgbClr val="F5F5F5"/>
+          </a:solidFill>
+          <a:ln w="10160">
+            <a:solidFill>
+              <a:srgbClr val="E0E0E0"/>
+            </a:solidFill>
+          </a:ln>
+        </p:spPr>
+        <p:style>
+          <a:lnRef idx="1">
+            <a:schemeClr val="accent1"/>
+          </a:lnRef>
+          <a:fillRef idx="3">
+            <a:schemeClr val="accent1"/>
+          </a:fillRef>
+          <a:effectRef idx="2">
+            <a:schemeClr val="accent1"/>
+          </a:effectRef>
+          <a:fontRef idx="minor">
+            <a:schemeClr val="lt1"/>
+          </a:fontRef>
+        </p:style>
+        <p:txBody>
+          <a:bodyPr rtlCol="0" anchor="ctr"/>
+          <a:lstStyle/>
+          <a:p>
+            <a:pPr algn="ctr"/>
+          </a:p>
+        </p:txBody>
+      </p:sp>
+      <p:sp>
+        <p:nvSpPr>
+          <p:cNvPr id="19" name="TextBox 18"/>
+          <p:cNvSpPr txBox="1"/>
+          <p:nvPr/>
+        </p:nvSpPr>
+        <p:spPr>
+          <a:xfrm>
+            <a:off x="7927848" y="1591056"/>
+            <a:ext cx="2377439" cy="438912"/>
+          </a:xfrm>
+          <a:prstGeom prst="rect">
+            <a:avLst/>
+          </a:prstGeom>
+          <a:noFill/>
+        </p:spPr>
+        <p:txBody>
+          <a:bodyPr wrap="square">
+            <a:spAutoFit/>
+          </a:bodyPr>
+          <a:lstStyle/>
+          <a:p>
+            <a:pPr algn="l"/>
+            <a:r>
+              <a:rPr sz="1200" b="1">
+                <a:solidFill>
+                  <a:srgbClr val="3F51B5"/>
+                </a:solidFill>
+              </a:rPr>
+              <a:t>역할</a:t>
+            </a:r>
+          </a:p>
+        </p:txBody>
+      </p:sp>
+      <p:sp>
+        <p:nvSpPr>
+          <p:cNvPr id="20" name="Rectangle 19"/>
+          <p:cNvSpPr/>
+          <p:nvPr/>
+        </p:nvSpPr>
+        <p:spPr>
+          <a:xfrm>
+            <a:off x="10424160" y="1389888"/>
+            <a:ext cx="1737360" cy="822960"/>
+          </a:xfrm>
+          <a:prstGeom prst="rect">
+            <a:avLst/>
+          </a:prstGeom>
+          <a:solidFill>
+            <a:srgbClr val="F5F5F5"/>
+          </a:solidFill>
+          <a:ln w="10160">
+            <a:solidFill>
+              <a:srgbClr val="E0E0E0"/>
+            </a:solidFill>
+          </a:ln>
+        </p:spPr>
+        <p:style>
+          <a:lnRef idx="1">
+            <a:schemeClr val="accent1"/>
+          </a:lnRef>
+          <a:fillRef idx="3">
+            <a:schemeClr val="accent1"/>
+          </a:fillRef>
+          <a:effectRef idx="2">
+            <a:schemeClr val="accent1"/>
+          </a:effectRef>
+          <a:fontRef idx="minor">
+            <a:schemeClr val="lt1"/>
+          </a:fontRef>
+        </p:style>
+        <p:txBody>
+          <a:bodyPr rtlCol="0" anchor="ctr"/>
+          <a:lstStyle/>
+          <a:p>
+            <a:pPr algn="ctr"/>
+          </a:p>
+        </p:txBody>
+      </p:sp>
+      <p:sp>
+        <p:nvSpPr>
+          <p:cNvPr id="21" name="TextBox 20"/>
+          <p:cNvSpPr txBox="1"/>
+          <p:nvPr/>
+        </p:nvSpPr>
+        <p:spPr>
+          <a:xfrm>
+            <a:off x="10533888" y="1591056"/>
+            <a:ext cx="1554480" cy="438912"/>
+          </a:xfrm>
+          <a:prstGeom prst="rect">
+            <a:avLst/>
+          </a:prstGeom>
+          <a:noFill/>
+        </p:spPr>
+        <p:txBody>
+          <a:bodyPr wrap="square">
+            <a:spAutoFit/>
+          </a:bodyPr>
+          <a:lstStyle/>
+          <a:p>
+            <a:pPr algn="l"/>
+            <a:r>
+              <a:rPr sz="1200" b="1">
+                <a:solidFill>
+                  <a:srgbClr val="3F51B5"/>
+                </a:solidFill>
+              </a:rPr>
+              <a:t>위치</a:t>
+            </a:r>
+          </a:p>
+        </p:txBody>
+      </p:sp>
+      <p:sp>
+        <p:nvSpPr>
+          <p:cNvPr id="22" name="Rectangle 21"/>
+          <p:cNvSpPr/>
+          <p:nvPr/>
+        </p:nvSpPr>
+        <p:spPr>
+          <a:xfrm>
+            <a:off x="6400800" y="2395728"/>
+            <a:ext cx="1371600" cy="822960"/>
+          </a:xfrm>
+          <a:prstGeom prst="rect">
+            <a:avLst/>
+          </a:prstGeom>
+          <a:solidFill>
+            <a:srgbClr val="FFFFFF"/>
+          </a:solidFill>
+          <a:ln w="10160">
+            <a:solidFill>
+              <a:srgbClr val="E0E0E0"/>
+            </a:solidFill>
+          </a:ln>
+        </p:spPr>
+        <p:style>
+          <a:lnRef idx="1">
+            <a:schemeClr val="accent1"/>
+          </a:lnRef>
+          <a:fillRef idx="3">
+            <a:schemeClr val="accent1"/>
+          </a:fillRef>
+          <a:effectRef idx="2">
+            <a:schemeClr val="accent1"/>
+          </a:effectRef>
+          <a:fontRef idx="minor">
+            <a:schemeClr val="lt1"/>
+          </a:fontRef>
+        </p:style>
+        <p:txBody>
+          <a:bodyPr rtlCol="0" anchor="ctr"/>
+          <a:lstStyle/>
+          <a:p>
+            <a:pPr algn="ctr"/>
+          </a:p>
+        </p:txBody>
+      </p:sp>
+      <p:sp>
+        <p:nvSpPr>
+          <p:cNvPr id="23" name="TextBox 22"/>
+          <p:cNvSpPr txBox="1"/>
+          <p:nvPr/>
+        </p:nvSpPr>
+        <p:spPr>
+          <a:xfrm>
+            <a:off x="6510528" y="2596896"/>
+            <a:ext cx="1188720" cy="438912"/>
+          </a:xfrm>
+          <a:prstGeom prst="rect">
+            <a:avLst/>
+          </a:prstGeom>
+          <a:noFill/>
+        </p:spPr>
+        <p:txBody>
+          <a:bodyPr wrap="square">
+            <a:spAutoFit/>
+          </a:bodyPr>
+          <a:lstStyle/>
+          <a:p>
+            <a:pPr algn="l"/>
+            <a:r>
+              <a:rPr sz="1200" b="0">
+                <a:solidFill>
+                  <a:srgbClr val="212121"/>
+                </a:solidFill>
+              </a:rPr>
+              <a:t>화면</a:t>
+            </a:r>
+          </a:p>
+        </p:txBody>
+      </p:sp>
+      <p:sp>
+        <p:nvSpPr>
+          <p:cNvPr id="24" name="Rectangle 23"/>
+          <p:cNvSpPr/>
+          <p:nvPr/>
+        </p:nvSpPr>
+        <p:spPr>
+          <a:xfrm>
+            <a:off x="7818120" y="2395728"/>
+            <a:ext cx="2560320" cy="822960"/>
+          </a:xfrm>
+          <a:prstGeom prst="rect">
+            <a:avLst/>
+          </a:prstGeom>
+          <a:solidFill>
+            <a:srgbClr val="FFFFFF"/>
+          </a:solidFill>
+          <a:ln w="10160">
+            <a:solidFill>
+              <a:srgbClr val="E0E0E0"/>
+            </a:solidFill>
+          </a:ln>
+        </p:spPr>
+        <p:style>
+          <a:lnRef idx="1">
+            <a:schemeClr val="accent1"/>
+          </a:lnRef>
+          <a:fillRef idx="3">
+            <a:schemeClr val="accent1"/>
+          </a:fillRef>
+          <a:effectRef idx="2">
+            <a:schemeClr val="accent1"/>
+          </a:effectRef>
+          <a:fontRef idx="minor">
+            <a:schemeClr val="lt1"/>
+          </a:fontRef>
+        </p:style>
+        <p:txBody>
+          <a:bodyPr rtlCol="0" anchor="ctr"/>
+          <a:lstStyle/>
+          <a:p>
+            <a:pPr algn="ctr"/>
+          </a:p>
+        </p:txBody>
+      </p:sp>
+      <p:sp>
+        <p:nvSpPr>
+          <p:cNvPr id="25" name="TextBox 24"/>
+          <p:cNvSpPr txBox="1"/>
+          <p:nvPr/>
+        </p:nvSpPr>
+        <p:spPr>
+          <a:xfrm>
+            <a:off x="7927848" y="2596896"/>
+            <a:ext cx="2377439" cy="438912"/>
+          </a:xfrm>
+          <a:prstGeom prst="rect">
+            <a:avLst/>
+          </a:prstGeom>
+          <a:noFill/>
+        </p:spPr>
+        <p:txBody>
+          <a:bodyPr wrap="square">
+            <a:spAutoFit/>
+          </a:bodyPr>
+          <a:lstStyle/>
+          <a:p>
+            <a:pPr algn="l"/>
+            <a:r>
+              <a:rPr sz="1200" b="0">
+                <a:solidFill>
+                  <a:srgbClr val="212121"/>
+                </a:solidFill>
+              </a:rPr>
+              <a:t>버튼·목록·입력창</a:t>
+            </a:r>
+          </a:p>
+        </p:txBody>
+      </p:sp>
+      <p:sp>
+        <p:nvSpPr>
+          <p:cNvPr id="26" name="Rectangle 25"/>
+          <p:cNvSpPr/>
+          <p:nvPr/>
+        </p:nvSpPr>
+        <p:spPr>
+          <a:xfrm>
+            <a:off x="10424160" y="2395728"/>
+            <a:ext cx="1737360" cy="822960"/>
+          </a:xfrm>
+          <a:prstGeom prst="rect">
+            <a:avLst/>
+          </a:prstGeom>
+          <a:solidFill>
+            <a:srgbClr val="FFFFFF"/>
+          </a:solidFill>
+          <a:ln w="10160">
+            <a:solidFill>
+              <a:srgbClr val="E0E0E0"/>
+            </a:solidFill>
+          </a:ln>
+        </p:spPr>
+        <p:style>
+          <a:lnRef idx="1">
+            <a:schemeClr val="accent1"/>
+          </a:lnRef>
+          <a:fillRef idx="3">
+            <a:schemeClr val="accent1"/>
+          </a:fillRef>
+          <a:effectRef idx="2">
+            <a:schemeClr val="accent1"/>
+          </a:effectRef>
+          <a:fontRef idx="minor">
+            <a:schemeClr val="lt1"/>
+          </a:fontRef>
+        </p:style>
+        <p:txBody>
+          <a:bodyPr rtlCol="0" anchor="ctr"/>
+          <a:lstStyle/>
+          <a:p>
+            <a:pPr algn="ctr"/>
+          </a:p>
+        </p:txBody>
+      </p:sp>
+      <p:sp>
+        <p:nvSpPr>
+          <p:cNvPr id="27" name="TextBox 26"/>
+          <p:cNvSpPr txBox="1"/>
+          <p:nvPr/>
+        </p:nvSpPr>
+        <p:spPr>
+          <a:xfrm>
+            <a:off x="10533888" y="2596896"/>
+            <a:ext cx="1554480" cy="438912"/>
+          </a:xfrm>
+          <a:prstGeom prst="rect">
+            <a:avLst/>
+          </a:prstGeom>
+          <a:noFill/>
+        </p:spPr>
+        <p:txBody>
+          <a:bodyPr wrap="square">
+            <a:spAutoFit/>
+          </a:bodyPr>
+          <a:lstStyle/>
+          <a:p>
+            <a:pPr algn="l"/>
+            <a:r>
+              <a:rPr sz="1200" b="0">
+                <a:solidFill>
+                  <a:srgbClr val="212121"/>
+                </a:solidFill>
+              </a:rPr>
+              <a:t>screens/</a:t>
+            </a:r>
+          </a:p>
+        </p:txBody>
+      </p:sp>
+      <p:sp>
+        <p:nvSpPr>
+          <p:cNvPr id="28" name="Rectangle 27"/>
+          <p:cNvSpPr/>
+          <p:nvPr/>
+        </p:nvSpPr>
+        <p:spPr>
+          <a:xfrm>
+            <a:off x="6400800" y="3401568"/>
+            <a:ext cx="1371600" cy="822960"/>
+          </a:xfrm>
+          <a:prstGeom prst="rect">
+            <a:avLst/>
+          </a:prstGeom>
+          <a:solidFill>
+            <a:srgbClr val="FFFFFF"/>
+          </a:solidFill>
+          <a:ln w="10160">
+            <a:solidFill>
+              <a:srgbClr val="E0E0E0"/>
+            </a:solidFill>
+          </a:ln>
+        </p:spPr>
+        <p:style>
+          <a:lnRef idx="1">
+            <a:schemeClr val="accent1"/>
+          </a:lnRef>
+          <a:fillRef idx="3">
+            <a:schemeClr val="accent1"/>
+          </a:fillRef>
+          <a:effectRef idx="2">
+            <a:schemeClr val="accent1"/>
+          </a:effectRef>
+          <a:fontRef idx="minor">
+            <a:schemeClr val="lt1"/>
+          </a:fontRef>
+        </p:style>
+        <p:txBody>
+          <a:bodyPr rtlCol="0" anchor="ctr"/>
+          <a:lstStyle/>
+          <a:p>
+            <a:pPr algn="ctr"/>
+          </a:p>
+        </p:txBody>
+      </p:sp>
+      <p:sp>
+        <p:nvSpPr>
+          <p:cNvPr id="29" name="TextBox 28"/>
+          <p:cNvSpPr txBox="1"/>
+          <p:nvPr/>
+        </p:nvSpPr>
+        <p:spPr>
+          <a:xfrm>
+            <a:off x="6510528" y="3602736"/>
+            <a:ext cx="1188720" cy="438912"/>
+          </a:xfrm>
+          <a:prstGeom prst="rect">
+            <a:avLst/>
+          </a:prstGeom>
+          <a:noFill/>
+        </p:spPr>
+        <p:txBody>
+          <a:bodyPr wrap="square">
+            <a:spAutoFit/>
+          </a:bodyPr>
+          <a:lstStyle/>
+          <a:p>
+            <a:pPr algn="l"/>
+            <a:r>
+              <a:rPr sz="1200" b="0">
+                <a:solidFill>
+                  <a:srgbClr val="212121"/>
+                </a:solidFill>
+              </a:rPr>
+              <a:t>흐름</a:t>
+            </a:r>
+          </a:p>
+        </p:txBody>
+      </p:sp>
+      <p:sp>
+        <p:nvSpPr>
+          <p:cNvPr id="30" name="Rectangle 29"/>
+          <p:cNvSpPr/>
+          <p:nvPr/>
+        </p:nvSpPr>
+        <p:spPr>
+          <a:xfrm>
+            <a:off x="7818120" y="3401568"/>
+            <a:ext cx="2560320" cy="822960"/>
+          </a:xfrm>
+          <a:prstGeom prst="rect">
+            <a:avLst/>
+          </a:prstGeom>
+          <a:solidFill>
+            <a:srgbClr val="FFFFFF"/>
+          </a:solidFill>
+          <a:ln w="10160">
+            <a:solidFill>
+              <a:srgbClr val="E0E0E0"/>
+            </a:solidFill>
+          </a:ln>
+        </p:spPr>
+        <p:style>
+          <a:lnRef idx="1">
+            <a:schemeClr val="accent1"/>
+          </a:lnRef>
+          <a:fillRef idx="3">
+            <a:schemeClr val="accent1"/>
+          </a:fillRef>
+          <a:effectRef idx="2">
+            <a:schemeClr val="accent1"/>
+          </a:effectRef>
+          <a:fontRef idx="minor">
+            <a:schemeClr val="lt1"/>
+          </a:fontRef>
+        </p:style>
+        <p:txBody>
+          <a:bodyPr rtlCol="0" anchor="ctr"/>
+          <a:lstStyle/>
+          <a:p>
+            <a:pPr algn="ctr"/>
+          </a:p>
+        </p:txBody>
+      </p:sp>
+      <p:sp>
+        <p:nvSpPr>
+          <p:cNvPr id="31" name="TextBox 30"/>
+          <p:cNvSpPr txBox="1"/>
+          <p:nvPr/>
+        </p:nvSpPr>
+        <p:spPr>
+          <a:xfrm>
+            <a:off x="7927848" y="3602736"/>
+            <a:ext cx="2377439" cy="438912"/>
+          </a:xfrm>
+          <a:prstGeom prst="rect">
+            <a:avLst/>
+          </a:prstGeom>
+          <a:noFill/>
+        </p:spPr>
+        <p:txBody>
+          <a:bodyPr wrap="square">
+            <a:spAutoFit/>
+          </a:bodyPr>
+          <a:lstStyle/>
+          <a:p>
+            <a:pPr algn="l"/>
+            <a:r>
+              <a:rPr sz="1200" b="0">
+                <a:solidFill>
+                  <a:srgbClr val="212121"/>
+                </a:solidFill>
+              </a:rPr>
+              <a:t>화면-데이터 연결 처리</a:t>
+            </a:r>
+          </a:p>
+        </p:txBody>
+      </p:sp>
+      <p:sp>
+        <p:nvSpPr>
+          <p:cNvPr id="32" name="Rectangle 31"/>
+          <p:cNvSpPr/>
+          <p:nvPr/>
+        </p:nvSpPr>
+        <p:spPr>
+          <a:xfrm>
+            <a:off x="10424160" y="3401568"/>
+            <a:ext cx="1737360" cy="822960"/>
+          </a:xfrm>
+          <a:prstGeom prst="rect">
+            <a:avLst/>
+          </a:prstGeom>
+          <a:solidFill>
+            <a:srgbClr val="FFFFFF"/>
+          </a:solidFill>
+          <a:ln w="10160">
+            <a:solidFill>
+              <a:srgbClr val="E0E0E0"/>
+            </a:solidFill>
+          </a:ln>
+        </p:spPr>
+        <p:style>
+          <a:lnRef idx="1">
+            <a:schemeClr val="accent1"/>
+          </a:lnRef>
+          <a:fillRef idx="3">
+            <a:schemeClr val="accent1"/>
+          </a:fillRef>
+          <a:effectRef idx="2">
+            <a:schemeClr val="accent1"/>
+          </a:effectRef>
+          <a:fontRef idx="minor">
+            <a:schemeClr val="lt1"/>
+          </a:fontRef>
+        </p:style>
+        <p:txBody>
+          <a:bodyPr rtlCol="0" anchor="ctr"/>
+          <a:lstStyle/>
+          <a:p>
+            <a:pPr algn="ctr"/>
+          </a:p>
+        </p:txBody>
+      </p:sp>
+      <p:sp>
+        <p:nvSpPr>
+          <p:cNvPr id="33" name="TextBox 32"/>
+          <p:cNvSpPr txBox="1"/>
+          <p:nvPr/>
+        </p:nvSpPr>
+        <p:spPr>
+          <a:xfrm>
+            <a:off x="10533888" y="3602736"/>
+            <a:ext cx="1554480" cy="438912"/>
+          </a:xfrm>
+          <a:prstGeom prst="rect">
+            <a:avLst/>
+          </a:prstGeom>
+          <a:noFill/>
+        </p:spPr>
+        <p:txBody>
+          <a:bodyPr wrap="square">
+            <a:spAutoFit/>
+          </a:bodyPr>
+          <a:lstStyle/>
+          <a:p>
+            <a:pPr algn="l"/>
+            <a:r>
+              <a:rPr sz="1200" b="0">
+                <a:solidFill>
+                  <a:srgbClr val="212121"/>
+                </a:solidFill>
+              </a:rPr>
+              <a:t/>
+            </a:r>
+          </a:p>
+        </p:txBody>
+      </p:sp>
+      <p:sp>
+        <p:nvSpPr>
+          <p:cNvPr id="34" name="Rectangle 33"/>
+          <p:cNvSpPr/>
+          <p:nvPr/>
+        </p:nvSpPr>
+        <p:spPr>
+          <a:xfrm>
+            <a:off x="6400800" y="4407408"/>
+            <a:ext cx="1371600" cy="822960"/>
+          </a:xfrm>
+          <a:prstGeom prst="rect">
+            <a:avLst/>
+          </a:prstGeom>
+          <a:solidFill>
+            <a:srgbClr val="FFFFFF"/>
+          </a:solidFill>
+          <a:ln w="10160">
+            <a:solidFill>
+              <a:srgbClr val="E0E0E0"/>
+            </a:solidFill>
+          </a:ln>
+        </p:spPr>
+        <p:style>
+          <a:lnRef idx="1">
+            <a:schemeClr val="accent1"/>
+          </a:lnRef>
+          <a:fillRef idx="3">
+            <a:schemeClr val="accent1"/>
+          </a:fillRef>
+          <a:effectRef idx="2">
+            <a:schemeClr val="accent1"/>
+          </a:effectRef>
+          <a:fontRef idx="minor">
+            <a:schemeClr val="lt1"/>
+          </a:fontRef>
+        </p:style>
+        <p:txBody>
+          <a:bodyPr rtlCol="0" anchor="ctr"/>
+          <a:lstStyle/>
+          <a:p>
+            <a:pPr algn="ctr"/>
+          </a:p>
+        </p:txBody>
+      </p:sp>
+      <p:sp>
+        <p:nvSpPr>
+          <p:cNvPr id="35" name="TextBox 34"/>
+          <p:cNvSpPr txBox="1"/>
+          <p:nvPr/>
+        </p:nvSpPr>
+        <p:spPr>
+          <a:xfrm>
+            <a:off x="6510528" y="4608576"/>
+            <a:ext cx="1188720" cy="438912"/>
+          </a:xfrm>
+          <a:prstGeom prst="rect">
+            <a:avLst/>
+          </a:prstGeom>
+          <a:noFill/>
+        </p:spPr>
+        <p:txBody>
+          <a:bodyPr wrap="square">
+            <a:spAutoFit/>
+          </a:bodyPr>
+          <a:lstStyle/>
+          <a:p>
+            <a:pPr algn="l"/>
+            <a:r>
+              <a:rPr sz="1200" b="0">
+                <a:solidFill>
+                  <a:srgbClr val="212121"/>
+                </a:solidFill>
+              </a:rPr>
+              <a:t>규칙</a:t>
+            </a:r>
+          </a:p>
+        </p:txBody>
+      </p:sp>
+      <p:sp>
+        <p:nvSpPr>
+          <p:cNvPr id="36" name="Rectangle 35"/>
+          <p:cNvSpPr/>
+          <p:nvPr/>
+        </p:nvSpPr>
+        <p:spPr>
+          <a:xfrm>
+            <a:off x="7818120" y="4407408"/>
+            <a:ext cx="2560320" cy="822960"/>
+          </a:xfrm>
+          <a:prstGeom prst="rect">
+            <a:avLst/>
+          </a:prstGeom>
+          <a:solidFill>
+            <a:srgbClr val="FFFFFF"/>
+          </a:solidFill>
+          <a:ln w="10160">
+            <a:solidFill>
+              <a:srgbClr val="E0E0E0"/>
+            </a:solidFill>
+          </a:ln>
+        </p:spPr>
+        <p:style>
+          <a:lnRef idx="1">
+            <a:schemeClr val="accent1"/>
+          </a:lnRef>
+          <a:fillRef idx="3">
+            <a:schemeClr val="accent1"/>
+          </a:fillRef>
+          <a:effectRef idx="2">
+            <a:schemeClr val="accent1"/>
+          </a:effectRef>
+          <a:fontRef idx="minor">
+            <a:schemeClr val="lt1"/>
+          </a:fontRef>
+        </p:style>
+        <p:txBody>
+          <a:bodyPr rtlCol="0" anchor="ctr"/>
+          <a:lstStyle/>
+          <a:p>
+            <a:pPr algn="ctr"/>
+          </a:p>
+        </p:txBody>
+      </p:sp>
+      <p:sp>
+        <p:nvSpPr>
+          <p:cNvPr id="37" name="TextBox 36"/>
+          <p:cNvSpPr txBox="1"/>
+          <p:nvPr/>
+        </p:nvSpPr>
+        <p:spPr>
+          <a:xfrm>
+            <a:off x="7927848" y="4608576"/>
+            <a:ext cx="2377439" cy="438912"/>
+          </a:xfrm>
+          <a:prstGeom prst="rect">
+            <a:avLst/>
+          </a:prstGeom>
+          <a:noFill/>
+        </p:spPr>
+        <p:txBody>
+          <a:bodyPr wrap="square">
+            <a:spAutoFit/>
+          </a:bodyPr>
+          <a:lstStyle/>
+          <a:p>
+            <a:pPr algn="l"/>
+            <a:r>
+              <a:rPr sz="1200" b="0">
+                <a:solidFill>
+                  <a:srgbClr val="212121"/>
+                </a:solidFill>
+              </a:rPr>
+              <a:t>잔액·수익률 계산</a:t>
+            </a:r>
+          </a:p>
+        </p:txBody>
+      </p:sp>
+      <p:sp>
+        <p:nvSpPr>
+          <p:cNvPr id="38" name="Rectangle 37"/>
+          <p:cNvSpPr/>
+          <p:nvPr/>
+        </p:nvSpPr>
+        <p:spPr>
+          <a:xfrm>
+            <a:off x="10424160" y="4407408"/>
+            <a:ext cx="1737360" cy="822960"/>
+          </a:xfrm>
+          <a:prstGeom prst="rect">
+            <a:avLst/>
+          </a:prstGeom>
+          <a:solidFill>
+            <a:srgbClr val="FFFFFF"/>
+          </a:solidFill>
+          <a:ln w="10160">
+            <a:solidFill>
+              <a:srgbClr val="E0E0E0"/>
+            </a:solidFill>
+          </a:ln>
+        </p:spPr>
+        <p:style>
+          <a:lnRef idx="1">
+            <a:schemeClr val="accent1"/>
+          </a:lnRef>
+          <a:fillRef idx="3">
+            <a:schemeClr val="accent1"/>
+          </a:fillRef>
+          <a:effectRef idx="2">
+            <a:schemeClr val="accent1"/>
+          </a:effectRef>
+          <a:fontRef idx="minor">
+            <a:schemeClr val="lt1"/>
+          </a:fontRef>
+        </p:style>
+        <p:txBody>
+          <a:bodyPr rtlCol="0" anchor="ctr"/>
+          <a:lstStyle/>
+          <a:p>
+            <a:pPr algn="ctr"/>
+          </a:p>
+        </p:txBody>
+      </p:sp>
+      <p:sp>
+        <p:nvSpPr>
+          <p:cNvPr id="39" name="TextBox 38"/>
+          <p:cNvSpPr txBox="1"/>
+          <p:nvPr/>
+        </p:nvSpPr>
+        <p:spPr>
+          <a:xfrm>
+            <a:off x="10533888" y="4608576"/>
+            <a:ext cx="1554480" cy="438912"/>
+          </a:xfrm>
+          <a:prstGeom prst="rect">
+            <a:avLst/>
+          </a:prstGeom>
+          <a:noFill/>
+        </p:spPr>
+        <p:txBody>
+          <a:bodyPr wrap="square">
+            <a:spAutoFit/>
+          </a:bodyPr>
+          <a:lstStyle/>
+          <a:p>
+            <a:pPr algn="l"/>
+            <a:r>
+              <a:rPr sz="1200" b="0">
+                <a:solidFill>
+                  <a:srgbClr val="212121"/>
+                </a:solidFill>
+              </a:rPr>
+              <a:t>models/</a:t>
+            </a:r>
+          </a:p>
+        </p:txBody>
+      </p:sp>
+      <p:sp>
+        <p:nvSpPr>
+          <p:cNvPr id="40" name="Rectangle 39"/>
+          <p:cNvSpPr/>
+          <p:nvPr/>
+        </p:nvSpPr>
+        <p:spPr>
+          <a:xfrm>
+            <a:off x="6400800" y="5413248"/>
+            <a:ext cx="1371600" cy="822960"/>
+          </a:xfrm>
+          <a:prstGeom prst="rect">
+            <a:avLst/>
+          </a:prstGeom>
+          <a:solidFill>
+            <a:srgbClr val="FFFFFF"/>
+          </a:solidFill>
+          <a:ln w="10160">
+            <a:solidFill>
+              <a:srgbClr val="E0E0E0"/>
+            </a:solidFill>
+          </a:ln>
+        </p:spPr>
+        <p:style>
+          <a:lnRef idx="1">
+            <a:schemeClr val="accent1"/>
+          </a:lnRef>
+          <a:fillRef idx="3">
+            <a:schemeClr val="accent1"/>
+          </a:fillRef>
+          <a:effectRef idx="2">
+            <a:schemeClr val="accent1"/>
+          </a:effectRef>
+          <a:fontRef idx="minor">
+            <a:schemeClr val="lt1"/>
+          </a:fontRef>
+        </p:style>
+        <p:txBody>
+          <a:bodyPr rtlCol="0" anchor="ctr"/>
+          <a:lstStyle/>
+          <a:p>
+            <a:pPr algn="ctr"/>
+          </a:p>
+        </p:txBody>
+      </p:sp>
+      <p:sp>
+        <p:nvSpPr>
+          <p:cNvPr id="41" name="TextBox 40"/>
+          <p:cNvSpPr txBox="1"/>
+          <p:nvPr/>
+        </p:nvSpPr>
+        <p:spPr>
+          <a:xfrm>
+            <a:off x="6510528" y="5614416"/>
+            <a:ext cx="1188720" cy="438912"/>
+          </a:xfrm>
+          <a:prstGeom prst="rect">
+            <a:avLst/>
+          </a:prstGeom>
+          <a:noFill/>
+        </p:spPr>
+        <p:txBody>
+          <a:bodyPr wrap="square">
+            <a:spAutoFit/>
+          </a:bodyPr>
+          <a:lstStyle/>
+          <a:p>
+            <a:pPr algn="l"/>
+            <a:r>
+              <a:rPr sz="1200" b="0">
+                <a:solidFill>
+                  <a:srgbClr val="212121"/>
+                </a:solidFill>
+              </a:rPr>
+              <a:t>저장</a:t>
+            </a:r>
+          </a:p>
+        </p:txBody>
+      </p:sp>
+      <p:sp>
+        <p:nvSpPr>
+          <p:cNvPr id="42" name="Rectangle 41"/>
+          <p:cNvSpPr/>
+          <p:nvPr/>
+        </p:nvSpPr>
+        <p:spPr>
+          <a:xfrm>
+            <a:off x="7818120" y="5413248"/>
+            <a:ext cx="2560320" cy="822960"/>
+          </a:xfrm>
+          <a:prstGeom prst="rect">
+            <a:avLst/>
+          </a:prstGeom>
+          <a:solidFill>
+            <a:srgbClr val="FFFFFF"/>
+          </a:solidFill>
+          <a:ln w="10160">
+            <a:solidFill>
+              <a:srgbClr val="E0E0E0"/>
+            </a:solidFill>
+          </a:ln>
+        </p:spPr>
+        <p:style>
+          <a:lnRef idx="1">
+            <a:schemeClr val="accent1"/>
+          </a:lnRef>
+          <a:fillRef idx="3">
+            <a:schemeClr val="accent1"/>
+          </a:fillRef>
+          <a:effectRef idx="2">
+            <a:schemeClr val="accent1"/>
+          </a:effectRef>
+          <a:fontRef idx="minor">
+            <a:schemeClr val="lt1"/>
+          </a:fontRef>
+        </p:style>
+        <p:txBody>
+          <a:bodyPr rtlCol="0" anchor="ctr"/>
+          <a:lstStyle/>
+          <a:p>
+            <a:pPr algn="ctr"/>
+          </a:p>
+        </p:txBody>
+      </p:sp>
+      <p:sp>
+        <p:nvSpPr>
+          <p:cNvPr id="43" name="TextBox 42"/>
+          <p:cNvSpPr txBox="1"/>
+          <p:nvPr/>
+        </p:nvSpPr>
+        <p:spPr>
+          <a:xfrm>
+            <a:off x="7927848" y="5614416"/>
+            <a:ext cx="2377439" cy="438912"/>
+          </a:xfrm>
+          <a:prstGeom prst="rect">
+            <a:avLst/>
+          </a:prstGeom>
+          <a:noFill/>
+        </p:spPr>
+        <p:txBody>
+          <a:bodyPr wrap="square">
+            <a:spAutoFit/>
+          </a:bodyPr>
+          <a:lstStyle/>
+          <a:p>
+            <a:pPr algn="l"/>
+            <a:r>
+              <a:rPr sz="1200" b="0">
+                <a:solidFill>
+                  <a:srgbClr val="212121"/>
+                </a:solidFill>
+              </a:rPr>
+              <a:t>Firestore 입출력</a:t>
+            </a:r>
+          </a:p>
+        </p:txBody>
+      </p:sp>
+      <p:sp>
+        <p:nvSpPr>
+          <p:cNvPr id="44" name="Rectangle 43"/>
+          <p:cNvSpPr/>
+          <p:nvPr/>
+        </p:nvSpPr>
+        <p:spPr>
+          <a:xfrm>
+            <a:off x="10424160" y="5413248"/>
+            <a:ext cx="1737360" cy="822960"/>
+          </a:xfrm>
+          <a:prstGeom prst="rect">
+            <a:avLst/>
+          </a:prstGeom>
+          <a:solidFill>
+            <a:srgbClr val="FFFFFF"/>
+          </a:solidFill>
+          <a:ln w="10160">
+            <a:solidFill>
+              <a:srgbClr val="E0E0E0"/>
+            </a:solidFill>
+          </a:ln>
+        </p:spPr>
+        <p:style>
+          <a:lnRef idx="1">
+            <a:schemeClr val="accent1"/>
+          </a:lnRef>
+          <a:fillRef idx="3">
+            <a:schemeClr val="accent1"/>
+          </a:fillRef>
+          <a:effectRef idx="2">
+            <a:schemeClr val="accent1"/>
+          </a:effectRef>
+          <a:fontRef idx="minor">
+            <a:schemeClr val="lt1"/>
+          </a:fontRef>
+        </p:style>
+        <p:txBody>
+          <a:bodyPr rtlCol="0" anchor="ctr"/>
+          <a:lstStyle/>
+          <a:p>
+            <a:pPr algn="ctr"/>
+          </a:p>
+        </p:txBody>
+      </p:sp>
+      <p:sp>
+        <p:nvSpPr>
+          <p:cNvPr id="45" name="TextBox 44"/>
+          <p:cNvSpPr txBox="1"/>
+          <p:nvPr/>
+        </p:nvSpPr>
+        <p:spPr>
+          <a:xfrm>
+            <a:off x="10533888" y="5614416"/>
+            <a:ext cx="1554480" cy="438912"/>
+          </a:xfrm>
+          <a:prstGeom prst="rect">
+            <a:avLst/>
+          </a:prstGeom>
+          <a:noFill/>
+        </p:spPr>
+        <p:txBody>
+          <a:bodyPr wrap="square">
+            <a:spAutoFit/>
+          </a:bodyPr>
+          <a:lstStyle/>
+          <a:p>
+            <a:pPr algn="l"/>
+            <a:r>
+              <a:rPr sz="1200" b="0">
+                <a:solidFill>
+                  <a:srgbClr val="212121"/>
+                </a:solidFill>
+              </a:rPr>
+              <a:t>services/</a:t>
             </a:r>
           </a:p>
         </p:txBody>
@@ -4282,7 +5730,7 @@
                   <a:srgbClr val="3F51B5"/>
                 </a:solidFill>
               </a:rPr>
-              <a:t>ADR-0002  —  아키텍처 패턴 선택</a:t>
+              <a:t>ADR-0003  —  백엔드 서비스 선택</a:t>
             </a:r>
           </a:p>
         </p:txBody>
@@ -4373,7 +5821,7 @@
         <p:spPr>
           <a:xfrm>
             <a:off x="457200" y="987552"/>
-            <a:ext cx="5486400" cy="347472"/>
+            <a:ext cx="10972800" cy="347472"/>
           </a:xfrm>
           <a:prstGeom prst="rect">
             <a:avLst/>
@@ -4407,7 +5855,7 @@
         <p:spPr>
           <a:xfrm>
             <a:off x="457200" y="1389888"/>
-            <a:ext cx="5486400" cy="1024128"/>
+            <a:ext cx="11247120" cy="1024128"/>
           </a:xfrm>
           <a:prstGeom prst="rect">
             <a:avLst/>
@@ -4450,7 +5898,7 @@
         <p:spPr>
           <a:xfrm>
             <a:off x="594360" y="1499616"/>
-            <a:ext cx="5303520" cy="886968"/>
+            <a:ext cx="11064240" cy="886968"/>
           </a:xfrm>
           <a:prstGeom prst="rect">
             <a:avLst/>
@@ -4470,7 +5918,7 @@
                   <a:srgbClr val="9E9E9E"/>
                 </a:solidFill>
               </a:rPr>
-              <a:t>역할 구분 없이 한 파일</a:t>
+              <a:t>Supabase</a:t>
             </a:r>
           </a:p>
         </p:txBody>
@@ -4484,7 +5932,7 @@
         <p:spPr>
           <a:xfrm>
             <a:off x="457200" y="2651760"/>
-            <a:ext cx="5486400" cy="1024128"/>
+            <a:ext cx="11247120" cy="1024128"/>
           </a:xfrm>
           <a:prstGeom prst="rect">
             <a:avLst/>
@@ -4527,7 +5975,7 @@
         <p:spPr>
           <a:xfrm>
             <a:off x="594360" y="2761488"/>
-            <a:ext cx="5303520" cy="886968"/>
+            <a:ext cx="11064240" cy="886968"/>
           </a:xfrm>
           <a:prstGeom prst="rect">
             <a:avLst/>
@@ -4547,7 +5995,7 @@
                   <a:srgbClr val="9E9E9E"/>
                 </a:solidFill>
               </a:rPr>
-              <a:t>MVC 방식</a:t>
+              <a:t>폰 내부 저장 (SQLite 등)</a:t>
             </a:r>
           </a:p>
         </p:txBody>
@@ -4561,7 +6009,7 @@
         <p:spPr>
           <a:xfrm>
             <a:off x="457200" y="3913631"/>
-            <a:ext cx="5486400" cy="1024128"/>
+            <a:ext cx="11247120" cy="1024128"/>
           </a:xfrm>
           <a:prstGeom prst="rect">
             <a:avLst/>
@@ -4604,7 +6052,7 @@
         <p:spPr>
           <a:xfrm>
             <a:off x="594360" y="4023359"/>
-            <a:ext cx="5303520" cy="886968"/>
+            <a:ext cx="11064240" cy="886968"/>
           </a:xfrm>
           <a:prstGeom prst="rect">
             <a:avLst/>
@@ -4624,7 +6072,7 @@
                   <a:srgbClr val="9E9E9E"/>
                 </a:solidFill>
               </a:rPr>
-              <a:t>6 ~ 8개 레이어</a:t>
+              <a:t>직접 서버 구축</a:t>
             </a:r>
           </a:p>
         </p:txBody>
@@ -4638,7 +6086,7 @@
         <p:spPr>
           <a:xfrm>
             <a:off x="457200" y="5175504"/>
-            <a:ext cx="5486400" cy="1024128"/>
+            <a:ext cx="11247120" cy="1024128"/>
           </a:xfrm>
           <a:prstGeom prst="rect">
             <a:avLst/>
@@ -4681,7 +6129,7 @@
         <p:spPr>
           <a:xfrm>
             <a:off x="594360" y="5285232"/>
-            <a:ext cx="5303520" cy="886968"/>
+            <a:ext cx="11064240" cy="886968"/>
           </a:xfrm>
           <a:prstGeom prst="rect">
             <a:avLst/>
@@ -4701,1226 +6149,7 @@
                   <a:srgbClr val="FFFFFF"/>
                 </a:solidFill>
               </a:rPr>
-              <a:t>✓  4레이어 구조</a:t>
-            </a:r>
-          </a:p>
-        </p:txBody>
-      </p:sp>
-      <p:sp>
-        <p:nvSpPr>
-          <p:cNvPr id="15" name="TextBox 14"/>
-          <p:cNvSpPr txBox="1"/>
-          <p:nvPr/>
-        </p:nvSpPr>
-        <p:spPr>
-          <a:xfrm>
-            <a:off x="6400800" y="987552"/>
-            <a:ext cx="5394960" cy="347472"/>
-          </a:xfrm>
-          <a:prstGeom prst="rect">
-            <a:avLst/>
-          </a:prstGeom>
-          <a:noFill/>
-        </p:spPr>
-        <p:txBody>
-          <a:bodyPr wrap="square">
-            <a:spAutoFit/>
-          </a:bodyPr>
-          <a:lstStyle/>
-          <a:p>
-            <a:pPr algn="l"/>
-            <a:r>
-              <a:rPr sz="1200" b="0">
-                <a:solidFill>
-                  <a:srgbClr val="9E9E9E"/>
-                </a:solidFill>
-              </a:rPr>
-              <a:t>선택된 4레이어 구조</a:t>
-            </a:r>
-          </a:p>
-        </p:txBody>
-      </p:sp>
-      <p:sp>
-        <p:nvSpPr>
-          <p:cNvPr id="16" name="Rectangle 15"/>
-          <p:cNvSpPr/>
-          <p:nvPr/>
-        </p:nvSpPr>
-        <p:spPr>
-          <a:xfrm>
-            <a:off x="6400800" y="1389888"/>
-            <a:ext cx="1371600" cy="822960"/>
-          </a:xfrm>
-          <a:prstGeom prst="rect">
-            <a:avLst/>
-          </a:prstGeom>
-          <a:solidFill>
-            <a:srgbClr val="F5F5F5"/>
-          </a:solidFill>
-          <a:ln w="10160">
-            <a:solidFill>
-              <a:srgbClr val="E0E0E0"/>
-            </a:solidFill>
-          </a:ln>
-        </p:spPr>
-        <p:style>
-          <a:lnRef idx="1">
-            <a:schemeClr val="accent1"/>
-          </a:lnRef>
-          <a:fillRef idx="3">
-            <a:schemeClr val="accent1"/>
-          </a:fillRef>
-          <a:effectRef idx="2">
-            <a:schemeClr val="accent1"/>
-          </a:effectRef>
-          <a:fontRef idx="minor">
-            <a:schemeClr val="lt1"/>
-          </a:fontRef>
-        </p:style>
-        <p:txBody>
-          <a:bodyPr rtlCol="0" anchor="ctr"/>
-          <a:lstStyle/>
-          <a:p>
-            <a:pPr algn="ctr"/>
-          </a:p>
-        </p:txBody>
-      </p:sp>
-      <p:sp>
-        <p:nvSpPr>
-          <p:cNvPr id="17" name="TextBox 16"/>
-          <p:cNvSpPr txBox="1"/>
-          <p:nvPr/>
-        </p:nvSpPr>
-        <p:spPr>
-          <a:xfrm>
-            <a:off x="6510528" y="1591056"/>
-            <a:ext cx="1188720" cy="438912"/>
-          </a:xfrm>
-          <a:prstGeom prst="rect">
-            <a:avLst/>
-          </a:prstGeom>
-          <a:noFill/>
-        </p:spPr>
-        <p:txBody>
-          <a:bodyPr wrap="square">
-            <a:spAutoFit/>
-          </a:bodyPr>
-          <a:lstStyle/>
-          <a:p>
-            <a:pPr algn="l"/>
-            <a:r>
-              <a:rPr sz="1200" b="1">
-                <a:solidFill>
-                  <a:srgbClr val="3F51B5"/>
-                </a:solidFill>
-              </a:rPr>
-              <a:t>레이어</a:t>
-            </a:r>
-          </a:p>
-        </p:txBody>
-      </p:sp>
-      <p:sp>
-        <p:nvSpPr>
-          <p:cNvPr id="18" name="Rectangle 17"/>
-          <p:cNvSpPr/>
-          <p:nvPr/>
-        </p:nvSpPr>
-        <p:spPr>
-          <a:xfrm>
-            <a:off x="7818120" y="1389888"/>
-            <a:ext cx="2560320" cy="822960"/>
-          </a:xfrm>
-          <a:prstGeom prst="rect">
-            <a:avLst/>
-          </a:prstGeom>
-          <a:solidFill>
-            <a:srgbClr val="F5F5F5"/>
-          </a:solidFill>
-          <a:ln w="10160">
-            <a:solidFill>
-              <a:srgbClr val="E0E0E0"/>
-            </a:solidFill>
-          </a:ln>
-        </p:spPr>
-        <p:style>
-          <a:lnRef idx="1">
-            <a:schemeClr val="accent1"/>
-          </a:lnRef>
-          <a:fillRef idx="3">
-            <a:schemeClr val="accent1"/>
-          </a:fillRef>
-          <a:effectRef idx="2">
-            <a:schemeClr val="accent1"/>
-          </a:effectRef>
-          <a:fontRef idx="minor">
-            <a:schemeClr val="lt1"/>
-          </a:fontRef>
-        </p:style>
-        <p:txBody>
-          <a:bodyPr rtlCol="0" anchor="ctr"/>
-          <a:lstStyle/>
-          <a:p>
-            <a:pPr algn="ctr"/>
-          </a:p>
-        </p:txBody>
-      </p:sp>
-      <p:sp>
-        <p:nvSpPr>
-          <p:cNvPr id="19" name="TextBox 18"/>
-          <p:cNvSpPr txBox="1"/>
-          <p:nvPr/>
-        </p:nvSpPr>
-        <p:spPr>
-          <a:xfrm>
-            <a:off x="7927848" y="1591056"/>
-            <a:ext cx="2377439" cy="438912"/>
-          </a:xfrm>
-          <a:prstGeom prst="rect">
-            <a:avLst/>
-          </a:prstGeom>
-          <a:noFill/>
-        </p:spPr>
-        <p:txBody>
-          <a:bodyPr wrap="square">
-            <a:spAutoFit/>
-          </a:bodyPr>
-          <a:lstStyle/>
-          <a:p>
-            <a:pPr algn="l"/>
-            <a:r>
-              <a:rPr sz="1200" b="1">
-                <a:solidFill>
-                  <a:srgbClr val="3F51B5"/>
-                </a:solidFill>
-              </a:rPr>
-              <a:t>역할</a:t>
-            </a:r>
-          </a:p>
-        </p:txBody>
-      </p:sp>
-      <p:sp>
-        <p:nvSpPr>
-          <p:cNvPr id="20" name="Rectangle 19"/>
-          <p:cNvSpPr/>
-          <p:nvPr/>
-        </p:nvSpPr>
-        <p:spPr>
-          <a:xfrm>
-            <a:off x="10424160" y="1389888"/>
-            <a:ext cx="1737360" cy="822960"/>
-          </a:xfrm>
-          <a:prstGeom prst="rect">
-            <a:avLst/>
-          </a:prstGeom>
-          <a:solidFill>
-            <a:srgbClr val="F5F5F5"/>
-          </a:solidFill>
-          <a:ln w="10160">
-            <a:solidFill>
-              <a:srgbClr val="E0E0E0"/>
-            </a:solidFill>
-          </a:ln>
-        </p:spPr>
-        <p:style>
-          <a:lnRef idx="1">
-            <a:schemeClr val="accent1"/>
-          </a:lnRef>
-          <a:fillRef idx="3">
-            <a:schemeClr val="accent1"/>
-          </a:fillRef>
-          <a:effectRef idx="2">
-            <a:schemeClr val="accent1"/>
-          </a:effectRef>
-          <a:fontRef idx="minor">
-            <a:schemeClr val="lt1"/>
-          </a:fontRef>
-        </p:style>
-        <p:txBody>
-          <a:bodyPr rtlCol="0" anchor="ctr"/>
-          <a:lstStyle/>
-          <a:p>
-            <a:pPr algn="ctr"/>
-          </a:p>
-        </p:txBody>
-      </p:sp>
-      <p:sp>
-        <p:nvSpPr>
-          <p:cNvPr id="21" name="TextBox 20"/>
-          <p:cNvSpPr txBox="1"/>
-          <p:nvPr/>
-        </p:nvSpPr>
-        <p:spPr>
-          <a:xfrm>
-            <a:off x="10533888" y="1591056"/>
-            <a:ext cx="1554480" cy="438912"/>
-          </a:xfrm>
-          <a:prstGeom prst="rect">
-            <a:avLst/>
-          </a:prstGeom>
-          <a:noFill/>
-        </p:spPr>
-        <p:txBody>
-          <a:bodyPr wrap="square">
-            <a:spAutoFit/>
-          </a:bodyPr>
-          <a:lstStyle/>
-          <a:p>
-            <a:pPr algn="l"/>
-            <a:r>
-              <a:rPr sz="1200" b="1">
-                <a:solidFill>
-                  <a:srgbClr val="3F51B5"/>
-                </a:solidFill>
-              </a:rPr>
-              <a:t>위치</a:t>
-            </a:r>
-          </a:p>
-        </p:txBody>
-      </p:sp>
-      <p:sp>
-        <p:nvSpPr>
-          <p:cNvPr id="22" name="Rectangle 21"/>
-          <p:cNvSpPr/>
-          <p:nvPr/>
-        </p:nvSpPr>
-        <p:spPr>
-          <a:xfrm>
-            <a:off x="6400800" y="2395728"/>
-            <a:ext cx="1371600" cy="822960"/>
-          </a:xfrm>
-          <a:prstGeom prst="rect">
-            <a:avLst/>
-          </a:prstGeom>
-          <a:solidFill>
-            <a:srgbClr val="FFFFFF"/>
-          </a:solidFill>
-          <a:ln w="10160">
-            <a:solidFill>
-              <a:srgbClr val="E0E0E0"/>
-            </a:solidFill>
-          </a:ln>
-        </p:spPr>
-        <p:style>
-          <a:lnRef idx="1">
-            <a:schemeClr val="accent1"/>
-          </a:lnRef>
-          <a:fillRef idx="3">
-            <a:schemeClr val="accent1"/>
-          </a:fillRef>
-          <a:effectRef idx="2">
-            <a:schemeClr val="accent1"/>
-          </a:effectRef>
-          <a:fontRef idx="minor">
-            <a:schemeClr val="lt1"/>
-          </a:fontRef>
-        </p:style>
-        <p:txBody>
-          <a:bodyPr rtlCol="0" anchor="ctr"/>
-          <a:lstStyle/>
-          <a:p>
-            <a:pPr algn="ctr"/>
-          </a:p>
-        </p:txBody>
-      </p:sp>
-      <p:sp>
-        <p:nvSpPr>
-          <p:cNvPr id="23" name="TextBox 22"/>
-          <p:cNvSpPr txBox="1"/>
-          <p:nvPr/>
-        </p:nvSpPr>
-        <p:spPr>
-          <a:xfrm>
-            <a:off x="6510528" y="2596896"/>
-            <a:ext cx="1188720" cy="438912"/>
-          </a:xfrm>
-          <a:prstGeom prst="rect">
-            <a:avLst/>
-          </a:prstGeom>
-          <a:noFill/>
-        </p:spPr>
-        <p:txBody>
-          <a:bodyPr wrap="square">
-            <a:spAutoFit/>
-          </a:bodyPr>
-          <a:lstStyle/>
-          <a:p>
-            <a:pPr algn="l"/>
-            <a:r>
-              <a:rPr sz="1200" b="0">
-                <a:solidFill>
-                  <a:srgbClr val="212121"/>
-                </a:solidFill>
-              </a:rPr>
-              <a:t>화면</a:t>
-            </a:r>
-          </a:p>
-        </p:txBody>
-      </p:sp>
-      <p:sp>
-        <p:nvSpPr>
-          <p:cNvPr id="24" name="Rectangle 23"/>
-          <p:cNvSpPr/>
-          <p:nvPr/>
-        </p:nvSpPr>
-        <p:spPr>
-          <a:xfrm>
-            <a:off x="7818120" y="2395728"/>
-            <a:ext cx="2560320" cy="822960"/>
-          </a:xfrm>
-          <a:prstGeom prst="rect">
-            <a:avLst/>
-          </a:prstGeom>
-          <a:solidFill>
-            <a:srgbClr val="FFFFFF"/>
-          </a:solidFill>
-          <a:ln w="10160">
-            <a:solidFill>
-              <a:srgbClr val="E0E0E0"/>
-            </a:solidFill>
-          </a:ln>
-        </p:spPr>
-        <p:style>
-          <a:lnRef idx="1">
-            <a:schemeClr val="accent1"/>
-          </a:lnRef>
-          <a:fillRef idx="3">
-            <a:schemeClr val="accent1"/>
-          </a:fillRef>
-          <a:effectRef idx="2">
-            <a:schemeClr val="accent1"/>
-          </a:effectRef>
-          <a:fontRef idx="minor">
-            <a:schemeClr val="lt1"/>
-          </a:fontRef>
-        </p:style>
-        <p:txBody>
-          <a:bodyPr rtlCol="0" anchor="ctr"/>
-          <a:lstStyle/>
-          <a:p>
-            <a:pPr algn="ctr"/>
-          </a:p>
-        </p:txBody>
-      </p:sp>
-      <p:sp>
-        <p:nvSpPr>
-          <p:cNvPr id="25" name="TextBox 24"/>
-          <p:cNvSpPr txBox="1"/>
-          <p:nvPr/>
-        </p:nvSpPr>
-        <p:spPr>
-          <a:xfrm>
-            <a:off x="7927848" y="2596896"/>
-            <a:ext cx="2377439" cy="438912"/>
-          </a:xfrm>
-          <a:prstGeom prst="rect">
-            <a:avLst/>
-          </a:prstGeom>
-          <a:noFill/>
-        </p:spPr>
-        <p:txBody>
-          <a:bodyPr wrap="square">
-            <a:spAutoFit/>
-          </a:bodyPr>
-          <a:lstStyle/>
-          <a:p>
-            <a:pPr algn="l"/>
-            <a:r>
-              <a:rPr sz="1200" b="0">
-                <a:solidFill>
-                  <a:srgbClr val="212121"/>
-                </a:solidFill>
-              </a:rPr>
-              <a:t>버튼·목록·입력창</a:t>
-            </a:r>
-          </a:p>
-        </p:txBody>
-      </p:sp>
-      <p:sp>
-        <p:nvSpPr>
-          <p:cNvPr id="26" name="Rectangle 25"/>
-          <p:cNvSpPr/>
-          <p:nvPr/>
-        </p:nvSpPr>
-        <p:spPr>
-          <a:xfrm>
-            <a:off x="10424160" y="2395728"/>
-            <a:ext cx="1737360" cy="822960"/>
-          </a:xfrm>
-          <a:prstGeom prst="rect">
-            <a:avLst/>
-          </a:prstGeom>
-          <a:solidFill>
-            <a:srgbClr val="FFFFFF"/>
-          </a:solidFill>
-          <a:ln w="10160">
-            <a:solidFill>
-              <a:srgbClr val="E0E0E0"/>
-            </a:solidFill>
-          </a:ln>
-        </p:spPr>
-        <p:style>
-          <a:lnRef idx="1">
-            <a:schemeClr val="accent1"/>
-          </a:lnRef>
-          <a:fillRef idx="3">
-            <a:schemeClr val="accent1"/>
-          </a:fillRef>
-          <a:effectRef idx="2">
-            <a:schemeClr val="accent1"/>
-          </a:effectRef>
-          <a:fontRef idx="minor">
-            <a:schemeClr val="lt1"/>
-          </a:fontRef>
-        </p:style>
-        <p:txBody>
-          <a:bodyPr rtlCol="0" anchor="ctr"/>
-          <a:lstStyle/>
-          <a:p>
-            <a:pPr algn="ctr"/>
-          </a:p>
-        </p:txBody>
-      </p:sp>
-      <p:sp>
-        <p:nvSpPr>
-          <p:cNvPr id="27" name="TextBox 26"/>
-          <p:cNvSpPr txBox="1"/>
-          <p:nvPr/>
-        </p:nvSpPr>
-        <p:spPr>
-          <a:xfrm>
-            <a:off x="10533888" y="2596896"/>
-            <a:ext cx="1554480" cy="438912"/>
-          </a:xfrm>
-          <a:prstGeom prst="rect">
-            <a:avLst/>
-          </a:prstGeom>
-          <a:noFill/>
-        </p:spPr>
-        <p:txBody>
-          <a:bodyPr wrap="square">
-            <a:spAutoFit/>
-          </a:bodyPr>
-          <a:lstStyle/>
-          <a:p>
-            <a:pPr algn="l"/>
-            <a:r>
-              <a:rPr sz="1200" b="0">
-                <a:solidFill>
-                  <a:srgbClr val="212121"/>
-                </a:solidFill>
-              </a:rPr>
-              <a:t>screens/</a:t>
-            </a:r>
-          </a:p>
-        </p:txBody>
-      </p:sp>
-      <p:sp>
-        <p:nvSpPr>
-          <p:cNvPr id="28" name="Rectangle 27"/>
-          <p:cNvSpPr/>
-          <p:nvPr/>
-        </p:nvSpPr>
-        <p:spPr>
-          <a:xfrm>
-            <a:off x="6400800" y="3401568"/>
-            <a:ext cx="1371600" cy="822960"/>
-          </a:xfrm>
-          <a:prstGeom prst="rect">
-            <a:avLst/>
-          </a:prstGeom>
-          <a:solidFill>
-            <a:srgbClr val="FFFFFF"/>
-          </a:solidFill>
-          <a:ln w="10160">
-            <a:solidFill>
-              <a:srgbClr val="E0E0E0"/>
-            </a:solidFill>
-          </a:ln>
-        </p:spPr>
-        <p:style>
-          <a:lnRef idx="1">
-            <a:schemeClr val="accent1"/>
-          </a:lnRef>
-          <a:fillRef idx="3">
-            <a:schemeClr val="accent1"/>
-          </a:fillRef>
-          <a:effectRef idx="2">
-            <a:schemeClr val="accent1"/>
-          </a:effectRef>
-          <a:fontRef idx="minor">
-            <a:schemeClr val="lt1"/>
-          </a:fontRef>
-        </p:style>
-        <p:txBody>
-          <a:bodyPr rtlCol="0" anchor="ctr"/>
-          <a:lstStyle/>
-          <a:p>
-            <a:pPr algn="ctr"/>
-          </a:p>
-        </p:txBody>
-      </p:sp>
-      <p:sp>
-        <p:nvSpPr>
-          <p:cNvPr id="29" name="TextBox 28"/>
-          <p:cNvSpPr txBox="1"/>
-          <p:nvPr/>
-        </p:nvSpPr>
-        <p:spPr>
-          <a:xfrm>
-            <a:off x="6510528" y="3602736"/>
-            <a:ext cx="1188720" cy="438912"/>
-          </a:xfrm>
-          <a:prstGeom prst="rect">
-            <a:avLst/>
-          </a:prstGeom>
-          <a:noFill/>
-        </p:spPr>
-        <p:txBody>
-          <a:bodyPr wrap="square">
-            <a:spAutoFit/>
-          </a:bodyPr>
-          <a:lstStyle/>
-          <a:p>
-            <a:pPr algn="l"/>
-            <a:r>
-              <a:rPr sz="1200" b="0">
-                <a:solidFill>
-                  <a:srgbClr val="212121"/>
-                </a:solidFill>
-              </a:rPr>
-              <a:t>흐름</a:t>
-            </a:r>
-          </a:p>
-        </p:txBody>
-      </p:sp>
-      <p:sp>
-        <p:nvSpPr>
-          <p:cNvPr id="30" name="Rectangle 29"/>
-          <p:cNvSpPr/>
-          <p:nvPr/>
-        </p:nvSpPr>
-        <p:spPr>
-          <a:xfrm>
-            <a:off x="7818120" y="3401568"/>
-            <a:ext cx="2560320" cy="822960"/>
-          </a:xfrm>
-          <a:prstGeom prst="rect">
-            <a:avLst/>
-          </a:prstGeom>
-          <a:solidFill>
-            <a:srgbClr val="FFFFFF"/>
-          </a:solidFill>
-          <a:ln w="10160">
-            <a:solidFill>
-              <a:srgbClr val="E0E0E0"/>
-            </a:solidFill>
-          </a:ln>
-        </p:spPr>
-        <p:style>
-          <a:lnRef idx="1">
-            <a:schemeClr val="accent1"/>
-          </a:lnRef>
-          <a:fillRef idx="3">
-            <a:schemeClr val="accent1"/>
-          </a:fillRef>
-          <a:effectRef idx="2">
-            <a:schemeClr val="accent1"/>
-          </a:effectRef>
-          <a:fontRef idx="minor">
-            <a:schemeClr val="lt1"/>
-          </a:fontRef>
-        </p:style>
-        <p:txBody>
-          <a:bodyPr rtlCol="0" anchor="ctr"/>
-          <a:lstStyle/>
-          <a:p>
-            <a:pPr algn="ctr"/>
-          </a:p>
-        </p:txBody>
-      </p:sp>
-      <p:sp>
-        <p:nvSpPr>
-          <p:cNvPr id="31" name="TextBox 30"/>
-          <p:cNvSpPr txBox="1"/>
-          <p:nvPr/>
-        </p:nvSpPr>
-        <p:spPr>
-          <a:xfrm>
-            <a:off x="7927848" y="3602736"/>
-            <a:ext cx="2377439" cy="438912"/>
-          </a:xfrm>
-          <a:prstGeom prst="rect">
-            <a:avLst/>
-          </a:prstGeom>
-          <a:noFill/>
-        </p:spPr>
-        <p:txBody>
-          <a:bodyPr wrap="square">
-            <a:spAutoFit/>
-          </a:bodyPr>
-          <a:lstStyle/>
-          <a:p>
-            <a:pPr algn="l"/>
-            <a:r>
-              <a:rPr sz="1200" b="0">
-                <a:solidFill>
-                  <a:srgbClr val="212121"/>
-                </a:solidFill>
-              </a:rPr>
-              <a:t>화면-데이터 연결 처리</a:t>
-            </a:r>
-          </a:p>
-        </p:txBody>
-      </p:sp>
-      <p:sp>
-        <p:nvSpPr>
-          <p:cNvPr id="32" name="Rectangle 31"/>
-          <p:cNvSpPr/>
-          <p:nvPr/>
-        </p:nvSpPr>
-        <p:spPr>
-          <a:xfrm>
-            <a:off x="10424160" y="3401568"/>
-            <a:ext cx="1737360" cy="822960"/>
-          </a:xfrm>
-          <a:prstGeom prst="rect">
-            <a:avLst/>
-          </a:prstGeom>
-          <a:solidFill>
-            <a:srgbClr val="FFFFFF"/>
-          </a:solidFill>
-          <a:ln w="10160">
-            <a:solidFill>
-              <a:srgbClr val="E0E0E0"/>
-            </a:solidFill>
-          </a:ln>
-        </p:spPr>
-        <p:style>
-          <a:lnRef idx="1">
-            <a:schemeClr val="accent1"/>
-          </a:lnRef>
-          <a:fillRef idx="3">
-            <a:schemeClr val="accent1"/>
-          </a:fillRef>
-          <a:effectRef idx="2">
-            <a:schemeClr val="accent1"/>
-          </a:effectRef>
-          <a:fontRef idx="minor">
-            <a:schemeClr val="lt1"/>
-          </a:fontRef>
-        </p:style>
-        <p:txBody>
-          <a:bodyPr rtlCol="0" anchor="ctr"/>
-          <a:lstStyle/>
-          <a:p>
-            <a:pPr algn="ctr"/>
-          </a:p>
-        </p:txBody>
-      </p:sp>
-      <p:sp>
-        <p:nvSpPr>
-          <p:cNvPr id="33" name="TextBox 32"/>
-          <p:cNvSpPr txBox="1"/>
-          <p:nvPr/>
-        </p:nvSpPr>
-        <p:spPr>
-          <a:xfrm>
-            <a:off x="10533888" y="3602736"/>
-            <a:ext cx="1554480" cy="438912"/>
-          </a:xfrm>
-          <a:prstGeom prst="rect">
-            <a:avLst/>
-          </a:prstGeom>
-          <a:noFill/>
-        </p:spPr>
-        <p:txBody>
-          <a:bodyPr wrap="square">
-            <a:spAutoFit/>
-          </a:bodyPr>
-          <a:lstStyle/>
-          <a:p>
-            <a:pPr algn="l"/>
-            <a:r>
-              <a:rPr sz="1200" b="0">
-                <a:solidFill>
-                  <a:srgbClr val="212121"/>
-                </a:solidFill>
-              </a:rPr>
-              <a:t/>
-            </a:r>
-          </a:p>
-        </p:txBody>
-      </p:sp>
-      <p:sp>
-        <p:nvSpPr>
-          <p:cNvPr id="34" name="Rectangle 33"/>
-          <p:cNvSpPr/>
-          <p:nvPr/>
-        </p:nvSpPr>
-        <p:spPr>
-          <a:xfrm>
-            <a:off x="6400800" y="4407408"/>
-            <a:ext cx="1371600" cy="822960"/>
-          </a:xfrm>
-          <a:prstGeom prst="rect">
-            <a:avLst/>
-          </a:prstGeom>
-          <a:solidFill>
-            <a:srgbClr val="FFFFFF"/>
-          </a:solidFill>
-          <a:ln w="10160">
-            <a:solidFill>
-              <a:srgbClr val="E0E0E0"/>
-            </a:solidFill>
-          </a:ln>
-        </p:spPr>
-        <p:style>
-          <a:lnRef idx="1">
-            <a:schemeClr val="accent1"/>
-          </a:lnRef>
-          <a:fillRef idx="3">
-            <a:schemeClr val="accent1"/>
-          </a:fillRef>
-          <a:effectRef idx="2">
-            <a:schemeClr val="accent1"/>
-          </a:effectRef>
-          <a:fontRef idx="minor">
-            <a:schemeClr val="lt1"/>
-          </a:fontRef>
-        </p:style>
-        <p:txBody>
-          <a:bodyPr rtlCol="0" anchor="ctr"/>
-          <a:lstStyle/>
-          <a:p>
-            <a:pPr algn="ctr"/>
-          </a:p>
-        </p:txBody>
-      </p:sp>
-      <p:sp>
-        <p:nvSpPr>
-          <p:cNvPr id="35" name="TextBox 34"/>
-          <p:cNvSpPr txBox="1"/>
-          <p:nvPr/>
-        </p:nvSpPr>
-        <p:spPr>
-          <a:xfrm>
-            <a:off x="6510528" y="4608576"/>
-            <a:ext cx="1188720" cy="438912"/>
-          </a:xfrm>
-          <a:prstGeom prst="rect">
-            <a:avLst/>
-          </a:prstGeom>
-          <a:noFill/>
-        </p:spPr>
-        <p:txBody>
-          <a:bodyPr wrap="square">
-            <a:spAutoFit/>
-          </a:bodyPr>
-          <a:lstStyle/>
-          <a:p>
-            <a:pPr algn="l"/>
-            <a:r>
-              <a:rPr sz="1200" b="0">
-                <a:solidFill>
-                  <a:srgbClr val="212121"/>
-                </a:solidFill>
-              </a:rPr>
-              <a:t>규칙</a:t>
-            </a:r>
-          </a:p>
-        </p:txBody>
-      </p:sp>
-      <p:sp>
-        <p:nvSpPr>
-          <p:cNvPr id="36" name="Rectangle 35"/>
-          <p:cNvSpPr/>
-          <p:nvPr/>
-        </p:nvSpPr>
-        <p:spPr>
-          <a:xfrm>
-            <a:off x="7818120" y="4407408"/>
-            <a:ext cx="2560320" cy="822960"/>
-          </a:xfrm>
-          <a:prstGeom prst="rect">
-            <a:avLst/>
-          </a:prstGeom>
-          <a:solidFill>
-            <a:srgbClr val="FFFFFF"/>
-          </a:solidFill>
-          <a:ln w="10160">
-            <a:solidFill>
-              <a:srgbClr val="E0E0E0"/>
-            </a:solidFill>
-          </a:ln>
-        </p:spPr>
-        <p:style>
-          <a:lnRef idx="1">
-            <a:schemeClr val="accent1"/>
-          </a:lnRef>
-          <a:fillRef idx="3">
-            <a:schemeClr val="accent1"/>
-          </a:fillRef>
-          <a:effectRef idx="2">
-            <a:schemeClr val="accent1"/>
-          </a:effectRef>
-          <a:fontRef idx="minor">
-            <a:schemeClr val="lt1"/>
-          </a:fontRef>
-        </p:style>
-        <p:txBody>
-          <a:bodyPr rtlCol="0" anchor="ctr"/>
-          <a:lstStyle/>
-          <a:p>
-            <a:pPr algn="ctr"/>
-          </a:p>
-        </p:txBody>
-      </p:sp>
-      <p:sp>
-        <p:nvSpPr>
-          <p:cNvPr id="37" name="TextBox 36"/>
-          <p:cNvSpPr txBox="1"/>
-          <p:nvPr/>
-        </p:nvSpPr>
-        <p:spPr>
-          <a:xfrm>
-            <a:off x="7927848" y="4608576"/>
-            <a:ext cx="2377439" cy="438912"/>
-          </a:xfrm>
-          <a:prstGeom prst="rect">
-            <a:avLst/>
-          </a:prstGeom>
-          <a:noFill/>
-        </p:spPr>
-        <p:txBody>
-          <a:bodyPr wrap="square">
-            <a:spAutoFit/>
-          </a:bodyPr>
-          <a:lstStyle/>
-          <a:p>
-            <a:pPr algn="l"/>
-            <a:r>
-              <a:rPr sz="1200" b="0">
-                <a:solidFill>
-                  <a:srgbClr val="212121"/>
-                </a:solidFill>
-              </a:rPr>
-              <a:t>잔액·수익률 계산</a:t>
-            </a:r>
-          </a:p>
-        </p:txBody>
-      </p:sp>
-      <p:sp>
-        <p:nvSpPr>
-          <p:cNvPr id="38" name="Rectangle 37"/>
-          <p:cNvSpPr/>
-          <p:nvPr/>
-        </p:nvSpPr>
-        <p:spPr>
-          <a:xfrm>
-            <a:off x="10424160" y="4407408"/>
-            <a:ext cx="1737360" cy="822960"/>
-          </a:xfrm>
-          <a:prstGeom prst="rect">
-            <a:avLst/>
-          </a:prstGeom>
-          <a:solidFill>
-            <a:srgbClr val="FFFFFF"/>
-          </a:solidFill>
-          <a:ln w="10160">
-            <a:solidFill>
-              <a:srgbClr val="E0E0E0"/>
-            </a:solidFill>
-          </a:ln>
-        </p:spPr>
-        <p:style>
-          <a:lnRef idx="1">
-            <a:schemeClr val="accent1"/>
-          </a:lnRef>
-          <a:fillRef idx="3">
-            <a:schemeClr val="accent1"/>
-          </a:fillRef>
-          <a:effectRef idx="2">
-            <a:schemeClr val="accent1"/>
-          </a:effectRef>
-          <a:fontRef idx="minor">
-            <a:schemeClr val="lt1"/>
-          </a:fontRef>
-        </p:style>
-        <p:txBody>
-          <a:bodyPr rtlCol="0" anchor="ctr"/>
-          <a:lstStyle/>
-          <a:p>
-            <a:pPr algn="ctr"/>
-          </a:p>
-        </p:txBody>
-      </p:sp>
-      <p:sp>
-        <p:nvSpPr>
-          <p:cNvPr id="39" name="TextBox 38"/>
-          <p:cNvSpPr txBox="1"/>
-          <p:nvPr/>
-        </p:nvSpPr>
-        <p:spPr>
-          <a:xfrm>
-            <a:off x="10533888" y="4608576"/>
-            <a:ext cx="1554480" cy="438912"/>
-          </a:xfrm>
-          <a:prstGeom prst="rect">
-            <a:avLst/>
-          </a:prstGeom>
-          <a:noFill/>
-        </p:spPr>
-        <p:txBody>
-          <a:bodyPr wrap="square">
-            <a:spAutoFit/>
-          </a:bodyPr>
-          <a:lstStyle/>
-          <a:p>
-            <a:pPr algn="l"/>
-            <a:r>
-              <a:rPr sz="1200" b="0">
-                <a:solidFill>
-                  <a:srgbClr val="212121"/>
-                </a:solidFill>
-              </a:rPr>
-              <a:t>models/</a:t>
-            </a:r>
-          </a:p>
-        </p:txBody>
-      </p:sp>
-      <p:sp>
-        <p:nvSpPr>
-          <p:cNvPr id="40" name="Rectangle 39"/>
-          <p:cNvSpPr/>
-          <p:nvPr/>
-        </p:nvSpPr>
-        <p:spPr>
-          <a:xfrm>
-            <a:off x="6400800" y="5413248"/>
-            <a:ext cx="1371600" cy="822960"/>
-          </a:xfrm>
-          <a:prstGeom prst="rect">
-            <a:avLst/>
-          </a:prstGeom>
-          <a:solidFill>
-            <a:srgbClr val="FFFFFF"/>
-          </a:solidFill>
-          <a:ln w="10160">
-            <a:solidFill>
-              <a:srgbClr val="E0E0E0"/>
-            </a:solidFill>
-          </a:ln>
-        </p:spPr>
-        <p:style>
-          <a:lnRef idx="1">
-            <a:schemeClr val="accent1"/>
-          </a:lnRef>
-          <a:fillRef idx="3">
-            <a:schemeClr val="accent1"/>
-          </a:fillRef>
-          <a:effectRef idx="2">
-            <a:schemeClr val="accent1"/>
-          </a:effectRef>
-          <a:fontRef idx="minor">
-            <a:schemeClr val="lt1"/>
-          </a:fontRef>
-        </p:style>
-        <p:txBody>
-          <a:bodyPr rtlCol="0" anchor="ctr"/>
-          <a:lstStyle/>
-          <a:p>
-            <a:pPr algn="ctr"/>
-          </a:p>
-        </p:txBody>
-      </p:sp>
-      <p:sp>
-        <p:nvSpPr>
-          <p:cNvPr id="41" name="TextBox 40"/>
-          <p:cNvSpPr txBox="1"/>
-          <p:nvPr/>
-        </p:nvSpPr>
-        <p:spPr>
-          <a:xfrm>
-            <a:off x="6510528" y="5614416"/>
-            <a:ext cx="1188720" cy="438912"/>
-          </a:xfrm>
-          <a:prstGeom prst="rect">
-            <a:avLst/>
-          </a:prstGeom>
-          <a:noFill/>
-        </p:spPr>
-        <p:txBody>
-          <a:bodyPr wrap="square">
-            <a:spAutoFit/>
-          </a:bodyPr>
-          <a:lstStyle/>
-          <a:p>
-            <a:pPr algn="l"/>
-            <a:r>
-              <a:rPr sz="1200" b="0">
-                <a:solidFill>
-                  <a:srgbClr val="212121"/>
-                </a:solidFill>
-              </a:rPr>
-              <a:t>저장</a:t>
-            </a:r>
-          </a:p>
-        </p:txBody>
-      </p:sp>
-      <p:sp>
-        <p:nvSpPr>
-          <p:cNvPr id="42" name="Rectangle 41"/>
-          <p:cNvSpPr/>
-          <p:nvPr/>
-        </p:nvSpPr>
-        <p:spPr>
-          <a:xfrm>
-            <a:off x="7818120" y="5413248"/>
-            <a:ext cx="2560320" cy="822960"/>
-          </a:xfrm>
-          <a:prstGeom prst="rect">
-            <a:avLst/>
-          </a:prstGeom>
-          <a:solidFill>
-            <a:srgbClr val="FFFFFF"/>
-          </a:solidFill>
-          <a:ln w="10160">
-            <a:solidFill>
-              <a:srgbClr val="E0E0E0"/>
-            </a:solidFill>
-          </a:ln>
-        </p:spPr>
-        <p:style>
-          <a:lnRef idx="1">
-            <a:schemeClr val="accent1"/>
-          </a:lnRef>
-          <a:fillRef idx="3">
-            <a:schemeClr val="accent1"/>
-          </a:fillRef>
-          <a:effectRef idx="2">
-            <a:schemeClr val="accent1"/>
-          </a:effectRef>
-          <a:fontRef idx="minor">
-            <a:schemeClr val="lt1"/>
-          </a:fontRef>
-        </p:style>
-        <p:txBody>
-          <a:bodyPr rtlCol="0" anchor="ctr"/>
-          <a:lstStyle/>
-          <a:p>
-            <a:pPr algn="ctr"/>
-          </a:p>
-        </p:txBody>
-      </p:sp>
-      <p:sp>
-        <p:nvSpPr>
-          <p:cNvPr id="43" name="TextBox 42"/>
-          <p:cNvSpPr txBox="1"/>
-          <p:nvPr/>
-        </p:nvSpPr>
-        <p:spPr>
-          <a:xfrm>
-            <a:off x="7927848" y="5614416"/>
-            <a:ext cx="2377439" cy="438912"/>
-          </a:xfrm>
-          <a:prstGeom prst="rect">
-            <a:avLst/>
-          </a:prstGeom>
-          <a:noFill/>
-        </p:spPr>
-        <p:txBody>
-          <a:bodyPr wrap="square">
-            <a:spAutoFit/>
-          </a:bodyPr>
-          <a:lstStyle/>
-          <a:p>
-            <a:pPr algn="l"/>
-            <a:r>
-              <a:rPr sz="1200" b="0">
-                <a:solidFill>
-                  <a:srgbClr val="212121"/>
-                </a:solidFill>
-              </a:rPr>
-              <a:t>Firestore 입출력</a:t>
-            </a:r>
-          </a:p>
-        </p:txBody>
-      </p:sp>
-      <p:sp>
-        <p:nvSpPr>
-          <p:cNvPr id="44" name="Rectangle 43"/>
-          <p:cNvSpPr/>
-          <p:nvPr/>
-        </p:nvSpPr>
-        <p:spPr>
-          <a:xfrm>
-            <a:off x="10424160" y="5413248"/>
-            <a:ext cx="1737360" cy="822960"/>
-          </a:xfrm>
-          <a:prstGeom prst="rect">
-            <a:avLst/>
-          </a:prstGeom>
-          <a:solidFill>
-            <a:srgbClr val="FFFFFF"/>
-          </a:solidFill>
-          <a:ln w="10160">
-            <a:solidFill>
-              <a:srgbClr val="E0E0E0"/>
-            </a:solidFill>
-          </a:ln>
-        </p:spPr>
-        <p:style>
-          <a:lnRef idx="1">
-            <a:schemeClr val="accent1"/>
-          </a:lnRef>
-          <a:fillRef idx="3">
-            <a:schemeClr val="accent1"/>
-          </a:fillRef>
-          <a:effectRef idx="2">
-            <a:schemeClr val="accent1"/>
-          </a:effectRef>
-          <a:fontRef idx="minor">
-            <a:schemeClr val="lt1"/>
-          </a:fontRef>
-        </p:style>
-        <p:txBody>
-          <a:bodyPr rtlCol="0" anchor="ctr"/>
-          <a:lstStyle/>
-          <a:p>
-            <a:pPr algn="ctr"/>
-          </a:p>
-        </p:txBody>
-      </p:sp>
-      <p:sp>
-        <p:nvSpPr>
-          <p:cNvPr id="45" name="TextBox 44"/>
-          <p:cNvSpPr txBox="1"/>
-          <p:nvPr/>
-        </p:nvSpPr>
-        <p:spPr>
-          <a:xfrm>
-            <a:off x="10533888" y="5614416"/>
-            <a:ext cx="1554480" cy="438912"/>
-          </a:xfrm>
-          <a:prstGeom prst="rect">
-            <a:avLst/>
-          </a:prstGeom>
-          <a:noFill/>
-        </p:spPr>
-        <p:txBody>
-          <a:bodyPr wrap="square">
-            <a:spAutoFit/>
-          </a:bodyPr>
-          <a:lstStyle/>
-          <a:p>
-            <a:pPr algn="l"/>
-            <a:r>
-              <a:rPr sz="1200" b="0">
-                <a:solidFill>
-                  <a:srgbClr val="212121"/>
-                </a:solidFill>
-              </a:rPr>
-              <a:t>services/</a:t>
+              <a:t>✓  Firebase (Auth + Firestore)</a:t>
             </a:r>
           </a:p>
         </p:txBody>
@@ -5952,12 +6181,14 @@
         <p:spPr>
           <a:xfrm>
             <a:off x="0" y="0"/>
-            <a:ext cx="12188952" cy="914400"/>
-          </a:xfrm>
-          <a:prstGeom prst="rect">
-            <a:avLst/>
-          </a:prstGeom>
-          <a:noFill/>
+            <a:ext cx="12188952" cy="6858000"/>
+          </a:xfrm>
+          <a:prstGeom prst="rect">
+            <a:avLst/>
+          </a:prstGeom>
+          <a:solidFill>
+            <a:srgbClr val="FFFFFF"/>
+          </a:solidFill>
           <a:ln>
             <a:noFill/>
           </a:ln>
@@ -5986,47 +6217,13 @@
       </p:sp>
       <p:sp>
         <p:nvSpPr>
-          <p:cNvPr id="3" name="TextBox 2"/>
-          <p:cNvSpPr txBox="1"/>
-          <p:nvPr/>
-        </p:nvSpPr>
-        <p:spPr>
-          <a:xfrm>
-            <a:off x="457200" y="73152"/>
-            <a:ext cx="10972800" cy="566928"/>
-          </a:xfrm>
-          <a:prstGeom prst="rect">
-            <a:avLst/>
-          </a:prstGeom>
-          <a:noFill/>
-        </p:spPr>
-        <p:txBody>
-          <a:bodyPr wrap="square">
-            <a:spAutoFit/>
-          </a:bodyPr>
-          <a:lstStyle/>
-          <a:p>
-            <a:pPr algn="l"/>
-            <a:r>
-              <a:rPr sz="2400" b="1">
-                <a:solidFill>
-                  <a:srgbClr val="3F51B5"/>
-                </a:solidFill>
-              </a:rPr>
-              <a:t>ADR-0003  —  백엔드 서비스 선택</a:t>
-            </a:r>
-          </a:p>
-        </p:txBody>
-      </p:sp>
-      <p:sp>
-        <p:nvSpPr>
-          <p:cNvPr id="4" name="Rectangle 3"/>
+          <p:cNvPr id="3" name="Rectangle 2"/>
           <p:cNvSpPr/>
           <p:nvPr/>
         </p:nvSpPr>
         <p:spPr>
           <a:xfrm>
-            <a:off x="0" y="868680"/>
+            <a:off x="0" y="4663440"/>
             <a:ext cx="12188952" cy="45720"/>
           </a:xfrm>
           <a:prstGeom prst="rect">
@@ -6063,91 +6260,23 @@
       </p:sp>
       <p:sp>
         <p:nvSpPr>
-          <p:cNvPr id="5" name="TextBox 4"/>
-          <p:cNvSpPr txBox="1"/>
-          <p:nvPr/>
-        </p:nvSpPr>
-        <p:spPr>
-          <a:xfrm>
-            <a:off x="11247120" y="6492240"/>
-            <a:ext cx="822960" cy="274320"/>
-          </a:xfrm>
-          <a:prstGeom prst="rect">
-            <a:avLst/>
-          </a:prstGeom>
-          <a:noFill/>
-        </p:spPr>
-        <p:txBody>
-          <a:bodyPr wrap="square">
-            <a:spAutoFit/>
-          </a:bodyPr>
-          <a:lstStyle/>
-          <a:p>
-            <a:pPr algn="ctr"/>
-            <a:r>
-              <a:rPr sz="1000" b="0">
-                <a:solidFill>
-                  <a:srgbClr val="9E9E9E"/>
-                </a:solidFill>
-              </a:rPr>
-              <a:t>13 / 13</a:t>
-            </a:r>
-          </a:p>
-        </p:txBody>
-      </p:sp>
-      <p:sp>
-        <p:nvSpPr>
-          <p:cNvPr id="6" name="TextBox 5"/>
-          <p:cNvSpPr txBox="1"/>
-          <p:nvPr/>
-        </p:nvSpPr>
-        <p:spPr>
-          <a:xfrm>
-            <a:off x="457200" y="987552"/>
-            <a:ext cx="10972800" cy="347472"/>
-          </a:xfrm>
-          <a:prstGeom prst="rect">
-            <a:avLst/>
-          </a:prstGeom>
-          <a:noFill/>
-        </p:spPr>
-        <p:txBody>
-          <a:bodyPr wrap="square">
-            <a:spAutoFit/>
-          </a:bodyPr>
-          <a:lstStyle/>
-          <a:p>
-            <a:pPr algn="l"/>
-            <a:r>
-              <a:rPr sz="1200" b="0">
-                <a:solidFill>
-                  <a:srgbClr val="9E9E9E"/>
-                </a:solidFill>
-              </a:rPr>
-              <a:t>선택지 비교</a:t>
-            </a:r>
-          </a:p>
-        </p:txBody>
-      </p:sp>
-      <p:sp>
-        <p:nvSpPr>
-          <p:cNvPr id="7" name="Rectangle 6"/>
+          <p:cNvPr id="4" name="Rectangle 3"/>
           <p:cNvSpPr/>
           <p:nvPr/>
         </p:nvSpPr>
         <p:spPr>
           <a:xfrm>
-            <a:off x="457200" y="1389888"/>
-            <a:ext cx="11247120" cy="1024128"/>
-          </a:xfrm>
-          <a:prstGeom prst="rect">
-            <a:avLst/>
-          </a:prstGeom>
-          <a:noFill/>
-          <a:ln w="10160">
-            <a:solidFill>
-              <a:srgbClr val="E0E0E0"/>
-            </a:solidFill>
+            <a:off x="0" y="4709160"/>
+            <a:ext cx="12188952" cy="2148840"/>
+          </a:xfrm>
+          <a:prstGeom prst="rect">
+            <a:avLst/>
+          </a:prstGeom>
+          <a:solidFill>
+            <a:srgbClr val="F5F5F5"/>
+          </a:solidFill>
+          <a:ln>
+            <a:noFill/>
           </a:ln>
         </p:spPr>
         <p:style>
@@ -6174,265 +6303,102 @@
       </p:sp>
       <p:sp>
         <p:nvSpPr>
-          <p:cNvPr id="8" name="TextBox 7"/>
-          <p:cNvSpPr txBox="1"/>
-          <p:nvPr/>
-        </p:nvSpPr>
-        <p:spPr>
-          <a:xfrm>
-            <a:off x="594360" y="1499616"/>
-            <a:ext cx="11064240" cy="886968"/>
-          </a:xfrm>
-          <a:prstGeom prst="rect">
-            <a:avLst/>
-          </a:prstGeom>
-          <a:noFill/>
-        </p:spPr>
-        <p:txBody>
-          <a:bodyPr wrap="square">
-            <a:spAutoFit/>
-          </a:bodyPr>
-          <a:lstStyle/>
-          <a:p>
-            <a:pPr algn="l"/>
-            <a:r>
-              <a:rPr sz="1600" b="0">
+          <p:cNvPr id="5" name="TextBox 4"/>
+          <p:cNvSpPr txBox="1"/>
+          <p:nvPr/>
+        </p:nvSpPr>
+        <p:spPr>
+          <a:xfrm>
+            <a:off x="914400" y="1463040"/>
+            <a:ext cx="10058400" cy="1371600"/>
+          </a:xfrm>
+          <a:prstGeom prst="rect">
+            <a:avLst/>
+          </a:prstGeom>
+          <a:noFill/>
+        </p:spPr>
+        <p:txBody>
+          <a:bodyPr wrap="square">
+            <a:spAutoFit/>
+          </a:bodyPr>
+          <a:lstStyle/>
+          <a:p>
+            <a:pPr algn="ctr"/>
+            <a:r>
+              <a:rPr sz="5200" b="1">
+                <a:solidFill>
+                  <a:srgbClr val="3F51B5"/>
+                </a:solidFill>
+              </a:rPr>
+              <a:t>감사합니다</a:t>
+            </a:r>
+          </a:p>
+        </p:txBody>
+      </p:sp>
+      <p:sp>
+        <p:nvSpPr>
+          <p:cNvPr id="6" name="TextBox 5"/>
+          <p:cNvSpPr txBox="1"/>
+          <p:nvPr/>
+        </p:nvSpPr>
+        <p:spPr>
+          <a:xfrm>
+            <a:off x="914400" y="5074920"/>
+            <a:ext cx="10058400" cy="457200"/>
+          </a:xfrm>
+          <a:prstGeom prst="rect">
+            <a:avLst/>
+          </a:prstGeom>
+          <a:noFill/>
+        </p:spPr>
+        <p:txBody>
+          <a:bodyPr wrap="square">
+            <a:spAutoFit/>
+          </a:bodyPr>
+          <a:lstStyle/>
+          <a:p>
+            <a:pPr algn="ctr"/>
+            <a:r>
+              <a:rPr sz="1300" b="0">
                 <a:solidFill>
                   <a:srgbClr val="9E9E9E"/>
                 </a:solidFill>
               </a:rPr>
-              <a:t>Supabase</a:t>
-            </a:r>
-          </a:p>
-        </p:txBody>
-      </p:sp>
-      <p:sp>
-        <p:nvSpPr>
-          <p:cNvPr id="9" name="Rectangle 8"/>
-          <p:cNvSpPr/>
-          <p:nvPr/>
-        </p:nvSpPr>
-        <p:spPr>
-          <a:xfrm>
-            <a:off x="457200" y="2651760"/>
-            <a:ext cx="11247120" cy="1024128"/>
-          </a:xfrm>
-          <a:prstGeom prst="rect">
-            <a:avLst/>
-          </a:prstGeom>
-          <a:noFill/>
-          <a:ln w="10160">
-            <a:solidFill>
-              <a:srgbClr val="E0E0E0"/>
-            </a:solidFill>
-          </a:ln>
-        </p:spPr>
-        <p:style>
-          <a:lnRef idx="1">
-            <a:schemeClr val="accent1"/>
-          </a:lnRef>
-          <a:fillRef idx="3">
-            <a:schemeClr val="accent1"/>
-          </a:fillRef>
-          <a:effectRef idx="2">
-            <a:schemeClr val="accent1"/>
-          </a:effectRef>
-          <a:fontRef idx="minor">
-            <a:schemeClr val="lt1"/>
-          </a:fontRef>
-        </p:style>
-        <p:txBody>
-          <a:bodyPr rtlCol="0" anchor="ctr"/>
-          <a:lstStyle/>
-          <a:p>
-            <a:pPr algn="ctr"/>
-          </a:p>
-        </p:txBody>
-      </p:sp>
-      <p:sp>
-        <p:nvSpPr>
-          <p:cNvPr id="10" name="TextBox 9"/>
-          <p:cNvSpPr txBox="1"/>
-          <p:nvPr/>
-        </p:nvSpPr>
-        <p:spPr>
-          <a:xfrm>
-            <a:off x="594360" y="2761488"/>
-            <a:ext cx="11064240" cy="886968"/>
-          </a:xfrm>
-          <a:prstGeom prst="rect">
-            <a:avLst/>
-          </a:prstGeom>
-          <a:noFill/>
-        </p:spPr>
-        <p:txBody>
-          <a:bodyPr wrap="square">
-            <a:spAutoFit/>
-          </a:bodyPr>
-          <a:lstStyle/>
-          <a:p>
-            <a:pPr algn="l"/>
-            <a:r>
-              <a:rPr sz="1600" b="0">
+              <a:t>Portfolio Tracker  ·  Jooseonghyeon  ·  2026.05</a:t>
+            </a:r>
+          </a:p>
+        </p:txBody>
+      </p:sp>
+      <p:sp>
+        <p:nvSpPr>
+          <p:cNvPr id="7" name="TextBox 6"/>
+          <p:cNvSpPr txBox="1"/>
+          <p:nvPr/>
+        </p:nvSpPr>
+        <p:spPr>
+          <a:xfrm>
+            <a:off x="11247120" y="6492240"/>
+            <a:ext cx="822960" cy="274320"/>
+          </a:xfrm>
+          <a:prstGeom prst="rect">
+            <a:avLst/>
+          </a:prstGeom>
+          <a:noFill/>
+        </p:spPr>
+        <p:txBody>
+          <a:bodyPr wrap="square">
+            <a:spAutoFit/>
+          </a:bodyPr>
+          <a:lstStyle/>
+          <a:p>
+            <a:pPr algn="ctr"/>
+            <a:r>
+              <a:rPr sz="1000" b="0">
                 <a:solidFill>
                   <a:srgbClr val="9E9E9E"/>
                 </a:solidFill>
               </a:rPr>
-              <a:t>폰 내부 저장 (SQLite 등)</a:t>
-            </a:r>
-          </a:p>
-        </p:txBody>
-      </p:sp>
-      <p:sp>
-        <p:nvSpPr>
-          <p:cNvPr id="11" name="Rectangle 10"/>
-          <p:cNvSpPr/>
-          <p:nvPr/>
-        </p:nvSpPr>
-        <p:spPr>
-          <a:xfrm>
-            <a:off x="457200" y="3913631"/>
-            <a:ext cx="11247120" cy="1024128"/>
-          </a:xfrm>
-          <a:prstGeom prst="rect">
-            <a:avLst/>
-          </a:prstGeom>
-          <a:noFill/>
-          <a:ln w="10160">
-            <a:solidFill>
-              <a:srgbClr val="E0E0E0"/>
-            </a:solidFill>
-          </a:ln>
-        </p:spPr>
-        <p:style>
-          <a:lnRef idx="1">
-            <a:schemeClr val="accent1"/>
-          </a:lnRef>
-          <a:fillRef idx="3">
-            <a:schemeClr val="accent1"/>
-          </a:fillRef>
-          <a:effectRef idx="2">
-            <a:schemeClr val="accent1"/>
-          </a:effectRef>
-          <a:fontRef idx="minor">
-            <a:schemeClr val="lt1"/>
-          </a:fontRef>
-        </p:style>
-        <p:txBody>
-          <a:bodyPr rtlCol="0" anchor="ctr"/>
-          <a:lstStyle/>
-          <a:p>
-            <a:pPr algn="ctr"/>
-          </a:p>
-        </p:txBody>
-      </p:sp>
-      <p:sp>
-        <p:nvSpPr>
-          <p:cNvPr id="12" name="TextBox 11"/>
-          <p:cNvSpPr txBox="1"/>
-          <p:nvPr/>
-        </p:nvSpPr>
-        <p:spPr>
-          <a:xfrm>
-            <a:off x="594360" y="4023359"/>
-            <a:ext cx="11064240" cy="886968"/>
-          </a:xfrm>
-          <a:prstGeom prst="rect">
-            <a:avLst/>
-          </a:prstGeom>
-          <a:noFill/>
-        </p:spPr>
-        <p:txBody>
-          <a:bodyPr wrap="square">
-            <a:spAutoFit/>
-          </a:bodyPr>
-          <a:lstStyle/>
-          <a:p>
-            <a:pPr algn="l"/>
-            <a:r>
-              <a:rPr sz="1600" b="0">
-                <a:solidFill>
-                  <a:srgbClr val="9E9E9E"/>
-                </a:solidFill>
-              </a:rPr>
-              <a:t>직접 서버 구축</a:t>
-            </a:r>
-          </a:p>
-        </p:txBody>
-      </p:sp>
-      <p:sp>
-        <p:nvSpPr>
-          <p:cNvPr id="13" name="Rectangle 12"/>
-          <p:cNvSpPr/>
-          <p:nvPr/>
-        </p:nvSpPr>
-        <p:spPr>
-          <a:xfrm>
-            <a:off x="457200" y="5175504"/>
-            <a:ext cx="11247120" cy="1024128"/>
-          </a:xfrm>
-          <a:prstGeom prst="rect">
-            <a:avLst/>
-          </a:prstGeom>
-          <a:solidFill>
-            <a:srgbClr val="3F51B5"/>
-          </a:solidFill>
-          <a:ln>
-            <a:noFill/>
-          </a:ln>
-        </p:spPr>
-        <p:style>
-          <a:lnRef idx="1">
-            <a:schemeClr val="accent1"/>
-          </a:lnRef>
-          <a:fillRef idx="3">
-            <a:schemeClr val="accent1"/>
-          </a:fillRef>
-          <a:effectRef idx="2">
-            <a:schemeClr val="accent1"/>
-          </a:effectRef>
-          <a:fontRef idx="minor">
-            <a:schemeClr val="lt1"/>
-          </a:fontRef>
-        </p:style>
-        <p:txBody>
-          <a:bodyPr rtlCol="0" anchor="ctr"/>
-          <a:lstStyle/>
-          <a:p>
-            <a:pPr algn="ctr"/>
-          </a:p>
-        </p:txBody>
-      </p:sp>
-      <p:sp>
-        <p:nvSpPr>
-          <p:cNvPr id="14" name="TextBox 13"/>
-          <p:cNvSpPr txBox="1"/>
-          <p:nvPr/>
-        </p:nvSpPr>
-        <p:spPr>
-          <a:xfrm>
-            <a:off x="594360" y="5285232"/>
-            <a:ext cx="11064240" cy="886968"/>
-          </a:xfrm>
-          <a:prstGeom prst="rect">
-            <a:avLst/>
-          </a:prstGeom>
-          <a:noFill/>
-        </p:spPr>
-        <p:txBody>
-          <a:bodyPr wrap="square">
-            <a:spAutoFit/>
-          </a:bodyPr>
-          <a:lstStyle/>
-          <a:p>
-            <a:pPr algn="l"/>
-            <a:r>
-              <a:rPr sz="1600" b="1">
-                <a:solidFill>
-                  <a:srgbClr val="FFFFFF"/>
-                </a:solidFill>
-              </a:rPr>
-              <a:t>✓  Firebase (Auth + Firestore)</a:t>
+              <a:t>13 / 13</a:t>
             </a:r>
           </a:p>
         </p:txBody>
@@ -10922,7 +10888,7 @@
                   <a:srgbClr val="212121"/>
                 </a:solidFill>
               </a:rPr>
-              <a:t>수익률 · 잔액 계산 비즈니스 규칙</a:t>
+              <a:t>수익률 · 잔액 등 계산식 정의</a:t>
             </a:r>
           </a:p>
         </p:txBody>
@@ -15118,7 +15084,7 @@
                   <a:srgbClr val="212121"/>
                 </a:solidFill>
               </a:rPr>
-              <a:t>Google Play Console 등록 절차 및 APK 서명 과정 첫 경험
+              <a:t>Google Play Console 등록 절차 및 APK 서명 과정 첫 시도
 배포 오류 발생 시 대응 방법 조언 필요</a:t>
             </a:r>
           </a:p>

--- a/portfolio-tracker/presentation/portfolio-tracker.pptx
+++ b/portfolio-tracker/presentation/portfolio-tracker.pptx
@@ -3394,7 +3394,7 @@
                   <a:srgbClr val="9E9E9E"/>
                 </a:solidFill>
               </a:rPr>
-              <a:t>Jooseonghyeon  ·  2026.05</a:t>
+              <a:t/>
             </a:r>
           </a:p>
         </p:txBody>

--- a/portfolio-tracker/presentation/portfolio-tracker.pptx
+++ b/portfolio-tracker/presentation/portfolio-tracker.pptx
@@ -11,6 +11,7 @@
     <p:sldId id="259" r:id="rId10"/>
     <p:sldId id="260" r:id="rId11"/>
     <p:sldId id="261" r:id="rId12"/>
+    <p:sldId id="269" r:id="rId20"/>
     <p:sldId id="262" r:id="rId13"/>
     <p:sldId id="263" r:id="rId14"/>
     <p:sldId id="264" r:id="rId15"/>
@@ -6403,6 +6404,48 @@
           </a:p>
         </p:txBody>
       </p:sp>
+    </p:spTree>
+  </p:cSld>
+  <p:clrMapOvr>
+    <a:masterClrMapping/>
+  </p:clrMapOvr>
+</p:sld>
+</file>
+
+<file path=ppt/slides/slide14.xml><?xml version="1.0" encoding="utf-8"?>
+<p:sld xmlns:a="http://schemas.openxmlformats.org/drawingml/2006/main" xmlns:p="http://schemas.openxmlformats.org/presentationml/2006/main" xmlns:r="http://schemas.openxmlformats.org/officeDocument/2006/relationships">
+  <p:cSld>
+    <p:spTree>
+      <p:nvGrpSpPr>
+        <p:cNvPr id="1" name=""/>
+        <p:cNvGrpSpPr/>
+        <p:nvPr/>
+      </p:nvGrpSpPr>
+      <p:grpSpPr/>
+      <p:pic>
+        <p:nvPicPr>
+          <p:cNvPr id="2" name="Picture 1" descr="wbs.png"/>
+          <p:cNvPicPr>
+            <a:picLocks noChangeAspect="1"/>
+          </p:cNvPicPr>
+          <p:nvPr/>
+        </p:nvPicPr>
+        <p:blipFill>
+          <a:blip r:embed="rId2"/>
+          <a:stretch>
+            <a:fillRect/>
+          </a:stretch>
+        </p:blipFill>
+        <p:spPr>
+          <a:xfrm>
+            <a:off x="274320" y="274320"/>
+            <a:ext cx="11640312" cy="6309360"/>
+          </a:xfrm>
+          <a:prstGeom prst="rect">
+            <a:avLst/>
+          </a:prstGeom>
+        </p:spPr>
+      </p:pic>
     </p:spTree>
   </p:cSld>
   <p:clrMapOvr>

--- a/portfolio-tracker/presentation/portfolio-tracker.pptx
+++ b/portfolio-tracker/presentation/portfolio-tracker.pptx
@@ -10,9 +10,9 @@
     <p:sldId id="258" r:id="rId9"/>
     <p:sldId id="259" r:id="rId10"/>
     <p:sldId id="260" r:id="rId11"/>
+    <p:sldId id="262" r:id="rId13"/>
     <p:sldId id="261" r:id="rId12"/>
     <p:sldId id="269" r:id="rId20"/>
-    <p:sldId id="262" r:id="rId13"/>
     <p:sldId id="263" r:id="rId14"/>
     <p:sldId id="264" r:id="rId15"/>
     <p:sldId id="265" r:id="rId16"/>
@@ -3488,7 +3488,7 @@
                   <a:srgbClr val="3F51B5"/>
                 </a:solidFill>
               </a:rPr>
-              <a:t>ADR-0001  —  모바일 프레임워크 선택</a:t>
+              <a:t>8.  어려운 점 / 도움 요청</a:t>
             </a:r>
           </a:p>
         </p:txBody>
@@ -3565,55 +3565,21 @@
                   <a:srgbClr val="9E9E9E"/>
                 </a:solidFill>
               </a:rPr>
-              <a:t>10 / 13</a:t>
-            </a:r>
-          </a:p>
-        </p:txBody>
-      </p:sp>
-      <p:sp>
-        <p:nvSpPr>
-          <p:cNvPr id="6" name="TextBox 5"/>
-          <p:cNvSpPr txBox="1"/>
-          <p:nvPr/>
-        </p:nvSpPr>
-        <p:spPr>
-          <a:xfrm>
-            <a:off x="457200" y="987552"/>
-            <a:ext cx="10972800" cy="347472"/>
-          </a:xfrm>
-          <a:prstGeom prst="rect">
-            <a:avLst/>
-          </a:prstGeom>
-          <a:noFill/>
-        </p:spPr>
-        <p:txBody>
-          <a:bodyPr wrap="square">
-            <a:spAutoFit/>
-          </a:bodyPr>
-          <a:lstStyle/>
-          <a:p>
-            <a:pPr algn="l"/>
-            <a:r>
-              <a:rPr sz="1200" b="0">
-                <a:solidFill>
-                  <a:srgbClr val="9E9E9E"/>
-                </a:solidFill>
-              </a:rPr>
-              <a:t>선택지 비교</a:t>
-            </a:r>
-          </a:p>
-        </p:txBody>
-      </p:sp>
-      <p:sp>
-        <p:nvSpPr>
-          <p:cNvPr id="7" name="Rectangle 6"/>
+              <a:t>9 / 13</a:t>
+            </a:r>
+          </a:p>
+        </p:txBody>
+      </p:sp>
+      <p:sp>
+        <p:nvSpPr>
+          <p:cNvPr id="6" name="Rectangle 5"/>
           <p:cNvSpPr/>
           <p:nvPr/>
         </p:nvSpPr>
         <p:spPr>
           <a:xfrm>
-            <a:off x="457200" y="1389888"/>
-            <a:ext cx="11247120" cy="1024128"/>
+            <a:off x="457200" y="1051560"/>
+            <a:ext cx="11247120" cy="1417320"/>
           </a:xfrm>
           <a:prstGeom prst="rect">
             <a:avLst/>
@@ -3649,14 +3615,57 @@
       </p:sp>
       <p:sp>
         <p:nvSpPr>
+          <p:cNvPr id="7" name="Rectangle 6"/>
+          <p:cNvSpPr/>
+          <p:nvPr/>
+        </p:nvSpPr>
+        <p:spPr>
+          <a:xfrm>
+            <a:off x="457200" y="1051560"/>
+            <a:ext cx="54864" cy="1417320"/>
+          </a:xfrm>
+          <a:prstGeom prst="rect">
+            <a:avLst/>
+          </a:prstGeom>
+          <a:solidFill>
+            <a:srgbClr val="E65C00"/>
+          </a:solidFill>
+          <a:ln>
+            <a:noFill/>
+          </a:ln>
+        </p:spPr>
+        <p:style>
+          <a:lnRef idx="1">
+            <a:schemeClr val="accent1"/>
+          </a:lnRef>
+          <a:fillRef idx="3">
+            <a:schemeClr val="accent1"/>
+          </a:fillRef>
+          <a:effectRef idx="2">
+            <a:schemeClr val="accent1"/>
+          </a:effectRef>
+          <a:fontRef idx="minor">
+            <a:schemeClr val="lt1"/>
+          </a:fontRef>
+        </p:style>
+        <p:txBody>
+          <a:bodyPr rtlCol="0" anchor="ctr"/>
+          <a:lstStyle/>
+          <a:p>
+            <a:pPr algn="ctr"/>
+          </a:p>
+        </p:txBody>
+      </p:sp>
+      <p:sp>
+        <p:nvSpPr>
           <p:cNvPr id="8" name="TextBox 7"/>
           <p:cNvSpPr txBox="1"/>
           <p:nvPr/>
         </p:nvSpPr>
         <p:spPr>
           <a:xfrm>
-            <a:off x="594360" y="1499616"/>
-            <a:ext cx="11064240" cy="886968"/>
+            <a:off x="658368" y="1188719"/>
+            <a:ext cx="10972800" cy="411480"/>
           </a:xfrm>
           <a:prstGeom prst="rect">
             <a:avLst/>
@@ -3671,26 +3680,61 @@
           <a:p>
             <a:pPr algn="l"/>
             <a:r>
-              <a:rPr sz="1600" b="0">
-                <a:solidFill>
-                  <a:srgbClr val="9E9E9E"/>
-                </a:solidFill>
-              </a:rPr>
-              <a:t>React Native</a:t>
-            </a:r>
-          </a:p>
-        </p:txBody>
-      </p:sp>
-      <p:sp>
-        <p:nvSpPr>
-          <p:cNvPr id="9" name="Rectangle 8"/>
+              <a:rPr sz="1400" b="1">
+                <a:solidFill>
+                  <a:srgbClr val="212121"/>
+                </a:solidFill>
+              </a:rPr>
+              <a:t>iOS 빌드 불가</a:t>
+            </a:r>
+          </a:p>
+        </p:txBody>
+      </p:sp>
+      <p:sp>
+        <p:nvSpPr>
+          <p:cNvPr id="9" name="TextBox 8"/>
+          <p:cNvSpPr txBox="1"/>
+          <p:nvPr/>
+        </p:nvSpPr>
+        <p:spPr>
+          <a:xfrm>
+            <a:off x="658368" y="1618488"/>
+            <a:ext cx="10789920" cy="749808"/>
+          </a:xfrm>
+          <a:prstGeom prst="rect">
+            <a:avLst/>
+          </a:prstGeom>
+          <a:noFill/>
+        </p:spPr>
+        <p:txBody>
+          <a:bodyPr wrap="square">
+            <a:spAutoFit/>
+          </a:bodyPr>
+          <a:lstStyle/>
+          <a:p>
+            <a:pPr algn="l"/>
+            <a:r>
+              <a:rPr sz="1300" b="0">
+                <a:solidFill>
+                  <a:srgbClr val="212121"/>
+                </a:solidFill>
+              </a:rPr>
+              <a:t>Mac 환경 없음 → iOS 시뮬레이터·실기기 테스트 불가
+Android APK만 제출 예정</a:t>
+            </a:r>
+          </a:p>
+        </p:txBody>
+      </p:sp>
+      <p:sp>
+        <p:nvSpPr>
+          <p:cNvPr id="10" name="Rectangle 9"/>
           <p:cNvSpPr/>
           <p:nvPr/>
         </p:nvSpPr>
         <p:spPr>
           <a:xfrm>
-            <a:off x="457200" y="2651760"/>
-            <a:ext cx="11247120" cy="1024128"/>
+            <a:off x="457200" y="2715768"/>
+            <a:ext cx="11247120" cy="1417320"/>
           </a:xfrm>
           <a:prstGeom prst="rect">
             <a:avLst/>
@@ -3726,48 +3770,126 @@
       </p:sp>
       <p:sp>
         <p:nvSpPr>
-          <p:cNvPr id="10" name="TextBox 9"/>
-          <p:cNvSpPr txBox="1"/>
-          <p:nvPr/>
-        </p:nvSpPr>
-        <p:spPr>
-          <a:xfrm>
-            <a:off x="594360" y="2761488"/>
-            <a:ext cx="11064240" cy="886968"/>
-          </a:xfrm>
-          <a:prstGeom prst="rect">
-            <a:avLst/>
-          </a:prstGeom>
-          <a:noFill/>
-        </p:spPr>
-        <p:txBody>
-          <a:bodyPr wrap="square">
-            <a:spAutoFit/>
-          </a:bodyPr>
-          <a:lstStyle/>
-          <a:p>
-            <a:pPr algn="l"/>
-            <a:r>
-              <a:rPr sz="1600" b="0">
-                <a:solidFill>
-                  <a:srgbClr val="9E9E9E"/>
-                </a:solidFill>
-              </a:rPr>
-              <a:t>안드로이드 전용 개발</a:t>
-            </a:r>
-          </a:p>
-        </p:txBody>
-      </p:sp>
-      <p:sp>
-        <p:nvSpPr>
           <p:cNvPr id="11" name="Rectangle 10"/>
           <p:cNvSpPr/>
           <p:nvPr/>
         </p:nvSpPr>
         <p:spPr>
           <a:xfrm>
-            <a:off x="457200" y="3913631"/>
-            <a:ext cx="11247120" cy="1024128"/>
+            <a:off x="457200" y="2715768"/>
+            <a:ext cx="54864" cy="1417320"/>
+          </a:xfrm>
+          <a:prstGeom prst="rect">
+            <a:avLst/>
+          </a:prstGeom>
+          <a:solidFill>
+            <a:srgbClr val="E65C00"/>
+          </a:solidFill>
+          <a:ln>
+            <a:noFill/>
+          </a:ln>
+        </p:spPr>
+        <p:style>
+          <a:lnRef idx="1">
+            <a:schemeClr val="accent1"/>
+          </a:lnRef>
+          <a:fillRef idx="3">
+            <a:schemeClr val="accent1"/>
+          </a:fillRef>
+          <a:effectRef idx="2">
+            <a:schemeClr val="accent1"/>
+          </a:effectRef>
+          <a:fontRef idx="minor">
+            <a:schemeClr val="lt1"/>
+          </a:fontRef>
+        </p:style>
+        <p:txBody>
+          <a:bodyPr rtlCol="0" anchor="ctr"/>
+          <a:lstStyle/>
+          <a:p>
+            <a:pPr algn="ctr"/>
+          </a:p>
+        </p:txBody>
+      </p:sp>
+      <p:sp>
+        <p:nvSpPr>
+          <p:cNvPr id="12" name="TextBox 11"/>
+          <p:cNvSpPr txBox="1"/>
+          <p:nvPr/>
+        </p:nvSpPr>
+        <p:spPr>
+          <a:xfrm>
+            <a:off x="658368" y="2852927"/>
+            <a:ext cx="10972800" cy="411480"/>
+          </a:xfrm>
+          <a:prstGeom prst="rect">
+            <a:avLst/>
+          </a:prstGeom>
+          <a:noFill/>
+        </p:spPr>
+        <p:txBody>
+          <a:bodyPr wrap="square">
+            <a:spAutoFit/>
+          </a:bodyPr>
+          <a:lstStyle/>
+          <a:p>
+            <a:pPr algn="l"/>
+            <a:r>
+              <a:rPr sz="1400" b="1">
+                <a:solidFill>
+                  <a:srgbClr val="212121"/>
+                </a:solidFill>
+              </a:rPr>
+              <a:t>Firebase Security Rules</a:t>
+            </a:r>
+          </a:p>
+        </p:txBody>
+      </p:sp>
+      <p:sp>
+        <p:nvSpPr>
+          <p:cNvPr id="13" name="TextBox 12"/>
+          <p:cNvSpPr txBox="1"/>
+          <p:nvPr/>
+        </p:nvSpPr>
+        <p:spPr>
+          <a:xfrm>
+            <a:off x="658368" y="3282696"/>
+            <a:ext cx="10789920" cy="749808"/>
+          </a:xfrm>
+          <a:prstGeom prst="rect">
+            <a:avLst/>
+          </a:prstGeom>
+          <a:noFill/>
+        </p:spPr>
+        <p:txBody>
+          <a:bodyPr wrap="square">
+            <a:spAutoFit/>
+          </a:bodyPr>
+          <a:lstStyle/>
+          <a:p>
+            <a:pPr algn="l"/>
+            <a:r>
+              <a:rPr sz="1300" b="0">
+                <a:solidFill>
+                  <a:srgbClr val="212121"/>
+                </a:solidFill>
+              </a:rPr>
+              <a:t>Firestore 보안 규칙 검증 어려움 — 다른 사용자가 타 계정 데이터에
+접근하지 못하도록 규칙을 작성했으나 침투 테스트 환경 없음</a:t>
+            </a:r>
+          </a:p>
+        </p:txBody>
+      </p:sp>
+      <p:sp>
+        <p:nvSpPr>
+          <p:cNvPr id="14" name="Rectangle 13"/>
+          <p:cNvSpPr/>
+          <p:nvPr/>
+        </p:nvSpPr>
+        <p:spPr>
+          <a:xfrm>
+            <a:off x="457200" y="4379976"/>
+            <a:ext cx="11247120" cy="1417320"/>
           </a:xfrm>
           <a:prstGeom prst="rect">
             <a:avLst/>
@@ -3803,54 +3925,20 @@
       </p:sp>
       <p:sp>
         <p:nvSpPr>
-          <p:cNvPr id="12" name="TextBox 11"/>
-          <p:cNvSpPr txBox="1"/>
-          <p:nvPr/>
-        </p:nvSpPr>
-        <p:spPr>
-          <a:xfrm>
-            <a:off x="594360" y="4023359"/>
-            <a:ext cx="11064240" cy="886968"/>
-          </a:xfrm>
-          <a:prstGeom prst="rect">
-            <a:avLst/>
-          </a:prstGeom>
-          <a:noFill/>
-        </p:spPr>
-        <p:txBody>
-          <a:bodyPr wrap="square">
-            <a:spAutoFit/>
-          </a:bodyPr>
-          <a:lstStyle/>
-          <a:p>
-            <a:pPr algn="l"/>
-            <a:r>
-              <a:rPr sz="1600" b="0">
-                <a:solidFill>
-                  <a:srgbClr val="9E9E9E"/>
-                </a:solidFill>
-              </a:rPr>
-              <a:t>아이폰 전용 개발</a:t>
-            </a:r>
-          </a:p>
-        </p:txBody>
-      </p:sp>
-      <p:sp>
-        <p:nvSpPr>
-          <p:cNvPr id="13" name="Rectangle 12"/>
+          <p:cNvPr id="15" name="Rectangle 14"/>
           <p:cNvSpPr/>
           <p:nvPr/>
         </p:nvSpPr>
         <p:spPr>
           <a:xfrm>
-            <a:off x="457200" y="5175504"/>
-            <a:ext cx="11247120" cy="1024128"/>
+            <a:off x="457200" y="4379976"/>
+            <a:ext cx="54864" cy="1417320"/>
           </a:xfrm>
           <a:prstGeom prst="rect">
             <a:avLst/>
           </a:prstGeom>
           <a:solidFill>
-            <a:srgbClr val="3F51B5"/>
+            <a:srgbClr val="E65C00"/>
           </a:solidFill>
           <a:ln>
             <a:noFill/>
@@ -3880,14 +3968,14 @@
       </p:sp>
       <p:sp>
         <p:nvSpPr>
-          <p:cNvPr id="14" name="TextBox 13"/>
-          <p:cNvSpPr txBox="1"/>
-          <p:nvPr/>
-        </p:nvSpPr>
-        <p:spPr>
-          <a:xfrm>
-            <a:off x="594360" y="5285232"/>
-            <a:ext cx="11064240" cy="886968"/>
+          <p:cNvPr id="16" name="TextBox 15"/>
+          <p:cNvSpPr txBox="1"/>
+          <p:nvPr/>
+        </p:nvSpPr>
+        <p:spPr>
+          <a:xfrm>
+            <a:off x="658368" y="4517136"/>
+            <a:ext cx="10972800" cy="411480"/>
           </a:xfrm>
           <a:prstGeom prst="rect">
             <a:avLst/>
@@ -3902,12 +3990,47 @@
           <a:p>
             <a:pPr algn="l"/>
             <a:r>
-              <a:rPr sz="1600" b="1">
-                <a:solidFill>
-                  <a:srgbClr val="FFFFFF"/>
-                </a:solidFill>
-              </a:rPr>
-              <a:t>✓  Flutter</a:t>
+              <a:rPr sz="1400" b="1">
+                <a:solidFill>
+                  <a:srgbClr val="212121"/>
+                </a:solidFill>
+              </a:rPr>
+              <a:t>앱 배포 경험 없음</a:t>
+            </a:r>
+          </a:p>
+        </p:txBody>
+      </p:sp>
+      <p:sp>
+        <p:nvSpPr>
+          <p:cNvPr id="17" name="TextBox 16"/>
+          <p:cNvSpPr txBox="1"/>
+          <p:nvPr/>
+        </p:nvSpPr>
+        <p:spPr>
+          <a:xfrm>
+            <a:off x="658368" y="4946904"/>
+            <a:ext cx="10789920" cy="749808"/>
+          </a:xfrm>
+          <a:prstGeom prst="rect">
+            <a:avLst/>
+          </a:prstGeom>
+          <a:noFill/>
+        </p:spPr>
+        <p:txBody>
+          <a:bodyPr wrap="square">
+            <a:spAutoFit/>
+          </a:bodyPr>
+          <a:lstStyle/>
+          <a:p>
+            <a:pPr algn="l"/>
+            <a:r>
+              <a:rPr sz="1300" b="0">
+                <a:solidFill>
+                  <a:srgbClr val="212121"/>
+                </a:solidFill>
+              </a:rPr>
+              <a:t>Google Play Console 등록 절차 및 APK 서명 과정 첫 시도
+배포 오류 발생 시 대응 방법 조언 필요</a:t>
             </a:r>
           </a:p>
         </p:txBody>
@@ -4000,7 +4123,7 @@
                   <a:srgbClr val="3F51B5"/>
                 </a:solidFill>
               </a:rPr>
-              <a:t>ADR-0002  —  아키텍처 패턴 선택</a:t>
+              <a:t>ADR-0001  —  모바일 프레임워크 선택</a:t>
             </a:r>
           </a:p>
         </p:txBody>
@@ -4077,7 +4200,7 @@
                   <a:srgbClr val="9E9E9E"/>
                 </a:solidFill>
               </a:rPr>
-              <a:t>11 / 13</a:t>
+              <a:t>10 / 13</a:t>
             </a:r>
           </a:p>
         </p:txBody>
@@ -4091,7 +4214,7 @@
         <p:spPr>
           <a:xfrm>
             <a:off x="457200" y="987552"/>
-            <a:ext cx="5486400" cy="347472"/>
+            <a:ext cx="10972800" cy="347472"/>
           </a:xfrm>
           <a:prstGeom prst="rect">
             <a:avLst/>
@@ -4125,7 +4248,7 @@
         <p:spPr>
           <a:xfrm>
             <a:off x="457200" y="1389888"/>
-            <a:ext cx="5486400" cy="1024128"/>
+            <a:ext cx="11247120" cy="1024128"/>
           </a:xfrm>
           <a:prstGeom prst="rect">
             <a:avLst/>
@@ -4168,7 +4291,7 @@
         <p:spPr>
           <a:xfrm>
             <a:off x="594360" y="1499616"/>
-            <a:ext cx="5303520" cy="886968"/>
+            <a:ext cx="11064240" cy="886968"/>
           </a:xfrm>
           <a:prstGeom prst="rect">
             <a:avLst/>
@@ -4188,7 +4311,7 @@
                   <a:srgbClr val="9E9E9E"/>
                 </a:solidFill>
               </a:rPr>
-              <a:t>역할 구분 없이 한 파일</a:t>
+              <a:t>React Native</a:t>
             </a:r>
           </a:p>
         </p:txBody>
@@ -4202,7 +4325,7 @@
         <p:spPr>
           <a:xfrm>
             <a:off x="457200" y="2651760"/>
-            <a:ext cx="5486400" cy="1024128"/>
+            <a:ext cx="11247120" cy="1024128"/>
           </a:xfrm>
           <a:prstGeom prst="rect">
             <a:avLst/>
@@ -4245,7 +4368,7 @@
         <p:spPr>
           <a:xfrm>
             <a:off x="594360" y="2761488"/>
-            <a:ext cx="5303520" cy="886968"/>
+            <a:ext cx="11064240" cy="886968"/>
           </a:xfrm>
           <a:prstGeom prst="rect">
             <a:avLst/>
@@ -4265,7 +4388,7 @@
                   <a:srgbClr val="9E9E9E"/>
                 </a:solidFill>
               </a:rPr>
-              <a:t>MVC 방식</a:t>
+              <a:t>안드로이드 전용 개발</a:t>
             </a:r>
           </a:p>
         </p:txBody>
@@ -4279,7 +4402,7 @@
         <p:spPr>
           <a:xfrm>
             <a:off x="457200" y="3913631"/>
-            <a:ext cx="5486400" cy="1024128"/>
+            <a:ext cx="11247120" cy="1024128"/>
           </a:xfrm>
           <a:prstGeom prst="rect">
             <a:avLst/>
@@ -4322,7 +4445,7 @@
         <p:spPr>
           <a:xfrm>
             <a:off x="594360" y="4023359"/>
-            <a:ext cx="5303520" cy="886968"/>
+            <a:ext cx="11064240" cy="886968"/>
           </a:xfrm>
           <a:prstGeom prst="rect">
             <a:avLst/>
@@ -4342,7 +4465,7 @@
                   <a:srgbClr val="9E9E9E"/>
                 </a:solidFill>
               </a:rPr>
-              <a:t>6 ~ 8개 레이어</a:t>
+              <a:t>아이폰 전용 개발</a:t>
             </a:r>
           </a:p>
         </p:txBody>
@@ -4356,7 +4479,7 @@
         <p:spPr>
           <a:xfrm>
             <a:off x="457200" y="5175504"/>
-            <a:ext cx="5486400" cy="1024128"/>
+            <a:ext cx="11247120" cy="1024128"/>
           </a:xfrm>
           <a:prstGeom prst="rect">
             <a:avLst/>
@@ -4399,7 +4522,7 @@
         <p:spPr>
           <a:xfrm>
             <a:off x="594360" y="5285232"/>
-            <a:ext cx="5303520" cy="886968"/>
+            <a:ext cx="11064240" cy="886968"/>
           </a:xfrm>
           <a:prstGeom prst="rect">
             <a:avLst/>
@@ -4419,1226 +4542,7 @@
                   <a:srgbClr val="FFFFFF"/>
                 </a:solidFill>
               </a:rPr>
-              <a:t>✓  4레이어 구조</a:t>
-            </a:r>
-          </a:p>
-        </p:txBody>
-      </p:sp>
-      <p:sp>
-        <p:nvSpPr>
-          <p:cNvPr id="15" name="TextBox 14"/>
-          <p:cNvSpPr txBox="1"/>
-          <p:nvPr/>
-        </p:nvSpPr>
-        <p:spPr>
-          <a:xfrm>
-            <a:off x="6400800" y="987552"/>
-            <a:ext cx="5394960" cy="347472"/>
-          </a:xfrm>
-          <a:prstGeom prst="rect">
-            <a:avLst/>
-          </a:prstGeom>
-          <a:noFill/>
-        </p:spPr>
-        <p:txBody>
-          <a:bodyPr wrap="square">
-            <a:spAutoFit/>
-          </a:bodyPr>
-          <a:lstStyle/>
-          <a:p>
-            <a:pPr algn="l"/>
-            <a:r>
-              <a:rPr sz="1200" b="0">
-                <a:solidFill>
-                  <a:srgbClr val="9E9E9E"/>
-                </a:solidFill>
-              </a:rPr>
-              <a:t>선택된 4레이어 구조</a:t>
-            </a:r>
-          </a:p>
-        </p:txBody>
-      </p:sp>
-      <p:sp>
-        <p:nvSpPr>
-          <p:cNvPr id="16" name="Rectangle 15"/>
-          <p:cNvSpPr/>
-          <p:nvPr/>
-        </p:nvSpPr>
-        <p:spPr>
-          <a:xfrm>
-            <a:off x="6400800" y="1389888"/>
-            <a:ext cx="1371600" cy="822960"/>
-          </a:xfrm>
-          <a:prstGeom prst="rect">
-            <a:avLst/>
-          </a:prstGeom>
-          <a:solidFill>
-            <a:srgbClr val="F5F5F5"/>
-          </a:solidFill>
-          <a:ln w="10160">
-            <a:solidFill>
-              <a:srgbClr val="E0E0E0"/>
-            </a:solidFill>
-          </a:ln>
-        </p:spPr>
-        <p:style>
-          <a:lnRef idx="1">
-            <a:schemeClr val="accent1"/>
-          </a:lnRef>
-          <a:fillRef idx="3">
-            <a:schemeClr val="accent1"/>
-          </a:fillRef>
-          <a:effectRef idx="2">
-            <a:schemeClr val="accent1"/>
-          </a:effectRef>
-          <a:fontRef idx="minor">
-            <a:schemeClr val="lt1"/>
-          </a:fontRef>
-        </p:style>
-        <p:txBody>
-          <a:bodyPr rtlCol="0" anchor="ctr"/>
-          <a:lstStyle/>
-          <a:p>
-            <a:pPr algn="ctr"/>
-          </a:p>
-        </p:txBody>
-      </p:sp>
-      <p:sp>
-        <p:nvSpPr>
-          <p:cNvPr id="17" name="TextBox 16"/>
-          <p:cNvSpPr txBox="1"/>
-          <p:nvPr/>
-        </p:nvSpPr>
-        <p:spPr>
-          <a:xfrm>
-            <a:off x="6510528" y="1591056"/>
-            <a:ext cx="1188720" cy="438912"/>
-          </a:xfrm>
-          <a:prstGeom prst="rect">
-            <a:avLst/>
-          </a:prstGeom>
-          <a:noFill/>
-        </p:spPr>
-        <p:txBody>
-          <a:bodyPr wrap="square">
-            <a:spAutoFit/>
-          </a:bodyPr>
-          <a:lstStyle/>
-          <a:p>
-            <a:pPr algn="l"/>
-            <a:r>
-              <a:rPr sz="1200" b="1">
-                <a:solidFill>
-                  <a:srgbClr val="3F51B5"/>
-                </a:solidFill>
-              </a:rPr>
-              <a:t>레이어</a:t>
-            </a:r>
-          </a:p>
-        </p:txBody>
-      </p:sp>
-      <p:sp>
-        <p:nvSpPr>
-          <p:cNvPr id="18" name="Rectangle 17"/>
-          <p:cNvSpPr/>
-          <p:nvPr/>
-        </p:nvSpPr>
-        <p:spPr>
-          <a:xfrm>
-            <a:off x="7818120" y="1389888"/>
-            <a:ext cx="2560320" cy="822960"/>
-          </a:xfrm>
-          <a:prstGeom prst="rect">
-            <a:avLst/>
-          </a:prstGeom>
-          <a:solidFill>
-            <a:srgbClr val="F5F5F5"/>
-          </a:solidFill>
-          <a:ln w="10160">
-            <a:solidFill>
-              <a:srgbClr val="E0E0E0"/>
-            </a:solidFill>
-          </a:ln>
-        </p:spPr>
-        <p:style>
-          <a:lnRef idx="1">
-            <a:schemeClr val="accent1"/>
-          </a:lnRef>
-          <a:fillRef idx="3">
-            <a:schemeClr val="accent1"/>
-          </a:fillRef>
-          <a:effectRef idx="2">
-            <a:schemeClr val="accent1"/>
-          </a:effectRef>
-          <a:fontRef idx="minor">
-            <a:schemeClr val="lt1"/>
-          </a:fontRef>
-        </p:style>
-        <p:txBody>
-          <a:bodyPr rtlCol="0" anchor="ctr"/>
-          <a:lstStyle/>
-          <a:p>
-            <a:pPr algn="ctr"/>
-          </a:p>
-        </p:txBody>
-      </p:sp>
-      <p:sp>
-        <p:nvSpPr>
-          <p:cNvPr id="19" name="TextBox 18"/>
-          <p:cNvSpPr txBox="1"/>
-          <p:nvPr/>
-        </p:nvSpPr>
-        <p:spPr>
-          <a:xfrm>
-            <a:off x="7927848" y="1591056"/>
-            <a:ext cx="2377439" cy="438912"/>
-          </a:xfrm>
-          <a:prstGeom prst="rect">
-            <a:avLst/>
-          </a:prstGeom>
-          <a:noFill/>
-        </p:spPr>
-        <p:txBody>
-          <a:bodyPr wrap="square">
-            <a:spAutoFit/>
-          </a:bodyPr>
-          <a:lstStyle/>
-          <a:p>
-            <a:pPr algn="l"/>
-            <a:r>
-              <a:rPr sz="1200" b="1">
-                <a:solidFill>
-                  <a:srgbClr val="3F51B5"/>
-                </a:solidFill>
-              </a:rPr>
-              <a:t>역할</a:t>
-            </a:r>
-          </a:p>
-        </p:txBody>
-      </p:sp>
-      <p:sp>
-        <p:nvSpPr>
-          <p:cNvPr id="20" name="Rectangle 19"/>
-          <p:cNvSpPr/>
-          <p:nvPr/>
-        </p:nvSpPr>
-        <p:spPr>
-          <a:xfrm>
-            <a:off x="10424160" y="1389888"/>
-            <a:ext cx="1737360" cy="822960"/>
-          </a:xfrm>
-          <a:prstGeom prst="rect">
-            <a:avLst/>
-          </a:prstGeom>
-          <a:solidFill>
-            <a:srgbClr val="F5F5F5"/>
-          </a:solidFill>
-          <a:ln w="10160">
-            <a:solidFill>
-              <a:srgbClr val="E0E0E0"/>
-            </a:solidFill>
-          </a:ln>
-        </p:spPr>
-        <p:style>
-          <a:lnRef idx="1">
-            <a:schemeClr val="accent1"/>
-          </a:lnRef>
-          <a:fillRef idx="3">
-            <a:schemeClr val="accent1"/>
-          </a:fillRef>
-          <a:effectRef idx="2">
-            <a:schemeClr val="accent1"/>
-          </a:effectRef>
-          <a:fontRef idx="minor">
-            <a:schemeClr val="lt1"/>
-          </a:fontRef>
-        </p:style>
-        <p:txBody>
-          <a:bodyPr rtlCol="0" anchor="ctr"/>
-          <a:lstStyle/>
-          <a:p>
-            <a:pPr algn="ctr"/>
-          </a:p>
-        </p:txBody>
-      </p:sp>
-      <p:sp>
-        <p:nvSpPr>
-          <p:cNvPr id="21" name="TextBox 20"/>
-          <p:cNvSpPr txBox="1"/>
-          <p:nvPr/>
-        </p:nvSpPr>
-        <p:spPr>
-          <a:xfrm>
-            <a:off x="10533888" y="1591056"/>
-            <a:ext cx="1554480" cy="438912"/>
-          </a:xfrm>
-          <a:prstGeom prst="rect">
-            <a:avLst/>
-          </a:prstGeom>
-          <a:noFill/>
-        </p:spPr>
-        <p:txBody>
-          <a:bodyPr wrap="square">
-            <a:spAutoFit/>
-          </a:bodyPr>
-          <a:lstStyle/>
-          <a:p>
-            <a:pPr algn="l"/>
-            <a:r>
-              <a:rPr sz="1200" b="1">
-                <a:solidFill>
-                  <a:srgbClr val="3F51B5"/>
-                </a:solidFill>
-              </a:rPr>
-              <a:t>위치</a:t>
-            </a:r>
-          </a:p>
-        </p:txBody>
-      </p:sp>
-      <p:sp>
-        <p:nvSpPr>
-          <p:cNvPr id="22" name="Rectangle 21"/>
-          <p:cNvSpPr/>
-          <p:nvPr/>
-        </p:nvSpPr>
-        <p:spPr>
-          <a:xfrm>
-            <a:off x="6400800" y="2395728"/>
-            <a:ext cx="1371600" cy="822960"/>
-          </a:xfrm>
-          <a:prstGeom prst="rect">
-            <a:avLst/>
-          </a:prstGeom>
-          <a:solidFill>
-            <a:srgbClr val="FFFFFF"/>
-          </a:solidFill>
-          <a:ln w="10160">
-            <a:solidFill>
-              <a:srgbClr val="E0E0E0"/>
-            </a:solidFill>
-          </a:ln>
-        </p:spPr>
-        <p:style>
-          <a:lnRef idx="1">
-            <a:schemeClr val="accent1"/>
-          </a:lnRef>
-          <a:fillRef idx="3">
-            <a:schemeClr val="accent1"/>
-          </a:fillRef>
-          <a:effectRef idx="2">
-            <a:schemeClr val="accent1"/>
-          </a:effectRef>
-          <a:fontRef idx="minor">
-            <a:schemeClr val="lt1"/>
-          </a:fontRef>
-        </p:style>
-        <p:txBody>
-          <a:bodyPr rtlCol="0" anchor="ctr"/>
-          <a:lstStyle/>
-          <a:p>
-            <a:pPr algn="ctr"/>
-          </a:p>
-        </p:txBody>
-      </p:sp>
-      <p:sp>
-        <p:nvSpPr>
-          <p:cNvPr id="23" name="TextBox 22"/>
-          <p:cNvSpPr txBox="1"/>
-          <p:nvPr/>
-        </p:nvSpPr>
-        <p:spPr>
-          <a:xfrm>
-            <a:off x="6510528" y="2596896"/>
-            <a:ext cx="1188720" cy="438912"/>
-          </a:xfrm>
-          <a:prstGeom prst="rect">
-            <a:avLst/>
-          </a:prstGeom>
-          <a:noFill/>
-        </p:spPr>
-        <p:txBody>
-          <a:bodyPr wrap="square">
-            <a:spAutoFit/>
-          </a:bodyPr>
-          <a:lstStyle/>
-          <a:p>
-            <a:pPr algn="l"/>
-            <a:r>
-              <a:rPr sz="1200" b="0">
-                <a:solidFill>
-                  <a:srgbClr val="212121"/>
-                </a:solidFill>
-              </a:rPr>
-              <a:t>화면</a:t>
-            </a:r>
-          </a:p>
-        </p:txBody>
-      </p:sp>
-      <p:sp>
-        <p:nvSpPr>
-          <p:cNvPr id="24" name="Rectangle 23"/>
-          <p:cNvSpPr/>
-          <p:nvPr/>
-        </p:nvSpPr>
-        <p:spPr>
-          <a:xfrm>
-            <a:off x="7818120" y="2395728"/>
-            <a:ext cx="2560320" cy="822960"/>
-          </a:xfrm>
-          <a:prstGeom prst="rect">
-            <a:avLst/>
-          </a:prstGeom>
-          <a:solidFill>
-            <a:srgbClr val="FFFFFF"/>
-          </a:solidFill>
-          <a:ln w="10160">
-            <a:solidFill>
-              <a:srgbClr val="E0E0E0"/>
-            </a:solidFill>
-          </a:ln>
-        </p:spPr>
-        <p:style>
-          <a:lnRef idx="1">
-            <a:schemeClr val="accent1"/>
-          </a:lnRef>
-          <a:fillRef idx="3">
-            <a:schemeClr val="accent1"/>
-          </a:fillRef>
-          <a:effectRef idx="2">
-            <a:schemeClr val="accent1"/>
-          </a:effectRef>
-          <a:fontRef idx="minor">
-            <a:schemeClr val="lt1"/>
-          </a:fontRef>
-        </p:style>
-        <p:txBody>
-          <a:bodyPr rtlCol="0" anchor="ctr"/>
-          <a:lstStyle/>
-          <a:p>
-            <a:pPr algn="ctr"/>
-          </a:p>
-        </p:txBody>
-      </p:sp>
-      <p:sp>
-        <p:nvSpPr>
-          <p:cNvPr id="25" name="TextBox 24"/>
-          <p:cNvSpPr txBox="1"/>
-          <p:nvPr/>
-        </p:nvSpPr>
-        <p:spPr>
-          <a:xfrm>
-            <a:off x="7927848" y="2596896"/>
-            <a:ext cx="2377439" cy="438912"/>
-          </a:xfrm>
-          <a:prstGeom prst="rect">
-            <a:avLst/>
-          </a:prstGeom>
-          <a:noFill/>
-        </p:spPr>
-        <p:txBody>
-          <a:bodyPr wrap="square">
-            <a:spAutoFit/>
-          </a:bodyPr>
-          <a:lstStyle/>
-          <a:p>
-            <a:pPr algn="l"/>
-            <a:r>
-              <a:rPr sz="1200" b="0">
-                <a:solidFill>
-                  <a:srgbClr val="212121"/>
-                </a:solidFill>
-              </a:rPr>
-              <a:t>버튼·목록·입력창</a:t>
-            </a:r>
-          </a:p>
-        </p:txBody>
-      </p:sp>
-      <p:sp>
-        <p:nvSpPr>
-          <p:cNvPr id="26" name="Rectangle 25"/>
-          <p:cNvSpPr/>
-          <p:nvPr/>
-        </p:nvSpPr>
-        <p:spPr>
-          <a:xfrm>
-            <a:off x="10424160" y="2395728"/>
-            <a:ext cx="1737360" cy="822960"/>
-          </a:xfrm>
-          <a:prstGeom prst="rect">
-            <a:avLst/>
-          </a:prstGeom>
-          <a:solidFill>
-            <a:srgbClr val="FFFFFF"/>
-          </a:solidFill>
-          <a:ln w="10160">
-            <a:solidFill>
-              <a:srgbClr val="E0E0E0"/>
-            </a:solidFill>
-          </a:ln>
-        </p:spPr>
-        <p:style>
-          <a:lnRef idx="1">
-            <a:schemeClr val="accent1"/>
-          </a:lnRef>
-          <a:fillRef idx="3">
-            <a:schemeClr val="accent1"/>
-          </a:fillRef>
-          <a:effectRef idx="2">
-            <a:schemeClr val="accent1"/>
-          </a:effectRef>
-          <a:fontRef idx="minor">
-            <a:schemeClr val="lt1"/>
-          </a:fontRef>
-        </p:style>
-        <p:txBody>
-          <a:bodyPr rtlCol="0" anchor="ctr"/>
-          <a:lstStyle/>
-          <a:p>
-            <a:pPr algn="ctr"/>
-          </a:p>
-        </p:txBody>
-      </p:sp>
-      <p:sp>
-        <p:nvSpPr>
-          <p:cNvPr id="27" name="TextBox 26"/>
-          <p:cNvSpPr txBox="1"/>
-          <p:nvPr/>
-        </p:nvSpPr>
-        <p:spPr>
-          <a:xfrm>
-            <a:off x="10533888" y="2596896"/>
-            <a:ext cx="1554480" cy="438912"/>
-          </a:xfrm>
-          <a:prstGeom prst="rect">
-            <a:avLst/>
-          </a:prstGeom>
-          <a:noFill/>
-        </p:spPr>
-        <p:txBody>
-          <a:bodyPr wrap="square">
-            <a:spAutoFit/>
-          </a:bodyPr>
-          <a:lstStyle/>
-          <a:p>
-            <a:pPr algn="l"/>
-            <a:r>
-              <a:rPr sz="1200" b="0">
-                <a:solidFill>
-                  <a:srgbClr val="212121"/>
-                </a:solidFill>
-              </a:rPr>
-              <a:t>screens/</a:t>
-            </a:r>
-          </a:p>
-        </p:txBody>
-      </p:sp>
-      <p:sp>
-        <p:nvSpPr>
-          <p:cNvPr id="28" name="Rectangle 27"/>
-          <p:cNvSpPr/>
-          <p:nvPr/>
-        </p:nvSpPr>
-        <p:spPr>
-          <a:xfrm>
-            <a:off x="6400800" y="3401568"/>
-            <a:ext cx="1371600" cy="822960"/>
-          </a:xfrm>
-          <a:prstGeom prst="rect">
-            <a:avLst/>
-          </a:prstGeom>
-          <a:solidFill>
-            <a:srgbClr val="FFFFFF"/>
-          </a:solidFill>
-          <a:ln w="10160">
-            <a:solidFill>
-              <a:srgbClr val="E0E0E0"/>
-            </a:solidFill>
-          </a:ln>
-        </p:spPr>
-        <p:style>
-          <a:lnRef idx="1">
-            <a:schemeClr val="accent1"/>
-          </a:lnRef>
-          <a:fillRef idx="3">
-            <a:schemeClr val="accent1"/>
-          </a:fillRef>
-          <a:effectRef idx="2">
-            <a:schemeClr val="accent1"/>
-          </a:effectRef>
-          <a:fontRef idx="minor">
-            <a:schemeClr val="lt1"/>
-          </a:fontRef>
-        </p:style>
-        <p:txBody>
-          <a:bodyPr rtlCol="0" anchor="ctr"/>
-          <a:lstStyle/>
-          <a:p>
-            <a:pPr algn="ctr"/>
-          </a:p>
-        </p:txBody>
-      </p:sp>
-      <p:sp>
-        <p:nvSpPr>
-          <p:cNvPr id="29" name="TextBox 28"/>
-          <p:cNvSpPr txBox="1"/>
-          <p:nvPr/>
-        </p:nvSpPr>
-        <p:spPr>
-          <a:xfrm>
-            <a:off x="6510528" y="3602736"/>
-            <a:ext cx="1188720" cy="438912"/>
-          </a:xfrm>
-          <a:prstGeom prst="rect">
-            <a:avLst/>
-          </a:prstGeom>
-          <a:noFill/>
-        </p:spPr>
-        <p:txBody>
-          <a:bodyPr wrap="square">
-            <a:spAutoFit/>
-          </a:bodyPr>
-          <a:lstStyle/>
-          <a:p>
-            <a:pPr algn="l"/>
-            <a:r>
-              <a:rPr sz="1200" b="0">
-                <a:solidFill>
-                  <a:srgbClr val="212121"/>
-                </a:solidFill>
-              </a:rPr>
-              <a:t>흐름</a:t>
-            </a:r>
-          </a:p>
-        </p:txBody>
-      </p:sp>
-      <p:sp>
-        <p:nvSpPr>
-          <p:cNvPr id="30" name="Rectangle 29"/>
-          <p:cNvSpPr/>
-          <p:nvPr/>
-        </p:nvSpPr>
-        <p:spPr>
-          <a:xfrm>
-            <a:off x="7818120" y="3401568"/>
-            <a:ext cx="2560320" cy="822960"/>
-          </a:xfrm>
-          <a:prstGeom prst="rect">
-            <a:avLst/>
-          </a:prstGeom>
-          <a:solidFill>
-            <a:srgbClr val="FFFFFF"/>
-          </a:solidFill>
-          <a:ln w="10160">
-            <a:solidFill>
-              <a:srgbClr val="E0E0E0"/>
-            </a:solidFill>
-          </a:ln>
-        </p:spPr>
-        <p:style>
-          <a:lnRef idx="1">
-            <a:schemeClr val="accent1"/>
-          </a:lnRef>
-          <a:fillRef idx="3">
-            <a:schemeClr val="accent1"/>
-          </a:fillRef>
-          <a:effectRef idx="2">
-            <a:schemeClr val="accent1"/>
-          </a:effectRef>
-          <a:fontRef idx="minor">
-            <a:schemeClr val="lt1"/>
-          </a:fontRef>
-        </p:style>
-        <p:txBody>
-          <a:bodyPr rtlCol="0" anchor="ctr"/>
-          <a:lstStyle/>
-          <a:p>
-            <a:pPr algn="ctr"/>
-          </a:p>
-        </p:txBody>
-      </p:sp>
-      <p:sp>
-        <p:nvSpPr>
-          <p:cNvPr id="31" name="TextBox 30"/>
-          <p:cNvSpPr txBox="1"/>
-          <p:nvPr/>
-        </p:nvSpPr>
-        <p:spPr>
-          <a:xfrm>
-            <a:off x="7927848" y="3602736"/>
-            <a:ext cx="2377439" cy="438912"/>
-          </a:xfrm>
-          <a:prstGeom prst="rect">
-            <a:avLst/>
-          </a:prstGeom>
-          <a:noFill/>
-        </p:spPr>
-        <p:txBody>
-          <a:bodyPr wrap="square">
-            <a:spAutoFit/>
-          </a:bodyPr>
-          <a:lstStyle/>
-          <a:p>
-            <a:pPr algn="l"/>
-            <a:r>
-              <a:rPr sz="1200" b="0">
-                <a:solidFill>
-                  <a:srgbClr val="212121"/>
-                </a:solidFill>
-              </a:rPr>
-              <a:t>화면-데이터 연결 처리</a:t>
-            </a:r>
-          </a:p>
-        </p:txBody>
-      </p:sp>
-      <p:sp>
-        <p:nvSpPr>
-          <p:cNvPr id="32" name="Rectangle 31"/>
-          <p:cNvSpPr/>
-          <p:nvPr/>
-        </p:nvSpPr>
-        <p:spPr>
-          <a:xfrm>
-            <a:off x="10424160" y="3401568"/>
-            <a:ext cx="1737360" cy="822960"/>
-          </a:xfrm>
-          <a:prstGeom prst="rect">
-            <a:avLst/>
-          </a:prstGeom>
-          <a:solidFill>
-            <a:srgbClr val="FFFFFF"/>
-          </a:solidFill>
-          <a:ln w="10160">
-            <a:solidFill>
-              <a:srgbClr val="E0E0E0"/>
-            </a:solidFill>
-          </a:ln>
-        </p:spPr>
-        <p:style>
-          <a:lnRef idx="1">
-            <a:schemeClr val="accent1"/>
-          </a:lnRef>
-          <a:fillRef idx="3">
-            <a:schemeClr val="accent1"/>
-          </a:fillRef>
-          <a:effectRef idx="2">
-            <a:schemeClr val="accent1"/>
-          </a:effectRef>
-          <a:fontRef idx="minor">
-            <a:schemeClr val="lt1"/>
-          </a:fontRef>
-        </p:style>
-        <p:txBody>
-          <a:bodyPr rtlCol="0" anchor="ctr"/>
-          <a:lstStyle/>
-          <a:p>
-            <a:pPr algn="ctr"/>
-          </a:p>
-        </p:txBody>
-      </p:sp>
-      <p:sp>
-        <p:nvSpPr>
-          <p:cNvPr id="33" name="TextBox 32"/>
-          <p:cNvSpPr txBox="1"/>
-          <p:nvPr/>
-        </p:nvSpPr>
-        <p:spPr>
-          <a:xfrm>
-            <a:off x="10533888" y="3602736"/>
-            <a:ext cx="1554480" cy="438912"/>
-          </a:xfrm>
-          <a:prstGeom prst="rect">
-            <a:avLst/>
-          </a:prstGeom>
-          <a:noFill/>
-        </p:spPr>
-        <p:txBody>
-          <a:bodyPr wrap="square">
-            <a:spAutoFit/>
-          </a:bodyPr>
-          <a:lstStyle/>
-          <a:p>
-            <a:pPr algn="l"/>
-            <a:r>
-              <a:rPr sz="1200" b="0">
-                <a:solidFill>
-                  <a:srgbClr val="212121"/>
-                </a:solidFill>
-              </a:rPr>
-              <a:t/>
-            </a:r>
-          </a:p>
-        </p:txBody>
-      </p:sp>
-      <p:sp>
-        <p:nvSpPr>
-          <p:cNvPr id="34" name="Rectangle 33"/>
-          <p:cNvSpPr/>
-          <p:nvPr/>
-        </p:nvSpPr>
-        <p:spPr>
-          <a:xfrm>
-            <a:off x="6400800" y="4407408"/>
-            <a:ext cx="1371600" cy="822960"/>
-          </a:xfrm>
-          <a:prstGeom prst="rect">
-            <a:avLst/>
-          </a:prstGeom>
-          <a:solidFill>
-            <a:srgbClr val="FFFFFF"/>
-          </a:solidFill>
-          <a:ln w="10160">
-            <a:solidFill>
-              <a:srgbClr val="E0E0E0"/>
-            </a:solidFill>
-          </a:ln>
-        </p:spPr>
-        <p:style>
-          <a:lnRef idx="1">
-            <a:schemeClr val="accent1"/>
-          </a:lnRef>
-          <a:fillRef idx="3">
-            <a:schemeClr val="accent1"/>
-          </a:fillRef>
-          <a:effectRef idx="2">
-            <a:schemeClr val="accent1"/>
-          </a:effectRef>
-          <a:fontRef idx="minor">
-            <a:schemeClr val="lt1"/>
-          </a:fontRef>
-        </p:style>
-        <p:txBody>
-          <a:bodyPr rtlCol="0" anchor="ctr"/>
-          <a:lstStyle/>
-          <a:p>
-            <a:pPr algn="ctr"/>
-          </a:p>
-        </p:txBody>
-      </p:sp>
-      <p:sp>
-        <p:nvSpPr>
-          <p:cNvPr id="35" name="TextBox 34"/>
-          <p:cNvSpPr txBox="1"/>
-          <p:nvPr/>
-        </p:nvSpPr>
-        <p:spPr>
-          <a:xfrm>
-            <a:off x="6510528" y="4608576"/>
-            <a:ext cx="1188720" cy="438912"/>
-          </a:xfrm>
-          <a:prstGeom prst="rect">
-            <a:avLst/>
-          </a:prstGeom>
-          <a:noFill/>
-        </p:spPr>
-        <p:txBody>
-          <a:bodyPr wrap="square">
-            <a:spAutoFit/>
-          </a:bodyPr>
-          <a:lstStyle/>
-          <a:p>
-            <a:pPr algn="l"/>
-            <a:r>
-              <a:rPr sz="1200" b="0">
-                <a:solidFill>
-                  <a:srgbClr val="212121"/>
-                </a:solidFill>
-              </a:rPr>
-              <a:t>규칙</a:t>
-            </a:r>
-          </a:p>
-        </p:txBody>
-      </p:sp>
-      <p:sp>
-        <p:nvSpPr>
-          <p:cNvPr id="36" name="Rectangle 35"/>
-          <p:cNvSpPr/>
-          <p:nvPr/>
-        </p:nvSpPr>
-        <p:spPr>
-          <a:xfrm>
-            <a:off x="7818120" y="4407408"/>
-            <a:ext cx="2560320" cy="822960"/>
-          </a:xfrm>
-          <a:prstGeom prst="rect">
-            <a:avLst/>
-          </a:prstGeom>
-          <a:solidFill>
-            <a:srgbClr val="FFFFFF"/>
-          </a:solidFill>
-          <a:ln w="10160">
-            <a:solidFill>
-              <a:srgbClr val="E0E0E0"/>
-            </a:solidFill>
-          </a:ln>
-        </p:spPr>
-        <p:style>
-          <a:lnRef idx="1">
-            <a:schemeClr val="accent1"/>
-          </a:lnRef>
-          <a:fillRef idx="3">
-            <a:schemeClr val="accent1"/>
-          </a:fillRef>
-          <a:effectRef idx="2">
-            <a:schemeClr val="accent1"/>
-          </a:effectRef>
-          <a:fontRef idx="minor">
-            <a:schemeClr val="lt1"/>
-          </a:fontRef>
-        </p:style>
-        <p:txBody>
-          <a:bodyPr rtlCol="0" anchor="ctr"/>
-          <a:lstStyle/>
-          <a:p>
-            <a:pPr algn="ctr"/>
-          </a:p>
-        </p:txBody>
-      </p:sp>
-      <p:sp>
-        <p:nvSpPr>
-          <p:cNvPr id="37" name="TextBox 36"/>
-          <p:cNvSpPr txBox="1"/>
-          <p:nvPr/>
-        </p:nvSpPr>
-        <p:spPr>
-          <a:xfrm>
-            <a:off x="7927848" y="4608576"/>
-            <a:ext cx="2377439" cy="438912"/>
-          </a:xfrm>
-          <a:prstGeom prst="rect">
-            <a:avLst/>
-          </a:prstGeom>
-          <a:noFill/>
-        </p:spPr>
-        <p:txBody>
-          <a:bodyPr wrap="square">
-            <a:spAutoFit/>
-          </a:bodyPr>
-          <a:lstStyle/>
-          <a:p>
-            <a:pPr algn="l"/>
-            <a:r>
-              <a:rPr sz="1200" b="0">
-                <a:solidFill>
-                  <a:srgbClr val="212121"/>
-                </a:solidFill>
-              </a:rPr>
-              <a:t>잔액·수익률 계산</a:t>
-            </a:r>
-          </a:p>
-        </p:txBody>
-      </p:sp>
-      <p:sp>
-        <p:nvSpPr>
-          <p:cNvPr id="38" name="Rectangle 37"/>
-          <p:cNvSpPr/>
-          <p:nvPr/>
-        </p:nvSpPr>
-        <p:spPr>
-          <a:xfrm>
-            <a:off x="10424160" y="4407408"/>
-            <a:ext cx="1737360" cy="822960"/>
-          </a:xfrm>
-          <a:prstGeom prst="rect">
-            <a:avLst/>
-          </a:prstGeom>
-          <a:solidFill>
-            <a:srgbClr val="FFFFFF"/>
-          </a:solidFill>
-          <a:ln w="10160">
-            <a:solidFill>
-              <a:srgbClr val="E0E0E0"/>
-            </a:solidFill>
-          </a:ln>
-        </p:spPr>
-        <p:style>
-          <a:lnRef idx="1">
-            <a:schemeClr val="accent1"/>
-          </a:lnRef>
-          <a:fillRef idx="3">
-            <a:schemeClr val="accent1"/>
-          </a:fillRef>
-          <a:effectRef idx="2">
-            <a:schemeClr val="accent1"/>
-          </a:effectRef>
-          <a:fontRef idx="minor">
-            <a:schemeClr val="lt1"/>
-          </a:fontRef>
-        </p:style>
-        <p:txBody>
-          <a:bodyPr rtlCol="0" anchor="ctr"/>
-          <a:lstStyle/>
-          <a:p>
-            <a:pPr algn="ctr"/>
-          </a:p>
-        </p:txBody>
-      </p:sp>
-      <p:sp>
-        <p:nvSpPr>
-          <p:cNvPr id="39" name="TextBox 38"/>
-          <p:cNvSpPr txBox="1"/>
-          <p:nvPr/>
-        </p:nvSpPr>
-        <p:spPr>
-          <a:xfrm>
-            <a:off x="10533888" y="4608576"/>
-            <a:ext cx="1554480" cy="438912"/>
-          </a:xfrm>
-          <a:prstGeom prst="rect">
-            <a:avLst/>
-          </a:prstGeom>
-          <a:noFill/>
-        </p:spPr>
-        <p:txBody>
-          <a:bodyPr wrap="square">
-            <a:spAutoFit/>
-          </a:bodyPr>
-          <a:lstStyle/>
-          <a:p>
-            <a:pPr algn="l"/>
-            <a:r>
-              <a:rPr sz="1200" b="0">
-                <a:solidFill>
-                  <a:srgbClr val="212121"/>
-                </a:solidFill>
-              </a:rPr>
-              <a:t>models/</a:t>
-            </a:r>
-          </a:p>
-        </p:txBody>
-      </p:sp>
-      <p:sp>
-        <p:nvSpPr>
-          <p:cNvPr id="40" name="Rectangle 39"/>
-          <p:cNvSpPr/>
-          <p:nvPr/>
-        </p:nvSpPr>
-        <p:spPr>
-          <a:xfrm>
-            <a:off x="6400800" y="5413248"/>
-            <a:ext cx="1371600" cy="822960"/>
-          </a:xfrm>
-          <a:prstGeom prst="rect">
-            <a:avLst/>
-          </a:prstGeom>
-          <a:solidFill>
-            <a:srgbClr val="FFFFFF"/>
-          </a:solidFill>
-          <a:ln w="10160">
-            <a:solidFill>
-              <a:srgbClr val="E0E0E0"/>
-            </a:solidFill>
-          </a:ln>
-        </p:spPr>
-        <p:style>
-          <a:lnRef idx="1">
-            <a:schemeClr val="accent1"/>
-          </a:lnRef>
-          <a:fillRef idx="3">
-            <a:schemeClr val="accent1"/>
-          </a:fillRef>
-          <a:effectRef idx="2">
-            <a:schemeClr val="accent1"/>
-          </a:effectRef>
-          <a:fontRef idx="minor">
-            <a:schemeClr val="lt1"/>
-          </a:fontRef>
-        </p:style>
-        <p:txBody>
-          <a:bodyPr rtlCol="0" anchor="ctr"/>
-          <a:lstStyle/>
-          <a:p>
-            <a:pPr algn="ctr"/>
-          </a:p>
-        </p:txBody>
-      </p:sp>
-      <p:sp>
-        <p:nvSpPr>
-          <p:cNvPr id="41" name="TextBox 40"/>
-          <p:cNvSpPr txBox="1"/>
-          <p:nvPr/>
-        </p:nvSpPr>
-        <p:spPr>
-          <a:xfrm>
-            <a:off x="6510528" y="5614416"/>
-            <a:ext cx="1188720" cy="438912"/>
-          </a:xfrm>
-          <a:prstGeom prst="rect">
-            <a:avLst/>
-          </a:prstGeom>
-          <a:noFill/>
-        </p:spPr>
-        <p:txBody>
-          <a:bodyPr wrap="square">
-            <a:spAutoFit/>
-          </a:bodyPr>
-          <a:lstStyle/>
-          <a:p>
-            <a:pPr algn="l"/>
-            <a:r>
-              <a:rPr sz="1200" b="0">
-                <a:solidFill>
-                  <a:srgbClr val="212121"/>
-                </a:solidFill>
-              </a:rPr>
-              <a:t>저장</a:t>
-            </a:r>
-          </a:p>
-        </p:txBody>
-      </p:sp>
-      <p:sp>
-        <p:nvSpPr>
-          <p:cNvPr id="42" name="Rectangle 41"/>
-          <p:cNvSpPr/>
-          <p:nvPr/>
-        </p:nvSpPr>
-        <p:spPr>
-          <a:xfrm>
-            <a:off x="7818120" y="5413248"/>
-            <a:ext cx="2560320" cy="822960"/>
-          </a:xfrm>
-          <a:prstGeom prst="rect">
-            <a:avLst/>
-          </a:prstGeom>
-          <a:solidFill>
-            <a:srgbClr val="FFFFFF"/>
-          </a:solidFill>
-          <a:ln w="10160">
-            <a:solidFill>
-              <a:srgbClr val="E0E0E0"/>
-            </a:solidFill>
-          </a:ln>
-        </p:spPr>
-        <p:style>
-          <a:lnRef idx="1">
-            <a:schemeClr val="accent1"/>
-          </a:lnRef>
-          <a:fillRef idx="3">
-            <a:schemeClr val="accent1"/>
-          </a:fillRef>
-          <a:effectRef idx="2">
-            <a:schemeClr val="accent1"/>
-          </a:effectRef>
-          <a:fontRef idx="minor">
-            <a:schemeClr val="lt1"/>
-          </a:fontRef>
-        </p:style>
-        <p:txBody>
-          <a:bodyPr rtlCol="0" anchor="ctr"/>
-          <a:lstStyle/>
-          <a:p>
-            <a:pPr algn="ctr"/>
-          </a:p>
-        </p:txBody>
-      </p:sp>
-      <p:sp>
-        <p:nvSpPr>
-          <p:cNvPr id="43" name="TextBox 42"/>
-          <p:cNvSpPr txBox="1"/>
-          <p:nvPr/>
-        </p:nvSpPr>
-        <p:spPr>
-          <a:xfrm>
-            <a:off x="7927848" y="5614416"/>
-            <a:ext cx="2377439" cy="438912"/>
-          </a:xfrm>
-          <a:prstGeom prst="rect">
-            <a:avLst/>
-          </a:prstGeom>
-          <a:noFill/>
-        </p:spPr>
-        <p:txBody>
-          <a:bodyPr wrap="square">
-            <a:spAutoFit/>
-          </a:bodyPr>
-          <a:lstStyle/>
-          <a:p>
-            <a:pPr algn="l"/>
-            <a:r>
-              <a:rPr sz="1200" b="0">
-                <a:solidFill>
-                  <a:srgbClr val="212121"/>
-                </a:solidFill>
-              </a:rPr>
-              <a:t>Firestore 입출력</a:t>
-            </a:r>
-          </a:p>
-        </p:txBody>
-      </p:sp>
-      <p:sp>
-        <p:nvSpPr>
-          <p:cNvPr id="44" name="Rectangle 43"/>
-          <p:cNvSpPr/>
-          <p:nvPr/>
-        </p:nvSpPr>
-        <p:spPr>
-          <a:xfrm>
-            <a:off x="10424160" y="5413248"/>
-            <a:ext cx="1737360" cy="822960"/>
-          </a:xfrm>
-          <a:prstGeom prst="rect">
-            <a:avLst/>
-          </a:prstGeom>
-          <a:solidFill>
-            <a:srgbClr val="FFFFFF"/>
-          </a:solidFill>
-          <a:ln w="10160">
-            <a:solidFill>
-              <a:srgbClr val="E0E0E0"/>
-            </a:solidFill>
-          </a:ln>
-        </p:spPr>
-        <p:style>
-          <a:lnRef idx="1">
-            <a:schemeClr val="accent1"/>
-          </a:lnRef>
-          <a:fillRef idx="3">
-            <a:schemeClr val="accent1"/>
-          </a:fillRef>
-          <a:effectRef idx="2">
-            <a:schemeClr val="accent1"/>
-          </a:effectRef>
-          <a:fontRef idx="minor">
-            <a:schemeClr val="lt1"/>
-          </a:fontRef>
-        </p:style>
-        <p:txBody>
-          <a:bodyPr rtlCol="0" anchor="ctr"/>
-          <a:lstStyle/>
-          <a:p>
-            <a:pPr algn="ctr"/>
-          </a:p>
-        </p:txBody>
-      </p:sp>
-      <p:sp>
-        <p:nvSpPr>
-          <p:cNvPr id="45" name="TextBox 44"/>
-          <p:cNvSpPr txBox="1"/>
-          <p:nvPr/>
-        </p:nvSpPr>
-        <p:spPr>
-          <a:xfrm>
-            <a:off x="10533888" y="5614416"/>
-            <a:ext cx="1554480" cy="438912"/>
-          </a:xfrm>
-          <a:prstGeom prst="rect">
-            <a:avLst/>
-          </a:prstGeom>
-          <a:noFill/>
-        </p:spPr>
-        <p:txBody>
-          <a:bodyPr wrap="square">
-            <a:spAutoFit/>
-          </a:bodyPr>
-          <a:lstStyle/>
-          <a:p>
-            <a:pPr algn="l"/>
-            <a:r>
-              <a:rPr sz="1200" b="0">
-                <a:solidFill>
-                  <a:srgbClr val="212121"/>
-                </a:solidFill>
-              </a:rPr>
-              <a:t>services/</a:t>
+              <a:t>✓  Flutter</a:t>
             </a:r>
           </a:p>
         </p:txBody>
@@ -5731,7 +4635,7 @@
                   <a:srgbClr val="3F51B5"/>
                 </a:solidFill>
               </a:rPr>
-              <a:t>ADR-0003  —  백엔드 서비스 선택</a:t>
+              <a:t>ADR-0002  —  아키텍처 패턴 선택</a:t>
             </a:r>
           </a:p>
         </p:txBody>
@@ -5808,7 +4712,7 @@
                   <a:srgbClr val="9E9E9E"/>
                 </a:solidFill>
               </a:rPr>
-              <a:t>12 / 13</a:t>
+              <a:t>11 / 13</a:t>
             </a:r>
           </a:p>
         </p:txBody>
@@ -5822,7 +4726,7 @@
         <p:spPr>
           <a:xfrm>
             <a:off x="457200" y="987552"/>
-            <a:ext cx="10972800" cy="347472"/>
+            <a:ext cx="5486400" cy="347472"/>
           </a:xfrm>
           <a:prstGeom prst="rect">
             <a:avLst/>
@@ -5856,7 +4760,7 @@
         <p:spPr>
           <a:xfrm>
             <a:off x="457200" y="1389888"/>
-            <a:ext cx="11247120" cy="1024128"/>
+            <a:ext cx="5486400" cy="1024128"/>
           </a:xfrm>
           <a:prstGeom prst="rect">
             <a:avLst/>
@@ -5899,7 +4803,7 @@
         <p:spPr>
           <a:xfrm>
             <a:off x="594360" y="1499616"/>
-            <a:ext cx="11064240" cy="886968"/>
+            <a:ext cx="5303520" cy="886968"/>
           </a:xfrm>
           <a:prstGeom prst="rect">
             <a:avLst/>
@@ -5919,7 +4823,7 @@
                   <a:srgbClr val="9E9E9E"/>
                 </a:solidFill>
               </a:rPr>
-              <a:t>Supabase</a:t>
+              <a:t>역할 구분 없이 한 파일</a:t>
             </a:r>
           </a:p>
         </p:txBody>
@@ -5933,7 +4837,7 @@
         <p:spPr>
           <a:xfrm>
             <a:off x="457200" y="2651760"/>
-            <a:ext cx="11247120" cy="1024128"/>
+            <a:ext cx="5486400" cy="1024128"/>
           </a:xfrm>
           <a:prstGeom prst="rect">
             <a:avLst/>
@@ -5976,7 +4880,7 @@
         <p:spPr>
           <a:xfrm>
             <a:off x="594360" y="2761488"/>
-            <a:ext cx="11064240" cy="886968"/>
+            <a:ext cx="5303520" cy="886968"/>
           </a:xfrm>
           <a:prstGeom prst="rect">
             <a:avLst/>
@@ -5996,7 +4900,7 @@
                   <a:srgbClr val="9E9E9E"/>
                 </a:solidFill>
               </a:rPr>
-              <a:t>폰 내부 저장 (SQLite 등)</a:t>
+              <a:t>MVC 방식</a:t>
             </a:r>
           </a:p>
         </p:txBody>
@@ -6010,7 +4914,7 @@
         <p:spPr>
           <a:xfrm>
             <a:off x="457200" y="3913631"/>
-            <a:ext cx="11247120" cy="1024128"/>
+            <a:ext cx="5486400" cy="1024128"/>
           </a:xfrm>
           <a:prstGeom prst="rect">
             <a:avLst/>
@@ -6053,7 +4957,7 @@
         <p:spPr>
           <a:xfrm>
             <a:off x="594360" y="4023359"/>
-            <a:ext cx="11064240" cy="886968"/>
+            <a:ext cx="5303520" cy="886968"/>
           </a:xfrm>
           <a:prstGeom prst="rect">
             <a:avLst/>
@@ -6073,7 +4977,7 @@
                   <a:srgbClr val="9E9E9E"/>
                 </a:solidFill>
               </a:rPr>
-              <a:t>직접 서버 구축</a:t>
+              <a:t>6 ~ 8개 레이어</a:t>
             </a:r>
           </a:p>
         </p:txBody>
@@ -6087,7 +4991,7 @@
         <p:spPr>
           <a:xfrm>
             <a:off x="457200" y="5175504"/>
-            <a:ext cx="11247120" cy="1024128"/>
+            <a:ext cx="5486400" cy="1024128"/>
           </a:xfrm>
           <a:prstGeom prst="rect">
             <a:avLst/>
@@ -6130,7 +5034,7 @@
         <p:spPr>
           <a:xfrm>
             <a:off x="594360" y="5285232"/>
-            <a:ext cx="11064240" cy="886968"/>
+            <a:ext cx="5303520" cy="886968"/>
           </a:xfrm>
           <a:prstGeom prst="rect">
             <a:avLst/>
@@ -6150,7 +5054,1226 @@
                   <a:srgbClr val="FFFFFF"/>
                 </a:solidFill>
               </a:rPr>
-              <a:t>✓  Firebase (Auth + Firestore)</a:t>
+              <a:t>✓  4레이어 구조</a:t>
+            </a:r>
+          </a:p>
+        </p:txBody>
+      </p:sp>
+      <p:sp>
+        <p:nvSpPr>
+          <p:cNvPr id="15" name="TextBox 14"/>
+          <p:cNvSpPr txBox="1"/>
+          <p:nvPr/>
+        </p:nvSpPr>
+        <p:spPr>
+          <a:xfrm>
+            <a:off x="6400800" y="987552"/>
+            <a:ext cx="5394960" cy="347472"/>
+          </a:xfrm>
+          <a:prstGeom prst="rect">
+            <a:avLst/>
+          </a:prstGeom>
+          <a:noFill/>
+        </p:spPr>
+        <p:txBody>
+          <a:bodyPr wrap="square">
+            <a:spAutoFit/>
+          </a:bodyPr>
+          <a:lstStyle/>
+          <a:p>
+            <a:pPr algn="l"/>
+            <a:r>
+              <a:rPr sz="1200" b="0">
+                <a:solidFill>
+                  <a:srgbClr val="9E9E9E"/>
+                </a:solidFill>
+              </a:rPr>
+              <a:t>선택된 4레이어 구조</a:t>
+            </a:r>
+          </a:p>
+        </p:txBody>
+      </p:sp>
+      <p:sp>
+        <p:nvSpPr>
+          <p:cNvPr id="16" name="Rectangle 15"/>
+          <p:cNvSpPr/>
+          <p:nvPr/>
+        </p:nvSpPr>
+        <p:spPr>
+          <a:xfrm>
+            <a:off x="6400800" y="1389888"/>
+            <a:ext cx="1371600" cy="822960"/>
+          </a:xfrm>
+          <a:prstGeom prst="rect">
+            <a:avLst/>
+          </a:prstGeom>
+          <a:solidFill>
+            <a:srgbClr val="F5F5F5"/>
+          </a:solidFill>
+          <a:ln w="10160">
+            <a:solidFill>
+              <a:srgbClr val="E0E0E0"/>
+            </a:solidFill>
+          </a:ln>
+        </p:spPr>
+        <p:style>
+          <a:lnRef idx="1">
+            <a:schemeClr val="accent1"/>
+          </a:lnRef>
+          <a:fillRef idx="3">
+            <a:schemeClr val="accent1"/>
+          </a:fillRef>
+          <a:effectRef idx="2">
+            <a:schemeClr val="accent1"/>
+          </a:effectRef>
+          <a:fontRef idx="minor">
+            <a:schemeClr val="lt1"/>
+          </a:fontRef>
+        </p:style>
+        <p:txBody>
+          <a:bodyPr rtlCol="0" anchor="ctr"/>
+          <a:lstStyle/>
+          <a:p>
+            <a:pPr algn="ctr"/>
+          </a:p>
+        </p:txBody>
+      </p:sp>
+      <p:sp>
+        <p:nvSpPr>
+          <p:cNvPr id="17" name="TextBox 16"/>
+          <p:cNvSpPr txBox="1"/>
+          <p:nvPr/>
+        </p:nvSpPr>
+        <p:spPr>
+          <a:xfrm>
+            <a:off x="6510528" y="1591056"/>
+            <a:ext cx="1188720" cy="438912"/>
+          </a:xfrm>
+          <a:prstGeom prst="rect">
+            <a:avLst/>
+          </a:prstGeom>
+          <a:noFill/>
+        </p:spPr>
+        <p:txBody>
+          <a:bodyPr wrap="square">
+            <a:spAutoFit/>
+          </a:bodyPr>
+          <a:lstStyle/>
+          <a:p>
+            <a:pPr algn="l"/>
+            <a:r>
+              <a:rPr sz="1200" b="1">
+                <a:solidFill>
+                  <a:srgbClr val="3F51B5"/>
+                </a:solidFill>
+              </a:rPr>
+              <a:t>레이어</a:t>
+            </a:r>
+          </a:p>
+        </p:txBody>
+      </p:sp>
+      <p:sp>
+        <p:nvSpPr>
+          <p:cNvPr id="18" name="Rectangle 17"/>
+          <p:cNvSpPr/>
+          <p:nvPr/>
+        </p:nvSpPr>
+        <p:spPr>
+          <a:xfrm>
+            <a:off x="7818120" y="1389888"/>
+            <a:ext cx="2560320" cy="822960"/>
+          </a:xfrm>
+          <a:prstGeom prst="rect">
+            <a:avLst/>
+          </a:prstGeom>
+          <a:solidFill>
+            <a:srgbClr val="F5F5F5"/>
+          </a:solidFill>
+          <a:ln w="10160">
+            <a:solidFill>
+              <a:srgbClr val="E0E0E0"/>
+            </a:solidFill>
+          </a:ln>
+        </p:spPr>
+        <p:style>
+          <a:lnRef idx="1">
+            <a:schemeClr val="accent1"/>
+          </a:lnRef>
+          <a:fillRef idx="3">
+            <a:schemeClr val="accent1"/>
+          </a:fillRef>
+          <a:effectRef idx="2">
+            <a:schemeClr val="accent1"/>
+          </a:effectRef>
+          <a:fontRef idx="minor">
+            <a:schemeClr val="lt1"/>
+          </a:fontRef>
+        </p:style>
+        <p:txBody>
+          <a:bodyPr rtlCol="0" anchor="ctr"/>
+          <a:lstStyle/>
+          <a:p>
+            <a:pPr algn="ctr"/>
+          </a:p>
+        </p:txBody>
+      </p:sp>
+      <p:sp>
+        <p:nvSpPr>
+          <p:cNvPr id="19" name="TextBox 18"/>
+          <p:cNvSpPr txBox="1"/>
+          <p:nvPr/>
+        </p:nvSpPr>
+        <p:spPr>
+          <a:xfrm>
+            <a:off x="7927848" y="1591056"/>
+            <a:ext cx="2377439" cy="438912"/>
+          </a:xfrm>
+          <a:prstGeom prst="rect">
+            <a:avLst/>
+          </a:prstGeom>
+          <a:noFill/>
+        </p:spPr>
+        <p:txBody>
+          <a:bodyPr wrap="square">
+            <a:spAutoFit/>
+          </a:bodyPr>
+          <a:lstStyle/>
+          <a:p>
+            <a:pPr algn="l"/>
+            <a:r>
+              <a:rPr sz="1200" b="1">
+                <a:solidFill>
+                  <a:srgbClr val="3F51B5"/>
+                </a:solidFill>
+              </a:rPr>
+              <a:t>역할</a:t>
+            </a:r>
+          </a:p>
+        </p:txBody>
+      </p:sp>
+      <p:sp>
+        <p:nvSpPr>
+          <p:cNvPr id="20" name="Rectangle 19"/>
+          <p:cNvSpPr/>
+          <p:nvPr/>
+        </p:nvSpPr>
+        <p:spPr>
+          <a:xfrm>
+            <a:off x="10424160" y="1389888"/>
+            <a:ext cx="1737360" cy="822960"/>
+          </a:xfrm>
+          <a:prstGeom prst="rect">
+            <a:avLst/>
+          </a:prstGeom>
+          <a:solidFill>
+            <a:srgbClr val="F5F5F5"/>
+          </a:solidFill>
+          <a:ln w="10160">
+            <a:solidFill>
+              <a:srgbClr val="E0E0E0"/>
+            </a:solidFill>
+          </a:ln>
+        </p:spPr>
+        <p:style>
+          <a:lnRef idx="1">
+            <a:schemeClr val="accent1"/>
+          </a:lnRef>
+          <a:fillRef idx="3">
+            <a:schemeClr val="accent1"/>
+          </a:fillRef>
+          <a:effectRef idx="2">
+            <a:schemeClr val="accent1"/>
+          </a:effectRef>
+          <a:fontRef idx="minor">
+            <a:schemeClr val="lt1"/>
+          </a:fontRef>
+        </p:style>
+        <p:txBody>
+          <a:bodyPr rtlCol="0" anchor="ctr"/>
+          <a:lstStyle/>
+          <a:p>
+            <a:pPr algn="ctr"/>
+          </a:p>
+        </p:txBody>
+      </p:sp>
+      <p:sp>
+        <p:nvSpPr>
+          <p:cNvPr id="21" name="TextBox 20"/>
+          <p:cNvSpPr txBox="1"/>
+          <p:nvPr/>
+        </p:nvSpPr>
+        <p:spPr>
+          <a:xfrm>
+            <a:off x="10533888" y="1591056"/>
+            <a:ext cx="1554480" cy="438912"/>
+          </a:xfrm>
+          <a:prstGeom prst="rect">
+            <a:avLst/>
+          </a:prstGeom>
+          <a:noFill/>
+        </p:spPr>
+        <p:txBody>
+          <a:bodyPr wrap="square">
+            <a:spAutoFit/>
+          </a:bodyPr>
+          <a:lstStyle/>
+          <a:p>
+            <a:pPr algn="l"/>
+            <a:r>
+              <a:rPr sz="1200" b="1">
+                <a:solidFill>
+                  <a:srgbClr val="3F51B5"/>
+                </a:solidFill>
+              </a:rPr>
+              <a:t>위치</a:t>
+            </a:r>
+          </a:p>
+        </p:txBody>
+      </p:sp>
+      <p:sp>
+        <p:nvSpPr>
+          <p:cNvPr id="22" name="Rectangle 21"/>
+          <p:cNvSpPr/>
+          <p:nvPr/>
+        </p:nvSpPr>
+        <p:spPr>
+          <a:xfrm>
+            <a:off x="6400800" y="2395728"/>
+            <a:ext cx="1371600" cy="822960"/>
+          </a:xfrm>
+          <a:prstGeom prst="rect">
+            <a:avLst/>
+          </a:prstGeom>
+          <a:solidFill>
+            <a:srgbClr val="FFFFFF"/>
+          </a:solidFill>
+          <a:ln w="10160">
+            <a:solidFill>
+              <a:srgbClr val="E0E0E0"/>
+            </a:solidFill>
+          </a:ln>
+        </p:spPr>
+        <p:style>
+          <a:lnRef idx="1">
+            <a:schemeClr val="accent1"/>
+          </a:lnRef>
+          <a:fillRef idx="3">
+            <a:schemeClr val="accent1"/>
+          </a:fillRef>
+          <a:effectRef idx="2">
+            <a:schemeClr val="accent1"/>
+          </a:effectRef>
+          <a:fontRef idx="minor">
+            <a:schemeClr val="lt1"/>
+          </a:fontRef>
+        </p:style>
+        <p:txBody>
+          <a:bodyPr rtlCol="0" anchor="ctr"/>
+          <a:lstStyle/>
+          <a:p>
+            <a:pPr algn="ctr"/>
+          </a:p>
+        </p:txBody>
+      </p:sp>
+      <p:sp>
+        <p:nvSpPr>
+          <p:cNvPr id="23" name="TextBox 22"/>
+          <p:cNvSpPr txBox="1"/>
+          <p:nvPr/>
+        </p:nvSpPr>
+        <p:spPr>
+          <a:xfrm>
+            <a:off x="6510528" y="2596896"/>
+            <a:ext cx="1188720" cy="438912"/>
+          </a:xfrm>
+          <a:prstGeom prst="rect">
+            <a:avLst/>
+          </a:prstGeom>
+          <a:noFill/>
+        </p:spPr>
+        <p:txBody>
+          <a:bodyPr wrap="square">
+            <a:spAutoFit/>
+          </a:bodyPr>
+          <a:lstStyle/>
+          <a:p>
+            <a:pPr algn="l"/>
+            <a:r>
+              <a:rPr sz="1200" b="0">
+                <a:solidFill>
+                  <a:srgbClr val="212121"/>
+                </a:solidFill>
+              </a:rPr>
+              <a:t>화면</a:t>
+            </a:r>
+          </a:p>
+        </p:txBody>
+      </p:sp>
+      <p:sp>
+        <p:nvSpPr>
+          <p:cNvPr id="24" name="Rectangle 23"/>
+          <p:cNvSpPr/>
+          <p:nvPr/>
+        </p:nvSpPr>
+        <p:spPr>
+          <a:xfrm>
+            <a:off x="7818120" y="2395728"/>
+            <a:ext cx="2560320" cy="822960"/>
+          </a:xfrm>
+          <a:prstGeom prst="rect">
+            <a:avLst/>
+          </a:prstGeom>
+          <a:solidFill>
+            <a:srgbClr val="FFFFFF"/>
+          </a:solidFill>
+          <a:ln w="10160">
+            <a:solidFill>
+              <a:srgbClr val="E0E0E0"/>
+            </a:solidFill>
+          </a:ln>
+        </p:spPr>
+        <p:style>
+          <a:lnRef idx="1">
+            <a:schemeClr val="accent1"/>
+          </a:lnRef>
+          <a:fillRef idx="3">
+            <a:schemeClr val="accent1"/>
+          </a:fillRef>
+          <a:effectRef idx="2">
+            <a:schemeClr val="accent1"/>
+          </a:effectRef>
+          <a:fontRef idx="minor">
+            <a:schemeClr val="lt1"/>
+          </a:fontRef>
+        </p:style>
+        <p:txBody>
+          <a:bodyPr rtlCol="0" anchor="ctr"/>
+          <a:lstStyle/>
+          <a:p>
+            <a:pPr algn="ctr"/>
+          </a:p>
+        </p:txBody>
+      </p:sp>
+      <p:sp>
+        <p:nvSpPr>
+          <p:cNvPr id="25" name="TextBox 24"/>
+          <p:cNvSpPr txBox="1"/>
+          <p:nvPr/>
+        </p:nvSpPr>
+        <p:spPr>
+          <a:xfrm>
+            <a:off x="7927848" y="2596896"/>
+            <a:ext cx="2377439" cy="438912"/>
+          </a:xfrm>
+          <a:prstGeom prst="rect">
+            <a:avLst/>
+          </a:prstGeom>
+          <a:noFill/>
+        </p:spPr>
+        <p:txBody>
+          <a:bodyPr wrap="square">
+            <a:spAutoFit/>
+          </a:bodyPr>
+          <a:lstStyle/>
+          <a:p>
+            <a:pPr algn="l"/>
+            <a:r>
+              <a:rPr sz="1200" b="0">
+                <a:solidFill>
+                  <a:srgbClr val="212121"/>
+                </a:solidFill>
+              </a:rPr>
+              <a:t>버튼·목록·입력창</a:t>
+            </a:r>
+          </a:p>
+        </p:txBody>
+      </p:sp>
+      <p:sp>
+        <p:nvSpPr>
+          <p:cNvPr id="26" name="Rectangle 25"/>
+          <p:cNvSpPr/>
+          <p:nvPr/>
+        </p:nvSpPr>
+        <p:spPr>
+          <a:xfrm>
+            <a:off x="10424160" y="2395728"/>
+            <a:ext cx="1737360" cy="822960"/>
+          </a:xfrm>
+          <a:prstGeom prst="rect">
+            <a:avLst/>
+          </a:prstGeom>
+          <a:solidFill>
+            <a:srgbClr val="FFFFFF"/>
+          </a:solidFill>
+          <a:ln w="10160">
+            <a:solidFill>
+              <a:srgbClr val="E0E0E0"/>
+            </a:solidFill>
+          </a:ln>
+        </p:spPr>
+        <p:style>
+          <a:lnRef idx="1">
+            <a:schemeClr val="accent1"/>
+          </a:lnRef>
+          <a:fillRef idx="3">
+            <a:schemeClr val="accent1"/>
+          </a:fillRef>
+          <a:effectRef idx="2">
+            <a:schemeClr val="accent1"/>
+          </a:effectRef>
+          <a:fontRef idx="minor">
+            <a:schemeClr val="lt1"/>
+          </a:fontRef>
+        </p:style>
+        <p:txBody>
+          <a:bodyPr rtlCol="0" anchor="ctr"/>
+          <a:lstStyle/>
+          <a:p>
+            <a:pPr algn="ctr"/>
+          </a:p>
+        </p:txBody>
+      </p:sp>
+      <p:sp>
+        <p:nvSpPr>
+          <p:cNvPr id="27" name="TextBox 26"/>
+          <p:cNvSpPr txBox="1"/>
+          <p:nvPr/>
+        </p:nvSpPr>
+        <p:spPr>
+          <a:xfrm>
+            <a:off x="10533888" y="2596896"/>
+            <a:ext cx="1554480" cy="438912"/>
+          </a:xfrm>
+          <a:prstGeom prst="rect">
+            <a:avLst/>
+          </a:prstGeom>
+          <a:noFill/>
+        </p:spPr>
+        <p:txBody>
+          <a:bodyPr wrap="square">
+            <a:spAutoFit/>
+          </a:bodyPr>
+          <a:lstStyle/>
+          <a:p>
+            <a:pPr algn="l"/>
+            <a:r>
+              <a:rPr sz="1200" b="0">
+                <a:solidFill>
+                  <a:srgbClr val="212121"/>
+                </a:solidFill>
+              </a:rPr>
+              <a:t>screens/</a:t>
+            </a:r>
+          </a:p>
+        </p:txBody>
+      </p:sp>
+      <p:sp>
+        <p:nvSpPr>
+          <p:cNvPr id="28" name="Rectangle 27"/>
+          <p:cNvSpPr/>
+          <p:nvPr/>
+        </p:nvSpPr>
+        <p:spPr>
+          <a:xfrm>
+            <a:off x="6400800" y="3401568"/>
+            <a:ext cx="1371600" cy="822960"/>
+          </a:xfrm>
+          <a:prstGeom prst="rect">
+            <a:avLst/>
+          </a:prstGeom>
+          <a:solidFill>
+            <a:srgbClr val="FFFFFF"/>
+          </a:solidFill>
+          <a:ln w="10160">
+            <a:solidFill>
+              <a:srgbClr val="E0E0E0"/>
+            </a:solidFill>
+          </a:ln>
+        </p:spPr>
+        <p:style>
+          <a:lnRef idx="1">
+            <a:schemeClr val="accent1"/>
+          </a:lnRef>
+          <a:fillRef idx="3">
+            <a:schemeClr val="accent1"/>
+          </a:fillRef>
+          <a:effectRef idx="2">
+            <a:schemeClr val="accent1"/>
+          </a:effectRef>
+          <a:fontRef idx="minor">
+            <a:schemeClr val="lt1"/>
+          </a:fontRef>
+        </p:style>
+        <p:txBody>
+          <a:bodyPr rtlCol="0" anchor="ctr"/>
+          <a:lstStyle/>
+          <a:p>
+            <a:pPr algn="ctr"/>
+          </a:p>
+        </p:txBody>
+      </p:sp>
+      <p:sp>
+        <p:nvSpPr>
+          <p:cNvPr id="29" name="TextBox 28"/>
+          <p:cNvSpPr txBox="1"/>
+          <p:nvPr/>
+        </p:nvSpPr>
+        <p:spPr>
+          <a:xfrm>
+            <a:off x="6510528" y="3602736"/>
+            <a:ext cx="1188720" cy="438912"/>
+          </a:xfrm>
+          <a:prstGeom prst="rect">
+            <a:avLst/>
+          </a:prstGeom>
+          <a:noFill/>
+        </p:spPr>
+        <p:txBody>
+          <a:bodyPr wrap="square">
+            <a:spAutoFit/>
+          </a:bodyPr>
+          <a:lstStyle/>
+          <a:p>
+            <a:pPr algn="l"/>
+            <a:r>
+              <a:rPr sz="1200" b="0">
+                <a:solidFill>
+                  <a:srgbClr val="212121"/>
+                </a:solidFill>
+              </a:rPr>
+              <a:t>흐름</a:t>
+            </a:r>
+          </a:p>
+        </p:txBody>
+      </p:sp>
+      <p:sp>
+        <p:nvSpPr>
+          <p:cNvPr id="30" name="Rectangle 29"/>
+          <p:cNvSpPr/>
+          <p:nvPr/>
+        </p:nvSpPr>
+        <p:spPr>
+          <a:xfrm>
+            <a:off x="7818120" y="3401568"/>
+            <a:ext cx="2560320" cy="822960"/>
+          </a:xfrm>
+          <a:prstGeom prst="rect">
+            <a:avLst/>
+          </a:prstGeom>
+          <a:solidFill>
+            <a:srgbClr val="FFFFFF"/>
+          </a:solidFill>
+          <a:ln w="10160">
+            <a:solidFill>
+              <a:srgbClr val="E0E0E0"/>
+            </a:solidFill>
+          </a:ln>
+        </p:spPr>
+        <p:style>
+          <a:lnRef idx="1">
+            <a:schemeClr val="accent1"/>
+          </a:lnRef>
+          <a:fillRef idx="3">
+            <a:schemeClr val="accent1"/>
+          </a:fillRef>
+          <a:effectRef idx="2">
+            <a:schemeClr val="accent1"/>
+          </a:effectRef>
+          <a:fontRef idx="minor">
+            <a:schemeClr val="lt1"/>
+          </a:fontRef>
+        </p:style>
+        <p:txBody>
+          <a:bodyPr rtlCol="0" anchor="ctr"/>
+          <a:lstStyle/>
+          <a:p>
+            <a:pPr algn="ctr"/>
+          </a:p>
+        </p:txBody>
+      </p:sp>
+      <p:sp>
+        <p:nvSpPr>
+          <p:cNvPr id="31" name="TextBox 30"/>
+          <p:cNvSpPr txBox="1"/>
+          <p:nvPr/>
+        </p:nvSpPr>
+        <p:spPr>
+          <a:xfrm>
+            <a:off x="7927848" y="3602736"/>
+            <a:ext cx="2377439" cy="438912"/>
+          </a:xfrm>
+          <a:prstGeom prst="rect">
+            <a:avLst/>
+          </a:prstGeom>
+          <a:noFill/>
+        </p:spPr>
+        <p:txBody>
+          <a:bodyPr wrap="square">
+            <a:spAutoFit/>
+          </a:bodyPr>
+          <a:lstStyle/>
+          <a:p>
+            <a:pPr algn="l"/>
+            <a:r>
+              <a:rPr sz="1200" b="0">
+                <a:solidFill>
+                  <a:srgbClr val="212121"/>
+                </a:solidFill>
+              </a:rPr>
+              <a:t>화면-데이터 연결 처리</a:t>
+            </a:r>
+          </a:p>
+        </p:txBody>
+      </p:sp>
+      <p:sp>
+        <p:nvSpPr>
+          <p:cNvPr id="32" name="Rectangle 31"/>
+          <p:cNvSpPr/>
+          <p:nvPr/>
+        </p:nvSpPr>
+        <p:spPr>
+          <a:xfrm>
+            <a:off x="10424160" y="3401568"/>
+            <a:ext cx="1737360" cy="822960"/>
+          </a:xfrm>
+          <a:prstGeom prst="rect">
+            <a:avLst/>
+          </a:prstGeom>
+          <a:solidFill>
+            <a:srgbClr val="FFFFFF"/>
+          </a:solidFill>
+          <a:ln w="10160">
+            <a:solidFill>
+              <a:srgbClr val="E0E0E0"/>
+            </a:solidFill>
+          </a:ln>
+        </p:spPr>
+        <p:style>
+          <a:lnRef idx="1">
+            <a:schemeClr val="accent1"/>
+          </a:lnRef>
+          <a:fillRef idx="3">
+            <a:schemeClr val="accent1"/>
+          </a:fillRef>
+          <a:effectRef idx="2">
+            <a:schemeClr val="accent1"/>
+          </a:effectRef>
+          <a:fontRef idx="minor">
+            <a:schemeClr val="lt1"/>
+          </a:fontRef>
+        </p:style>
+        <p:txBody>
+          <a:bodyPr rtlCol="0" anchor="ctr"/>
+          <a:lstStyle/>
+          <a:p>
+            <a:pPr algn="ctr"/>
+          </a:p>
+        </p:txBody>
+      </p:sp>
+      <p:sp>
+        <p:nvSpPr>
+          <p:cNvPr id="33" name="TextBox 32"/>
+          <p:cNvSpPr txBox="1"/>
+          <p:nvPr/>
+        </p:nvSpPr>
+        <p:spPr>
+          <a:xfrm>
+            <a:off x="10533888" y="3602736"/>
+            <a:ext cx="1554480" cy="438912"/>
+          </a:xfrm>
+          <a:prstGeom prst="rect">
+            <a:avLst/>
+          </a:prstGeom>
+          <a:noFill/>
+        </p:spPr>
+        <p:txBody>
+          <a:bodyPr wrap="square">
+            <a:spAutoFit/>
+          </a:bodyPr>
+          <a:lstStyle/>
+          <a:p>
+            <a:pPr algn="l"/>
+            <a:r>
+              <a:rPr sz="1200" b="0">
+                <a:solidFill>
+                  <a:srgbClr val="212121"/>
+                </a:solidFill>
+              </a:rPr>
+              <a:t/>
+            </a:r>
+          </a:p>
+        </p:txBody>
+      </p:sp>
+      <p:sp>
+        <p:nvSpPr>
+          <p:cNvPr id="34" name="Rectangle 33"/>
+          <p:cNvSpPr/>
+          <p:nvPr/>
+        </p:nvSpPr>
+        <p:spPr>
+          <a:xfrm>
+            <a:off x="6400800" y="4407408"/>
+            <a:ext cx="1371600" cy="822960"/>
+          </a:xfrm>
+          <a:prstGeom prst="rect">
+            <a:avLst/>
+          </a:prstGeom>
+          <a:solidFill>
+            <a:srgbClr val="FFFFFF"/>
+          </a:solidFill>
+          <a:ln w="10160">
+            <a:solidFill>
+              <a:srgbClr val="E0E0E0"/>
+            </a:solidFill>
+          </a:ln>
+        </p:spPr>
+        <p:style>
+          <a:lnRef idx="1">
+            <a:schemeClr val="accent1"/>
+          </a:lnRef>
+          <a:fillRef idx="3">
+            <a:schemeClr val="accent1"/>
+          </a:fillRef>
+          <a:effectRef idx="2">
+            <a:schemeClr val="accent1"/>
+          </a:effectRef>
+          <a:fontRef idx="minor">
+            <a:schemeClr val="lt1"/>
+          </a:fontRef>
+        </p:style>
+        <p:txBody>
+          <a:bodyPr rtlCol="0" anchor="ctr"/>
+          <a:lstStyle/>
+          <a:p>
+            <a:pPr algn="ctr"/>
+          </a:p>
+        </p:txBody>
+      </p:sp>
+      <p:sp>
+        <p:nvSpPr>
+          <p:cNvPr id="35" name="TextBox 34"/>
+          <p:cNvSpPr txBox="1"/>
+          <p:nvPr/>
+        </p:nvSpPr>
+        <p:spPr>
+          <a:xfrm>
+            <a:off x="6510528" y="4608576"/>
+            <a:ext cx="1188720" cy="438912"/>
+          </a:xfrm>
+          <a:prstGeom prst="rect">
+            <a:avLst/>
+          </a:prstGeom>
+          <a:noFill/>
+        </p:spPr>
+        <p:txBody>
+          <a:bodyPr wrap="square">
+            <a:spAutoFit/>
+          </a:bodyPr>
+          <a:lstStyle/>
+          <a:p>
+            <a:pPr algn="l"/>
+            <a:r>
+              <a:rPr sz="1200" b="0">
+                <a:solidFill>
+                  <a:srgbClr val="212121"/>
+                </a:solidFill>
+              </a:rPr>
+              <a:t>규칙</a:t>
+            </a:r>
+          </a:p>
+        </p:txBody>
+      </p:sp>
+      <p:sp>
+        <p:nvSpPr>
+          <p:cNvPr id="36" name="Rectangle 35"/>
+          <p:cNvSpPr/>
+          <p:nvPr/>
+        </p:nvSpPr>
+        <p:spPr>
+          <a:xfrm>
+            <a:off x="7818120" y="4407408"/>
+            <a:ext cx="2560320" cy="822960"/>
+          </a:xfrm>
+          <a:prstGeom prst="rect">
+            <a:avLst/>
+          </a:prstGeom>
+          <a:solidFill>
+            <a:srgbClr val="FFFFFF"/>
+          </a:solidFill>
+          <a:ln w="10160">
+            <a:solidFill>
+              <a:srgbClr val="E0E0E0"/>
+            </a:solidFill>
+          </a:ln>
+        </p:spPr>
+        <p:style>
+          <a:lnRef idx="1">
+            <a:schemeClr val="accent1"/>
+          </a:lnRef>
+          <a:fillRef idx="3">
+            <a:schemeClr val="accent1"/>
+          </a:fillRef>
+          <a:effectRef idx="2">
+            <a:schemeClr val="accent1"/>
+          </a:effectRef>
+          <a:fontRef idx="minor">
+            <a:schemeClr val="lt1"/>
+          </a:fontRef>
+        </p:style>
+        <p:txBody>
+          <a:bodyPr rtlCol="0" anchor="ctr"/>
+          <a:lstStyle/>
+          <a:p>
+            <a:pPr algn="ctr"/>
+          </a:p>
+        </p:txBody>
+      </p:sp>
+      <p:sp>
+        <p:nvSpPr>
+          <p:cNvPr id="37" name="TextBox 36"/>
+          <p:cNvSpPr txBox="1"/>
+          <p:nvPr/>
+        </p:nvSpPr>
+        <p:spPr>
+          <a:xfrm>
+            <a:off x="7927848" y="4608576"/>
+            <a:ext cx="2377439" cy="438912"/>
+          </a:xfrm>
+          <a:prstGeom prst="rect">
+            <a:avLst/>
+          </a:prstGeom>
+          <a:noFill/>
+        </p:spPr>
+        <p:txBody>
+          <a:bodyPr wrap="square">
+            <a:spAutoFit/>
+          </a:bodyPr>
+          <a:lstStyle/>
+          <a:p>
+            <a:pPr algn="l"/>
+            <a:r>
+              <a:rPr sz="1200" b="0">
+                <a:solidFill>
+                  <a:srgbClr val="212121"/>
+                </a:solidFill>
+              </a:rPr>
+              <a:t>잔액·수익률 계산</a:t>
+            </a:r>
+          </a:p>
+        </p:txBody>
+      </p:sp>
+      <p:sp>
+        <p:nvSpPr>
+          <p:cNvPr id="38" name="Rectangle 37"/>
+          <p:cNvSpPr/>
+          <p:nvPr/>
+        </p:nvSpPr>
+        <p:spPr>
+          <a:xfrm>
+            <a:off x="10424160" y="4407408"/>
+            <a:ext cx="1737360" cy="822960"/>
+          </a:xfrm>
+          <a:prstGeom prst="rect">
+            <a:avLst/>
+          </a:prstGeom>
+          <a:solidFill>
+            <a:srgbClr val="FFFFFF"/>
+          </a:solidFill>
+          <a:ln w="10160">
+            <a:solidFill>
+              <a:srgbClr val="E0E0E0"/>
+            </a:solidFill>
+          </a:ln>
+        </p:spPr>
+        <p:style>
+          <a:lnRef idx="1">
+            <a:schemeClr val="accent1"/>
+          </a:lnRef>
+          <a:fillRef idx="3">
+            <a:schemeClr val="accent1"/>
+          </a:fillRef>
+          <a:effectRef idx="2">
+            <a:schemeClr val="accent1"/>
+          </a:effectRef>
+          <a:fontRef idx="minor">
+            <a:schemeClr val="lt1"/>
+          </a:fontRef>
+        </p:style>
+        <p:txBody>
+          <a:bodyPr rtlCol="0" anchor="ctr"/>
+          <a:lstStyle/>
+          <a:p>
+            <a:pPr algn="ctr"/>
+          </a:p>
+        </p:txBody>
+      </p:sp>
+      <p:sp>
+        <p:nvSpPr>
+          <p:cNvPr id="39" name="TextBox 38"/>
+          <p:cNvSpPr txBox="1"/>
+          <p:nvPr/>
+        </p:nvSpPr>
+        <p:spPr>
+          <a:xfrm>
+            <a:off x="10533888" y="4608576"/>
+            <a:ext cx="1554480" cy="438912"/>
+          </a:xfrm>
+          <a:prstGeom prst="rect">
+            <a:avLst/>
+          </a:prstGeom>
+          <a:noFill/>
+        </p:spPr>
+        <p:txBody>
+          <a:bodyPr wrap="square">
+            <a:spAutoFit/>
+          </a:bodyPr>
+          <a:lstStyle/>
+          <a:p>
+            <a:pPr algn="l"/>
+            <a:r>
+              <a:rPr sz="1200" b="0">
+                <a:solidFill>
+                  <a:srgbClr val="212121"/>
+                </a:solidFill>
+              </a:rPr>
+              <a:t>models/</a:t>
+            </a:r>
+          </a:p>
+        </p:txBody>
+      </p:sp>
+      <p:sp>
+        <p:nvSpPr>
+          <p:cNvPr id="40" name="Rectangle 39"/>
+          <p:cNvSpPr/>
+          <p:nvPr/>
+        </p:nvSpPr>
+        <p:spPr>
+          <a:xfrm>
+            <a:off x="6400800" y="5413248"/>
+            <a:ext cx="1371600" cy="822960"/>
+          </a:xfrm>
+          <a:prstGeom prst="rect">
+            <a:avLst/>
+          </a:prstGeom>
+          <a:solidFill>
+            <a:srgbClr val="FFFFFF"/>
+          </a:solidFill>
+          <a:ln w="10160">
+            <a:solidFill>
+              <a:srgbClr val="E0E0E0"/>
+            </a:solidFill>
+          </a:ln>
+        </p:spPr>
+        <p:style>
+          <a:lnRef idx="1">
+            <a:schemeClr val="accent1"/>
+          </a:lnRef>
+          <a:fillRef idx="3">
+            <a:schemeClr val="accent1"/>
+          </a:fillRef>
+          <a:effectRef idx="2">
+            <a:schemeClr val="accent1"/>
+          </a:effectRef>
+          <a:fontRef idx="minor">
+            <a:schemeClr val="lt1"/>
+          </a:fontRef>
+        </p:style>
+        <p:txBody>
+          <a:bodyPr rtlCol="0" anchor="ctr"/>
+          <a:lstStyle/>
+          <a:p>
+            <a:pPr algn="ctr"/>
+          </a:p>
+        </p:txBody>
+      </p:sp>
+      <p:sp>
+        <p:nvSpPr>
+          <p:cNvPr id="41" name="TextBox 40"/>
+          <p:cNvSpPr txBox="1"/>
+          <p:nvPr/>
+        </p:nvSpPr>
+        <p:spPr>
+          <a:xfrm>
+            <a:off x="6510528" y="5614416"/>
+            <a:ext cx="1188720" cy="438912"/>
+          </a:xfrm>
+          <a:prstGeom prst="rect">
+            <a:avLst/>
+          </a:prstGeom>
+          <a:noFill/>
+        </p:spPr>
+        <p:txBody>
+          <a:bodyPr wrap="square">
+            <a:spAutoFit/>
+          </a:bodyPr>
+          <a:lstStyle/>
+          <a:p>
+            <a:pPr algn="l"/>
+            <a:r>
+              <a:rPr sz="1200" b="0">
+                <a:solidFill>
+                  <a:srgbClr val="212121"/>
+                </a:solidFill>
+              </a:rPr>
+              <a:t>저장</a:t>
+            </a:r>
+          </a:p>
+        </p:txBody>
+      </p:sp>
+      <p:sp>
+        <p:nvSpPr>
+          <p:cNvPr id="42" name="Rectangle 41"/>
+          <p:cNvSpPr/>
+          <p:nvPr/>
+        </p:nvSpPr>
+        <p:spPr>
+          <a:xfrm>
+            <a:off x="7818120" y="5413248"/>
+            <a:ext cx="2560320" cy="822960"/>
+          </a:xfrm>
+          <a:prstGeom prst="rect">
+            <a:avLst/>
+          </a:prstGeom>
+          <a:solidFill>
+            <a:srgbClr val="FFFFFF"/>
+          </a:solidFill>
+          <a:ln w="10160">
+            <a:solidFill>
+              <a:srgbClr val="E0E0E0"/>
+            </a:solidFill>
+          </a:ln>
+        </p:spPr>
+        <p:style>
+          <a:lnRef idx="1">
+            <a:schemeClr val="accent1"/>
+          </a:lnRef>
+          <a:fillRef idx="3">
+            <a:schemeClr val="accent1"/>
+          </a:fillRef>
+          <a:effectRef idx="2">
+            <a:schemeClr val="accent1"/>
+          </a:effectRef>
+          <a:fontRef idx="minor">
+            <a:schemeClr val="lt1"/>
+          </a:fontRef>
+        </p:style>
+        <p:txBody>
+          <a:bodyPr rtlCol="0" anchor="ctr"/>
+          <a:lstStyle/>
+          <a:p>
+            <a:pPr algn="ctr"/>
+          </a:p>
+        </p:txBody>
+      </p:sp>
+      <p:sp>
+        <p:nvSpPr>
+          <p:cNvPr id="43" name="TextBox 42"/>
+          <p:cNvSpPr txBox="1"/>
+          <p:nvPr/>
+        </p:nvSpPr>
+        <p:spPr>
+          <a:xfrm>
+            <a:off x="7927848" y="5614416"/>
+            <a:ext cx="2377439" cy="438912"/>
+          </a:xfrm>
+          <a:prstGeom prst="rect">
+            <a:avLst/>
+          </a:prstGeom>
+          <a:noFill/>
+        </p:spPr>
+        <p:txBody>
+          <a:bodyPr wrap="square">
+            <a:spAutoFit/>
+          </a:bodyPr>
+          <a:lstStyle/>
+          <a:p>
+            <a:pPr algn="l"/>
+            <a:r>
+              <a:rPr sz="1200" b="0">
+                <a:solidFill>
+                  <a:srgbClr val="212121"/>
+                </a:solidFill>
+              </a:rPr>
+              <a:t>Firestore 입출력</a:t>
+            </a:r>
+          </a:p>
+        </p:txBody>
+      </p:sp>
+      <p:sp>
+        <p:nvSpPr>
+          <p:cNvPr id="44" name="Rectangle 43"/>
+          <p:cNvSpPr/>
+          <p:nvPr/>
+        </p:nvSpPr>
+        <p:spPr>
+          <a:xfrm>
+            <a:off x="10424160" y="5413248"/>
+            <a:ext cx="1737360" cy="822960"/>
+          </a:xfrm>
+          <a:prstGeom prst="rect">
+            <a:avLst/>
+          </a:prstGeom>
+          <a:solidFill>
+            <a:srgbClr val="FFFFFF"/>
+          </a:solidFill>
+          <a:ln w="10160">
+            <a:solidFill>
+              <a:srgbClr val="E0E0E0"/>
+            </a:solidFill>
+          </a:ln>
+        </p:spPr>
+        <p:style>
+          <a:lnRef idx="1">
+            <a:schemeClr val="accent1"/>
+          </a:lnRef>
+          <a:fillRef idx="3">
+            <a:schemeClr val="accent1"/>
+          </a:fillRef>
+          <a:effectRef idx="2">
+            <a:schemeClr val="accent1"/>
+          </a:effectRef>
+          <a:fontRef idx="minor">
+            <a:schemeClr val="lt1"/>
+          </a:fontRef>
+        </p:style>
+        <p:txBody>
+          <a:bodyPr rtlCol="0" anchor="ctr"/>
+          <a:lstStyle/>
+          <a:p>
+            <a:pPr algn="ctr"/>
+          </a:p>
+        </p:txBody>
+      </p:sp>
+      <p:sp>
+        <p:nvSpPr>
+          <p:cNvPr id="45" name="TextBox 44"/>
+          <p:cNvSpPr txBox="1"/>
+          <p:nvPr/>
+        </p:nvSpPr>
+        <p:spPr>
+          <a:xfrm>
+            <a:off x="10533888" y="5614416"/>
+            <a:ext cx="1554480" cy="438912"/>
+          </a:xfrm>
+          <a:prstGeom prst="rect">
+            <a:avLst/>
+          </a:prstGeom>
+          <a:noFill/>
+        </p:spPr>
+        <p:txBody>
+          <a:bodyPr wrap="square">
+            <a:spAutoFit/>
+          </a:bodyPr>
+          <a:lstStyle/>
+          <a:p>
+            <a:pPr algn="l"/>
+            <a:r>
+              <a:rPr sz="1200" b="0">
+                <a:solidFill>
+                  <a:srgbClr val="212121"/>
+                </a:solidFill>
+              </a:rPr>
+              <a:t>services/</a:t>
             </a:r>
           </a:p>
         </p:txBody>
@@ -6182,14 +6305,12 @@
         <p:spPr>
           <a:xfrm>
             <a:off x="0" y="0"/>
-            <a:ext cx="12188952" cy="6858000"/>
-          </a:xfrm>
-          <a:prstGeom prst="rect">
-            <a:avLst/>
-          </a:prstGeom>
-          <a:solidFill>
-            <a:srgbClr val="FFFFFF"/>
-          </a:solidFill>
+            <a:ext cx="12188952" cy="914400"/>
+          </a:xfrm>
+          <a:prstGeom prst="rect">
+            <a:avLst/>
+          </a:prstGeom>
+          <a:noFill/>
           <a:ln>
             <a:noFill/>
           </a:ln>
@@ -6218,13 +6339,47 @@
       </p:sp>
       <p:sp>
         <p:nvSpPr>
-          <p:cNvPr id="3" name="Rectangle 2"/>
+          <p:cNvPr id="3" name="TextBox 2"/>
+          <p:cNvSpPr txBox="1"/>
+          <p:nvPr/>
+        </p:nvSpPr>
+        <p:spPr>
+          <a:xfrm>
+            <a:off x="457200" y="73152"/>
+            <a:ext cx="10972800" cy="566928"/>
+          </a:xfrm>
+          <a:prstGeom prst="rect">
+            <a:avLst/>
+          </a:prstGeom>
+          <a:noFill/>
+        </p:spPr>
+        <p:txBody>
+          <a:bodyPr wrap="square">
+            <a:spAutoFit/>
+          </a:bodyPr>
+          <a:lstStyle/>
+          <a:p>
+            <a:pPr algn="l"/>
+            <a:r>
+              <a:rPr sz="2400" b="1">
+                <a:solidFill>
+                  <a:srgbClr val="3F51B5"/>
+                </a:solidFill>
+              </a:rPr>
+              <a:t>ADR-0003  —  백엔드 서비스 선택</a:t>
+            </a:r>
+          </a:p>
+        </p:txBody>
+      </p:sp>
+      <p:sp>
+        <p:nvSpPr>
+          <p:cNvPr id="4" name="Rectangle 3"/>
           <p:cNvSpPr/>
           <p:nvPr/>
         </p:nvSpPr>
         <p:spPr>
           <a:xfrm>
-            <a:off x="0" y="4663440"/>
+            <a:off x="0" y="868680"/>
             <a:ext cx="12188952" cy="45720"/>
           </a:xfrm>
           <a:prstGeom prst="rect">
@@ -6261,23 +6416,91 @@
       </p:sp>
       <p:sp>
         <p:nvSpPr>
-          <p:cNvPr id="4" name="Rectangle 3"/>
+          <p:cNvPr id="5" name="TextBox 4"/>
+          <p:cNvSpPr txBox="1"/>
+          <p:nvPr/>
+        </p:nvSpPr>
+        <p:spPr>
+          <a:xfrm>
+            <a:off x="11247120" y="6492240"/>
+            <a:ext cx="822960" cy="274320"/>
+          </a:xfrm>
+          <a:prstGeom prst="rect">
+            <a:avLst/>
+          </a:prstGeom>
+          <a:noFill/>
+        </p:spPr>
+        <p:txBody>
+          <a:bodyPr wrap="square">
+            <a:spAutoFit/>
+          </a:bodyPr>
+          <a:lstStyle/>
+          <a:p>
+            <a:pPr algn="ctr"/>
+            <a:r>
+              <a:rPr sz="1000" b="0">
+                <a:solidFill>
+                  <a:srgbClr val="9E9E9E"/>
+                </a:solidFill>
+              </a:rPr>
+              <a:t>12 / 13</a:t>
+            </a:r>
+          </a:p>
+        </p:txBody>
+      </p:sp>
+      <p:sp>
+        <p:nvSpPr>
+          <p:cNvPr id="6" name="TextBox 5"/>
+          <p:cNvSpPr txBox="1"/>
+          <p:nvPr/>
+        </p:nvSpPr>
+        <p:spPr>
+          <a:xfrm>
+            <a:off x="457200" y="987552"/>
+            <a:ext cx="10972800" cy="347472"/>
+          </a:xfrm>
+          <a:prstGeom prst="rect">
+            <a:avLst/>
+          </a:prstGeom>
+          <a:noFill/>
+        </p:spPr>
+        <p:txBody>
+          <a:bodyPr wrap="square">
+            <a:spAutoFit/>
+          </a:bodyPr>
+          <a:lstStyle/>
+          <a:p>
+            <a:pPr algn="l"/>
+            <a:r>
+              <a:rPr sz="1200" b="0">
+                <a:solidFill>
+                  <a:srgbClr val="9E9E9E"/>
+                </a:solidFill>
+              </a:rPr>
+              <a:t>선택지 비교</a:t>
+            </a:r>
+          </a:p>
+        </p:txBody>
+      </p:sp>
+      <p:sp>
+        <p:nvSpPr>
+          <p:cNvPr id="7" name="Rectangle 6"/>
           <p:cNvSpPr/>
           <p:nvPr/>
         </p:nvSpPr>
         <p:spPr>
           <a:xfrm>
-            <a:off x="0" y="4709160"/>
-            <a:ext cx="12188952" cy="2148840"/>
-          </a:xfrm>
-          <a:prstGeom prst="rect">
-            <a:avLst/>
-          </a:prstGeom>
-          <a:solidFill>
-            <a:srgbClr val="F5F5F5"/>
-          </a:solidFill>
-          <a:ln>
-            <a:noFill/>
+            <a:off x="457200" y="1389888"/>
+            <a:ext cx="11247120" cy="1024128"/>
+          </a:xfrm>
+          <a:prstGeom prst="rect">
+            <a:avLst/>
+          </a:prstGeom>
+          <a:noFill/>
+          <a:ln w="10160">
+            <a:solidFill>
+              <a:srgbClr val="E0E0E0"/>
+            </a:solidFill>
           </a:ln>
         </p:spPr>
         <p:style>
@@ -6304,102 +6527,265 @@
       </p:sp>
       <p:sp>
         <p:nvSpPr>
-          <p:cNvPr id="5" name="TextBox 4"/>
-          <p:cNvSpPr txBox="1"/>
-          <p:nvPr/>
-        </p:nvSpPr>
-        <p:spPr>
-          <a:xfrm>
-            <a:off x="914400" y="1463040"/>
-            <a:ext cx="10058400" cy="1371600"/>
-          </a:xfrm>
-          <a:prstGeom prst="rect">
-            <a:avLst/>
-          </a:prstGeom>
-          <a:noFill/>
-        </p:spPr>
-        <p:txBody>
-          <a:bodyPr wrap="square">
-            <a:spAutoFit/>
-          </a:bodyPr>
-          <a:lstStyle/>
-          <a:p>
-            <a:pPr algn="ctr"/>
-            <a:r>
-              <a:rPr sz="5200" b="1">
-                <a:solidFill>
-                  <a:srgbClr val="3F51B5"/>
-                </a:solidFill>
-              </a:rPr>
-              <a:t>감사합니다</a:t>
-            </a:r>
-          </a:p>
-        </p:txBody>
-      </p:sp>
-      <p:sp>
-        <p:nvSpPr>
-          <p:cNvPr id="6" name="TextBox 5"/>
-          <p:cNvSpPr txBox="1"/>
-          <p:nvPr/>
-        </p:nvSpPr>
-        <p:spPr>
-          <a:xfrm>
-            <a:off x="914400" y="5074920"/>
-            <a:ext cx="10058400" cy="457200"/>
-          </a:xfrm>
-          <a:prstGeom prst="rect">
-            <a:avLst/>
-          </a:prstGeom>
-          <a:noFill/>
-        </p:spPr>
-        <p:txBody>
-          <a:bodyPr wrap="square">
-            <a:spAutoFit/>
-          </a:bodyPr>
-          <a:lstStyle/>
-          <a:p>
-            <a:pPr algn="ctr"/>
-            <a:r>
-              <a:rPr sz="1300" b="0">
+          <p:cNvPr id="8" name="TextBox 7"/>
+          <p:cNvSpPr txBox="1"/>
+          <p:nvPr/>
+        </p:nvSpPr>
+        <p:spPr>
+          <a:xfrm>
+            <a:off x="594360" y="1499616"/>
+            <a:ext cx="11064240" cy="886968"/>
+          </a:xfrm>
+          <a:prstGeom prst="rect">
+            <a:avLst/>
+          </a:prstGeom>
+          <a:noFill/>
+        </p:spPr>
+        <p:txBody>
+          <a:bodyPr wrap="square">
+            <a:spAutoFit/>
+          </a:bodyPr>
+          <a:lstStyle/>
+          <a:p>
+            <a:pPr algn="l"/>
+            <a:r>
+              <a:rPr sz="1600" b="0">
                 <a:solidFill>
                   <a:srgbClr val="9E9E9E"/>
                 </a:solidFill>
               </a:rPr>
-              <a:t>Portfolio Tracker  ·  Jooseonghyeon  ·  2026.05</a:t>
-            </a:r>
-          </a:p>
-        </p:txBody>
-      </p:sp>
-      <p:sp>
-        <p:nvSpPr>
-          <p:cNvPr id="7" name="TextBox 6"/>
-          <p:cNvSpPr txBox="1"/>
-          <p:nvPr/>
-        </p:nvSpPr>
-        <p:spPr>
-          <a:xfrm>
-            <a:off x="11247120" y="6492240"/>
-            <a:ext cx="822960" cy="274320"/>
-          </a:xfrm>
-          <a:prstGeom prst="rect">
-            <a:avLst/>
-          </a:prstGeom>
-          <a:noFill/>
-        </p:spPr>
-        <p:txBody>
-          <a:bodyPr wrap="square">
-            <a:spAutoFit/>
-          </a:bodyPr>
-          <a:lstStyle/>
-          <a:p>
-            <a:pPr algn="ctr"/>
-            <a:r>
-              <a:rPr sz="1000" b="0">
+              <a:t>Supabase</a:t>
+            </a:r>
+          </a:p>
+        </p:txBody>
+      </p:sp>
+      <p:sp>
+        <p:nvSpPr>
+          <p:cNvPr id="9" name="Rectangle 8"/>
+          <p:cNvSpPr/>
+          <p:nvPr/>
+        </p:nvSpPr>
+        <p:spPr>
+          <a:xfrm>
+            <a:off x="457200" y="2651760"/>
+            <a:ext cx="11247120" cy="1024128"/>
+          </a:xfrm>
+          <a:prstGeom prst="rect">
+            <a:avLst/>
+          </a:prstGeom>
+          <a:noFill/>
+          <a:ln w="10160">
+            <a:solidFill>
+              <a:srgbClr val="E0E0E0"/>
+            </a:solidFill>
+          </a:ln>
+        </p:spPr>
+        <p:style>
+          <a:lnRef idx="1">
+            <a:schemeClr val="accent1"/>
+          </a:lnRef>
+          <a:fillRef idx="3">
+            <a:schemeClr val="accent1"/>
+          </a:fillRef>
+          <a:effectRef idx="2">
+            <a:schemeClr val="accent1"/>
+          </a:effectRef>
+          <a:fontRef idx="minor">
+            <a:schemeClr val="lt1"/>
+          </a:fontRef>
+        </p:style>
+        <p:txBody>
+          <a:bodyPr rtlCol="0" anchor="ctr"/>
+          <a:lstStyle/>
+          <a:p>
+            <a:pPr algn="ctr"/>
+          </a:p>
+        </p:txBody>
+      </p:sp>
+      <p:sp>
+        <p:nvSpPr>
+          <p:cNvPr id="10" name="TextBox 9"/>
+          <p:cNvSpPr txBox="1"/>
+          <p:nvPr/>
+        </p:nvSpPr>
+        <p:spPr>
+          <a:xfrm>
+            <a:off x="594360" y="2761488"/>
+            <a:ext cx="11064240" cy="886968"/>
+          </a:xfrm>
+          <a:prstGeom prst="rect">
+            <a:avLst/>
+          </a:prstGeom>
+          <a:noFill/>
+        </p:spPr>
+        <p:txBody>
+          <a:bodyPr wrap="square">
+            <a:spAutoFit/>
+          </a:bodyPr>
+          <a:lstStyle/>
+          <a:p>
+            <a:pPr algn="l"/>
+            <a:r>
+              <a:rPr sz="1600" b="0">
                 <a:solidFill>
                   <a:srgbClr val="9E9E9E"/>
                 </a:solidFill>
               </a:rPr>
-              <a:t>13 / 13</a:t>
+              <a:t>폰 내부 저장 (SQLite 등)</a:t>
+            </a:r>
+          </a:p>
+        </p:txBody>
+      </p:sp>
+      <p:sp>
+        <p:nvSpPr>
+          <p:cNvPr id="11" name="Rectangle 10"/>
+          <p:cNvSpPr/>
+          <p:nvPr/>
+        </p:nvSpPr>
+        <p:spPr>
+          <a:xfrm>
+            <a:off x="457200" y="3913631"/>
+            <a:ext cx="11247120" cy="1024128"/>
+          </a:xfrm>
+          <a:prstGeom prst="rect">
+            <a:avLst/>
+          </a:prstGeom>
+          <a:noFill/>
+          <a:ln w="10160">
+            <a:solidFill>
+              <a:srgbClr val="E0E0E0"/>
+            </a:solidFill>
+          </a:ln>
+        </p:spPr>
+        <p:style>
+          <a:lnRef idx="1">
+            <a:schemeClr val="accent1"/>
+          </a:lnRef>
+          <a:fillRef idx="3">
+            <a:schemeClr val="accent1"/>
+          </a:fillRef>
+          <a:effectRef idx="2">
+            <a:schemeClr val="accent1"/>
+          </a:effectRef>
+          <a:fontRef idx="minor">
+            <a:schemeClr val="lt1"/>
+          </a:fontRef>
+        </p:style>
+        <p:txBody>
+          <a:bodyPr rtlCol="0" anchor="ctr"/>
+          <a:lstStyle/>
+          <a:p>
+            <a:pPr algn="ctr"/>
+          </a:p>
+        </p:txBody>
+      </p:sp>
+      <p:sp>
+        <p:nvSpPr>
+          <p:cNvPr id="12" name="TextBox 11"/>
+          <p:cNvSpPr txBox="1"/>
+          <p:nvPr/>
+        </p:nvSpPr>
+        <p:spPr>
+          <a:xfrm>
+            <a:off x="594360" y="4023359"/>
+            <a:ext cx="11064240" cy="886968"/>
+          </a:xfrm>
+          <a:prstGeom prst="rect">
+            <a:avLst/>
+          </a:prstGeom>
+          <a:noFill/>
+        </p:spPr>
+        <p:txBody>
+          <a:bodyPr wrap="square">
+            <a:spAutoFit/>
+          </a:bodyPr>
+          <a:lstStyle/>
+          <a:p>
+            <a:pPr algn="l"/>
+            <a:r>
+              <a:rPr sz="1600" b="0">
+                <a:solidFill>
+                  <a:srgbClr val="9E9E9E"/>
+                </a:solidFill>
+              </a:rPr>
+              <a:t>직접 서버 구축</a:t>
+            </a:r>
+          </a:p>
+        </p:txBody>
+      </p:sp>
+      <p:sp>
+        <p:nvSpPr>
+          <p:cNvPr id="13" name="Rectangle 12"/>
+          <p:cNvSpPr/>
+          <p:nvPr/>
+        </p:nvSpPr>
+        <p:spPr>
+          <a:xfrm>
+            <a:off x="457200" y="5175504"/>
+            <a:ext cx="11247120" cy="1024128"/>
+          </a:xfrm>
+          <a:prstGeom prst="rect">
+            <a:avLst/>
+          </a:prstGeom>
+          <a:solidFill>
+            <a:srgbClr val="3F51B5"/>
+          </a:solidFill>
+          <a:ln>
+            <a:noFill/>
+          </a:ln>
+        </p:spPr>
+        <p:style>
+          <a:lnRef idx="1">
+            <a:schemeClr val="accent1"/>
+          </a:lnRef>
+          <a:fillRef idx="3">
+            <a:schemeClr val="accent1"/>
+          </a:fillRef>
+          <a:effectRef idx="2">
+            <a:schemeClr val="accent1"/>
+          </a:effectRef>
+          <a:fontRef idx="minor">
+            <a:schemeClr val="lt1"/>
+          </a:fontRef>
+        </p:style>
+        <p:txBody>
+          <a:bodyPr rtlCol="0" anchor="ctr"/>
+          <a:lstStyle/>
+          <a:p>
+            <a:pPr algn="ctr"/>
+          </a:p>
+        </p:txBody>
+      </p:sp>
+      <p:sp>
+        <p:nvSpPr>
+          <p:cNvPr id="14" name="TextBox 13"/>
+          <p:cNvSpPr txBox="1"/>
+          <p:nvPr/>
+        </p:nvSpPr>
+        <p:spPr>
+          <a:xfrm>
+            <a:off x="594360" y="5285232"/>
+            <a:ext cx="11064240" cy="886968"/>
+          </a:xfrm>
+          <a:prstGeom prst="rect">
+            <a:avLst/>
+          </a:prstGeom>
+          <a:noFill/>
+        </p:spPr>
+        <p:txBody>
+          <a:bodyPr wrap="square">
+            <a:spAutoFit/>
+          </a:bodyPr>
+          <a:lstStyle/>
+          <a:p>
+            <a:pPr algn="l"/>
+            <a:r>
+              <a:rPr sz="1600" b="1">
+                <a:solidFill>
+                  <a:srgbClr val="FFFFFF"/>
+                </a:solidFill>
+              </a:rPr>
+              <a:t>✓  Firebase (Auth + Firestore)</a:t>
             </a:r>
           </a:p>
         </p:txBody>
@@ -6422,30 +6808,237 @@
         <p:nvPr/>
       </p:nvGrpSpPr>
       <p:grpSpPr/>
-      <p:pic>
-        <p:nvPicPr>
-          <p:cNvPr id="2" name="Picture 1" descr="wbs.png"/>
-          <p:cNvPicPr>
-            <a:picLocks noChangeAspect="1"/>
-          </p:cNvPicPr>
-          <p:nvPr/>
-        </p:nvPicPr>
-        <p:blipFill>
-          <a:blip r:embed="rId2"/>
-          <a:stretch>
-            <a:fillRect/>
-          </a:stretch>
-        </p:blipFill>
-        <p:spPr>
-          <a:xfrm>
-            <a:off x="274320" y="274320"/>
-            <a:ext cx="11640312" cy="6309360"/>
-          </a:xfrm>
-          <a:prstGeom prst="rect">
-            <a:avLst/>
-          </a:prstGeom>
-        </p:spPr>
-      </p:pic>
+      <p:sp>
+        <p:nvSpPr>
+          <p:cNvPr id="2" name="Rectangle 1"/>
+          <p:cNvSpPr/>
+          <p:nvPr/>
+        </p:nvSpPr>
+        <p:spPr>
+          <a:xfrm>
+            <a:off x="0" y="0"/>
+            <a:ext cx="12188952" cy="6858000"/>
+          </a:xfrm>
+          <a:prstGeom prst="rect">
+            <a:avLst/>
+          </a:prstGeom>
+          <a:solidFill>
+            <a:srgbClr val="FFFFFF"/>
+          </a:solidFill>
+          <a:ln>
+            <a:noFill/>
+          </a:ln>
+        </p:spPr>
+        <p:style>
+          <a:lnRef idx="1">
+            <a:schemeClr val="accent1"/>
+          </a:lnRef>
+          <a:fillRef idx="3">
+            <a:schemeClr val="accent1"/>
+          </a:fillRef>
+          <a:effectRef idx="2">
+            <a:schemeClr val="accent1"/>
+          </a:effectRef>
+          <a:fontRef idx="minor">
+            <a:schemeClr val="lt1"/>
+          </a:fontRef>
+        </p:style>
+        <p:txBody>
+          <a:bodyPr rtlCol="0" anchor="ctr"/>
+          <a:lstStyle/>
+          <a:p>
+            <a:pPr algn="ctr"/>
+          </a:p>
+        </p:txBody>
+      </p:sp>
+      <p:sp>
+        <p:nvSpPr>
+          <p:cNvPr id="3" name="Rectangle 2"/>
+          <p:cNvSpPr/>
+          <p:nvPr/>
+        </p:nvSpPr>
+        <p:spPr>
+          <a:xfrm>
+            <a:off x="0" y="4663440"/>
+            <a:ext cx="12188952" cy="45720"/>
+          </a:xfrm>
+          <a:prstGeom prst="rect">
+            <a:avLst/>
+          </a:prstGeom>
+          <a:solidFill>
+            <a:srgbClr val="3F51B5"/>
+          </a:solidFill>
+          <a:ln>
+            <a:noFill/>
+          </a:ln>
+        </p:spPr>
+        <p:style>
+          <a:lnRef idx="1">
+            <a:schemeClr val="accent1"/>
+          </a:lnRef>
+          <a:fillRef idx="3">
+            <a:schemeClr val="accent1"/>
+          </a:fillRef>
+          <a:effectRef idx="2">
+            <a:schemeClr val="accent1"/>
+          </a:effectRef>
+          <a:fontRef idx="minor">
+            <a:schemeClr val="lt1"/>
+          </a:fontRef>
+        </p:style>
+        <p:txBody>
+          <a:bodyPr rtlCol="0" anchor="ctr"/>
+          <a:lstStyle/>
+          <a:p>
+            <a:pPr algn="ctr"/>
+          </a:p>
+        </p:txBody>
+      </p:sp>
+      <p:sp>
+        <p:nvSpPr>
+          <p:cNvPr id="4" name="Rectangle 3"/>
+          <p:cNvSpPr/>
+          <p:nvPr/>
+        </p:nvSpPr>
+        <p:spPr>
+          <a:xfrm>
+            <a:off x="0" y="4709160"/>
+            <a:ext cx="12188952" cy="2148840"/>
+          </a:xfrm>
+          <a:prstGeom prst="rect">
+            <a:avLst/>
+          </a:prstGeom>
+          <a:solidFill>
+            <a:srgbClr val="F5F5F5"/>
+          </a:solidFill>
+          <a:ln>
+            <a:noFill/>
+          </a:ln>
+        </p:spPr>
+        <p:style>
+          <a:lnRef idx="1">
+            <a:schemeClr val="accent1"/>
+          </a:lnRef>
+          <a:fillRef idx="3">
+            <a:schemeClr val="accent1"/>
+          </a:fillRef>
+          <a:effectRef idx="2">
+            <a:schemeClr val="accent1"/>
+          </a:effectRef>
+          <a:fontRef idx="minor">
+            <a:schemeClr val="lt1"/>
+          </a:fontRef>
+        </p:style>
+        <p:txBody>
+          <a:bodyPr rtlCol="0" anchor="ctr"/>
+          <a:lstStyle/>
+          <a:p>
+            <a:pPr algn="ctr"/>
+          </a:p>
+        </p:txBody>
+      </p:sp>
+      <p:sp>
+        <p:nvSpPr>
+          <p:cNvPr id="5" name="TextBox 4"/>
+          <p:cNvSpPr txBox="1"/>
+          <p:nvPr/>
+        </p:nvSpPr>
+        <p:spPr>
+          <a:xfrm>
+            <a:off x="914400" y="1463040"/>
+            <a:ext cx="10058400" cy="1371600"/>
+          </a:xfrm>
+          <a:prstGeom prst="rect">
+            <a:avLst/>
+          </a:prstGeom>
+          <a:noFill/>
+        </p:spPr>
+        <p:txBody>
+          <a:bodyPr wrap="square">
+            <a:spAutoFit/>
+          </a:bodyPr>
+          <a:lstStyle/>
+          <a:p>
+            <a:pPr algn="ctr"/>
+            <a:r>
+              <a:rPr sz="5200" b="1">
+                <a:solidFill>
+                  <a:srgbClr val="3F51B5"/>
+                </a:solidFill>
+              </a:rPr>
+              <a:t>감사합니다</a:t>
+            </a:r>
+          </a:p>
+        </p:txBody>
+      </p:sp>
+      <p:sp>
+        <p:nvSpPr>
+          <p:cNvPr id="6" name="TextBox 5"/>
+          <p:cNvSpPr txBox="1"/>
+          <p:nvPr/>
+        </p:nvSpPr>
+        <p:spPr>
+          <a:xfrm>
+            <a:off x="914400" y="5074920"/>
+            <a:ext cx="10058400" cy="457200"/>
+          </a:xfrm>
+          <a:prstGeom prst="rect">
+            <a:avLst/>
+          </a:prstGeom>
+          <a:noFill/>
+        </p:spPr>
+        <p:txBody>
+          <a:bodyPr wrap="square">
+            <a:spAutoFit/>
+          </a:bodyPr>
+          <a:lstStyle/>
+          <a:p>
+            <a:pPr algn="ctr"/>
+            <a:r>
+              <a:rPr sz="1300" b="0">
+                <a:solidFill>
+                  <a:srgbClr val="9E9E9E"/>
+                </a:solidFill>
+              </a:rPr>
+              <a:t>Portfolio Tracker  ·  Jooseonghyeon  ·  2026.05</a:t>
+            </a:r>
+          </a:p>
+        </p:txBody>
+      </p:sp>
+      <p:sp>
+        <p:nvSpPr>
+          <p:cNvPr id="7" name="TextBox 6"/>
+          <p:cNvSpPr txBox="1"/>
+          <p:nvPr/>
+        </p:nvSpPr>
+        <p:spPr>
+          <a:xfrm>
+            <a:off x="11247120" y="6492240"/>
+            <a:ext cx="822960" cy="274320"/>
+          </a:xfrm>
+          <a:prstGeom prst="rect">
+            <a:avLst/>
+          </a:prstGeom>
+          <a:noFill/>
+        </p:spPr>
+        <p:txBody>
+          <a:bodyPr wrap="square">
+            <a:spAutoFit/>
+          </a:bodyPr>
+          <a:lstStyle/>
+          <a:p>
+            <a:pPr algn="ctr"/>
+            <a:r>
+              <a:rPr sz="1000" b="0">
+                <a:solidFill>
+                  <a:srgbClr val="9E9E9E"/>
+                </a:solidFill>
+              </a:rPr>
+              <a:t>13 / 13</a:t>
+            </a:r>
+          </a:p>
+        </p:txBody>
+      </p:sp>
     </p:spTree>
   </p:cSld>
   <p:clrMapOvr>
@@ -13001,733 +13594,30 @@
         <p:nvPr/>
       </p:nvGrpSpPr>
       <p:grpSpPr/>
-      <p:sp>
-        <p:nvSpPr>
-          <p:cNvPr id="2" name="Rectangle 1"/>
-          <p:cNvSpPr/>
-          <p:nvPr/>
-        </p:nvSpPr>
-        <p:spPr>
-          <a:xfrm>
-            <a:off x="0" y="0"/>
-            <a:ext cx="12188952" cy="914400"/>
-          </a:xfrm>
-          <a:prstGeom prst="rect">
-            <a:avLst/>
-          </a:prstGeom>
-          <a:noFill/>
-          <a:ln>
-            <a:noFill/>
-          </a:ln>
-        </p:spPr>
-        <p:style>
-          <a:lnRef idx="1">
-            <a:schemeClr val="accent1"/>
-          </a:lnRef>
-          <a:fillRef idx="3">
-            <a:schemeClr val="accent1"/>
-          </a:fillRef>
-          <a:effectRef idx="2">
-            <a:schemeClr val="accent1"/>
-          </a:effectRef>
-          <a:fontRef idx="minor">
-            <a:schemeClr val="lt1"/>
-          </a:fontRef>
-        </p:style>
-        <p:txBody>
-          <a:bodyPr rtlCol="0" anchor="ctr"/>
-          <a:lstStyle/>
-          <a:p>
-            <a:pPr algn="ctr"/>
-          </a:p>
-        </p:txBody>
-      </p:sp>
-      <p:sp>
-        <p:nvSpPr>
-          <p:cNvPr id="3" name="TextBox 2"/>
-          <p:cNvSpPr txBox="1"/>
-          <p:nvPr/>
-        </p:nvSpPr>
-        <p:spPr>
-          <a:xfrm>
-            <a:off x="457200" y="73152"/>
-            <a:ext cx="10972800" cy="566928"/>
-          </a:xfrm>
-          <a:prstGeom prst="rect">
-            <a:avLst/>
-          </a:prstGeom>
-          <a:noFill/>
-        </p:spPr>
-        <p:txBody>
-          <a:bodyPr wrap="square">
-            <a:spAutoFit/>
-          </a:bodyPr>
-          <a:lstStyle/>
-          <a:p>
-            <a:pPr algn="l"/>
-            <a:r>
-              <a:rPr sz="2400" b="1">
-                <a:solidFill>
-                  <a:srgbClr val="3F51B5"/>
-                </a:solidFill>
-              </a:rPr>
-              <a:t>6.  데모</a:t>
-            </a:r>
-          </a:p>
-        </p:txBody>
-      </p:sp>
-      <p:sp>
-        <p:nvSpPr>
-          <p:cNvPr id="4" name="TextBox 3"/>
-          <p:cNvSpPr txBox="1"/>
-          <p:nvPr/>
-        </p:nvSpPr>
-        <p:spPr>
-          <a:xfrm>
-            <a:off x="457200" y="621792"/>
-            <a:ext cx="10972800" cy="274320"/>
-          </a:xfrm>
-          <a:prstGeom prst="rect">
-            <a:avLst/>
-          </a:prstGeom>
-          <a:noFill/>
-        </p:spPr>
-        <p:txBody>
-          <a:bodyPr wrap="square">
-            <a:spAutoFit/>
-          </a:bodyPr>
-          <a:lstStyle/>
-          <a:p>
-            <a:pPr algn="l"/>
-            <a:r>
-              <a:rPr sz="1100" b="0">
-                <a:solidFill>
-                  <a:srgbClr val="9E9E9E"/>
-                </a:solidFill>
-              </a:rPr>
-              <a:t>라이브 시연 — 핵심 화면 2가지</a:t>
-            </a:r>
-          </a:p>
-        </p:txBody>
-      </p:sp>
-      <p:sp>
-        <p:nvSpPr>
-          <p:cNvPr id="5" name="Rectangle 4"/>
-          <p:cNvSpPr/>
-          <p:nvPr/>
-        </p:nvSpPr>
-        <p:spPr>
-          <a:xfrm>
-            <a:off x="0" y="868680"/>
-            <a:ext cx="12188952" cy="45720"/>
-          </a:xfrm>
-          <a:prstGeom prst="rect">
-            <a:avLst/>
-          </a:prstGeom>
-          <a:solidFill>
-            <a:srgbClr val="3F51B5"/>
-          </a:solidFill>
-          <a:ln>
-            <a:noFill/>
-          </a:ln>
-        </p:spPr>
-        <p:style>
-          <a:lnRef idx="1">
-            <a:schemeClr val="accent1"/>
-          </a:lnRef>
-          <a:fillRef idx="3">
-            <a:schemeClr val="accent1"/>
-          </a:fillRef>
-          <a:effectRef idx="2">
-            <a:schemeClr val="accent1"/>
-          </a:effectRef>
-          <a:fontRef idx="minor">
-            <a:schemeClr val="lt1"/>
-          </a:fontRef>
-        </p:style>
-        <p:txBody>
-          <a:bodyPr rtlCol="0" anchor="ctr"/>
-          <a:lstStyle/>
-          <a:p>
-            <a:pPr algn="ctr"/>
-          </a:p>
-        </p:txBody>
-      </p:sp>
-      <p:sp>
-        <p:nvSpPr>
-          <p:cNvPr id="6" name="TextBox 5"/>
-          <p:cNvSpPr txBox="1"/>
-          <p:nvPr/>
-        </p:nvSpPr>
-        <p:spPr>
-          <a:xfrm>
-            <a:off x="11247120" y="6492240"/>
-            <a:ext cx="822960" cy="274320"/>
-          </a:xfrm>
-          <a:prstGeom prst="rect">
-            <a:avLst/>
-          </a:prstGeom>
-          <a:noFill/>
-        </p:spPr>
-        <p:txBody>
-          <a:bodyPr wrap="square">
-            <a:spAutoFit/>
-          </a:bodyPr>
-          <a:lstStyle/>
-          <a:p>
-            <a:pPr algn="ctr"/>
-            <a:r>
-              <a:rPr sz="1000" b="0">
-                <a:solidFill>
-                  <a:srgbClr val="9E9E9E"/>
-                </a:solidFill>
-              </a:rPr>
-              <a:t>7 / 13</a:t>
-            </a:r>
-          </a:p>
-        </p:txBody>
-      </p:sp>
-      <p:sp>
-        <p:nvSpPr>
-          <p:cNvPr id="7" name="Rectangle 6"/>
-          <p:cNvSpPr/>
-          <p:nvPr/>
-        </p:nvSpPr>
-        <p:spPr>
-          <a:xfrm>
-            <a:off x="457200" y="1097280"/>
-            <a:ext cx="11247120" cy="1920240"/>
-          </a:xfrm>
-          <a:prstGeom prst="rect">
-            <a:avLst/>
-          </a:prstGeom>
-          <a:noFill/>
-          <a:ln w="10160">
-            <a:solidFill>
-              <a:srgbClr val="E0E0E0"/>
-            </a:solidFill>
-          </a:ln>
-        </p:spPr>
-        <p:style>
-          <a:lnRef idx="1">
-            <a:schemeClr val="accent1"/>
-          </a:lnRef>
-          <a:fillRef idx="3">
-            <a:schemeClr val="accent1"/>
-          </a:fillRef>
-          <a:effectRef idx="2">
-            <a:schemeClr val="accent1"/>
-          </a:effectRef>
-          <a:fontRef idx="minor">
-            <a:schemeClr val="lt1"/>
-          </a:fontRef>
-        </p:style>
-        <p:txBody>
-          <a:bodyPr rtlCol="0" anchor="ctr"/>
-          <a:lstStyle/>
-          <a:p>
-            <a:pPr algn="ctr"/>
-          </a:p>
-        </p:txBody>
-      </p:sp>
-      <p:sp>
-        <p:nvSpPr>
-          <p:cNvPr id="8" name="Rectangle 7"/>
-          <p:cNvSpPr/>
-          <p:nvPr/>
-        </p:nvSpPr>
-        <p:spPr>
-          <a:xfrm>
-            <a:off x="457200" y="1097280"/>
-            <a:ext cx="54864" cy="1920240"/>
-          </a:xfrm>
-          <a:prstGeom prst="rect">
-            <a:avLst/>
-          </a:prstGeom>
-          <a:solidFill>
-            <a:srgbClr val="3F51B5"/>
-          </a:solidFill>
-          <a:ln>
-            <a:noFill/>
-          </a:ln>
-        </p:spPr>
-        <p:style>
-          <a:lnRef idx="1">
-            <a:schemeClr val="accent1"/>
-          </a:lnRef>
-          <a:fillRef idx="3">
-            <a:schemeClr val="accent1"/>
-          </a:fillRef>
-          <a:effectRef idx="2">
-            <a:schemeClr val="accent1"/>
-          </a:effectRef>
-          <a:fontRef idx="minor">
-            <a:schemeClr val="lt1"/>
-          </a:fontRef>
-        </p:style>
-        <p:txBody>
-          <a:bodyPr rtlCol="0" anchor="ctr"/>
-          <a:lstStyle/>
-          <a:p>
-            <a:pPr algn="ctr"/>
-          </a:p>
-        </p:txBody>
-      </p:sp>
-      <p:sp>
-        <p:nvSpPr>
-          <p:cNvPr id="9" name="Rectangle 8"/>
-          <p:cNvSpPr/>
-          <p:nvPr/>
-        </p:nvSpPr>
-        <p:spPr>
-          <a:xfrm>
-            <a:off x="457200" y="1097280"/>
-            <a:ext cx="11247120" cy="475488"/>
-          </a:xfrm>
-          <a:prstGeom prst="rect">
-            <a:avLst/>
-          </a:prstGeom>
-          <a:solidFill>
-            <a:srgbClr val="F5F5F5"/>
-          </a:solidFill>
-          <a:ln>
-            <a:noFill/>
-          </a:ln>
-        </p:spPr>
-        <p:style>
-          <a:lnRef idx="1">
-            <a:schemeClr val="accent1"/>
-          </a:lnRef>
-          <a:fillRef idx="3">
-            <a:schemeClr val="accent1"/>
-          </a:fillRef>
-          <a:effectRef idx="2">
-            <a:schemeClr val="accent1"/>
-          </a:effectRef>
-          <a:fontRef idx="minor">
-            <a:schemeClr val="lt1"/>
-          </a:fontRef>
-        </p:style>
-        <p:txBody>
-          <a:bodyPr rtlCol="0" anchor="ctr"/>
-          <a:lstStyle/>
-          <a:p>
-            <a:pPr algn="ctr"/>
-          </a:p>
-        </p:txBody>
-      </p:sp>
-      <p:sp>
-        <p:nvSpPr>
-          <p:cNvPr id="10" name="TextBox 9"/>
-          <p:cNvSpPr txBox="1"/>
-          <p:nvPr/>
-        </p:nvSpPr>
-        <p:spPr>
-          <a:xfrm>
-            <a:off x="658368" y="1188720"/>
-            <a:ext cx="1828800" cy="320040"/>
-          </a:xfrm>
-          <a:prstGeom prst="rect">
-            <a:avLst/>
-          </a:prstGeom>
-          <a:noFill/>
-        </p:spPr>
-        <p:txBody>
-          <a:bodyPr wrap="square">
-            <a:spAutoFit/>
-          </a:bodyPr>
-          <a:lstStyle/>
-          <a:p>
-            <a:pPr algn="l"/>
-            <a:r>
-              <a:rPr sz="1100" b="1">
-                <a:solidFill>
-                  <a:srgbClr val="3F51B5"/>
-                </a:solidFill>
-              </a:rPr>
-              <a:t>시나리오 A</a:t>
-            </a:r>
-          </a:p>
-        </p:txBody>
-      </p:sp>
-      <p:sp>
-        <p:nvSpPr>
-          <p:cNvPr id="11" name="TextBox 10"/>
-          <p:cNvSpPr txBox="1"/>
-          <p:nvPr/>
-        </p:nvSpPr>
-        <p:spPr>
-          <a:xfrm>
-            <a:off x="2606040" y="1188720"/>
-            <a:ext cx="8961120" cy="320040"/>
-          </a:xfrm>
-          <a:prstGeom prst="rect">
-            <a:avLst/>
-          </a:prstGeom>
-          <a:noFill/>
-        </p:spPr>
-        <p:txBody>
-          <a:bodyPr wrap="square">
-            <a:spAutoFit/>
-          </a:bodyPr>
-          <a:lstStyle/>
-          <a:p>
-            <a:pPr algn="l"/>
-            <a:r>
-              <a:rPr sz="1400" b="1">
-                <a:solidFill>
-                  <a:srgbClr val="212121"/>
-                </a:solidFill>
-              </a:rPr>
-              <a:t>계좌 관리 흐름</a:t>
-            </a:r>
-          </a:p>
-        </p:txBody>
-      </p:sp>
-      <p:sp>
-        <p:nvSpPr>
-          <p:cNvPr id="12" name="TextBox 11"/>
-          <p:cNvSpPr txBox="1"/>
-          <p:nvPr/>
-        </p:nvSpPr>
-        <p:spPr>
-          <a:xfrm>
-            <a:off x="658368" y="1737360"/>
-            <a:ext cx="10881360" cy="1097280"/>
-          </a:xfrm>
-          <a:prstGeom prst="rect">
-            <a:avLst/>
-          </a:prstGeom>
-          <a:noFill/>
-        </p:spPr>
-        <p:txBody>
-          <a:bodyPr wrap="square">
-            <a:spAutoFit/>
-          </a:bodyPr>
-          <a:lstStyle/>
-          <a:p>
-            <a:pPr algn="l"/>
-            <a:r>
-              <a:rPr sz="1300" b="0">
-                <a:solidFill>
-                  <a:srgbClr val="212121"/>
-                </a:solidFill>
-              </a:rPr>
-              <a:t>① 계좌 등록 (주식·코인 선택, 통화 선택)  → ② 입금 기록  → ③ 잔액 자동 계산 확인</a:t>
-            </a:r>
-          </a:p>
-        </p:txBody>
-      </p:sp>
-      <p:sp>
-        <p:nvSpPr>
-          <p:cNvPr id="13" name="Rectangle 12"/>
-          <p:cNvSpPr/>
-          <p:nvPr/>
-        </p:nvSpPr>
-        <p:spPr>
-          <a:xfrm>
-            <a:off x="457200" y="3383280"/>
-            <a:ext cx="11247120" cy="1920240"/>
-          </a:xfrm>
-          <a:prstGeom prst="rect">
-            <a:avLst/>
-          </a:prstGeom>
-          <a:noFill/>
-          <a:ln w="10160">
-            <a:solidFill>
-              <a:srgbClr val="E0E0E0"/>
-            </a:solidFill>
-          </a:ln>
-        </p:spPr>
-        <p:style>
-          <a:lnRef idx="1">
-            <a:schemeClr val="accent1"/>
-          </a:lnRef>
-          <a:fillRef idx="3">
-            <a:schemeClr val="accent1"/>
-          </a:fillRef>
-          <a:effectRef idx="2">
-            <a:schemeClr val="accent1"/>
-          </a:effectRef>
-          <a:fontRef idx="minor">
-            <a:schemeClr val="lt1"/>
-          </a:fontRef>
-        </p:style>
-        <p:txBody>
-          <a:bodyPr rtlCol="0" anchor="ctr"/>
-          <a:lstStyle/>
-          <a:p>
-            <a:pPr algn="ctr"/>
-          </a:p>
-        </p:txBody>
-      </p:sp>
-      <p:sp>
-        <p:nvSpPr>
-          <p:cNvPr id="14" name="Rectangle 13"/>
-          <p:cNvSpPr/>
-          <p:nvPr/>
-        </p:nvSpPr>
-        <p:spPr>
-          <a:xfrm>
-            <a:off x="457200" y="3383280"/>
-            <a:ext cx="54864" cy="1920240"/>
-          </a:xfrm>
-          <a:prstGeom prst="rect">
-            <a:avLst/>
-          </a:prstGeom>
-          <a:solidFill>
-            <a:srgbClr val="3F51B5"/>
-          </a:solidFill>
-          <a:ln>
-            <a:noFill/>
-          </a:ln>
-        </p:spPr>
-        <p:style>
-          <a:lnRef idx="1">
-            <a:schemeClr val="accent1"/>
-          </a:lnRef>
-          <a:fillRef idx="3">
-            <a:schemeClr val="accent1"/>
-          </a:fillRef>
-          <a:effectRef idx="2">
-            <a:schemeClr val="accent1"/>
-          </a:effectRef>
-          <a:fontRef idx="minor">
-            <a:schemeClr val="lt1"/>
-          </a:fontRef>
-        </p:style>
-        <p:txBody>
-          <a:bodyPr rtlCol="0" anchor="ctr"/>
-          <a:lstStyle/>
-          <a:p>
-            <a:pPr algn="ctr"/>
-          </a:p>
-        </p:txBody>
-      </p:sp>
-      <p:sp>
-        <p:nvSpPr>
-          <p:cNvPr id="15" name="Rectangle 14"/>
-          <p:cNvSpPr/>
-          <p:nvPr/>
-        </p:nvSpPr>
-        <p:spPr>
-          <a:xfrm>
-            <a:off x="457200" y="3383280"/>
-            <a:ext cx="11247120" cy="475488"/>
-          </a:xfrm>
-          <a:prstGeom prst="rect">
-            <a:avLst/>
-          </a:prstGeom>
-          <a:solidFill>
-            <a:srgbClr val="F5F5F5"/>
-          </a:solidFill>
-          <a:ln>
-            <a:noFill/>
-          </a:ln>
-        </p:spPr>
-        <p:style>
-          <a:lnRef idx="1">
-            <a:schemeClr val="accent1"/>
-          </a:lnRef>
-          <a:fillRef idx="3">
-            <a:schemeClr val="accent1"/>
-          </a:fillRef>
-          <a:effectRef idx="2">
-            <a:schemeClr val="accent1"/>
-          </a:effectRef>
-          <a:fontRef idx="minor">
-            <a:schemeClr val="lt1"/>
-          </a:fontRef>
-        </p:style>
-        <p:txBody>
-          <a:bodyPr rtlCol="0" anchor="ctr"/>
-          <a:lstStyle/>
-          <a:p>
-            <a:pPr algn="ctr"/>
-          </a:p>
-        </p:txBody>
-      </p:sp>
-      <p:sp>
-        <p:nvSpPr>
-          <p:cNvPr id="16" name="TextBox 15"/>
-          <p:cNvSpPr txBox="1"/>
-          <p:nvPr/>
-        </p:nvSpPr>
-        <p:spPr>
-          <a:xfrm>
-            <a:off x="658368" y="3474720"/>
-            <a:ext cx="1828800" cy="320040"/>
-          </a:xfrm>
-          <a:prstGeom prst="rect">
-            <a:avLst/>
-          </a:prstGeom>
-          <a:noFill/>
-        </p:spPr>
-        <p:txBody>
-          <a:bodyPr wrap="square">
-            <a:spAutoFit/>
-          </a:bodyPr>
-          <a:lstStyle/>
-          <a:p>
-            <a:pPr algn="l"/>
-            <a:r>
-              <a:rPr sz="1100" b="1">
-                <a:solidFill>
-                  <a:srgbClr val="3F51B5"/>
-                </a:solidFill>
-              </a:rPr>
-              <a:t>시나리오 B</a:t>
-            </a:r>
-          </a:p>
-        </p:txBody>
-      </p:sp>
-      <p:sp>
-        <p:nvSpPr>
-          <p:cNvPr id="17" name="TextBox 16"/>
-          <p:cNvSpPr txBox="1"/>
-          <p:nvPr/>
-        </p:nvSpPr>
-        <p:spPr>
-          <a:xfrm>
-            <a:off x="2606040" y="3474720"/>
-            <a:ext cx="8961120" cy="320040"/>
-          </a:xfrm>
-          <a:prstGeom prst="rect">
-            <a:avLst/>
-          </a:prstGeom>
-          <a:noFill/>
-        </p:spPr>
-        <p:txBody>
-          <a:bodyPr wrap="square">
-            <a:spAutoFit/>
-          </a:bodyPr>
-          <a:lstStyle/>
-          <a:p>
-            <a:pPr algn="l"/>
-            <a:r>
-              <a:rPr sz="1400" b="1">
-                <a:solidFill>
-                  <a:srgbClr val="212121"/>
-                </a:solidFill>
-              </a:rPr>
-              <a:t>포지션 기록 + 복기</a:t>
-            </a:r>
-          </a:p>
-        </p:txBody>
-      </p:sp>
-      <p:sp>
-        <p:nvSpPr>
-          <p:cNvPr id="18" name="TextBox 17"/>
-          <p:cNvSpPr txBox="1"/>
-          <p:nvPr/>
-        </p:nvSpPr>
-        <p:spPr>
-          <a:xfrm>
-            <a:off x="658368" y="4023360"/>
-            <a:ext cx="10881360" cy="1097280"/>
-          </a:xfrm>
-          <a:prstGeom prst="rect">
-            <a:avLst/>
-          </a:prstGeom>
-          <a:noFill/>
-        </p:spPr>
-        <p:txBody>
-          <a:bodyPr wrap="square">
-            <a:spAutoFit/>
-          </a:bodyPr>
-          <a:lstStyle/>
-          <a:p>
-            <a:pPr algn="l"/>
-            <a:r>
-              <a:rPr sz="1300" b="0">
-                <a:solidFill>
-                  <a:srgbClr val="212121"/>
-                </a:solidFill>
-              </a:rPr>
-              <a:t>① 포지션 진입 기록 (종목·진입가·수량·매수 근거)  → ② 포지션 정리 (매도가·손익·수익률 자동 계산)  → ③ 복기 메모 조회</a:t>
-            </a:r>
-          </a:p>
-        </p:txBody>
-      </p:sp>
-      <p:sp>
-        <p:nvSpPr>
-          <p:cNvPr id="19" name="Rectangle 18"/>
-          <p:cNvSpPr/>
-          <p:nvPr/>
-        </p:nvSpPr>
-        <p:spPr>
-          <a:xfrm>
-            <a:off x="457200" y="5806440"/>
-            <a:ext cx="11247120" cy="658368"/>
-          </a:xfrm>
-          <a:prstGeom prst="rect">
-            <a:avLst/>
-          </a:prstGeom>
-          <a:solidFill>
-            <a:srgbClr val="F5F5F5"/>
-          </a:solidFill>
-          <a:ln w="10160">
-            <a:solidFill>
-              <a:srgbClr val="E0E0E0"/>
-            </a:solidFill>
-          </a:ln>
-        </p:spPr>
-        <p:style>
-          <a:lnRef idx="1">
-            <a:schemeClr val="accent1"/>
-          </a:lnRef>
-          <a:fillRef idx="3">
-            <a:schemeClr val="accent1"/>
-          </a:fillRef>
-          <a:effectRef idx="2">
-            <a:schemeClr val="accent1"/>
-          </a:effectRef>
-          <a:fontRef idx="minor">
-            <a:schemeClr val="lt1"/>
-          </a:fontRef>
-        </p:style>
-        <p:txBody>
-          <a:bodyPr rtlCol="0" anchor="ctr"/>
-          <a:lstStyle/>
-          <a:p>
-            <a:pPr algn="ctr"/>
-          </a:p>
-        </p:txBody>
-      </p:sp>
-      <p:sp>
-        <p:nvSpPr>
-          <p:cNvPr id="20" name="TextBox 19"/>
-          <p:cNvSpPr txBox="1"/>
-          <p:nvPr/>
-        </p:nvSpPr>
-        <p:spPr>
-          <a:xfrm>
-            <a:off x="658368" y="5971032"/>
-            <a:ext cx="10972800" cy="411480"/>
-          </a:xfrm>
-          <a:prstGeom prst="rect">
-            <a:avLst/>
-          </a:prstGeom>
-          <a:noFill/>
-        </p:spPr>
-        <p:txBody>
-          <a:bodyPr wrap="square">
-            <a:spAutoFit/>
-          </a:bodyPr>
-          <a:lstStyle/>
-          <a:p>
-            <a:pPr algn="l"/>
-            <a:r>
-              <a:rPr sz="1200" b="0">
-                <a:solidFill>
-                  <a:srgbClr val="9E9E9E"/>
-                </a:solidFill>
-              </a:rPr>
-              <a:t>데모 백업  ·  Wi-Fi 없는 환경 대비 → 로컬 데이터 캐시 + 화면 녹화 영상 준비</a:t>
-            </a:r>
-          </a:p>
-        </p:txBody>
-      </p:sp>
+      <p:pic>
+        <p:nvPicPr>
+          <p:cNvPr id="2" name="Picture 1" descr="wbs.png"/>
+          <p:cNvPicPr>
+            <a:picLocks noChangeAspect="1"/>
+          </p:cNvPicPr>
+          <p:nvPr/>
+        </p:nvPicPr>
+        <p:blipFill>
+          <a:blip r:embed="rId2"/>
+          <a:stretch>
+            <a:fillRect/>
+          </a:stretch>
+        </p:blipFill>
+        <p:spPr>
+          <a:xfrm>
+            <a:off x="274320" y="274320"/>
+            <a:ext cx="11640312" cy="6309360"/>
+          </a:xfrm>
+          <a:prstGeom prst="rect">
+            <a:avLst/>
+          </a:prstGeom>
+        </p:spPr>
+      </p:pic>
     </p:spTree>
   </p:cSld>
   <p:clrMapOvr>
@@ -13816,7 +13706,7 @@
                   <a:srgbClr val="3F51B5"/>
                 </a:solidFill>
               </a:rPr>
-              <a:t>7.  남은 일정</a:t>
+              <a:t>6.  데모</a:t>
             </a:r>
           </a:p>
         </p:txBody>
@@ -13850,7 +13740,7 @@
                   <a:srgbClr val="9E9E9E"/>
                 </a:solidFill>
               </a:rPr>
-              <a:t>13 ~ 15주차 우선순위</a:t>
+              <a:t>라이브 시연 — 핵심 화면 2가지</a:t>
             </a:r>
           </a:p>
         </p:txBody>
@@ -13927,7 +13817,7 @@
                   <a:srgbClr val="9E9E9E"/>
                 </a:solidFill>
               </a:rPr>
-              <a:t>8 / 13</a:t>
+              <a:t>7 / 13</a:t>
             </a:r>
           </a:p>
         </p:txBody>
@@ -13941,7 +13831,7 @@
         <p:spPr>
           <a:xfrm>
             <a:off x="457200" y="1097280"/>
-            <a:ext cx="11247120" cy="1417320"/>
+            <a:ext cx="11247120" cy="1920240"/>
           </a:xfrm>
           <a:prstGeom prst="rect">
             <a:avLst/>
@@ -13984,7 +13874,7 @@
         <p:spPr>
           <a:xfrm>
             <a:off x="457200" y="1097280"/>
-            <a:ext cx="2560320" cy="1417320"/>
+            <a:ext cx="54864" cy="1920240"/>
           </a:xfrm>
           <a:prstGeom prst="rect">
             <a:avLst/>
@@ -14020,35 +13910,44 @@
       </p:sp>
       <p:sp>
         <p:nvSpPr>
-          <p:cNvPr id="9" name="TextBox 8"/>
-          <p:cNvSpPr txBox="1"/>
-          <p:nvPr/>
-        </p:nvSpPr>
-        <p:spPr>
-          <a:xfrm>
-            <a:off x="621792" y="1298448"/>
-            <a:ext cx="2240280" cy="475488"/>
-          </a:xfrm>
-          <a:prstGeom prst="rect">
-            <a:avLst/>
-          </a:prstGeom>
-          <a:noFill/>
-        </p:spPr>
-        <p:txBody>
-          <a:bodyPr wrap="square">
-            <a:spAutoFit/>
-          </a:bodyPr>
-          <a:lstStyle/>
-          <a:p>
-            <a:pPr algn="ctr"/>
-            <a:r>
-              <a:rPr sz="1800" b="1">
-                <a:solidFill>
-                  <a:srgbClr val="FFFFFF"/>
-                </a:solidFill>
-              </a:rPr>
-              <a:t>13주차</a:t>
-            </a:r>
+          <p:cNvPr id="9" name="Rectangle 8"/>
+          <p:cNvSpPr/>
+          <p:nvPr/>
+        </p:nvSpPr>
+        <p:spPr>
+          <a:xfrm>
+            <a:off x="457200" y="1097280"/>
+            <a:ext cx="11247120" cy="475488"/>
+          </a:xfrm>
+          <a:prstGeom prst="rect">
+            <a:avLst/>
+          </a:prstGeom>
+          <a:solidFill>
+            <a:srgbClr val="F5F5F5"/>
+          </a:solidFill>
+          <a:ln>
+            <a:noFill/>
+          </a:ln>
+        </p:spPr>
+        <p:style>
+          <a:lnRef idx="1">
+            <a:schemeClr val="accent1"/>
+          </a:lnRef>
+          <a:fillRef idx="3">
+            <a:schemeClr val="accent1"/>
+          </a:fillRef>
+          <a:effectRef idx="2">
+            <a:schemeClr val="accent1"/>
+          </a:effectRef>
+          <a:fontRef idx="minor">
+            <a:schemeClr val="lt1"/>
+          </a:fontRef>
+        </p:style>
+        <p:txBody>
+          <a:bodyPr rtlCol="0" anchor="ctr"/>
+          <a:lstStyle/>
+          <a:p>
+            <a:pPr algn="ctr"/>
           </a:p>
         </p:txBody>
       </p:sp>
@@ -14060,28 +13959,28 @@
         </p:nvSpPr>
         <p:spPr>
           <a:xfrm>
-            <a:off x="621792" y="1810512"/>
-            <a:ext cx="2240280" cy="347472"/>
-          </a:xfrm>
-          <a:prstGeom prst="rect">
-            <a:avLst/>
-          </a:prstGeom>
-          <a:noFill/>
-        </p:spPr>
-        <p:txBody>
-          <a:bodyPr wrap="square">
-            <a:spAutoFit/>
-          </a:bodyPr>
-          <a:lstStyle/>
-          <a:p>
-            <a:pPr algn="ctr"/>
-            <a:r>
-              <a:rPr sz="1000" b="0">
-                <a:solidFill>
-                  <a:srgbClr val="C5CAE9"/>
-                </a:solidFill>
-              </a:rPr>
-              <a:t>2026-05-26 ~ 05-30</a:t>
+            <a:off x="658368" y="1188720"/>
+            <a:ext cx="1828800" cy="320040"/>
+          </a:xfrm>
+          <a:prstGeom prst="rect">
+            <a:avLst/>
+          </a:prstGeom>
+          <a:noFill/>
+        </p:spPr>
+        <p:txBody>
+          <a:bodyPr wrap="square">
+            <a:spAutoFit/>
+          </a:bodyPr>
+          <a:lstStyle/>
+          <a:p>
+            <a:pPr algn="l"/>
+            <a:r>
+              <a:rPr sz="1100" b="1">
+                <a:solidFill>
+                  <a:srgbClr val="3F51B5"/>
+                </a:solidFill>
+              </a:rPr>
+              <a:t>시나리오 A</a:t>
             </a:r>
           </a:p>
         </p:txBody>
@@ -14094,8 +13993,8 @@
         </p:nvSpPr>
         <p:spPr>
           <a:xfrm>
-            <a:off x="3200400" y="1353312"/>
-            <a:ext cx="8229600" cy="914400"/>
+            <a:off x="2606040" y="1188720"/>
+            <a:ext cx="8961120" cy="320040"/>
           </a:xfrm>
           <a:prstGeom prst="rect">
             <a:avLst/>
@@ -14110,27 +14009,60 @@
           <a:p>
             <a:pPr algn="l"/>
             <a:r>
-              <a:rPr sz="1400" b="0">
+              <a:rPr sz="1400" b="1">
                 <a:solidFill>
                   <a:srgbClr val="212121"/>
                 </a:solidFill>
               </a:rPr>
-              <a:t>setup.md / deploy.md / testing.md 문서 완성
-README 최종 완비</a:t>
-            </a:r>
-          </a:p>
-        </p:txBody>
-      </p:sp>
-      <p:sp>
-        <p:nvSpPr>
-          <p:cNvPr id="12" name="Rectangle 11"/>
+              <a:t>계좌 관리 흐름</a:t>
+            </a:r>
+          </a:p>
+        </p:txBody>
+      </p:sp>
+      <p:sp>
+        <p:nvSpPr>
+          <p:cNvPr id="12" name="TextBox 11"/>
+          <p:cNvSpPr txBox="1"/>
+          <p:nvPr/>
+        </p:nvSpPr>
+        <p:spPr>
+          <a:xfrm>
+            <a:off x="658368" y="1737360"/>
+            <a:ext cx="10881360" cy="1097280"/>
+          </a:xfrm>
+          <a:prstGeom prst="rect">
+            <a:avLst/>
+          </a:prstGeom>
+          <a:noFill/>
+        </p:spPr>
+        <p:txBody>
+          <a:bodyPr wrap="square">
+            <a:spAutoFit/>
+          </a:bodyPr>
+          <a:lstStyle/>
+          <a:p>
+            <a:pPr algn="l"/>
+            <a:r>
+              <a:rPr sz="1300" b="0">
+                <a:solidFill>
+                  <a:srgbClr val="212121"/>
+                </a:solidFill>
+              </a:rPr>
+              <a:t>① 계좌 등록 (주식·코인 선택, 통화 선택)  → ② 입금 기록  → ③ 잔액 자동 계산 확인</a:t>
+            </a:r>
+          </a:p>
+        </p:txBody>
+      </p:sp>
+      <p:sp>
+        <p:nvSpPr>
+          <p:cNvPr id="13" name="Rectangle 12"/>
           <p:cNvSpPr/>
           <p:nvPr/>
         </p:nvSpPr>
         <p:spPr>
           <a:xfrm>
-            <a:off x="457200" y="2743200"/>
-            <a:ext cx="11247120" cy="1417320"/>
+            <a:off x="457200" y="3383280"/>
+            <a:ext cx="11247120" cy="1920240"/>
           </a:xfrm>
           <a:prstGeom prst="rect">
             <a:avLst/>
@@ -14166,14 +14098,14 @@
       </p:sp>
       <p:sp>
         <p:nvSpPr>
-          <p:cNvPr id="13" name="Rectangle 12"/>
+          <p:cNvPr id="14" name="Rectangle 13"/>
           <p:cNvSpPr/>
           <p:nvPr/>
         </p:nvSpPr>
         <p:spPr>
           <a:xfrm>
-            <a:off x="457200" y="2743200"/>
-            <a:ext cx="2560320" cy="1417320"/>
+            <a:off x="457200" y="3383280"/>
+            <a:ext cx="54864" cy="1920240"/>
           </a:xfrm>
           <a:prstGeom prst="rect">
             <a:avLst/>
@@ -14209,69 +14141,44 @@
       </p:sp>
       <p:sp>
         <p:nvSpPr>
-          <p:cNvPr id="14" name="TextBox 13"/>
-          <p:cNvSpPr txBox="1"/>
-          <p:nvPr/>
-        </p:nvSpPr>
-        <p:spPr>
-          <a:xfrm>
-            <a:off x="621792" y="2944368"/>
-            <a:ext cx="2240280" cy="475488"/>
-          </a:xfrm>
-          <a:prstGeom prst="rect">
-            <a:avLst/>
-          </a:prstGeom>
-          <a:noFill/>
-        </p:spPr>
-        <p:txBody>
-          <a:bodyPr wrap="square">
-            <a:spAutoFit/>
-          </a:bodyPr>
-          <a:lstStyle/>
-          <a:p>
-            <a:pPr algn="ctr"/>
-            <a:r>
-              <a:rPr sz="1800" b="1">
-                <a:solidFill>
-                  <a:srgbClr val="FFFFFF"/>
-                </a:solidFill>
-              </a:rPr>
-              <a:t>14주차</a:t>
-            </a:r>
-          </a:p>
-        </p:txBody>
-      </p:sp>
-      <p:sp>
-        <p:nvSpPr>
-          <p:cNvPr id="15" name="TextBox 14"/>
-          <p:cNvSpPr txBox="1"/>
-          <p:nvPr/>
-        </p:nvSpPr>
-        <p:spPr>
-          <a:xfrm>
-            <a:off x="621792" y="3456432"/>
-            <a:ext cx="2240280" cy="347472"/>
-          </a:xfrm>
-          <a:prstGeom prst="rect">
-            <a:avLst/>
-          </a:prstGeom>
-          <a:noFill/>
-        </p:spPr>
-        <p:txBody>
-          <a:bodyPr wrap="square">
-            <a:spAutoFit/>
-          </a:bodyPr>
-          <a:lstStyle/>
-          <a:p>
-            <a:pPr algn="ctr"/>
-            <a:r>
-              <a:rPr sz="1000" b="0">
-                <a:solidFill>
-                  <a:srgbClr val="C5CAE9"/>
-                </a:solidFill>
-              </a:rPr>
-              <a:t>2026-06-02 ~ 06-06</a:t>
-            </a:r>
+          <p:cNvPr id="15" name="Rectangle 14"/>
+          <p:cNvSpPr/>
+          <p:nvPr/>
+        </p:nvSpPr>
+        <p:spPr>
+          <a:xfrm>
+            <a:off x="457200" y="3383280"/>
+            <a:ext cx="11247120" cy="475488"/>
+          </a:xfrm>
+          <a:prstGeom prst="rect">
+            <a:avLst/>
+          </a:prstGeom>
+          <a:solidFill>
+            <a:srgbClr val="F5F5F5"/>
+          </a:solidFill>
+          <a:ln>
+            <a:noFill/>
+          </a:ln>
+        </p:spPr>
+        <p:style>
+          <a:lnRef idx="1">
+            <a:schemeClr val="accent1"/>
+          </a:lnRef>
+          <a:fillRef idx="3">
+            <a:schemeClr val="accent1"/>
+          </a:fillRef>
+          <a:effectRef idx="2">
+            <a:schemeClr val="accent1"/>
+          </a:effectRef>
+          <a:fontRef idx="minor">
+            <a:schemeClr val="lt1"/>
+          </a:fontRef>
+        </p:style>
+        <p:txBody>
+          <a:bodyPr rtlCol="0" anchor="ctr"/>
+          <a:lstStyle/>
+          <a:p>
+            <a:pPr algn="ctr"/>
           </a:p>
         </p:txBody>
       </p:sp>
@@ -14283,8 +14190,8 @@
         </p:nvSpPr>
         <p:spPr>
           <a:xfrm>
-            <a:off x="3200400" y="2999232"/>
-            <a:ext cx="8229600" cy="914400"/>
+            <a:off x="658368" y="3474720"/>
+            <a:ext cx="1828800" cy="320040"/>
           </a:xfrm>
           <a:prstGeom prst="rect">
             <a:avLst/>
@@ -14299,32 +14206,101 @@
           <a:p>
             <a:pPr algn="l"/>
             <a:r>
-              <a:rPr sz="1400" b="0">
+              <a:rPr sz="1100" b="1">
+                <a:solidFill>
+                  <a:srgbClr val="3F51B5"/>
+                </a:solidFill>
+              </a:rPr>
+              <a:t>시나리오 B</a:t>
+            </a:r>
+          </a:p>
+        </p:txBody>
+      </p:sp>
+      <p:sp>
+        <p:nvSpPr>
+          <p:cNvPr id="17" name="TextBox 16"/>
+          <p:cNvSpPr txBox="1"/>
+          <p:nvPr/>
+        </p:nvSpPr>
+        <p:spPr>
+          <a:xfrm>
+            <a:off x="2606040" y="3474720"/>
+            <a:ext cx="8961120" cy="320040"/>
+          </a:xfrm>
+          <a:prstGeom prst="rect">
+            <a:avLst/>
+          </a:prstGeom>
+          <a:noFill/>
+        </p:spPr>
+        <p:txBody>
+          <a:bodyPr wrap="square">
+            <a:spAutoFit/>
+          </a:bodyPr>
+          <a:lstStyle/>
+          <a:p>
+            <a:pPr algn="l"/>
+            <a:r>
+              <a:rPr sz="1400" b="1">
                 <a:solidFill>
                   <a:srgbClr val="212121"/>
                 </a:solidFill>
               </a:rPr>
-              <a:t>Android APK 빌드 및 설치 테스트
-최종 발표 슬라이드 완성</a:t>
-            </a:r>
-          </a:p>
-        </p:txBody>
-      </p:sp>
-      <p:sp>
-        <p:nvSpPr>
-          <p:cNvPr id="17" name="Rectangle 16"/>
+              <a:t>포지션 기록 + 복기</a:t>
+            </a:r>
+          </a:p>
+        </p:txBody>
+      </p:sp>
+      <p:sp>
+        <p:nvSpPr>
+          <p:cNvPr id="18" name="TextBox 17"/>
+          <p:cNvSpPr txBox="1"/>
+          <p:nvPr/>
+        </p:nvSpPr>
+        <p:spPr>
+          <a:xfrm>
+            <a:off x="658368" y="4023360"/>
+            <a:ext cx="10881360" cy="1097280"/>
+          </a:xfrm>
+          <a:prstGeom prst="rect">
+            <a:avLst/>
+          </a:prstGeom>
+          <a:noFill/>
+        </p:spPr>
+        <p:txBody>
+          <a:bodyPr wrap="square">
+            <a:spAutoFit/>
+          </a:bodyPr>
+          <a:lstStyle/>
+          <a:p>
+            <a:pPr algn="l"/>
+            <a:r>
+              <a:rPr sz="1300" b="0">
+                <a:solidFill>
+                  <a:srgbClr val="212121"/>
+                </a:solidFill>
+              </a:rPr>
+              <a:t>① 포지션 진입 기록 (종목·진입가·수량·매수 근거)  → ② 포지션 정리 (매도가·손익·수익률 자동 계산)  → ③ 복기 메모 조회</a:t>
+            </a:r>
+          </a:p>
+        </p:txBody>
+      </p:sp>
+      <p:sp>
+        <p:nvSpPr>
+          <p:cNvPr id="19" name="Rectangle 18"/>
           <p:cNvSpPr/>
           <p:nvPr/>
         </p:nvSpPr>
         <p:spPr>
           <a:xfrm>
-            <a:off x="457200" y="4389120"/>
-            <a:ext cx="11247120" cy="1417320"/>
-          </a:xfrm>
-          <a:prstGeom prst="rect">
-            <a:avLst/>
-          </a:prstGeom>
-          <a:noFill/>
+            <a:off x="457200" y="5806440"/>
+            <a:ext cx="11247120" cy="658368"/>
+          </a:xfrm>
+          <a:prstGeom prst="rect">
+            <a:avLst/>
+          </a:prstGeom>
+          <a:solidFill>
+            <a:srgbClr val="F5F5F5"/>
+          </a:solidFill>
           <a:ln w="10160">
             <a:solidFill>
               <a:srgbClr val="E0E0E0"/>
@@ -14355,125 +14331,14 @@
       </p:sp>
       <p:sp>
         <p:nvSpPr>
-          <p:cNvPr id="18" name="Rectangle 17"/>
-          <p:cNvSpPr/>
-          <p:nvPr/>
-        </p:nvSpPr>
-        <p:spPr>
-          <a:xfrm>
-            <a:off x="457200" y="4389120"/>
-            <a:ext cx="2560320" cy="1417320"/>
-          </a:xfrm>
-          <a:prstGeom prst="rect">
-            <a:avLst/>
-          </a:prstGeom>
-          <a:solidFill>
-            <a:srgbClr val="3F51B5"/>
-          </a:solidFill>
-          <a:ln>
-            <a:noFill/>
-          </a:ln>
-        </p:spPr>
-        <p:style>
-          <a:lnRef idx="1">
-            <a:schemeClr val="accent1"/>
-          </a:lnRef>
-          <a:fillRef idx="3">
-            <a:schemeClr val="accent1"/>
-          </a:fillRef>
-          <a:effectRef idx="2">
-            <a:schemeClr val="accent1"/>
-          </a:effectRef>
-          <a:fontRef idx="minor">
-            <a:schemeClr val="lt1"/>
-          </a:fontRef>
-        </p:style>
-        <p:txBody>
-          <a:bodyPr rtlCol="0" anchor="ctr"/>
-          <a:lstStyle/>
-          <a:p>
-            <a:pPr algn="ctr"/>
-          </a:p>
-        </p:txBody>
-      </p:sp>
-      <p:sp>
-        <p:nvSpPr>
-          <p:cNvPr id="19" name="TextBox 18"/>
-          <p:cNvSpPr txBox="1"/>
-          <p:nvPr/>
-        </p:nvSpPr>
-        <p:spPr>
-          <a:xfrm>
-            <a:off x="621792" y="4590288"/>
-            <a:ext cx="2240280" cy="475488"/>
-          </a:xfrm>
-          <a:prstGeom prst="rect">
-            <a:avLst/>
-          </a:prstGeom>
-          <a:noFill/>
-        </p:spPr>
-        <p:txBody>
-          <a:bodyPr wrap="square">
-            <a:spAutoFit/>
-          </a:bodyPr>
-          <a:lstStyle/>
-          <a:p>
-            <a:pPr algn="ctr"/>
-            <a:r>
-              <a:rPr sz="1800" b="1">
-                <a:solidFill>
-                  <a:srgbClr val="FFFFFF"/>
-                </a:solidFill>
-              </a:rPr>
-              <a:t>15주차</a:t>
-            </a:r>
-          </a:p>
-        </p:txBody>
-      </p:sp>
-      <p:sp>
-        <p:nvSpPr>
           <p:cNvPr id="20" name="TextBox 19"/>
           <p:cNvSpPr txBox="1"/>
           <p:nvPr/>
         </p:nvSpPr>
         <p:spPr>
           <a:xfrm>
-            <a:off x="621792" y="5102352"/>
-            <a:ext cx="2240280" cy="347472"/>
-          </a:xfrm>
-          <a:prstGeom prst="rect">
-            <a:avLst/>
-          </a:prstGeom>
-          <a:noFill/>
-        </p:spPr>
-        <p:txBody>
-          <a:bodyPr wrap="square">
-            <a:spAutoFit/>
-          </a:bodyPr>
-          <a:lstStyle/>
-          <a:p>
-            <a:pPr algn="ctr"/>
-            <a:r>
-              <a:rPr sz="1000" b="0">
-                <a:solidFill>
-                  <a:srgbClr val="C5CAE9"/>
-                </a:solidFill>
-              </a:rPr>
-              <a:t>2026-06-09 ~ 06-13</a:t>
-            </a:r>
-          </a:p>
-        </p:txBody>
-      </p:sp>
-      <p:sp>
-        <p:nvSpPr>
-          <p:cNvPr id="21" name="TextBox 20"/>
-          <p:cNvSpPr txBox="1"/>
-          <p:nvPr/>
-        </p:nvSpPr>
-        <p:spPr>
-          <a:xfrm>
-            <a:off x="3200400" y="4645152"/>
-            <a:ext cx="8229600" cy="914400"/>
+            <a:off x="658368" y="5971032"/>
+            <a:ext cx="10972800" cy="411480"/>
           </a:xfrm>
           <a:prstGeom prst="rect">
             <a:avLst/>
@@ -14488,12 +14353,12 @@
           <a:p>
             <a:pPr algn="l"/>
             <a:r>
-              <a:rPr sz="1400" b="0">
-                <a:solidFill>
-                  <a:srgbClr val="212121"/>
-                </a:solidFill>
-              </a:rPr>
-              <a:t>최종 발표</a:t>
+              <a:rPr sz="1200" b="0">
+                <a:solidFill>
+                  <a:srgbClr val="9E9E9E"/>
+                </a:solidFill>
+              </a:rPr>
+              <a:t>데모 백업  ·  Wi-Fi 없는 환경 대비 → 로컬 데이터 캐시 + 화면 녹화 영상 준비</a:t>
             </a:r>
           </a:p>
         </p:txBody>
@@ -14586,14 +14451,48 @@
                   <a:srgbClr val="3F51B5"/>
                 </a:solidFill>
               </a:rPr>
-              <a:t>8.  어려운 점 / 도움 요청</a:t>
-            </a:r>
-          </a:p>
-        </p:txBody>
-      </p:sp>
-      <p:sp>
-        <p:nvSpPr>
-          <p:cNvPr id="4" name="Rectangle 3"/>
+              <a:t>7.  남은 일정</a:t>
+            </a:r>
+          </a:p>
+        </p:txBody>
+      </p:sp>
+      <p:sp>
+        <p:nvSpPr>
+          <p:cNvPr id="4" name="TextBox 3"/>
+          <p:cNvSpPr txBox="1"/>
+          <p:nvPr/>
+        </p:nvSpPr>
+        <p:spPr>
+          <a:xfrm>
+            <a:off x="457200" y="621792"/>
+            <a:ext cx="10972800" cy="274320"/>
+          </a:xfrm>
+          <a:prstGeom prst="rect">
+            <a:avLst/>
+          </a:prstGeom>
+          <a:noFill/>
+        </p:spPr>
+        <p:txBody>
+          <a:bodyPr wrap="square">
+            <a:spAutoFit/>
+          </a:bodyPr>
+          <a:lstStyle/>
+          <a:p>
+            <a:pPr algn="l"/>
+            <a:r>
+              <a:rPr sz="1100" b="0">
+                <a:solidFill>
+                  <a:srgbClr val="9E9E9E"/>
+                </a:solidFill>
+              </a:rPr>
+              <a:t>13 ~ 15주차 우선순위</a:t>
+            </a:r>
+          </a:p>
+        </p:txBody>
+      </p:sp>
+      <p:sp>
+        <p:nvSpPr>
+          <p:cNvPr id="5" name="Rectangle 4"/>
           <p:cNvSpPr/>
           <p:nvPr/>
         </p:nvSpPr>
@@ -14636,7 +14535,7 @@
       </p:sp>
       <p:sp>
         <p:nvSpPr>
-          <p:cNvPr id="5" name="TextBox 4"/>
+          <p:cNvPr id="6" name="TextBox 5"/>
           <p:cNvSpPr txBox="1"/>
           <p:nvPr/>
         </p:nvSpPr>
@@ -14663,20 +14562,20 @@
                   <a:srgbClr val="9E9E9E"/>
                 </a:solidFill>
               </a:rPr>
-              <a:t>9 / 13</a:t>
-            </a:r>
-          </a:p>
-        </p:txBody>
-      </p:sp>
-      <p:sp>
-        <p:nvSpPr>
-          <p:cNvPr id="6" name="Rectangle 5"/>
+              <a:t>8 / 13</a:t>
+            </a:r>
+          </a:p>
+        </p:txBody>
+      </p:sp>
+      <p:sp>
+        <p:nvSpPr>
+          <p:cNvPr id="7" name="Rectangle 6"/>
           <p:cNvSpPr/>
           <p:nvPr/>
         </p:nvSpPr>
         <p:spPr>
           <a:xfrm>
-            <a:off x="457200" y="1051560"/>
+            <a:off x="457200" y="1097280"/>
             <a:ext cx="11247120" cy="1417320"/>
           </a:xfrm>
           <a:prstGeom prst="rect">
@@ -14713,20 +14612,20 @@
       </p:sp>
       <p:sp>
         <p:nvSpPr>
-          <p:cNvPr id="7" name="Rectangle 6"/>
+          <p:cNvPr id="8" name="Rectangle 7"/>
           <p:cNvSpPr/>
           <p:nvPr/>
         </p:nvSpPr>
         <p:spPr>
           <a:xfrm>
-            <a:off x="457200" y="1051560"/>
-            <a:ext cx="54864" cy="1417320"/>
+            <a:off x="457200" y="1097280"/>
+            <a:ext cx="2560320" cy="1417320"/>
           </a:xfrm>
           <a:prstGeom prst="rect">
             <a:avLst/>
           </a:prstGeom>
           <a:solidFill>
-            <a:srgbClr val="E65C00"/>
+            <a:srgbClr val="3F51B5"/>
           </a:solidFill>
           <a:ln>
             <a:noFill/>
@@ -14756,14 +14655,82 @@
       </p:sp>
       <p:sp>
         <p:nvSpPr>
-          <p:cNvPr id="8" name="TextBox 7"/>
-          <p:cNvSpPr txBox="1"/>
-          <p:nvPr/>
-        </p:nvSpPr>
-        <p:spPr>
-          <a:xfrm>
-            <a:off x="658368" y="1188719"/>
-            <a:ext cx="10972800" cy="411480"/>
+          <p:cNvPr id="9" name="TextBox 8"/>
+          <p:cNvSpPr txBox="1"/>
+          <p:nvPr/>
+        </p:nvSpPr>
+        <p:spPr>
+          <a:xfrm>
+            <a:off x="621792" y="1298448"/>
+            <a:ext cx="2240280" cy="475488"/>
+          </a:xfrm>
+          <a:prstGeom prst="rect">
+            <a:avLst/>
+          </a:prstGeom>
+          <a:noFill/>
+        </p:spPr>
+        <p:txBody>
+          <a:bodyPr wrap="square">
+            <a:spAutoFit/>
+          </a:bodyPr>
+          <a:lstStyle/>
+          <a:p>
+            <a:pPr algn="ctr"/>
+            <a:r>
+              <a:rPr sz="1800" b="1">
+                <a:solidFill>
+                  <a:srgbClr val="FFFFFF"/>
+                </a:solidFill>
+              </a:rPr>
+              <a:t>13주차</a:t>
+            </a:r>
+          </a:p>
+        </p:txBody>
+      </p:sp>
+      <p:sp>
+        <p:nvSpPr>
+          <p:cNvPr id="10" name="TextBox 9"/>
+          <p:cNvSpPr txBox="1"/>
+          <p:nvPr/>
+        </p:nvSpPr>
+        <p:spPr>
+          <a:xfrm>
+            <a:off x="621792" y="1810512"/>
+            <a:ext cx="2240280" cy="347472"/>
+          </a:xfrm>
+          <a:prstGeom prst="rect">
+            <a:avLst/>
+          </a:prstGeom>
+          <a:noFill/>
+        </p:spPr>
+        <p:txBody>
+          <a:bodyPr wrap="square">
+            <a:spAutoFit/>
+          </a:bodyPr>
+          <a:lstStyle/>
+          <a:p>
+            <a:pPr algn="ctr"/>
+            <a:r>
+              <a:rPr sz="1000" b="0">
+                <a:solidFill>
+                  <a:srgbClr val="C5CAE9"/>
+                </a:solidFill>
+              </a:rPr>
+              <a:t>2026-05-26 ~ 05-30</a:t>
+            </a:r>
+          </a:p>
+        </p:txBody>
+      </p:sp>
+      <p:sp>
+        <p:nvSpPr>
+          <p:cNvPr id="11" name="TextBox 10"/>
+          <p:cNvSpPr txBox="1"/>
+          <p:nvPr/>
+        </p:nvSpPr>
+        <p:spPr>
+          <a:xfrm>
+            <a:off x="3200400" y="1353312"/>
+            <a:ext cx="8229600" cy="914400"/>
           </a:xfrm>
           <a:prstGeom prst="rect">
             <a:avLst/>
@@ -14778,60 +14745,26 @@
           <a:p>
             <a:pPr algn="l"/>
             <a:r>
-              <a:rPr sz="1400" b="1">
+              <a:rPr sz="1400" b="0">
                 <a:solidFill>
                   <a:srgbClr val="212121"/>
                 </a:solidFill>
               </a:rPr>
-              <a:t>iOS 빌드 불가</a:t>
-            </a:r>
-          </a:p>
-        </p:txBody>
-      </p:sp>
-      <p:sp>
-        <p:nvSpPr>
-          <p:cNvPr id="9" name="TextBox 8"/>
-          <p:cNvSpPr txBox="1"/>
-          <p:nvPr/>
-        </p:nvSpPr>
-        <p:spPr>
-          <a:xfrm>
-            <a:off x="658368" y="1618488"/>
-            <a:ext cx="10789920" cy="749808"/>
-          </a:xfrm>
-          <a:prstGeom prst="rect">
-            <a:avLst/>
-          </a:prstGeom>
-          <a:noFill/>
-        </p:spPr>
-        <p:txBody>
-          <a:bodyPr wrap="square">
-            <a:spAutoFit/>
-          </a:bodyPr>
-          <a:lstStyle/>
-          <a:p>
-            <a:pPr algn="l"/>
-            <a:r>
-              <a:rPr sz="1300" b="0">
-                <a:solidFill>
-                  <a:srgbClr val="212121"/>
-                </a:solidFill>
-              </a:rPr>
-              <a:t>Mac 환경 없음 → iOS 시뮬레이터·실기기 테스트 불가
-Android APK만 제출 예정</a:t>
-            </a:r>
-          </a:p>
-        </p:txBody>
-      </p:sp>
-      <p:sp>
-        <p:nvSpPr>
-          <p:cNvPr id="10" name="Rectangle 9"/>
+              <a:t>setup.md / deploy.md / testing.md 문서 완성
+README 최종 완비</a:t>
+            </a:r>
+          </a:p>
+        </p:txBody>
+      </p:sp>
+      <p:sp>
+        <p:nvSpPr>
+          <p:cNvPr id="12" name="Rectangle 11"/>
           <p:cNvSpPr/>
           <p:nvPr/>
         </p:nvSpPr>
         <p:spPr>
           <a:xfrm>
-            <a:off x="457200" y="2715768"/>
+            <a:off x="457200" y="2743200"/>
             <a:ext cx="11247120" cy="1417320"/>
           </a:xfrm>
           <a:prstGeom prst="rect">
@@ -14868,20 +14801,20 @@
       </p:sp>
       <p:sp>
         <p:nvSpPr>
-          <p:cNvPr id="11" name="Rectangle 10"/>
+          <p:cNvPr id="13" name="Rectangle 12"/>
           <p:cNvSpPr/>
           <p:nvPr/>
         </p:nvSpPr>
         <p:spPr>
           <a:xfrm>
-            <a:off x="457200" y="2715768"/>
-            <a:ext cx="54864" cy="1417320"/>
+            <a:off x="457200" y="2743200"/>
+            <a:ext cx="2560320" cy="1417320"/>
           </a:xfrm>
           <a:prstGeom prst="rect">
             <a:avLst/>
           </a:prstGeom>
           <a:solidFill>
-            <a:srgbClr val="E65C00"/>
+            <a:srgbClr val="3F51B5"/>
           </a:solidFill>
           <a:ln>
             <a:noFill/>
@@ -14911,14 +14844,82 @@
       </p:sp>
       <p:sp>
         <p:nvSpPr>
-          <p:cNvPr id="12" name="TextBox 11"/>
-          <p:cNvSpPr txBox="1"/>
-          <p:nvPr/>
-        </p:nvSpPr>
-        <p:spPr>
-          <a:xfrm>
-            <a:off x="658368" y="2852927"/>
-            <a:ext cx="10972800" cy="411480"/>
+          <p:cNvPr id="14" name="TextBox 13"/>
+          <p:cNvSpPr txBox="1"/>
+          <p:nvPr/>
+        </p:nvSpPr>
+        <p:spPr>
+          <a:xfrm>
+            <a:off x="621792" y="2944368"/>
+            <a:ext cx="2240280" cy="475488"/>
+          </a:xfrm>
+          <a:prstGeom prst="rect">
+            <a:avLst/>
+          </a:prstGeom>
+          <a:noFill/>
+        </p:spPr>
+        <p:txBody>
+          <a:bodyPr wrap="square">
+            <a:spAutoFit/>
+          </a:bodyPr>
+          <a:lstStyle/>
+          <a:p>
+            <a:pPr algn="ctr"/>
+            <a:r>
+              <a:rPr sz="1800" b="1">
+                <a:solidFill>
+                  <a:srgbClr val="FFFFFF"/>
+                </a:solidFill>
+              </a:rPr>
+              <a:t>14주차</a:t>
+            </a:r>
+          </a:p>
+        </p:txBody>
+      </p:sp>
+      <p:sp>
+        <p:nvSpPr>
+          <p:cNvPr id="15" name="TextBox 14"/>
+          <p:cNvSpPr txBox="1"/>
+          <p:nvPr/>
+        </p:nvSpPr>
+        <p:spPr>
+          <a:xfrm>
+            <a:off x="621792" y="3456432"/>
+            <a:ext cx="2240280" cy="347472"/>
+          </a:xfrm>
+          <a:prstGeom prst="rect">
+            <a:avLst/>
+          </a:prstGeom>
+          <a:noFill/>
+        </p:spPr>
+        <p:txBody>
+          <a:bodyPr wrap="square">
+            <a:spAutoFit/>
+          </a:bodyPr>
+          <a:lstStyle/>
+          <a:p>
+            <a:pPr algn="ctr"/>
+            <a:r>
+              <a:rPr sz="1000" b="0">
+                <a:solidFill>
+                  <a:srgbClr val="C5CAE9"/>
+                </a:solidFill>
+              </a:rPr>
+              <a:t>2026-06-02 ~ 06-06</a:t>
+            </a:r>
+          </a:p>
+        </p:txBody>
+      </p:sp>
+      <p:sp>
+        <p:nvSpPr>
+          <p:cNvPr id="16" name="TextBox 15"/>
+          <p:cNvSpPr txBox="1"/>
+          <p:nvPr/>
+        </p:nvSpPr>
+        <p:spPr>
+          <a:xfrm>
+            <a:off x="3200400" y="2999232"/>
+            <a:ext cx="8229600" cy="914400"/>
           </a:xfrm>
           <a:prstGeom prst="rect">
             <a:avLst/>
@@ -14933,60 +14934,26 @@
           <a:p>
             <a:pPr algn="l"/>
             <a:r>
-              <a:rPr sz="1400" b="1">
+              <a:rPr sz="1400" b="0">
                 <a:solidFill>
                   <a:srgbClr val="212121"/>
                 </a:solidFill>
               </a:rPr>
-              <a:t>Firebase Security Rules</a:t>
-            </a:r>
-          </a:p>
-        </p:txBody>
-      </p:sp>
-      <p:sp>
-        <p:nvSpPr>
-          <p:cNvPr id="13" name="TextBox 12"/>
-          <p:cNvSpPr txBox="1"/>
-          <p:nvPr/>
-        </p:nvSpPr>
-        <p:spPr>
-          <a:xfrm>
-            <a:off x="658368" y="3282696"/>
-            <a:ext cx="10789920" cy="749808"/>
-          </a:xfrm>
-          <a:prstGeom prst="rect">
-            <a:avLst/>
-          </a:prstGeom>
-          <a:noFill/>
-        </p:spPr>
-        <p:txBody>
-          <a:bodyPr wrap="square">
-            <a:spAutoFit/>
-          </a:bodyPr>
-          <a:lstStyle/>
-          <a:p>
-            <a:pPr algn="l"/>
-            <a:r>
-              <a:rPr sz="1300" b="0">
-                <a:solidFill>
-                  <a:srgbClr val="212121"/>
-                </a:solidFill>
-              </a:rPr>
-              <a:t>Firestore 보안 규칙 검증 어려움 — 다른 사용자가 타 계정 데이터에
-접근하지 못하도록 규칙을 작성했으나 침투 테스트 환경 없음</a:t>
-            </a:r>
-          </a:p>
-        </p:txBody>
-      </p:sp>
-      <p:sp>
-        <p:nvSpPr>
-          <p:cNvPr id="14" name="Rectangle 13"/>
+              <a:t>Android APK 빌드 및 설치 테스트
+최종 발표 슬라이드 완성</a:t>
+            </a:r>
+          </a:p>
+        </p:txBody>
+      </p:sp>
+      <p:sp>
+        <p:nvSpPr>
+          <p:cNvPr id="17" name="Rectangle 16"/>
           <p:cNvSpPr/>
           <p:nvPr/>
         </p:nvSpPr>
         <p:spPr>
           <a:xfrm>
-            <a:off x="457200" y="4379976"/>
+            <a:off x="457200" y="4389120"/>
             <a:ext cx="11247120" cy="1417320"/>
           </a:xfrm>
           <a:prstGeom prst="rect">
@@ -15023,20 +14990,20 @@
       </p:sp>
       <p:sp>
         <p:nvSpPr>
-          <p:cNvPr id="15" name="Rectangle 14"/>
+          <p:cNvPr id="18" name="Rectangle 17"/>
           <p:cNvSpPr/>
           <p:nvPr/>
         </p:nvSpPr>
         <p:spPr>
           <a:xfrm>
-            <a:off x="457200" y="4379976"/>
-            <a:ext cx="54864" cy="1417320"/>
+            <a:off x="457200" y="4389120"/>
+            <a:ext cx="2560320" cy="1417320"/>
           </a:xfrm>
           <a:prstGeom prst="rect">
             <a:avLst/>
           </a:prstGeom>
           <a:solidFill>
-            <a:srgbClr val="E65C00"/>
+            <a:srgbClr val="3F51B5"/>
           </a:solidFill>
           <a:ln>
             <a:noFill/>
@@ -15066,14 +15033,82 @@
       </p:sp>
       <p:sp>
         <p:nvSpPr>
-          <p:cNvPr id="16" name="TextBox 15"/>
-          <p:cNvSpPr txBox="1"/>
-          <p:nvPr/>
-        </p:nvSpPr>
-        <p:spPr>
-          <a:xfrm>
-            <a:off x="658368" y="4517136"/>
-            <a:ext cx="10972800" cy="411480"/>
+          <p:cNvPr id="19" name="TextBox 18"/>
+          <p:cNvSpPr txBox="1"/>
+          <p:nvPr/>
+        </p:nvSpPr>
+        <p:spPr>
+          <a:xfrm>
+            <a:off x="621792" y="4590288"/>
+            <a:ext cx="2240280" cy="475488"/>
+          </a:xfrm>
+          <a:prstGeom prst="rect">
+            <a:avLst/>
+          </a:prstGeom>
+          <a:noFill/>
+        </p:spPr>
+        <p:txBody>
+          <a:bodyPr wrap="square">
+            <a:spAutoFit/>
+          </a:bodyPr>
+          <a:lstStyle/>
+          <a:p>
+            <a:pPr algn="ctr"/>
+            <a:r>
+              <a:rPr sz="1800" b="1">
+                <a:solidFill>
+                  <a:srgbClr val="FFFFFF"/>
+                </a:solidFill>
+              </a:rPr>
+              <a:t>15주차</a:t>
+            </a:r>
+          </a:p>
+        </p:txBody>
+      </p:sp>
+      <p:sp>
+        <p:nvSpPr>
+          <p:cNvPr id="20" name="TextBox 19"/>
+          <p:cNvSpPr txBox="1"/>
+          <p:nvPr/>
+        </p:nvSpPr>
+        <p:spPr>
+          <a:xfrm>
+            <a:off x="621792" y="5102352"/>
+            <a:ext cx="2240280" cy="347472"/>
+          </a:xfrm>
+          <a:prstGeom prst="rect">
+            <a:avLst/>
+          </a:prstGeom>
+          <a:noFill/>
+        </p:spPr>
+        <p:txBody>
+          <a:bodyPr wrap="square">
+            <a:spAutoFit/>
+          </a:bodyPr>
+          <a:lstStyle/>
+          <a:p>
+            <a:pPr algn="ctr"/>
+            <a:r>
+              <a:rPr sz="1000" b="0">
+                <a:solidFill>
+                  <a:srgbClr val="C5CAE9"/>
+                </a:solidFill>
+              </a:rPr>
+              <a:t>2026-06-09 ~ 06-13</a:t>
+            </a:r>
+          </a:p>
+        </p:txBody>
+      </p:sp>
+      <p:sp>
+        <p:nvSpPr>
+          <p:cNvPr id="21" name="TextBox 20"/>
+          <p:cNvSpPr txBox="1"/>
+          <p:nvPr/>
+        </p:nvSpPr>
+        <p:spPr>
+          <a:xfrm>
+            <a:off x="3200400" y="4645152"/>
+            <a:ext cx="8229600" cy="914400"/>
           </a:xfrm>
           <a:prstGeom prst="rect">
             <a:avLst/>
@@ -15088,47 +15123,12 @@
           <a:p>
             <a:pPr algn="l"/>
             <a:r>
-              <a:rPr sz="1400" b="1">
+              <a:rPr sz="1400" b="0">
                 <a:solidFill>
                   <a:srgbClr val="212121"/>
                 </a:solidFill>
               </a:rPr>
-              <a:t>앱 배포 경험 없음</a:t>
-            </a:r>
-          </a:p>
-        </p:txBody>
-      </p:sp>
-      <p:sp>
-        <p:nvSpPr>
-          <p:cNvPr id="17" name="TextBox 16"/>
-          <p:cNvSpPr txBox="1"/>
-          <p:nvPr/>
-        </p:nvSpPr>
-        <p:spPr>
-          <a:xfrm>
-            <a:off x="658368" y="4946904"/>
-            <a:ext cx="10789920" cy="749808"/>
-          </a:xfrm>
-          <a:prstGeom prst="rect">
-            <a:avLst/>
-          </a:prstGeom>
-          <a:noFill/>
-        </p:spPr>
-        <p:txBody>
-          <a:bodyPr wrap="square">
-            <a:spAutoFit/>
-          </a:bodyPr>
-          <a:lstStyle/>
-          <a:p>
-            <a:pPr algn="l"/>
-            <a:r>
-              <a:rPr sz="1300" b="0">
-                <a:solidFill>
-                  <a:srgbClr val="212121"/>
-                </a:solidFill>
-              </a:rPr>
-              <a:t>Google Play Console 등록 절차 및 APK 서명 과정 첫 시도
-배포 오류 발생 시 대응 방법 조언 필요</a:t>
+              <a:t>최종 발표</a:t>
             </a:r>
           </a:p>
         </p:txBody>

--- a/portfolio-tracker/presentation/portfolio-tracker.pptx
+++ b/portfolio-tracker/presentation/portfolio-tracker.pptx
@@ -12065,7 +12065,7 @@
                   <a:srgbClr val="3F51B5"/>
                 </a:solidFill>
               </a:rPr>
-              <a:t>5.  진행 상황</a:t>
+              <a:t>5.  데모</a:t>
             </a:r>
           </a:p>
         </p:txBody>
@@ -12099,7 +12099,7 @@
                   <a:srgbClr val="9E9E9E"/>
                 </a:solidFill>
               </a:rPr>
-              <a:t>Must 기능 기준 진척도</a:t>
+              <a:t>라이브 시연 — 핵심 화면 2가지</a:t>
             </a:r>
           </a:p>
         </p:txBody>
@@ -12176,7 +12176,7 @@
                   <a:srgbClr val="9E9E9E"/>
                 </a:solidFill>
               </a:rPr>
-              <a:t>6 / 13</a:t>
+              <a:t>7 / 13</a:t>
             </a:r>
           </a:p>
         </p:txBody>
@@ -12189,8 +12189,8 @@
         </p:nvSpPr>
         <p:spPr>
           <a:xfrm>
-            <a:off x="457200" y="1051560"/>
-            <a:ext cx="11247120" cy="621792"/>
+            <a:off x="457200" y="1097280"/>
+            <a:ext cx="11247120" cy="1920240"/>
           </a:xfrm>
           <a:prstGeom prst="rect">
             <a:avLst/>
@@ -12232,14 +12232,14 @@
         </p:nvSpPr>
         <p:spPr>
           <a:xfrm>
-            <a:off x="457200" y="1051560"/>
-            <a:ext cx="54864" cy="621792"/>
+            <a:off x="457200" y="1097280"/>
+            <a:ext cx="54864" cy="1920240"/>
           </a:xfrm>
           <a:prstGeom prst="rect">
             <a:avLst/>
           </a:prstGeom>
           <a:solidFill>
-            <a:srgbClr val="2E7D32"/>
+            <a:srgbClr val="3F51B5"/>
           </a:solidFill>
           <a:ln>
             <a:noFill/>
@@ -12269,14 +12269,57 @@
       </p:sp>
       <p:sp>
         <p:nvSpPr>
-          <p:cNvPr id="9" name="TextBox 8"/>
-          <p:cNvSpPr txBox="1"/>
-          <p:nvPr/>
-        </p:nvSpPr>
-        <p:spPr>
-          <a:xfrm>
-            <a:off x="594360" y="1197863"/>
-            <a:ext cx="1188720" cy="347472"/>
+          <p:cNvPr id="9" name="Rectangle 8"/>
+          <p:cNvSpPr/>
+          <p:nvPr/>
+        </p:nvSpPr>
+        <p:spPr>
+          <a:xfrm>
+            <a:off x="457200" y="1097280"/>
+            <a:ext cx="11247120" cy="475488"/>
+          </a:xfrm>
+          <a:prstGeom prst="rect">
+            <a:avLst/>
+          </a:prstGeom>
+          <a:solidFill>
+            <a:srgbClr val="F5F5F5"/>
+          </a:solidFill>
+          <a:ln>
+            <a:noFill/>
+          </a:ln>
+        </p:spPr>
+        <p:style>
+          <a:lnRef idx="1">
+            <a:schemeClr val="accent1"/>
+          </a:lnRef>
+          <a:fillRef idx="3">
+            <a:schemeClr val="accent1"/>
+          </a:fillRef>
+          <a:effectRef idx="2">
+            <a:schemeClr val="accent1"/>
+          </a:effectRef>
+          <a:fontRef idx="minor">
+            <a:schemeClr val="lt1"/>
+          </a:fontRef>
+        </p:style>
+        <p:txBody>
+          <a:bodyPr rtlCol="0" anchor="ctr"/>
+          <a:lstStyle/>
+          <a:p>
+            <a:pPr algn="ctr"/>
+          </a:p>
+        </p:txBody>
+      </p:sp>
+      <p:sp>
+        <p:nvSpPr>
+          <p:cNvPr id="10" name="TextBox 9"/>
+          <p:cNvSpPr txBox="1"/>
+          <p:nvPr/>
+        </p:nvSpPr>
+        <p:spPr>
+          <a:xfrm>
+            <a:off x="658368" y="1188720"/>
+            <a:ext cx="1828800" cy="320040"/>
           </a:xfrm>
           <a:prstGeom prst="rect">
             <a:avLst/>
@@ -12291,26 +12334,26 @@
           <a:p>
             <a:pPr algn="l"/>
             <a:r>
-              <a:rPr sz="1100" b="0">
-                <a:solidFill>
-                  <a:srgbClr val="2E7D32"/>
-                </a:solidFill>
-              </a:rPr>
-              <a:t>✅ 완료</a:t>
-            </a:r>
-          </a:p>
-        </p:txBody>
-      </p:sp>
-      <p:sp>
-        <p:nvSpPr>
-          <p:cNvPr id="10" name="TextBox 9"/>
-          <p:cNvSpPr txBox="1"/>
-          <p:nvPr/>
-        </p:nvSpPr>
-        <p:spPr>
-          <a:xfrm>
-            <a:off x="1920240" y="1197863"/>
-            <a:ext cx="2103120" cy="347472"/>
+              <a:rPr sz="1100" b="1">
+                <a:solidFill>
+                  <a:srgbClr val="3F51B5"/>
+                </a:solidFill>
+              </a:rPr>
+              <a:t>시나리오 A</a:t>
+            </a:r>
+          </a:p>
+        </p:txBody>
+      </p:sp>
+      <p:sp>
+        <p:nvSpPr>
+          <p:cNvPr id="11" name="TextBox 10"/>
+          <p:cNvSpPr txBox="1"/>
+          <p:nvPr/>
+        </p:nvSpPr>
+        <p:spPr>
+          <a:xfrm>
+            <a:off x="2606040" y="1188720"/>
+            <a:ext cx="8961120" cy="320040"/>
           </a:xfrm>
           <a:prstGeom prst="rect">
             <a:avLst/>
@@ -12325,26 +12368,26 @@
           <a:p>
             <a:pPr algn="l"/>
             <a:r>
-              <a:rPr sz="1200" b="1">
+              <a:rPr sz="1400" b="1">
                 <a:solidFill>
                   <a:srgbClr val="212121"/>
                 </a:solidFill>
               </a:rPr>
-              <a:t>인증</a:t>
-            </a:r>
-          </a:p>
-        </p:txBody>
-      </p:sp>
-      <p:sp>
-        <p:nvSpPr>
-          <p:cNvPr id="11" name="TextBox 10"/>
-          <p:cNvSpPr txBox="1"/>
-          <p:nvPr/>
-        </p:nvSpPr>
-        <p:spPr>
-          <a:xfrm>
-            <a:off x="4114800" y="1197863"/>
-            <a:ext cx="7406640" cy="347472"/>
+              <a:t>계좌 관리 흐름</a:t>
+            </a:r>
+          </a:p>
+        </p:txBody>
+      </p:sp>
+      <p:sp>
+        <p:nvSpPr>
+          <p:cNvPr id="12" name="TextBox 11"/>
+          <p:cNvSpPr txBox="1"/>
+          <p:nvPr/>
+        </p:nvSpPr>
+        <p:spPr>
+          <a:xfrm>
+            <a:off x="658368" y="1737360"/>
+            <a:ext cx="10881360" cy="1097280"/>
           </a:xfrm>
           <a:prstGeom prst="rect">
             <a:avLst/>
@@ -12359,26 +12402,26 @@
           <a:p>
             <a:pPr algn="l"/>
             <a:r>
-              <a:rPr sz="1200" b="0">
+              <a:rPr sz="1300" b="0">
                 <a:solidFill>
                   <a:srgbClr val="212121"/>
                 </a:solidFill>
               </a:rPr>
-              <a:t>회원가입 / 로그인 / 자동 로그인</a:t>
-            </a:r>
-          </a:p>
-        </p:txBody>
-      </p:sp>
-      <p:sp>
-        <p:nvSpPr>
-          <p:cNvPr id="12" name="Rectangle 11"/>
+              <a:t>① 계좌 등록 (주식·코인 선택, 통화 선택)  → ② 입금 기록  → ③ 잔액 자동 계산 확인</a:t>
+            </a:r>
+          </a:p>
+        </p:txBody>
+      </p:sp>
+      <p:sp>
+        <p:nvSpPr>
+          <p:cNvPr id="13" name="Rectangle 12"/>
           <p:cNvSpPr/>
           <p:nvPr/>
         </p:nvSpPr>
         <p:spPr>
           <a:xfrm>
-            <a:off x="457200" y="1783080"/>
-            <a:ext cx="11247120" cy="621792"/>
+            <a:off x="457200" y="3383280"/>
+            <a:ext cx="11247120" cy="1920240"/>
           </a:xfrm>
           <a:prstGeom prst="rect">
             <a:avLst/>
@@ -12414,20 +12457,20 @@
       </p:sp>
       <p:sp>
         <p:nvSpPr>
-          <p:cNvPr id="13" name="Rectangle 12"/>
+          <p:cNvPr id="14" name="Rectangle 13"/>
           <p:cNvSpPr/>
           <p:nvPr/>
         </p:nvSpPr>
         <p:spPr>
           <a:xfrm>
-            <a:off x="457200" y="1783080"/>
-            <a:ext cx="54864" cy="621792"/>
+            <a:off x="457200" y="3383280"/>
+            <a:ext cx="54864" cy="1920240"/>
           </a:xfrm>
           <a:prstGeom prst="rect">
             <a:avLst/>
           </a:prstGeom>
           <a:solidFill>
-            <a:srgbClr val="2E7D32"/>
+            <a:srgbClr val="3F51B5"/>
           </a:solidFill>
           <a:ln>
             <a:noFill/>
@@ -12457,125 +12500,23 @@
       </p:sp>
       <p:sp>
         <p:nvSpPr>
-          <p:cNvPr id="14" name="TextBox 13"/>
-          <p:cNvSpPr txBox="1"/>
-          <p:nvPr/>
-        </p:nvSpPr>
-        <p:spPr>
-          <a:xfrm>
-            <a:off x="594360" y="1929384"/>
-            <a:ext cx="1188720" cy="347472"/>
-          </a:xfrm>
-          <a:prstGeom prst="rect">
-            <a:avLst/>
-          </a:prstGeom>
-          <a:noFill/>
-        </p:spPr>
-        <p:txBody>
-          <a:bodyPr wrap="square">
-            <a:spAutoFit/>
-          </a:bodyPr>
-          <a:lstStyle/>
-          <a:p>
-            <a:pPr algn="l"/>
-            <a:r>
-              <a:rPr sz="1100" b="0">
-                <a:solidFill>
-                  <a:srgbClr val="2E7D32"/>
-                </a:solidFill>
-              </a:rPr>
-              <a:t>✅ 완료</a:t>
-            </a:r>
-          </a:p>
-        </p:txBody>
-      </p:sp>
-      <p:sp>
-        <p:nvSpPr>
-          <p:cNvPr id="15" name="TextBox 14"/>
-          <p:cNvSpPr txBox="1"/>
-          <p:nvPr/>
-        </p:nvSpPr>
-        <p:spPr>
-          <a:xfrm>
-            <a:off x="1920240" y="1929384"/>
-            <a:ext cx="2103120" cy="347472"/>
-          </a:xfrm>
-          <a:prstGeom prst="rect">
-            <a:avLst/>
-          </a:prstGeom>
-          <a:noFill/>
-        </p:spPr>
-        <p:txBody>
-          <a:bodyPr wrap="square">
-            <a:spAutoFit/>
-          </a:bodyPr>
-          <a:lstStyle/>
-          <a:p>
-            <a:pPr algn="l"/>
-            <a:r>
-              <a:rPr sz="1200" b="1">
-                <a:solidFill>
-                  <a:srgbClr val="212121"/>
-                </a:solidFill>
-              </a:rPr>
-              <a:t>계좌 관리</a:t>
-            </a:r>
-          </a:p>
-        </p:txBody>
-      </p:sp>
-      <p:sp>
-        <p:nvSpPr>
-          <p:cNvPr id="16" name="TextBox 15"/>
-          <p:cNvSpPr txBox="1"/>
-          <p:nvPr/>
-        </p:nvSpPr>
-        <p:spPr>
-          <a:xfrm>
-            <a:off x="4114800" y="1929384"/>
-            <a:ext cx="7406640" cy="347472"/>
-          </a:xfrm>
-          <a:prstGeom prst="rect">
-            <a:avLst/>
-          </a:prstGeom>
-          <a:noFill/>
-        </p:spPr>
-        <p:txBody>
-          <a:bodyPr wrap="square">
-            <a:spAutoFit/>
-          </a:bodyPr>
-          <a:lstStyle/>
-          <a:p>
-            <a:pPr algn="l"/>
-            <a:r>
-              <a:rPr sz="1200" b="0">
-                <a:solidFill>
-                  <a:srgbClr val="212121"/>
-                </a:solidFill>
-              </a:rPr>
-              <a:t>계좌 등록 / 입출금 기록 / 잔액 자동 계산</a:t>
-            </a:r>
-          </a:p>
-        </p:txBody>
-      </p:sp>
-      <p:sp>
-        <p:nvSpPr>
-          <p:cNvPr id="17" name="Rectangle 16"/>
+          <p:cNvPr id="15" name="Rectangle 14"/>
           <p:cNvSpPr/>
           <p:nvPr/>
         </p:nvSpPr>
         <p:spPr>
           <a:xfrm>
-            <a:off x="457200" y="2514600"/>
-            <a:ext cx="11247120" cy="621792"/>
-          </a:xfrm>
-          <a:prstGeom prst="rect">
-            <a:avLst/>
-          </a:prstGeom>
-          <a:noFill/>
-          <a:ln w="10160">
-            <a:solidFill>
-              <a:srgbClr val="E0E0E0"/>
-            </a:solidFill>
+            <a:off x="457200" y="3383280"/>
+            <a:ext cx="11247120" cy="475488"/>
+          </a:xfrm>
+          <a:prstGeom prst="rect">
+            <a:avLst/>
+          </a:prstGeom>
+          <a:solidFill>
+            <a:srgbClr val="F5F5F5"/>
+          </a:solidFill>
+          <a:ln>
+            <a:noFill/>
           </a:ln>
         </p:spPr>
         <p:style>
@@ -12602,911 +12543,116 @@
       </p:sp>
       <p:sp>
         <p:nvSpPr>
-          <p:cNvPr id="18" name="Rectangle 17"/>
+          <p:cNvPr id="16" name="TextBox 15"/>
+          <p:cNvSpPr txBox="1"/>
+          <p:nvPr/>
+        </p:nvSpPr>
+        <p:spPr>
+          <a:xfrm>
+            <a:off x="658368" y="3474720"/>
+            <a:ext cx="1828800" cy="320040"/>
+          </a:xfrm>
+          <a:prstGeom prst="rect">
+            <a:avLst/>
+          </a:prstGeom>
+          <a:noFill/>
+        </p:spPr>
+        <p:txBody>
+          <a:bodyPr wrap="square">
+            <a:spAutoFit/>
+          </a:bodyPr>
+          <a:lstStyle/>
+          <a:p>
+            <a:pPr algn="l"/>
+            <a:r>
+              <a:rPr sz="1100" b="1">
+                <a:solidFill>
+                  <a:srgbClr val="3F51B5"/>
+                </a:solidFill>
+              </a:rPr>
+              <a:t>시나리오 B</a:t>
+            </a:r>
+          </a:p>
+        </p:txBody>
+      </p:sp>
+      <p:sp>
+        <p:nvSpPr>
+          <p:cNvPr id="17" name="TextBox 16"/>
+          <p:cNvSpPr txBox="1"/>
+          <p:nvPr/>
+        </p:nvSpPr>
+        <p:spPr>
+          <a:xfrm>
+            <a:off x="2606040" y="3474720"/>
+            <a:ext cx="8961120" cy="320040"/>
+          </a:xfrm>
+          <a:prstGeom prst="rect">
+            <a:avLst/>
+          </a:prstGeom>
+          <a:noFill/>
+        </p:spPr>
+        <p:txBody>
+          <a:bodyPr wrap="square">
+            <a:spAutoFit/>
+          </a:bodyPr>
+          <a:lstStyle/>
+          <a:p>
+            <a:pPr algn="l"/>
+            <a:r>
+              <a:rPr sz="1400" b="1">
+                <a:solidFill>
+                  <a:srgbClr val="212121"/>
+                </a:solidFill>
+              </a:rPr>
+              <a:t>포지션 기록 + 복기</a:t>
+            </a:r>
+          </a:p>
+        </p:txBody>
+      </p:sp>
+      <p:sp>
+        <p:nvSpPr>
+          <p:cNvPr id="18" name="TextBox 17"/>
+          <p:cNvSpPr txBox="1"/>
+          <p:nvPr/>
+        </p:nvSpPr>
+        <p:spPr>
+          <a:xfrm>
+            <a:off x="658368" y="4023360"/>
+            <a:ext cx="10881360" cy="1097280"/>
+          </a:xfrm>
+          <a:prstGeom prst="rect">
+            <a:avLst/>
+          </a:prstGeom>
+          <a:noFill/>
+        </p:spPr>
+        <p:txBody>
+          <a:bodyPr wrap="square">
+            <a:spAutoFit/>
+          </a:bodyPr>
+          <a:lstStyle/>
+          <a:p>
+            <a:pPr algn="l"/>
+            <a:r>
+              <a:rPr sz="1300" b="0">
+                <a:solidFill>
+                  <a:srgbClr val="212121"/>
+                </a:solidFill>
+              </a:rPr>
+              <a:t>① 포지션 진입 기록 (종목·진입가·수량·매수 근거)  → ② 포지션 정리 (매도가·손익·수익률 자동 계산)  → ③ 복기 메모 조회</a:t>
+            </a:r>
+          </a:p>
+        </p:txBody>
+      </p:sp>
+      <p:sp>
+        <p:nvSpPr>
+          <p:cNvPr id="19" name="Rectangle 18"/>
           <p:cNvSpPr/>
           <p:nvPr/>
         </p:nvSpPr>
         <p:spPr>
           <a:xfrm>
-            <a:off x="457200" y="2514600"/>
-            <a:ext cx="54864" cy="621792"/>
-          </a:xfrm>
-          <a:prstGeom prst="rect">
-            <a:avLst/>
-          </a:prstGeom>
-          <a:solidFill>
-            <a:srgbClr val="2E7D32"/>
-          </a:solidFill>
-          <a:ln>
-            <a:noFill/>
-          </a:ln>
-        </p:spPr>
-        <p:style>
-          <a:lnRef idx="1">
-            <a:schemeClr val="accent1"/>
-          </a:lnRef>
-          <a:fillRef idx="3">
-            <a:schemeClr val="accent1"/>
-          </a:fillRef>
-          <a:effectRef idx="2">
-            <a:schemeClr val="accent1"/>
-          </a:effectRef>
-          <a:fontRef idx="minor">
-            <a:schemeClr val="lt1"/>
-          </a:fontRef>
-        </p:style>
-        <p:txBody>
-          <a:bodyPr rtlCol="0" anchor="ctr"/>
-          <a:lstStyle/>
-          <a:p>
-            <a:pPr algn="ctr"/>
-          </a:p>
-        </p:txBody>
-      </p:sp>
-      <p:sp>
-        <p:nvSpPr>
-          <p:cNvPr id="19" name="TextBox 18"/>
-          <p:cNvSpPr txBox="1"/>
-          <p:nvPr/>
-        </p:nvSpPr>
-        <p:spPr>
-          <a:xfrm>
-            <a:off x="594360" y="2660904"/>
-            <a:ext cx="1188720" cy="347472"/>
-          </a:xfrm>
-          <a:prstGeom prst="rect">
-            <a:avLst/>
-          </a:prstGeom>
-          <a:noFill/>
-        </p:spPr>
-        <p:txBody>
-          <a:bodyPr wrap="square">
-            <a:spAutoFit/>
-          </a:bodyPr>
-          <a:lstStyle/>
-          <a:p>
-            <a:pPr algn="l"/>
-            <a:r>
-              <a:rPr sz="1100" b="0">
-                <a:solidFill>
-                  <a:srgbClr val="2E7D32"/>
-                </a:solidFill>
-              </a:rPr>
-              <a:t>✅ 완료</a:t>
-            </a:r>
-          </a:p>
-        </p:txBody>
-      </p:sp>
-      <p:sp>
-        <p:nvSpPr>
-          <p:cNvPr id="20" name="TextBox 19"/>
-          <p:cNvSpPr txBox="1"/>
-          <p:nvPr/>
-        </p:nvSpPr>
-        <p:spPr>
-          <a:xfrm>
-            <a:off x="1920240" y="2660904"/>
-            <a:ext cx="2103120" cy="347472"/>
-          </a:xfrm>
-          <a:prstGeom prst="rect">
-            <a:avLst/>
-          </a:prstGeom>
-          <a:noFill/>
-        </p:spPr>
-        <p:txBody>
-          <a:bodyPr wrap="square">
-            <a:spAutoFit/>
-          </a:bodyPr>
-          <a:lstStyle/>
-          <a:p>
-            <a:pPr algn="l"/>
-            <a:r>
-              <a:rPr sz="1200" b="1">
-                <a:solidFill>
-                  <a:srgbClr val="212121"/>
-                </a:solidFill>
-              </a:rPr>
-              <a:t>포지션 관리</a:t>
-            </a:r>
-          </a:p>
-        </p:txBody>
-      </p:sp>
-      <p:sp>
-        <p:nvSpPr>
-          <p:cNvPr id="21" name="TextBox 20"/>
-          <p:cNvSpPr txBox="1"/>
-          <p:nvPr/>
-        </p:nvSpPr>
-        <p:spPr>
-          <a:xfrm>
-            <a:off x="4114800" y="2660904"/>
-            <a:ext cx="7406640" cy="347472"/>
-          </a:xfrm>
-          <a:prstGeom prst="rect">
-            <a:avLst/>
-          </a:prstGeom>
-          <a:noFill/>
-        </p:spPr>
-        <p:txBody>
-          <a:bodyPr wrap="square">
-            <a:spAutoFit/>
-          </a:bodyPr>
-          <a:lstStyle/>
-          <a:p>
-            <a:pPr algn="l"/>
-            <a:r>
-              <a:rPr sz="1200" b="0">
-                <a:solidFill>
-                  <a:srgbClr val="212121"/>
-                </a:solidFill>
-              </a:rPr>
-              <a:t>진입·정리 / 수익률·손익 계산 / 복기 메모</a:t>
-            </a:r>
-          </a:p>
-        </p:txBody>
-      </p:sp>
-      <p:sp>
-        <p:nvSpPr>
-          <p:cNvPr id="22" name="Rectangle 21"/>
-          <p:cNvSpPr/>
-          <p:nvPr/>
-        </p:nvSpPr>
-        <p:spPr>
-          <a:xfrm>
-            <a:off x="457200" y="3246120"/>
-            <a:ext cx="11247120" cy="621792"/>
-          </a:xfrm>
-          <a:prstGeom prst="rect">
-            <a:avLst/>
-          </a:prstGeom>
-          <a:noFill/>
-          <a:ln w="10160">
-            <a:solidFill>
-              <a:srgbClr val="E0E0E0"/>
-            </a:solidFill>
-          </a:ln>
-        </p:spPr>
-        <p:style>
-          <a:lnRef idx="1">
-            <a:schemeClr val="accent1"/>
-          </a:lnRef>
-          <a:fillRef idx="3">
-            <a:schemeClr val="accent1"/>
-          </a:fillRef>
-          <a:effectRef idx="2">
-            <a:schemeClr val="accent1"/>
-          </a:effectRef>
-          <a:fontRef idx="minor">
-            <a:schemeClr val="lt1"/>
-          </a:fontRef>
-        </p:style>
-        <p:txBody>
-          <a:bodyPr rtlCol="0" anchor="ctr"/>
-          <a:lstStyle/>
-          <a:p>
-            <a:pPr algn="ctr"/>
-          </a:p>
-        </p:txBody>
-      </p:sp>
-      <p:sp>
-        <p:nvSpPr>
-          <p:cNvPr id="23" name="Rectangle 22"/>
-          <p:cNvSpPr/>
-          <p:nvPr/>
-        </p:nvSpPr>
-        <p:spPr>
-          <a:xfrm>
-            <a:off x="457200" y="3246120"/>
-            <a:ext cx="54864" cy="621792"/>
-          </a:xfrm>
-          <a:prstGeom prst="rect">
-            <a:avLst/>
-          </a:prstGeom>
-          <a:solidFill>
-            <a:srgbClr val="2E7D32"/>
-          </a:solidFill>
-          <a:ln>
-            <a:noFill/>
-          </a:ln>
-        </p:spPr>
-        <p:style>
-          <a:lnRef idx="1">
-            <a:schemeClr val="accent1"/>
-          </a:lnRef>
-          <a:fillRef idx="3">
-            <a:schemeClr val="accent1"/>
-          </a:fillRef>
-          <a:effectRef idx="2">
-            <a:schemeClr val="accent1"/>
-          </a:effectRef>
-          <a:fontRef idx="minor">
-            <a:schemeClr val="lt1"/>
-          </a:fontRef>
-        </p:style>
-        <p:txBody>
-          <a:bodyPr rtlCol="0" anchor="ctr"/>
-          <a:lstStyle/>
-          <a:p>
-            <a:pPr algn="ctr"/>
-          </a:p>
-        </p:txBody>
-      </p:sp>
-      <p:sp>
-        <p:nvSpPr>
-          <p:cNvPr id="24" name="TextBox 23"/>
-          <p:cNvSpPr txBox="1"/>
-          <p:nvPr/>
-        </p:nvSpPr>
-        <p:spPr>
-          <a:xfrm>
-            <a:off x="594360" y="3392424"/>
-            <a:ext cx="1188720" cy="347472"/>
-          </a:xfrm>
-          <a:prstGeom prst="rect">
-            <a:avLst/>
-          </a:prstGeom>
-          <a:noFill/>
-        </p:spPr>
-        <p:txBody>
-          <a:bodyPr wrap="square">
-            <a:spAutoFit/>
-          </a:bodyPr>
-          <a:lstStyle/>
-          <a:p>
-            <a:pPr algn="l"/>
-            <a:r>
-              <a:rPr sz="1100" b="0">
-                <a:solidFill>
-                  <a:srgbClr val="2E7D32"/>
-                </a:solidFill>
-              </a:rPr>
-              <a:t>✅ 완료</a:t>
-            </a:r>
-          </a:p>
-        </p:txBody>
-      </p:sp>
-      <p:sp>
-        <p:nvSpPr>
-          <p:cNvPr id="25" name="TextBox 24"/>
-          <p:cNvSpPr txBox="1"/>
-          <p:nvPr/>
-        </p:nvSpPr>
-        <p:spPr>
-          <a:xfrm>
-            <a:off x="1920240" y="3392424"/>
-            <a:ext cx="2103120" cy="347472"/>
-          </a:xfrm>
-          <a:prstGeom prst="rect">
-            <a:avLst/>
-          </a:prstGeom>
-          <a:noFill/>
-        </p:spPr>
-        <p:txBody>
-          <a:bodyPr wrap="square">
-            <a:spAutoFit/>
-          </a:bodyPr>
-          <a:lstStyle/>
-          <a:p>
-            <a:pPr algn="l"/>
-            <a:r>
-              <a:rPr sz="1200" b="1">
-                <a:solidFill>
-                  <a:srgbClr val="212121"/>
-                </a:solidFill>
-              </a:rPr>
-              <a:t>시각화</a:t>
-            </a:r>
-          </a:p>
-        </p:txBody>
-      </p:sp>
-      <p:sp>
-        <p:nvSpPr>
-          <p:cNvPr id="26" name="TextBox 25"/>
-          <p:cNvSpPr txBox="1"/>
-          <p:nvPr/>
-        </p:nvSpPr>
-        <p:spPr>
-          <a:xfrm>
-            <a:off x="4114800" y="3392424"/>
-            <a:ext cx="7406640" cy="347472"/>
-          </a:xfrm>
-          <a:prstGeom prst="rect">
-            <a:avLst/>
-          </a:prstGeom>
-          <a:noFill/>
-        </p:spPr>
-        <p:txBody>
-          <a:bodyPr wrap="square">
-            <a:spAutoFit/>
-          </a:bodyPr>
-          <a:lstStyle/>
-          <a:p>
-            <a:pPr algn="l"/>
-            <a:r>
-              <a:rPr sz="1200" b="0">
-                <a:solidFill>
-                  <a:srgbClr val="212121"/>
-                </a:solidFill>
-              </a:rPr>
-              <a:t>수익률 막대 차트 / 누적 손익 라인 차트 / 기간 필터</a:t>
-            </a:r>
-          </a:p>
-        </p:txBody>
-      </p:sp>
-      <p:sp>
-        <p:nvSpPr>
-          <p:cNvPr id="27" name="Rectangle 26"/>
-          <p:cNvSpPr/>
-          <p:nvPr/>
-        </p:nvSpPr>
-        <p:spPr>
-          <a:xfrm>
-            <a:off x="457200" y="3977639"/>
-            <a:ext cx="11247120" cy="621792"/>
-          </a:xfrm>
-          <a:prstGeom prst="rect">
-            <a:avLst/>
-          </a:prstGeom>
-          <a:noFill/>
-          <a:ln w="10160">
-            <a:solidFill>
-              <a:srgbClr val="E0E0E0"/>
-            </a:solidFill>
-          </a:ln>
-        </p:spPr>
-        <p:style>
-          <a:lnRef idx="1">
-            <a:schemeClr val="accent1"/>
-          </a:lnRef>
-          <a:fillRef idx="3">
-            <a:schemeClr val="accent1"/>
-          </a:fillRef>
-          <a:effectRef idx="2">
-            <a:schemeClr val="accent1"/>
-          </a:effectRef>
-          <a:fontRef idx="minor">
-            <a:schemeClr val="lt1"/>
-          </a:fontRef>
-        </p:style>
-        <p:txBody>
-          <a:bodyPr rtlCol="0" anchor="ctr"/>
-          <a:lstStyle/>
-          <a:p>
-            <a:pPr algn="ctr"/>
-          </a:p>
-        </p:txBody>
-      </p:sp>
-      <p:sp>
-        <p:nvSpPr>
-          <p:cNvPr id="28" name="Rectangle 27"/>
-          <p:cNvSpPr/>
-          <p:nvPr/>
-        </p:nvSpPr>
-        <p:spPr>
-          <a:xfrm>
-            <a:off x="457200" y="3977639"/>
-            <a:ext cx="54864" cy="621792"/>
-          </a:xfrm>
-          <a:prstGeom prst="rect">
-            <a:avLst/>
-          </a:prstGeom>
-          <a:solidFill>
-            <a:srgbClr val="2E7D32"/>
-          </a:solidFill>
-          <a:ln>
-            <a:noFill/>
-          </a:ln>
-        </p:spPr>
-        <p:style>
-          <a:lnRef idx="1">
-            <a:schemeClr val="accent1"/>
-          </a:lnRef>
-          <a:fillRef idx="3">
-            <a:schemeClr val="accent1"/>
-          </a:fillRef>
-          <a:effectRef idx="2">
-            <a:schemeClr val="accent1"/>
-          </a:effectRef>
-          <a:fontRef idx="minor">
-            <a:schemeClr val="lt1"/>
-          </a:fontRef>
-        </p:style>
-        <p:txBody>
-          <a:bodyPr rtlCol="0" anchor="ctr"/>
-          <a:lstStyle/>
-          <a:p>
-            <a:pPr algn="ctr"/>
-          </a:p>
-        </p:txBody>
-      </p:sp>
-      <p:sp>
-        <p:nvSpPr>
-          <p:cNvPr id="29" name="TextBox 28"/>
-          <p:cNvSpPr txBox="1"/>
-          <p:nvPr/>
-        </p:nvSpPr>
-        <p:spPr>
-          <a:xfrm>
-            <a:off x="594360" y="4123944"/>
-            <a:ext cx="1188720" cy="347472"/>
-          </a:xfrm>
-          <a:prstGeom prst="rect">
-            <a:avLst/>
-          </a:prstGeom>
-          <a:noFill/>
-        </p:spPr>
-        <p:txBody>
-          <a:bodyPr wrap="square">
-            <a:spAutoFit/>
-          </a:bodyPr>
-          <a:lstStyle/>
-          <a:p>
-            <a:pPr algn="l"/>
-            <a:r>
-              <a:rPr sz="1100" b="0">
-                <a:solidFill>
-                  <a:srgbClr val="2E7D32"/>
-                </a:solidFill>
-              </a:rPr>
-              <a:t>✅ 완료</a:t>
-            </a:r>
-          </a:p>
-        </p:txBody>
-      </p:sp>
-      <p:sp>
-        <p:nvSpPr>
-          <p:cNvPr id="30" name="TextBox 29"/>
-          <p:cNvSpPr txBox="1"/>
-          <p:nvPr/>
-        </p:nvSpPr>
-        <p:spPr>
-          <a:xfrm>
-            <a:off x="1920240" y="4123944"/>
-            <a:ext cx="2103120" cy="347472"/>
-          </a:xfrm>
-          <a:prstGeom prst="rect">
-            <a:avLst/>
-          </a:prstGeom>
-          <a:noFill/>
-        </p:spPr>
-        <p:txBody>
-          <a:bodyPr wrap="square">
-            <a:spAutoFit/>
-          </a:bodyPr>
-          <a:lstStyle/>
-          <a:p>
-            <a:pPr algn="l"/>
-            <a:r>
-              <a:rPr sz="1200" b="1">
-                <a:solidFill>
-                  <a:srgbClr val="212121"/>
-                </a:solidFill>
-              </a:rPr>
-              <a:t>대시보드</a:t>
-            </a:r>
-          </a:p>
-        </p:txBody>
-      </p:sp>
-      <p:sp>
-        <p:nvSpPr>
-          <p:cNvPr id="31" name="TextBox 30"/>
-          <p:cNvSpPr txBox="1"/>
-          <p:nvPr/>
-        </p:nvSpPr>
-        <p:spPr>
-          <a:xfrm>
-            <a:off x="4114800" y="4123944"/>
-            <a:ext cx="7406640" cy="347472"/>
-          </a:xfrm>
-          <a:prstGeom prst="rect">
-            <a:avLst/>
-          </a:prstGeom>
-          <a:noFill/>
-        </p:spPr>
-        <p:txBody>
-          <a:bodyPr wrap="square">
-            <a:spAutoFit/>
-          </a:bodyPr>
-          <a:lstStyle/>
-          <a:p>
-            <a:pPr algn="l"/>
-            <a:r>
-              <a:rPr sz="1200" b="0">
-                <a:solidFill>
-                  <a:srgbClr val="212121"/>
-                </a:solidFill>
-              </a:rPr>
-              <a:t>총 잔액 / 누적 손익 / 승률 / 최근 포지션 목록</a:t>
-            </a:r>
-          </a:p>
-        </p:txBody>
-      </p:sp>
-      <p:sp>
-        <p:nvSpPr>
-          <p:cNvPr id="32" name="Rectangle 31"/>
-          <p:cNvSpPr/>
-          <p:nvPr/>
-        </p:nvSpPr>
-        <p:spPr>
-          <a:xfrm>
-            <a:off x="457200" y="4709160"/>
-            <a:ext cx="11247120" cy="621792"/>
-          </a:xfrm>
-          <a:prstGeom prst="rect">
-            <a:avLst/>
-          </a:prstGeom>
-          <a:noFill/>
-          <a:ln w="10160">
-            <a:solidFill>
-              <a:srgbClr val="E0E0E0"/>
-            </a:solidFill>
-          </a:ln>
-        </p:spPr>
-        <p:style>
-          <a:lnRef idx="1">
-            <a:schemeClr val="accent1"/>
-          </a:lnRef>
-          <a:fillRef idx="3">
-            <a:schemeClr val="accent1"/>
-          </a:fillRef>
-          <a:effectRef idx="2">
-            <a:schemeClr val="accent1"/>
-          </a:effectRef>
-          <a:fontRef idx="minor">
-            <a:schemeClr val="lt1"/>
-          </a:fontRef>
-        </p:style>
-        <p:txBody>
-          <a:bodyPr rtlCol="0" anchor="ctr"/>
-          <a:lstStyle/>
-          <a:p>
-            <a:pPr algn="ctr"/>
-          </a:p>
-        </p:txBody>
-      </p:sp>
-      <p:sp>
-        <p:nvSpPr>
-          <p:cNvPr id="33" name="Rectangle 32"/>
-          <p:cNvSpPr/>
-          <p:nvPr/>
-        </p:nvSpPr>
-        <p:spPr>
-          <a:xfrm>
-            <a:off x="457200" y="4709160"/>
-            <a:ext cx="54864" cy="621792"/>
-          </a:xfrm>
-          <a:prstGeom prst="rect">
-            <a:avLst/>
-          </a:prstGeom>
-          <a:solidFill>
-            <a:srgbClr val="E65C00"/>
-          </a:solidFill>
-          <a:ln>
-            <a:noFill/>
-          </a:ln>
-        </p:spPr>
-        <p:style>
-          <a:lnRef idx="1">
-            <a:schemeClr val="accent1"/>
-          </a:lnRef>
-          <a:fillRef idx="3">
-            <a:schemeClr val="accent1"/>
-          </a:fillRef>
-          <a:effectRef idx="2">
-            <a:schemeClr val="accent1"/>
-          </a:effectRef>
-          <a:fontRef idx="minor">
-            <a:schemeClr val="lt1"/>
-          </a:fontRef>
-        </p:style>
-        <p:txBody>
-          <a:bodyPr rtlCol="0" anchor="ctr"/>
-          <a:lstStyle/>
-          <a:p>
-            <a:pPr algn="ctr"/>
-          </a:p>
-        </p:txBody>
-      </p:sp>
-      <p:sp>
-        <p:nvSpPr>
-          <p:cNvPr id="34" name="TextBox 33"/>
-          <p:cNvSpPr txBox="1"/>
-          <p:nvPr/>
-        </p:nvSpPr>
-        <p:spPr>
-          <a:xfrm>
-            <a:off x="594360" y="4855464"/>
-            <a:ext cx="1188720" cy="347472"/>
-          </a:xfrm>
-          <a:prstGeom prst="rect">
-            <a:avLst/>
-          </a:prstGeom>
-          <a:noFill/>
-        </p:spPr>
-        <p:txBody>
-          <a:bodyPr wrap="square">
-            <a:spAutoFit/>
-          </a:bodyPr>
-          <a:lstStyle/>
-          <a:p>
-            <a:pPr algn="l"/>
-            <a:r>
-              <a:rPr sz="1100" b="0">
-                <a:solidFill>
-                  <a:srgbClr val="E65C00"/>
-                </a:solidFill>
-              </a:rPr>
-              <a:t>🚧 진행</a:t>
-            </a:r>
-          </a:p>
-        </p:txBody>
-      </p:sp>
-      <p:sp>
-        <p:nvSpPr>
-          <p:cNvPr id="35" name="TextBox 34"/>
-          <p:cNvSpPr txBox="1"/>
-          <p:nvPr/>
-        </p:nvSpPr>
-        <p:spPr>
-          <a:xfrm>
-            <a:off x="1920240" y="4855464"/>
-            <a:ext cx="2103120" cy="347472"/>
-          </a:xfrm>
-          <a:prstGeom prst="rect">
-            <a:avLst/>
-          </a:prstGeom>
-          <a:noFill/>
-        </p:spPr>
-        <p:txBody>
-          <a:bodyPr wrap="square">
-            <a:spAutoFit/>
-          </a:bodyPr>
-          <a:lstStyle/>
-          <a:p>
-            <a:pPr algn="l"/>
-            <a:r>
-              <a:rPr sz="1200" b="1">
-                <a:solidFill>
-                  <a:srgbClr val="212121"/>
-                </a:solidFill>
-              </a:rPr>
-              <a:t>문서·배포</a:t>
-            </a:r>
-          </a:p>
-        </p:txBody>
-      </p:sp>
-      <p:sp>
-        <p:nvSpPr>
-          <p:cNvPr id="36" name="TextBox 35"/>
-          <p:cNvSpPr txBox="1"/>
-          <p:nvPr/>
-        </p:nvSpPr>
-        <p:spPr>
-          <a:xfrm>
-            <a:off x="4114800" y="4855464"/>
-            <a:ext cx="7406640" cy="347472"/>
-          </a:xfrm>
-          <a:prstGeom prst="rect">
-            <a:avLst/>
-          </a:prstGeom>
-          <a:noFill/>
-        </p:spPr>
-        <p:txBody>
-          <a:bodyPr wrap="square">
-            <a:spAutoFit/>
-          </a:bodyPr>
-          <a:lstStyle/>
-          <a:p>
-            <a:pPr algn="l"/>
-            <a:r>
-              <a:rPr sz="1200" b="0">
-                <a:solidFill>
-                  <a:srgbClr val="212121"/>
-                </a:solidFill>
-              </a:rPr>
-              <a:t>setup·testing 문서 / README 완비</a:t>
-            </a:r>
-          </a:p>
-        </p:txBody>
-      </p:sp>
-      <p:sp>
-        <p:nvSpPr>
-          <p:cNvPr id="37" name="Rectangle 36"/>
-          <p:cNvSpPr/>
-          <p:nvPr/>
-        </p:nvSpPr>
-        <p:spPr>
-          <a:xfrm>
-            <a:off x="457200" y="5440680"/>
-            <a:ext cx="11247120" cy="621792"/>
-          </a:xfrm>
-          <a:prstGeom prst="rect">
-            <a:avLst/>
-          </a:prstGeom>
-          <a:noFill/>
-          <a:ln w="10160">
-            <a:solidFill>
-              <a:srgbClr val="E0E0E0"/>
-            </a:solidFill>
-          </a:ln>
-        </p:spPr>
-        <p:style>
-          <a:lnRef idx="1">
-            <a:schemeClr val="accent1"/>
-          </a:lnRef>
-          <a:fillRef idx="3">
-            <a:schemeClr val="accent1"/>
-          </a:fillRef>
-          <a:effectRef idx="2">
-            <a:schemeClr val="accent1"/>
-          </a:effectRef>
-          <a:fontRef idx="minor">
-            <a:schemeClr val="lt1"/>
-          </a:fontRef>
-        </p:style>
-        <p:txBody>
-          <a:bodyPr rtlCol="0" anchor="ctr"/>
-          <a:lstStyle/>
-          <a:p>
-            <a:pPr algn="ctr"/>
-          </a:p>
-        </p:txBody>
-      </p:sp>
-      <p:sp>
-        <p:nvSpPr>
-          <p:cNvPr id="38" name="Rectangle 37"/>
-          <p:cNvSpPr/>
-          <p:nvPr/>
-        </p:nvSpPr>
-        <p:spPr>
-          <a:xfrm>
-            <a:off x="457200" y="5440680"/>
-            <a:ext cx="54864" cy="621792"/>
-          </a:xfrm>
-          <a:prstGeom prst="rect">
-            <a:avLst/>
-          </a:prstGeom>
-          <a:solidFill>
-            <a:srgbClr val="9E9E9E"/>
-          </a:solidFill>
-          <a:ln>
-            <a:noFill/>
-          </a:ln>
-        </p:spPr>
-        <p:style>
-          <a:lnRef idx="1">
-            <a:schemeClr val="accent1"/>
-          </a:lnRef>
-          <a:fillRef idx="3">
-            <a:schemeClr val="accent1"/>
-          </a:fillRef>
-          <a:effectRef idx="2">
-            <a:schemeClr val="accent1"/>
-          </a:effectRef>
-          <a:fontRef idx="minor">
-            <a:schemeClr val="lt1"/>
-          </a:fontRef>
-        </p:style>
-        <p:txBody>
-          <a:bodyPr rtlCol="0" anchor="ctr"/>
-          <a:lstStyle/>
-          <a:p>
-            <a:pPr algn="ctr"/>
-          </a:p>
-        </p:txBody>
-      </p:sp>
-      <p:sp>
-        <p:nvSpPr>
-          <p:cNvPr id="39" name="TextBox 38"/>
-          <p:cNvSpPr txBox="1"/>
-          <p:nvPr/>
-        </p:nvSpPr>
-        <p:spPr>
-          <a:xfrm>
-            <a:off x="594360" y="5586984"/>
-            <a:ext cx="1188720" cy="347472"/>
-          </a:xfrm>
-          <a:prstGeom prst="rect">
-            <a:avLst/>
-          </a:prstGeom>
-          <a:noFill/>
-        </p:spPr>
-        <p:txBody>
-          <a:bodyPr wrap="square">
-            <a:spAutoFit/>
-          </a:bodyPr>
-          <a:lstStyle/>
-          <a:p>
-            <a:pPr algn="l"/>
-            <a:r>
-              <a:rPr sz="1100" b="0">
-                <a:solidFill>
-                  <a:srgbClr val="9E9E9E"/>
-                </a:solidFill>
-              </a:rPr>
-              <a:t>⏳ 예정</a:t>
-            </a:r>
-          </a:p>
-        </p:txBody>
-      </p:sp>
-      <p:sp>
-        <p:nvSpPr>
-          <p:cNvPr id="40" name="TextBox 39"/>
-          <p:cNvSpPr txBox="1"/>
-          <p:nvPr/>
-        </p:nvSpPr>
-        <p:spPr>
-          <a:xfrm>
-            <a:off x="1920240" y="5586984"/>
-            <a:ext cx="2103120" cy="347472"/>
-          </a:xfrm>
-          <a:prstGeom prst="rect">
-            <a:avLst/>
-          </a:prstGeom>
-          <a:noFill/>
-        </p:spPr>
-        <p:txBody>
-          <a:bodyPr wrap="square">
-            <a:spAutoFit/>
-          </a:bodyPr>
-          <a:lstStyle/>
-          <a:p>
-            <a:pPr algn="l"/>
-            <a:r>
-              <a:rPr sz="1200" b="1">
-                <a:solidFill>
-                  <a:srgbClr val="212121"/>
-                </a:solidFill>
-              </a:rPr>
-              <a:t>앱 빌드</a:t>
-            </a:r>
-          </a:p>
-        </p:txBody>
-      </p:sp>
-      <p:sp>
-        <p:nvSpPr>
-          <p:cNvPr id="41" name="TextBox 40"/>
-          <p:cNvSpPr txBox="1"/>
-          <p:nvPr/>
-        </p:nvSpPr>
-        <p:spPr>
-          <a:xfrm>
-            <a:off x="4114800" y="5586984"/>
-            <a:ext cx="7406640" cy="347472"/>
-          </a:xfrm>
-          <a:prstGeom prst="rect">
-            <a:avLst/>
-          </a:prstGeom>
-          <a:noFill/>
-        </p:spPr>
-        <p:txBody>
-          <a:bodyPr wrap="square">
-            <a:spAutoFit/>
-          </a:bodyPr>
-          <a:lstStyle/>
-          <a:p>
-            <a:pPr algn="l"/>
-            <a:r>
-              <a:rPr sz="1200" b="0">
-                <a:solidFill>
-                  <a:srgbClr val="212121"/>
-                </a:solidFill>
-              </a:rPr>
-              <a:t>Android APK 빌드 및 설치 파일 생성</a:t>
-            </a:r>
-          </a:p>
-        </p:txBody>
-      </p:sp>
-      <p:sp>
-        <p:nvSpPr>
-          <p:cNvPr id="42" name="Rectangle 41"/>
-          <p:cNvSpPr/>
-          <p:nvPr/>
-        </p:nvSpPr>
-        <p:spPr>
-          <a:xfrm>
-            <a:off x="457200" y="5605272"/>
-            <a:ext cx="11247120" cy="566928"/>
+            <a:off x="457200" y="5806440"/>
+            <a:ext cx="11247120" cy="658368"/>
           </a:xfrm>
           <a:prstGeom prst="rect">
             <a:avLst/>
@@ -13544,14 +12690,14 @@
       </p:sp>
       <p:sp>
         <p:nvSpPr>
-          <p:cNvPr id="43" name="TextBox 42"/>
-          <p:cNvSpPr txBox="1"/>
-          <p:nvPr/>
-        </p:nvSpPr>
-        <p:spPr>
-          <a:xfrm>
-            <a:off x="658368" y="5760720"/>
-            <a:ext cx="10972800" cy="384048"/>
+          <p:cNvPr id="20" name="TextBox 19"/>
+          <p:cNvSpPr txBox="1"/>
+          <p:nvPr/>
+        </p:nvSpPr>
+        <p:spPr>
+          <a:xfrm>
+            <a:off x="658368" y="5971032"/>
+            <a:ext cx="10972800" cy="411480"/>
           </a:xfrm>
           <a:prstGeom prst="rect">
             <a:avLst/>
@@ -13566,12 +12712,12 @@
           <a:p>
             <a:pPr algn="l"/>
             <a:r>
-              <a:rPr sz="1300" b="1">
-                <a:solidFill>
-                  <a:srgbClr val="3F51B5"/>
-                </a:solidFill>
-              </a:rPr>
-              <a:t>전체 진척  ·  Must 기능 95% 완료  (5단계 구현 완료 / 문서·배포 진행 중)</a:t>
+              <a:rPr sz="1200" b="0">
+                <a:solidFill>
+                  <a:srgbClr val="9E9E9E"/>
+                </a:solidFill>
+              </a:rPr>
+              <a:t>데모 백업  ·  Wi-Fi 없는 환경 대비 → 로컬 데이터 캐시 + 화면 녹화 영상 준비</a:t>
             </a:r>
           </a:p>
         </p:txBody>
@@ -13594,30 +12740,1587 @@
         <p:nvPr/>
       </p:nvGrpSpPr>
       <p:grpSpPr/>
-      <p:pic>
-        <p:nvPicPr>
-          <p:cNvPr id="2" name="Picture 1" descr="wbs.png"/>
-          <p:cNvPicPr>
-            <a:picLocks noChangeAspect="1"/>
-          </p:cNvPicPr>
-          <p:nvPr/>
-        </p:nvPicPr>
-        <p:blipFill>
-          <a:blip r:embed="rId2"/>
-          <a:stretch>
-            <a:fillRect/>
-          </a:stretch>
-        </p:blipFill>
-        <p:spPr>
-          <a:xfrm>
-            <a:off x="274320" y="274320"/>
-            <a:ext cx="11640312" cy="6309360"/>
-          </a:xfrm>
-          <a:prstGeom prst="rect">
-            <a:avLst/>
-          </a:prstGeom>
-        </p:spPr>
-      </p:pic>
+      <p:sp>
+        <p:nvSpPr>
+          <p:cNvPr id="2" name="Rectangle 1"/>
+          <p:cNvSpPr/>
+          <p:nvPr/>
+        </p:nvSpPr>
+        <p:spPr>
+          <a:xfrm>
+            <a:off x="0" y="0"/>
+            <a:ext cx="12188952" cy="914400"/>
+          </a:xfrm>
+          <a:prstGeom prst="rect">
+            <a:avLst/>
+          </a:prstGeom>
+          <a:noFill/>
+          <a:ln>
+            <a:noFill/>
+          </a:ln>
+        </p:spPr>
+        <p:style>
+          <a:lnRef idx="1">
+            <a:schemeClr val="accent1"/>
+          </a:lnRef>
+          <a:fillRef idx="3">
+            <a:schemeClr val="accent1"/>
+          </a:fillRef>
+          <a:effectRef idx="2">
+            <a:schemeClr val="accent1"/>
+          </a:effectRef>
+          <a:fontRef idx="minor">
+            <a:schemeClr val="lt1"/>
+          </a:fontRef>
+        </p:style>
+        <p:txBody>
+          <a:bodyPr rtlCol="0" anchor="ctr"/>
+          <a:lstStyle/>
+          <a:p>
+            <a:pPr algn="ctr"/>
+          </a:p>
+        </p:txBody>
+      </p:sp>
+      <p:sp>
+        <p:nvSpPr>
+          <p:cNvPr id="3" name="TextBox 2"/>
+          <p:cNvSpPr txBox="1"/>
+          <p:nvPr/>
+        </p:nvSpPr>
+        <p:spPr>
+          <a:xfrm>
+            <a:off x="457200" y="73152"/>
+            <a:ext cx="10972800" cy="566928"/>
+          </a:xfrm>
+          <a:prstGeom prst="rect">
+            <a:avLst/>
+          </a:prstGeom>
+          <a:noFill/>
+        </p:spPr>
+        <p:txBody>
+          <a:bodyPr wrap="square">
+            <a:spAutoFit/>
+          </a:bodyPr>
+          <a:lstStyle/>
+          <a:p>
+            <a:pPr algn="l"/>
+            <a:r>
+              <a:rPr sz="2400" b="1">
+                <a:solidFill>
+                  <a:srgbClr val="3F51B5"/>
+                </a:solidFill>
+              </a:rPr>
+              <a:t>6.  진행 상황</a:t>
+            </a:r>
+          </a:p>
+        </p:txBody>
+      </p:sp>
+      <p:sp>
+        <p:nvSpPr>
+          <p:cNvPr id="4" name="TextBox 3"/>
+          <p:cNvSpPr txBox="1"/>
+          <p:nvPr/>
+        </p:nvSpPr>
+        <p:spPr>
+          <a:xfrm>
+            <a:off x="457200" y="621792"/>
+            <a:ext cx="10972800" cy="274320"/>
+          </a:xfrm>
+          <a:prstGeom prst="rect">
+            <a:avLst/>
+          </a:prstGeom>
+          <a:noFill/>
+        </p:spPr>
+        <p:txBody>
+          <a:bodyPr wrap="square">
+            <a:spAutoFit/>
+          </a:bodyPr>
+          <a:lstStyle/>
+          <a:p>
+            <a:pPr algn="l"/>
+            <a:r>
+              <a:rPr sz="1100" b="0">
+                <a:solidFill>
+                  <a:srgbClr val="9E9E9E"/>
+                </a:solidFill>
+              </a:rPr>
+              <a:t>Must 기능 기준 진척도</a:t>
+            </a:r>
+          </a:p>
+        </p:txBody>
+      </p:sp>
+      <p:sp>
+        <p:nvSpPr>
+          <p:cNvPr id="5" name="Rectangle 4"/>
+          <p:cNvSpPr/>
+          <p:nvPr/>
+        </p:nvSpPr>
+        <p:spPr>
+          <a:xfrm>
+            <a:off x="0" y="868680"/>
+            <a:ext cx="12188952" cy="45720"/>
+          </a:xfrm>
+          <a:prstGeom prst="rect">
+            <a:avLst/>
+          </a:prstGeom>
+          <a:solidFill>
+            <a:srgbClr val="3F51B5"/>
+          </a:solidFill>
+          <a:ln>
+            <a:noFill/>
+          </a:ln>
+        </p:spPr>
+        <p:style>
+          <a:lnRef idx="1">
+            <a:schemeClr val="accent1"/>
+          </a:lnRef>
+          <a:fillRef idx="3">
+            <a:schemeClr val="accent1"/>
+          </a:fillRef>
+          <a:effectRef idx="2">
+            <a:schemeClr val="accent1"/>
+          </a:effectRef>
+          <a:fontRef idx="minor">
+            <a:schemeClr val="lt1"/>
+          </a:fontRef>
+        </p:style>
+        <p:txBody>
+          <a:bodyPr rtlCol="0" anchor="ctr"/>
+          <a:lstStyle/>
+          <a:p>
+            <a:pPr algn="ctr"/>
+          </a:p>
+        </p:txBody>
+      </p:sp>
+      <p:sp>
+        <p:nvSpPr>
+          <p:cNvPr id="6" name="TextBox 5"/>
+          <p:cNvSpPr txBox="1"/>
+          <p:nvPr/>
+        </p:nvSpPr>
+        <p:spPr>
+          <a:xfrm>
+            <a:off x="11247120" y="6492240"/>
+            <a:ext cx="822960" cy="274320"/>
+          </a:xfrm>
+          <a:prstGeom prst="rect">
+            <a:avLst/>
+          </a:prstGeom>
+          <a:noFill/>
+        </p:spPr>
+        <p:txBody>
+          <a:bodyPr wrap="square">
+            <a:spAutoFit/>
+          </a:bodyPr>
+          <a:lstStyle/>
+          <a:p>
+            <a:pPr algn="ctr"/>
+            <a:r>
+              <a:rPr sz="1000" b="0">
+                <a:solidFill>
+                  <a:srgbClr val="9E9E9E"/>
+                </a:solidFill>
+              </a:rPr>
+              <a:t>6 / 13</a:t>
+            </a:r>
+          </a:p>
+        </p:txBody>
+      </p:sp>
+      <p:sp>
+        <p:nvSpPr>
+          <p:cNvPr id="7" name="Rectangle 6"/>
+          <p:cNvSpPr/>
+          <p:nvPr/>
+        </p:nvSpPr>
+        <p:spPr>
+          <a:xfrm>
+            <a:off x="457200" y="1051560"/>
+            <a:ext cx="11247120" cy="621792"/>
+          </a:xfrm>
+          <a:prstGeom prst="rect">
+            <a:avLst/>
+          </a:prstGeom>
+          <a:noFill/>
+          <a:ln w="10160">
+            <a:solidFill>
+              <a:srgbClr val="E0E0E0"/>
+            </a:solidFill>
+          </a:ln>
+        </p:spPr>
+        <p:style>
+          <a:lnRef idx="1">
+            <a:schemeClr val="accent1"/>
+          </a:lnRef>
+          <a:fillRef idx="3">
+            <a:schemeClr val="accent1"/>
+          </a:fillRef>
+          <a:effectRef idx="2">
+            <a:schemeClr val="accent1"/>
+          </a:effectRef>
+          <a:fontRef idx="minor">
+            <a:schemeClr val="lt1"/>
+          </a:fontRef>
+        </p:style>
+        <p:txBody>
+          <a:bodyPr rtlCol="0" anchor="ctr"/>
+          <a:lstStyle/>
+          <a:p>
+            <a:pPr algn="ctr"/>
+          </a:p>
+        </p:txBody>
+      </p:sp>
+      <p:sp>
+        <p:nvSpPr>
+          <p:cNvPr id="8" name="Rectangle 7"/>
+          <p:cNvSpPr/>
+          <p:nvPr/>
+        </p:nvSpPr>
+        <p:spPr>
+          <a:xfrm>
+            <a:off x="457200" y="1051560"/>
+            <a:ext cx="54864" cy="621792"/>
+          </a:xfrm>
+          <a:prstGeom prst="rect">
+            <a:avLst/>
+          </a:prstGeom>
+          <a:solidFill>
+            <a:srgbClr val="2E7D32"/>
+          </a:solidFill>
+          <a:ln>
+            <a:noFill/>
+          </a:ln>
+        </p:spPr>
+        <p:style>
+          <a:lnRef idx="1">
+            <a:schemeClr val="accent1"/>
+          </a:lnRef>
+          <a:fillRef idx="3">
+            <a:schemeClr val="accent1"/>
+          </a:fillRef>
+          <a:effectRef idx="2">
+            <a:schemeClr val="accent1"/>
+          </a:effectRef>
+          <a:fontRef idx="minor">
+            <a:schemeClr val="lt1"/>
+          </a:fontRef>
+        </p:style>
+        <p:txBody>
+          <a:bodyPr rtlCol="0" anchor="ctr"/>
+          <a:lstStyle/>
+          <a:p>
+            <a:pPr algn="ctr"/>
+          </a:p>
+        </p:txBody>
+      </p:sp>
+      <p:sp>
+        <p:nvSpPr>
+          <p:cNvPr id="9" name="TextBox 8"/>
+          <p:cNvSpPr txBox="1"/>
+          <p:nvPr/>
+        </p:nvSpPr>
+        <p:spPr>
+          <a:xfrm>
+            <a:off x="594360" y="1197863"/>
+            <a:ext cx="1188720" cy="347472"/>
+          </a:xfrm>
+          <a:prstGeom prst="rect">
+            <a:avLst/>
+          </a:prstGeom>
+          <a:noFill/>
+        </p:spPr>
+        <p:txBody>
+          <a:bodyPr wrap="square">
+            <a:spAutoFit/>
+          </a:bodyPr>
+          <a:lstStyle/>
+          <a:p>
+            <a:pPr algn="l"/>
+            <a:r>
+              <a:rPr sz="1100" b="0">
+                <a:solidFill>
+                  <a:srgbClr val="2E7D32"/>
+                </a:solidFill>
+              </a:rPr>
+              <a:t>✅ 완료</a:t>
+            </a:r>
+          </a:p>
+        </p:txBody>
+      </p:sp>
+      <p:sp>
+        <p:nvSpPr>
+          <p:cNvPr id="10" name="TextBox 9"/>
+          <p:cNvSpPr txBox="1"/>
+          <p:nvPr/>
+        </p:nvSpPr>
+        <p:spPr>
+          <a:xfrm>
+            <a:off x="1920240" y="1197863"/>
+            <a:ext cx="2103120" cy="347472"/>
+          </a:xfrm>
+          <a:prstGeom prst="rect">
+            <a:avLst/>
+          </a:prstGeom>
+          <a:noFill/>
+        </p:spPr>
+        <p:txBody>
+          <a:bodyPr wrap="square">
+            <a:spAutoFit/>
+          </a:bodyPr>
+          <a:lstStyle/>
+          <a:p>
+            <a:pPr algn="l"/>
+            <a:r>
+              <a:rPr sz="1200" b="1">
+                <a:solidFill>
+                  <a:srgbClr val="212121"/>
+                </a:solidFill>
+              </a:rPr>
+              <a:t>인증</a:t>
+            </a:r>
+          </a:p>
+        </p:txBody>
+      </p:sp>
+      <p:sp>
+        <p:nvSpPr>
+          <p:cNvPr id="11" name="TextBox 10"/>
+          <p:cNvSpPr txBox="1"/>
+          <p:nvPr/>
+        </p:nvSpPr>
+        <p:spPr>
+          <a:xfrm>
+            <a:off x="4114800" y="1197863"/>
+            <a:ext cx="7406640" cy="347472"/>
+          </a:xfrm>
+          <a:prstGeom prst="rect">
+            <a:avLst/>
+          </a:prstGeom>
+          <a:noFill/>
+        </p:spPr>
+        <p:txBody>
+          <a:bodyPr wrap="square">
+            <a:spAutoFit/>
+          </a:bodyPr>
+          <a:lstStyle/>
+          <a:p>
+            <a:pPr algn="l"/>
+            <a:r>
+              <a:rPr sz="1200" b="0">
+                <a:solidFill>
+                  <a:srgbClr val="212121"/>
+                </a:solidFill>
+              </a:rPr>
+              <a:t>회원가입 / 로그인 / 자동 로그인</a:t>
+            </a:r>
+          </a:p>
+        </p:txBody>
+      </p:sp>
+      <p:sp>
+        <p:nvSpPr>
+          <p:cNvPr id="12" name="Rectangle 11"/>
+          <p:cNvSpPr/>
+          <p:nvPr/>
+        </p:nvSpPr>
+        <p:spPr>
+          <a:xfrm>
+            <a:off x="457200" y="1783080"/>
+            <a:ext cx="11247120" cy="621792"/>
+          </a:xfrm>
+          <a:prstGeom prst="rect">
+            <a:avLst/>
+          </a:prstGeom>
+          <a:noFill/>
+          <a:ln w="10160">
+            <a:solidFill>
+              <a:srgbClr val="E0E0E0"/>
+            </a:solidFill>
+          </a:ln>
+        </p:spPr>
+        <p:style>
+          <a:lnRef idx="1">
+            <a:schemeClr val="accent1"/>
+          </a:lnRef>
+          <a:fillRef idx="3">
+            <a:schemeClr val="accent1"/>
+          </a:fillRef>
+          <a:effectRef idx="2">
+            <a:schemeClr val="accent1"/>
+          </a:effectRef>
+          <a:fontRef idx="minor">
+            <a:schemeClr val="lt1"/>
+          </a:fontRef>
+        </p:style>
+        <p:txBody>
+          <a:bodyPr rtlCol="0" anchor="ctr"/>
+          <a:lstStyle/>
+          <a:p>
+            <a:pPr algn="ctr"/>
+          </a:p>
+        </p:txBody>
+      </p:sp>
+      <p:sp>
+        <p:nvSpPr>
+          <p:cNvPr id="13" name="Rectangle 12"/>
+          <p:cNvSpPr/>
+          <p:nvPr/>
+        </p:nvSpPr>
+        <p:spPr>
+          <a:xfrm>
+            <a:off x="457200" y="1783080"/>
+            <a:ext cx="54864" cy="621792"/>
+          </a:xfrm>
+          <a:prstGeom prst="rect">
+            <a:avLst/>
+          </a:prstGeom>
+          <a:solidFill>
+            <a:srgbClr val="2E7D32"/>
+          </a:solidFill>
+          <a:ln>
+            <a:noFill/>
+          </a:ln>
+        </p:spPr>
+        <p:style>
+          <a:lnRef idx="1">
+            <a:schemeClr val="accent1"/>
+          </a:lnRef>
+          <a:fillRef idx="3">
+            <a:schemeClr val="accent1"/>
+          </a:fillRef>
+          <a:effectRef idx="2">
+            <a:schemeClr val="accent1"/>
+          </a:effectRef>
+          <a:fontRef idx="minor">
+            <a:schemeClr val="lt1"/>
+          </a:fontRef>
+        </p:style>
+        <p:txBody>
+          <a:bodyPr rtlCol="0" anchor="ctr"/>
+          <a:lstStyle/>
+          <a:p>
+            <a:pPr algn="ctr"/>
+          </a:p>
+        </p:txBody>
+      </p:sp>
+      <p:sp>
+        <p:nvSpPr>
+          <p:cNvPr id="14" name="TextBox 13"/>
+          <p:cNvSpPr txBox="1"/>
+          <p:nvPr/>
+        </p:nvSpPr>
+        <p:spPr>
+          <a:xfrm>
+            <a:off x="594360" y="1929384"/>
+            <a:ext cx="1188720" cy="347472"/>
+          </a:xfrm>
+          <a:prstGeom prst="rect">
+            <a:avLst/>
+          </a:prstGeom>
+          <a:noFill/>
+        </p:spPr>
+        <p:txBody>
+          <a:bodyPr wrap="square">
+            <a:spAutoFit/>
+          </a:bodyPr>
+          <a:lstStyle/>
+          <a:p>
+            <a:pPr algn="l"/>
+            <a:r>
+              <a:rPr sz="1100" b="0">
+                <a:solidFill>
+                  <a:srgbClr val="2E7D32"/>
+                </a:solidFill>
+              </a:rPr>
+              <a:t>✅ 완료</a:t>
+            </a:r>
+          </a:p>
+        </p:txBody>
+      </p:sp>
+      <p:sp>
+        <p:nvSpPr>
+          <p:cNvPr id="15" name="TextBox 14"/>
+          <p:cNvSpPr txBox="1"/>
+          <p:nvPr/>
+        </p:nvSpPr>
+        <p:spPr>
+          <a:xfrm>
+            <a:off x="1920240" y="1929384"/>
+            <a:ext cx="2103120" cy="347472"/>
+          </a:xfrm>
+          <a:prstGeom prst="rect">
+            <a:avLst/>
+          </a:prstGeom>
+          <a:noFill/>
+        </p:spPr>
+        <p:txBody>
+          <a:bodyPr wrap="square">
+            <a:spAutoFit/>
+          </a:bodyPr>
+          <a:lstStyle/>
+          <a:p>
+            <a:pPr algn="l"/>
+            <a:r>
+              <a:rPr sz="1200" b="1">
+                <a:solidFill>
+                  <a:srgbClr val="212121"/>
+                </a:solidFill>
+              </a:rPr>
+              <a:t>계좌 관리</a:t>
+            </a:r>
+          </a:p>
+        </p:txBody>
+      </p:sp>
+      <p:sp>
+        <p:nvSpPr>
+          <p:cNvPr id="16" name="TextBox 15"/>
+          <p:cNvSpPr txBox="1"/>
+          <p:nvPr/>
+        </p:nvSpPr>
+        <p:spPr>
+          <a:xfrm>
+            <a:off x="4114800" y="1929384"/>
+            <a:ext cx="7406640" cy="347472"/>
+          </a:xfrm>
+          <a:prstGeom prst="rect">
+            <a:avLst/>
+          </a:prstGeom>
+          <a:noFill/>
+        </p:spPr>
+        <p:txBody>
+          <a:bodyPr wrap="square">
+            <a:spAutoFit/>
+          </a:bodyPr>
+          <a:lstStyle/>
+          <a:p>
+            <a:pPr algn="l"/>
+            <a:r>
+              <a:rPr sz="1200" b="0">
+                <a:solidFill>
+                  <a:srgbClr val="212121"/>
+                </a:solidFill>
+              </a:rPr>
+              <a:t>계좌 등록 / 입출금 기록 / 잔액 자동 계산</a:t>
+            </a:r>
+          </a:p>
+        </p:txBody>
+      </p:sp>
+      <p:sp>
+        <p:nvSpPr>
+          <p:cNvPr id="17" name="Rectangle 16"/>
+          <p:cNvSpPr/>
+          <p:nvPr/>
+        </p:nvSpPr>
+        <p:spPr>
+          <a:xfrm>
+            <a:off x="457200" y="2514600"/>
+            <a:ext cx="11247120" cy="621792"/>
+          </a:xfrm>
+          <a:prstGeom prst="rect">
+            <a:avLst/>
+          </a:prstGeom>
+          <a:noFill/>
+          <a:ln w="10160">
+            <a:solidFill>
+              <a:srgbClr val="E0E0E0"/>
+            </a:solidFill>
+          </a:ln>
+        </p:spPr>
+        <p:style>
+          <a:lnRef idx="1">
+            <a:schemeClr val="accent1"/>
+          </a:lnRef>
+          <a:fillRef idx="3">
+            <a:schemeClr val="accent1"/>
+          </a:fillRef>
+          <a:effectRef idx="2">
+            <a:schemeClr val="accent1"/>
+          </a:effectRef>
+          <a:fontRef idx="minor">
+            <a:schemeClr val="lt1"/>
+          </a:fontRef>
+        </p:style>
+        <p:txBody>
+          <a:bodyPr rtlCol="0" anchor="ctr"/>
+          <a:lstStyle/>
+          <a:p>
+            <a:pPr algn="ctr"/>
+          </a:p>
+        </p:txBody>
+      </p:sp>
+      <p:sp>
+        <p:nvSpPr>
+          <p:cNvPr id="18" name="Rectangle 17"/>
+          <p:cNvSpPr/>
+          <p:nvPr/>
+        </p:nvSpPr>
+        <p:spPr>
+          <a:xfrm>
+            <a:off x="457200" y="2514600"/>
+            <a:ext cx="54864" cy="621792"/>
+          </a:xfrm>
+          <a:prstGeom prst="rect">
+            <a:avLst/>
+          </a:prstGeom>
+          <a:solidFill>
+            <a:srgbClr val="2E7D32"/>
+          </a:solidFill>
+          <a:ln>
+            <a:noFill/>
+          </a:ln>
+        </p:spPr>
+        <p:style>
+          <a:lnRef idx="1">
+            <a:schemeClr val="accent1"/>
+          </a:lnRef>
+          <a:fillRef idx="3">
+            <a:schemeClr val="accent1"/>
+          </a:fillRef>
+          <a:effectRef idx="2">
+            <a:schemeClr val="accent1"/>
+          </a:effectRef>
+          <a:fontRef idx="minor">
+            <a:schemeClr val="lt1"/>
+          </a:fontRef>
+        </p:style>
+        <p:txBody>
+          <a:bodyPr rtlCol="0" anchor="ctr"/>
+          <a:lstStyle/>
+          <a:p>
+            <a:pPr algn="ctr"/>
+          </a:p>
+        </p:txBody>
+      </p:sp>
+      <p:sp>
+        <p:nvSpPr>
+          <p:cNvPr id="19" name="TextBox 18"/>
+          <p:cNvSpPr txBox="1"/>
+          <p:nvPr/>
+        </p:nvSpPr>
+        <p:spPr>
+          <a:xfrm>
+            <a:off x="594360" y="2660904"/>
+            <a:ext cx="1188720" cy="347472"/>
+          </a:xfrm>
+          <a:prstGeom prst="rect">
+            <a:avLst/>
+          </a:prstGeom>
+          <a:noFill/>
+        </p:spPr>
+        <p:txBody>
+          <a:bodyPr wrap="square">
+            <a:spAutoFit/>
+          </a:bodyPr>
+          <a:lstStyle/>
+          <a:p>
+            <a:pPr algn="l"/>
+            <a:r>
+              <a:rPr sz="1100" b="0">
+                <a:solidFill>
+                  <a:srgbClr val="2E7D32"/>
+                </a:solidFill>
+              </a:rPr>
+              <a:t>✅ 완료</a:t>
+            </a:r>
+          </a:p>
+        </p:txBody>
+      </p:sp>
+      <p:sp>
+        <p:nvSpPr>
+          <p:cNvPr id="20" name="TextBox 19"/>
+          <p:cNvSpPr txBox="1"/>
+          <p:nvPr/>
+        </p:nvSpPr>
+        <p:spPr>
+          <a:xfrm>
+            <a:off x="1920240" y="2660904"/>
+            <a:ext cx="2103120" cy="347472"/>
+          </a:xfrm>
+          <a:prstGeom prst="rect">
+            <a:avLst/>
+          </a:prstGeom>
+          <a:noFill/>
+        </p:spPr>
+        <p:txBody>
+          <a:bodyPr wrap="square">
+            <a:spAutoFit/>
+          </a:bodyPr>
+          <a:lstStyle/>
+          <a:p>
+            <a:pPr algn="l"/>
+            <a:r>
+              <a:rPr sz="1200" b="1">
+                <a:solidFill>
+                  <a:srgbClr val="212121"/>
+                </a:solidFill>
+              </a:rPr>
+              <a:t>포지션 관리</a:t>
+            </a:r>
+          </a:p>
+        </p:txBody>
+      </p:sp>
+      <p:sp>
+        <p:nvSpPr>
+          <p:cNvPr id="21" name="TextBox 20"/>
+          <p:cNvSpPr txBox="1"/>
+          <p:nvPr/>
+        </p:nvSpPr>
+        <p:spPr>
+          <a:xfrm>
+            <a:off x="4114800" y="2660904"/>
+            <a:ext cx="7406640" cy="347472"/>
+          </a:xfrm>
+          <a:prstGeom prst="rect">
+            <a:avLst/>
+          </a:prstGeom>
+          <a:noFill/>
+        </p:spPr>
+        <p:txBody>
+          <a:bodyPr wrap="square">
+            <a:spAutoFit/>
+          </a:bodyPr>
+          <a:lstStyle/>
+          <a:p>
+            <a:pPr algn="l"/>
+            <a:r>
+              <a:rPr sz="1200" b="0">
+                <a:solidFill>
+                  <a:srgbClr val="212121"/>
+                </a:solidFill>
+              </a:rPr>
+              <a:t>진입·정리 / 수익률·손익 계산 / 복기 메모</a:t>
+            </a:r>
+          </a:p>
+        </p:txBody>
+      </p:sp>
+      <p:sp>
+        <p:nvSpPr>
+          <p:cNvPr id="22" name="Rectangle 21"/>
+          <p:cNvSpPr/>
+          <p:nvPr/>
+        </p:nvSpPr>
+        <p:spPr>
+          <a:xfrm>
+            <a:off x="457200" y="3246120"/>
+            <a:ext cx="11247120" cy="621792"/>
+          </a:xfrm>
+          <a:prstGeom prst="rect">
+            <a:avLst/>
+          </a:prstGeom>
+          <a:noFill/>
+          <a:ln w="10160">
+            <a:solidFill>
+              <a:srgbClr val="E0E0E0"/>
+            </a:solidFill>
+          </a:ln>
+        </p:spPr>
+        <p:style>
+          <a:lnRef idx="1">
+            <a:schemeClr val="accent1"/>
+          </a:lnRef>
+          <a:fillRef idx="3">
+            <a:schemeClr val="accent1"/>
+          </a:fillRef>
+          <a:effectRef idx="2">
+            <a:schemeClr val="accent1"/>
+          </a:effectRef>
+          <a:fontRef idx="minor">
+            <a:schemeClr val="lt1"/>
+          </a:fontRef>
+        </p:style>
+        <p:txBody>
+          <a:bodyPr rtlCol="0" anchor="ctr"/>
+          <a:lstStyle/>
+          <a:p>
+            <a:pPr algn="ctr"/>
+          </a:p>
+        </p:txBody>
+      </p:sp>
+      <p:sp>
+        <p:nvSpPr>
+          <p:cNvPr id="23" name="Rectangle 22"/>
+          <p:cNvSpPr/>
+          <p:nvPr/>
+        </p:nvSpPr>
+        <p:spPr>
+          <a:xfrm>
+            <a:off x="457200" y="3246120"/>
+            <a:ext cx="54864" cy="621792"/>
+          </a:xfrm>
+          <a:prstGeom prst="rect">
+            <a:avLst/>
+          </a:prstGeom>
+          <a:solidFill>
+            <a:srgbClr val="2E7D32"/>
+          </a:solidFill>
+          <a:ln>
+            <a:noFill/>
+          </a:ln>
+        </p:spPr>
+        <p:style>
+          <a:lnRef idx="1">
+            <a:schemeClr val="accent1"/>
+          </a:lnRef>
+          <a:fillRef idx="3">
+            <a:schemeClr val="accent1"/>
+          </a:fillRef>
+          <a:effectRef idx="2">
+            <a:schemeClr val="accent1"/>
+          </a:effectRef>
+          <a:fontRef idx="minor">
+            <a:schemeClr val="lt1"/>
+          </a:fontRef>
+        </p:style>
+        <p:txBody>
+          <a:bodyPr rtlCol="0" anchor="ctr"/>
+          <a:lstStyle/>
+          <a:p>
+            <a:pPr algn="ctr"/>
+          </a:p>
+        </p:txBody>
+      </p:sp>
+      <p:sp>
+        <p:nvSpPr>
+          <p:cNvPr id="24" name="TextBox 23"/>
+          <p:cNvSpPr txBox="1"/>
+          <p:nvPr/>
+        </p:nvSpPr>
+        <p:spPr>
+          <a:xfrm>
+            <a:off x="594360" y="3392424"/>
+            <a:ext cx="1188720" cy="347472"/>
+          </a:xfrm>
+          <a:prstGeom prst="rect">
+            <a:avLst/>
+          </a:prstGeom>
+          <a:noFill/>
+        </p:spPr>
+        <p:txBody>
+          <a:bodyPr wrap="square">
+            <a:spAutoFit/>
+          </a:bodyPr>
+          <a:lstStyle/>
+          <a:p>
+            <a:pPr algn="l"/>
+            <a:r>
+              <a:rPr sz="1100" b="0">
+                <a:solidFill>
+                  <a:srgbClr val="2E7D32"/>
+                </a:solidFill>
+              </a:rPr>
+              <a:t>✅ 완료</a:t>
+            </a:r>
+          </a:p>
+        </p:txBody>
+      </p:sp>
+      <p:sp>
+        <p:nvSpPr>
+          <p:cNvPr id="25" name="TextBox 24"/>
+          <p:cNvSpPr txBox="1"/>
+          <p:nvPr/>
+        </p:nvSpPr>
+        <p:spPr>
+          <a:xfrm>
+            <a:off x="1920240" y="3392424"/>
+            <a:ext cx="2103120" cy="347472"/>
+          </a:xfrm>
+          <a:prstGeom prst="rect">
+            <a:avLst/>
+          </a:prstGeom>
+          <a:noFill/>
+        </p:spPr>
+        <p:txBody>
+          <a:bodyPr wrap="square">
+            <a:spAutoFit/>
+          </a:bodyPr>
+          <a:lstStyle/>
+          <a:p>
+            <a:pPr algn="l"/>
+            <a:r>
+              <a:rPr sz="1200" b="1">
+                <a:solidFill>
+                  <a:srgbClr val="212121"/>
+                </a:solidFill>
+              </a:rPr>
+              <a:t>시각화</a:t>
+            </a:r>
+          </a:p>
+        </p:txBody>
+      </p:sp>
+      <p:sp>
+        <p:nvSpPr>
+          <p:cNvPr id="26" name="TextBox 25"/>
+          <p:cNvSpPr txBox="1"/>
+          <p:nvPr/>
+        </p:nvSpPr>
+        <p:spPr>
+          <a:xfrm>
+            <a:off x="4114800" y="3392424"/>
+            <a:ext cx="7406640" cy="347472"/>
+          </a:xfrm>
+          <a:prstGeom prst="rect">
+            <a:avLst/>
+          </a:prstGeom>
+          <a:noFill/>
+        </p:spPr>
+        <p:txBody>
+          <a:bodyPr wrap="square">
+            <a:spAutoFit/>
+          </a:bodyPr>
+          <a:lstStyle/>
+          <a:p>
+            <a:pPr algn="l"/>
+            <a:r>
+              <a:rPr sz="1200" b="0">
+                <a:solidFill>
+                  <a:srgbClr val="212121"/>
+                </a:solidFill>
+              </a:rPr>
+              <a:t>수익률 막대 차트 / 누적 손익 라인 차트 / 기간 필터</a:t>
+            </a:r>
+          </a:p>
+        </p:txBody>
+      </p:sp>
+      <p:sp>
+        <p:nvSpPr>
+          <p:cNvPr id="27" name="Rectangle 26"/>
+          <p:cNvSpPr/>
+          <p:nvPr/>
+        </p:nvSpPr>
+        <p:spPr>
+          <a:xfrm>
+            <a:off x="457200" y="3977639"/>
+            <a:ext cx="11247120" cy="621792"/>
+          </a:xfrm>
+          <a:prstGeom prst="rect">
+            <a:avLst/>
+          </a:prstGeom>
+          <a:noFill/>
+          <a:ln w="10160">
+            <a:solidFill>
+              <a:srgbClr val="E0E0E0"/>
+            </a:solidFill>
+          </a:ln>
+        </p:spPr>
+        <p:style>
+          <a:lnRef idx="1">
+            <a:schemeClr val="accent1"/>
+          </a:lnRef>
+          <a:fillRef idx="3">
+            <a:schemeClr val="accent1"/>
+          </a:fillRef>
+          <a:effectRef idx="2">
+            <a:schemeClr val="accent1"/>
+          </a:effectRef>
+          <a:fontRef idx="minor">
+            <a:schemeClr val="lt1"/>
+          </a:fontRef>
+        </p:style>
+        <p:txBody>
+          <a:bodyPr rtlCol="0" anchor="ctr"/>
+          <a:lstStyle/>
+          <a:p>
+            <a:pPr algn="ctr"/>
+          </a:p>
+        </p:txBody>
+      </p:sp>
+      <p:sp>
+        <p:nvSpPr>
+          <p:cNvPr id="28" name="Rectangle 27"/>
+          <p:cNvSpPr/>
+          <p:nvPr/>
+        </p:nvSpPr>
+        <p:spPr>
+          <a:xfrm>
+            <a:off x="457200" y="3977639"/>
+            <a:ext cx="54864" cy="621792"/>
+          </a:xfrm>
+          <a:prstGeom prst="rect">
+            <a:avLst/>
+          </a:prstGeom>
+          <a:solidFill>
+            <a:srgbClr val="2E7D32"/>
+          </a:solidFill>
+          <a:ln>
+            <a:noFill/>
+          </a:ln>
+        </p:spPr>
+        <p:style>
+          <a:lnRef idx="1">
+            <a:schemeClr val="accent1"/>
+          </a:lnRef>
+          <a:fillRef idx="3">
+            <a:schemeClr val="accent1"/>
+          </a:fillRef>
+          <a:effectRef idx="2">
+            <a:schemeClr val="accent1"/>
+          </a:effectRef>
+          <a:fontRef idx="minor">
+            <a:schemeClr val="lt1"/>
+          </a:fontRef>
+        </p:style>
+        <p:txBody>
+          <a:bodyPr rtlCol="0" anchor="ctr"/>
+          <a:lstStyle/>
+          <a:p>
+            <a:pPr algn="ctr"/>
+          </a:p>
+        </p:txBody>
+      </p:sp>
+      <p:sp>
+        <p:nvSpPr>
+          <p:cNvPr id="29" name="TextBox 28"/>
+          <p:cNvSpPr txBox="1"/>
+          <p:nvPr/>
+        </p:nvSpPr>
+        <p:spPr>
+          <a:xfrm>
+            <a:off x="594360" y="4123944"/>
+            <a:ext cx="1188720" cy="347472"/>
+          </a:xfrm>
+          <a:prstGeom prst="rect">
+            <a:avLst/>
+          </a:prstGeom>
+          <a:noFill/>
+        </p:spPr>
+        <p:txBody>
+          <a:bodyPr wrap="square">
+            <a:spAutoFit/>
+          </a:bodyPr>
+          <a:lstStyle/>
+          <a:p>
+            <a:pPr algn="l"/>
+            <a:r>
+              <a:rPr sz="1100" b="0">
+                <a:solidFill>
+                  <a:srgbClr val="2E7D32"/>
+                </a:solidFill>
+              </a:rPr>
+              <a:t>✅ 완료</a:t>
+            </a:r>
+          </a:p>
+        </p:txBody>
+      </p:sp>
+      <p:sp>
+        <p:nvSpPr>
+          <p:cNvPr id="30" name="TextBox 29"/>
+          <p:cNvSpPr txBox="1"/>
+          <p:nvPr/>
+        </p:nvSpPr>
+        <p:spPr>
+          <a:xfrm>
+            <a:off x="1920240" y="4123944"/>
+            <a:ext cx="2103120" cy="347472"/>
+          </a:xfrm>
+          <a:prstGeom prst="rect">
+            <a:avLst/>
+          </a:prstGeom>
+          <a:noFill/>
+        </p:spPr>
+        <p:txBody>
+          <a:bodyPr wrap="square">
+            <a:spAutoFit/>
+          </a:bodyPr>
+          <a:lstStyle/>
+          <a:p>
+            <a:pPr algn="l"/>
+            <a:r>
+              <a:rPr sz="1200" b="1">
+                <a:solidFill>
+                  <a:srgbClr val="212121"/>
+                </a:solidFill>
+              </a:rPr>
+              <a:t>대시보드</a:t>
+            </a:r>
+          </a:p>
+        </p:txBody>
+      </p:sp>
+      <p:sp>
+        <p:nvSpPr>
+          <p:cNvPr id="31" name="TextBox 30"/>
+          <p:cNvSpPr txBox="1"/>
+          <p:nvPr/>
+        </p:nvSpPr>
+        <p:spPr>
+          <a:xfrm>
+            <a:off x="4114800" y="4123944"/>
+            <a:ext cx="7406640" cy="347472"/>
+          </a:xfrm>
+          <a:prstGeom prst="rect">
+            <a:avLst/>
+          </a:prstGeom>
+          <a:noFill/>
+        </p:spPr>
+        <p:txBody>
+          <a:bodyPr wrap="square">
+            <a:spAutoFit/>
+          </a:bodyPr>
+          <a:lstStyle/>
+          <a:p>
+            <a:pPr algn="l"/>
+            <a:r>
+              <a:rPr sz="1200" b="0">
+                <a:solidFill>
+                  <a:srgbClr val="212121"/>
+                </a:solidFill>
+              </a:rPr>
+              <a:t>총 잔액 / 누적 손익 / 승률 / 최근 포지션 목록</a:t>
+            </a:r>
+          </a:p>
+        </p:txBody>
+      </p:sp>
+      <p:sp>
+        <p:nvSpPr>
+          <p:cNvPr id="32" name="Rectangle 31"/>
+          <p:cNvSpPr/>
+          <p:nvPr/>
+        </p:nvSpPr>
+        <p:spPr>
+          <a:xfrm>
+            <a:off x="457200" y="4709160"/>
+            <a:ext cx="11247120" cy="621792"/>
+          </a:xfrm>
+          <a:prstGeom prst="rect">
+            <a:avLst/>
+          </a:prstGeom>
+          <a:noFill/>
+          <a:ln w="10160">
+            <a:solidFill>
+              <a:srgbClr val="E0E0E0"/>
+            </a:solidFill>
+          </a:ln>
+        </p:spPr>
+        <p:style>
+          <a:lnRef idx="1">
+            <a:schemeClr val="accent1"/>
+          </a:lnRef>
+          <a:fillRef idx="3">
+            <a:schemeClr val="accent1"/>
+          </a:fillRef>
+          <a:effectRef idx="2">
+            <a:schemeClr val="accent1"/>
+          </a:effectRef>
+          <a:fontRef idx="minor">
+            <a:schemeClr val="lt1"/>
+          </a:fontRef>
+        </p:style>
+        <p:txBody>
+          <a:bodyPr rtlCol="0" anchor="ctr"/>
+          <a:lstStyle/>
+          <a:p>
+            <a:pPr algn="ctr"/>
+          </a:p>
+        </p:txBody>
+      </p:sp>
+      <p:sp>
+        <p:nvSpPr>
+          <p:cNvPr id="33" name="Rectangle 32"/>
+          <p:cNvSpPr/>
+          <p:nvPr/>
+        </p:nvSpPr>
+        <p:spPr>
+          <a:xfrm>
+            <a:off x="457200" y="4709160"/>
+            <a:ext cx="54864" cy="621792"/>
+          </a:xfrm>
+          <a:prstGeom prst="rect">
+            <a:avLst/>
+          </a:prstGeom>
+          <a:solidFill>
+            <a:srgbClr val="E65C00"/>
+          </a:solidFill>
+          <a:ln>
+            <a:noFill/>
+          </a:ln>
+        </p:spPr>
+        <p:style>
+          <a:lnRef idx="1">
+            <a:schemeClr val="accent1"/>
+          </a:lnRef>
+          <a:fillRef idx="3">
+            <a:schemeClr val="accent1"/>
+          </a:fillRef>
+          <a:effectRef idx="2">
+            <a:schemeClr val="accent1"/>
+          </a:effectRef>
+          <a:fontRef idx="minor">
+            <a:schemeClr val="lt1"/>
+          </a:fontRef>
+        </p:style>
+        <p:txBody>
+          <a:bodyPr rtlCol="0" anchor="ctr"/>
+          <a:lstStyle/>
+          <a:p>
+            <a:pPr algn="ctr"/>
+          </a:p>
+        </p:txBody>
+      </p:sp>
+      <p:sp>
+        <p:nvSpPr>
+          <p:cNvPr id="34" name="TextBox 33"/>
+          <p:cNvSpPr txBox="1"/>
+          <p:nvPr/>
+        </p:nvSpPr>
+        <p:spPr>
+          <a:xfrm>
+            <a:off x="594360" y="4855464"/>
+            <a:ext cx="1188720" cy="347472"/>
+          </a:xfrm>
+          <a:prstGeom prst="rect">
+            <a:avLst/>
+          </a:prstGeom>
+          <a:noFill/>
+        </p:spPr>
+        <p:txBody>
+          <a:bodyPr wrap="square">
+            <a:spAutoFit/>
+          </a:bodyPr>
+          <a:lstStyle/>
+          <a:p>
+            <a:pPr algn="l"/>
+            <a:r>
+              <a:rPr sz="1100" b="0">
+                <a:solidFill>
+                  <a:srgbClr val="E65C00"/>
+                </a:solidFill>
+              </a:rPr>
+              <a:t>🚧 진행</a:t>
+            </a:r>
+          </a:p>
+        </p:txBody>
+      </p:sp>
+      <p:sp>
+        <p:nvSpPr>
+          <p:cNvPr id="35" name="TextBox 34"/>
+          <p:cNvSpPr txBox="1"/>
+          <p:nvPr/>
+        </p:nvSpPr>
+        <p:spPr>
+          <a:xfrm>
+            <a:off x="1920240" y="4855464"/>
+            <a:ext cx="2103120" cy="347472"/>
+          </a:xfrm>
+          <a:prstGeom prst="rect">
+            <a:avLst/>
+          </a:prstGeom>
+          <a:noFill/>
+        </p:spPr>
+        <p:txBody>
+          <a:bodyPr wrap="square">
+            <a:spAutoFit/>
+          </a:bodyPr>
+          <a:lstStyle/>
+          <a:p>
+            <a:pPr algn="l"/>
+            <a:r>
+              <a:rPr sz="1200" b="1">
+                <a:solidFill>
+                  <a:srgbClr val="212121"/>
+                </a:solidFill>
+              </a:rPr>
+              <a:t>문서·배포</a:t>
+            </a:r>
+          </a:p>
+        </p:txBody>
+      </p:sp>
+      <p:sp>
+        <p:nvSpPr>
+          <p:cNvPr id="36" name="TextBox 35"/>
+          <p:cNvSpPr txBox="1"/>
+          <p:nvPr/>
+        </p:nvSpPr>
+        <p:spPr>
+          <a:xfrm>
+            <a:off x="4114800" y="4855464"/>
+            <a:ext cx="7406640" cy="347472"/>
+          </a:xfrm>
+          <a:prstGeom prst="rect">
+            <a:avLst/>
+          </a:prstGeom>
+          <a:noFill/>
+        </p:spPr>
+        <p:txBody>
+          <a:bodyPr wrap="square">
+            <a:spAutoFit/>
+          </a:bodyPr>
+          <a:lstStyle/>
+          <a:p>
+            <a:pPr algn="l"/>
+            <a:r>
+              <a:rPr sz="1200" b="0">
+                <a:solidFill>
+                  <a:srgbClr val="212121"/>
+                </a:solidFill>
+              </a:rPr>
+              <a:t>setup·testing 문서 / README 완비</a:t>
+            </a:r>
+          </a:p>
+        </p:txBody>
+      </p:sp>
+      <p:sp>
+        <p:nvSpPr>
+          <p:cNvPr id="37" name="Rectangle 36"/>
+          <p:cNvSpPr/>
+          <p:nvPr/>
+        </p:nvSpPr>
+        <p:spPr>
+          <a:xfrm>
+            <a:off x="457200" y="5440680"/>
+            <a:ext cx="11247120" cy="621792"/>
+          </a:xfrm>
+          <a:prstGeom prst="rect">
+            <a:avLst/>
+          </a:prstGeom>
+          <a:noFill/>
+          <a:ln w="10160">
+            <a:solidFill>
+              <a:srgbClr val="E0E0E0"/>
+            </a:solidFill>
+          </a:ln>
+        </p:spPr>
+        <p:style>
+          <a:lnRef idx="1">
+            <a:schemeClr val="accent1"/>
+          </a:lnRef>
+          <a:fillRef idx="3">
+            <a:schemeClr val="accent1"/>
+          </a:fillRef>
+          <a:effectRef idx="2">
+            <a:schemeClr val="accent1"/>
+          </a:effectRef>
+          <a:fontRef idx="minor">
+            <a:schemeClr val="lt1"/>
+          </a:fontRef>
+        </p:style>
+        <p:txBody>
+          <a:bodyPr rtlCol="0" anchor="ctr"/>
+          <a:lstStyle/>
+          <a:p>
+            <a:pPr algn="ctr"/>
+          </a:p>
+        </p:txBody>
+      </p:sp>
+      <p:sp>
+        <p:nvSpPr>
+          <p:cNvPr id="38" name="Rectangle 37"/>
+          <p:cNvSpPr/>
+          <p:nvPr/>
+        </p:nvSpPr>
+        <p:spPr>
+          <a:xfrm>
+            <a:off x="457200" y="5440680"/>
+            <a:ext cx="54864" cy="621792"/>
+          </a:xfrm>
+          <a:prstGeom prst="rect">
+            <a:avLst/>
+          </a:prstGeom>
+          <a:solidFill>
+            <a:srgbClr val="9E9E9E"/>
+          </a:solidFill>
+          <a:ln>
+            <a:noFill/>
+          </a:ln>
+        </p:spPr>
+        <p:style>
+          <a:lnRef idx="1">
+            <a:schemeClr val="accent1"/>
+          </a:lnRef>
+          <a:fillRef idx="3">
+            <a:schemeClr val="accent1"/>
+          </a:fillRef>
+          <a:effectRef idx="2">
+            <a:schemeClr val="accent1"/>
+          </a:effectRef>
+          <a:fontRef idx="minor">
+            <a:schemeClr val="lt1"/>
+          </a:fontRef>
+        </p:style>
+        <p:txBody>
+          <a:bodyPr rtlCol="0" anchor="ctr"/>
+          <a:lstStyle/>
+          <a:p>
+            <a:pPr algn="ctr"/>
+          </a:p>
+        </p:txBody>
+      </p:sp>
+      <p:sp>
+        <p:nvSpPr>
+          <p:cNvPr id="39" name="TextBox 38"/>
+          <p:cNvSpPr txBox="1"/>
+          <p:nvPr/>
+        </p:nvSpPr>
+        <p:spPr>
+          <a:xfrm>
+            <a:off x="594360" y="5586984"/>
+            <a:ext cx="1188720" cy="347472"/>
+          </a:xfrm>
+          <a:prstGeom prst="rect">
+            <a:avLst/>
+          </a:prstGeom>
+          <a:noFill/>
+        </p:spPr>
+        <p:txBody>
+          <a:bodyPr wrap="square">
+            <a:spAutoFit/>
+          </a:bodyPr>
+          <a:lstStyle/>
+          <a:p>
+            <a:pPr algn="l"/>
+            <a:r>
+              <a:rPr sz="1100" b="0">
+                <a:solidFill>
+                  <a:srgbClr val="9E9E9E"/>
+                </a:solidFill>
+              </a:rPr>
+              <a:t>⏳ 예정</a:t>
+            </a:r>
+          </a:p>
+        </p:txBody>
+      </p:sp>
+      <p:sp>
+        <p:nvSpPr>
+          <p:cNvPr id="40" name="TextBox 39"/>
+          <p:cNvSpPr txBox="1"/>
+          <p:nvPr/>
+        </p:nvSpPr>
+        <p:spPr>
+          <a:xfrm>
+            <a:off x="1920240" y="5586984"/>
+            <a:ext cx="2103120" cy="347472"/>
+          </a:xfrm>
+          <a:prstGeom prst="rect">
+            <a:avLst/>
+          </a:prstGeom>
+          <a:noFill/>
+        </p:spPr>
+        <p:txBody>
+          <a:bodyPr wrap="square">
+            <a:spAutoFit/>
+          </a:bodyPr>
+          <a:lstStyle/>
+          <a:p>
+            <a:pPr algn="l"/>
+            <a:r>
+              <a:rPr sz="1200" b="1">
+                <a:solidFill>
+                  <a:srgbClr val="212121"/>
+                </a:solidFill>
+              </a:rPr>
+              <a:t>앱 빌드</a:t>
+            </a:r>
+          </a:p>
+        </p:txBody>
+      </p:sp>
+      <p:sp>
+        <p:nvSpPr>
+          <p:cNvPr id="41" name="TextBox 40"/>
+          <p:cNvSpPr txBox="1"/>
+          <p:nvPr/>
+        </p:nvSpPr>
+        <p:spPr>
+          <a:xfrm>
+            <a:off x="4114800" y="5586984"/>
+            <a:ext cx="7406640" cy="347472"/>
+          </a:xfrm>
+          <a:prstGeom prst="rect">
+            <a:avLst/>
+          </a:prstGeom>
+          <a:noFill/>
+        </p:spPr>
+        <p:txBody>
+          <a:bodyPr wrap="square">
+            <a:spAutoFit/>
+          </a:bodyPr>
+          <a:lstStyle/>
+          <a:p>
+            <a:pPr algn="l"/>
+            <a:r>
+              <a:rPr sz="1200" b="0">
+                <a:solidFill>
+                  <a:srgbClr val="212121"/>
+                </a:solidFill>
+              </a:rPr>
+              <a:t>Android APK 빌드 및 설치 파일 생성</a:t>
+            </a:r>
+          </a:p>
+        </p:txBody>
+      </p:sp>
+      <p:sp>
+        <p:nvSpPr>
+          <p:cNvPr id="42" name="Rectangle 41"/>
+          <p:cNvSpPr/>
+          <p:nvPr/>
+        </p:nvSpPr>
+        <p:spPr>
+          <a:xfrm>
+            <a:off x="457200" y="5605272"/>
+            <a:ext cx="11247120" cy="566928"/>
+          </a:xfrm>
+          <a:prstGeom prst="rect">
+            <a:avLst/>
+          </a:prstGeom>
+          <a:solidFill>
+            <a:srgbClr val="F5F5F5"/>
+          </a:solidFill>
+          <a:ln w="10160">
+            <a:solidFill>
+              <a:srgbClr val="E0E0E0"/>
+            </a:solidFill>
+          </a:ln>
+        </p:spPr>
+        <p:style>
+          <a:lnRef idx="1">
+            <a:schemeClr val="accent1"/>
+          </a:lnRef>
+          <a:fillRef idx="3">
+            <a:schemeClr val="accent1"/>
+          </a:fillRef>
+          <a:effectRef idx="2">
+            <a:schemeClr val="accent1"/>
+          </a:effectRef>
+          <a:fontRef idx="minor">
+            <a:schemeClr val="lt1"/>
+          </a:fontRef>
+        </p:style>
+        <p:txBody>
+          <a:bodyPr rtlCol="0" anchor="ctr"/>
+          <a:lstStyle/>
+          <a:p>
+            <a:pPr algn="ctr"/>
+          </a:p>
+        </p:txBody>
+      </p:sp>
+      <p:sp>
+        <p:nvSpPr>
+          <p:cNvPr id="43" name="TextBox 42"/>
+          <p:cNvSpPr txBox="1"/>
+          <p:nvPr/>
+        </p:nvSpPr>
+        <p:spPr>
+          <a:xfrm>
+            <a:off x="658368" y="5760720"/>
+            <a:ext cx="10972800" cy="384048"/>
+          </a:xfrm>
+          <a:prstGeom prst="rect">
+            <a:avLst/>
+          </a:prstGeom>
+          <a:noFill/>
+        </p:spPr>
+        <p:txBody>
+          <a:bodyPr wrap="square">
+            <a:spAutoFit/>
+          </a:bodyPr>
+          <a:lstStyle/>
+          <a:p>
+            <a:pPr algn="l"/>
+            <a:r>
+              <a:rPr sz="1300" b="1">
+                <a:solidFill>
+                  <a:srgbClr val="3F51B5"/>
+                </a:solidFill>
+              </a:rPr>
+              <a:t>전체 진척  ·  Must 기능 95% 완료  (5단계 구현 완료 / 문서·배포 진행 중)</a:t>
+            </a:r>
+          </a:p>
+        </p:txBody>
+      </p:sp>
     </p:spTree>
   </p:cSld>
   <p:clrMapOvr>
@@ -13636,733 +14339,30 @@
         <p:nvPr/>
       </p:nvGrpSpPr>
       <p:grpSpPr/>
-      <p:sp>
-        <p:nvSpPr>
-          <p:cNvPr id="2" name="Rectangle 1"/>
-          <p:cNvSpPr/>
-          <p:nvPr/>
-        </p:nvSpPr>
-        <p:spPr>
-          <a:xfrm>
-            <a:off x="0" y="0"/>
-            <a:ext cx="12188952" cy="914400"/>
-          </a:xfrm>
-          <a:prstGeom prst="rect">
-            <a:avLst/>
-          </a:prstGeom>
-          <a:noFill/>
-          <a:ln>
-            <a:noFill/>
-          </a:ln>
-        </p:spPr>
-        <p:style>
-          <a:lnRef idx="1">
-            <a:schemeClr val="accent1"/>
-          </a:lnRef>
-          <a:fillRef idx="3">
-            <a:schemeClr val="accent1"/>
-          </a:fillRef>
-          <a:effectRef idx="2">
-            <a:schemeClr val="accent1"/>
-          </a:effectRef>
-          <a:fontRef idx="minor">
-            <a:schemeClr val="lt1"/>
-          </a:fontRef>
-        </p:style>
-        <p:txBody>
-          <a:bodyPr rtlCol="0" anchor="ctr"/>
-          <a:lstStyle/>
-          <a:p>
-            <a:pPr algn="ctr"/>
-          </a:p>
-        </p:txBody>
-      </p:sp>
-      <p:sp>
-        <p:nvSpPr>
-          <p:cNvPr id="3" name="TextBox 2"/>
-          <p:cNvSpPr txBox="1"/>
-          <p:nvPr/>
-        </p:nvSpPr>
-        <p:spPr>
-          <a:xfrm>
-            <a:off x="457200" y="73152"/>
-            <a:ext cx="10972800" cy="566928"/>
-          </a:xfrm>
-          <a:prstGeom prst="rect">
-            <a:avLst/>
-          </a:prstGeom>
-          <a:noFill/>
-        </p:spPr>
-        <p:txBody>
-          <a:bodyPr wrap="square">
-            <a:spAutoFit/>
-          </a:bodyPr>
-          <a:lstStyle/>
-          <a:p>
-            <a:pPr algn="l"/>
-            <a:r>
-              <a:rPr sz="2400" b="1">
-                <a:solidFill>
-                  <a:srgbClr val="3F51B5"/>
-                </a:solidFill>
-              </a:rPr>
-              <a:t>6.  데모</a:t>
-            </a:r>
-          </a:p>
-        </p:txBody>
-      </p:sp>
-      <p:sp>
-        <p:nvSpPr>
-          <p:cNvPr id="4" name="TextBox 3"/>
-          <p:cNvSpPr txBox="1"/>
-          <p:nvPr/>
-        </p:nvSpPr>
-        <p:spPr>
-          <a:xfrm>
-            <a:off x="457200" y="621792"/>
-            <a:ext cx="10972800" cy="274320"/>
-          </a:xfrm>
-          <a:prstGeom prst="rect">
-            <a:avLst/>
-          </a:prstGeom>
-          <a:noFill/>
-        </p:spPr>
-        <p:txBody>
-          <a:bodyPr wrap="square">
-            <a:spAutoFit/>
-          </a:bodyPr>
-          <a:lstStyle/>
-          <a:p>
-            <a:pPr algn="l"/>
-            <a:r>
-              <a:rPr sz="1100" b="0">
-                <a:solidFill>
-                  <a:srgbClr val="9E9E9E"/>
-                </a:solidFill>
-              </a:rPr>
-              <a:t>라이브 시연 — 핵심 화면 2가지</a:t>
-            </a:r>
-          </a:p>
-        </p:txBody>
-      </p:sp>
-      <p:sp>
-        <p:nvSpPr>
-          <p:cNvPr id="5" name="Rectangle 4"/>
-          <p:cNvSpPr/>
-          <p:nvPr/>
-        </p:nvSpPr>
-        <p:spPr>
-          <a:xfrm>
-            <a:off x="0" y="868680"/>
-            <a:ext cx="12188952" cy="45720"/>
-          </a:xfrm>
-          <a:prstGeom prst="rect">
-            <a:avLst/>
-          </a:prstGeom>
-          <a:solidFill>
-            <a:srgbClr val="3F51B5"/>
-          </a:solidFill>
-          <a:ln>
-            <a:noFill/>
-          </a:ln>
-        </p:spPr>
-        <p:style>
-          <a:lnRef idx="1">
-            <a:schemeClr val="accent1"/>
-          </a:lnRef>
-          <a:fillRef idx="3">
-            <a:schemeClr val="accent1"/>
-          </a:fillRef>
-          <a:effectRef idx="2">
-            <a:schemeClr val="accent1"/>
-          </a:effectRef>
-          <a:fontRef idx="minor">
-            <a:schemeClr val="lt1"/>
-          </a:fontRef>
-        </p:style>
-        <p:txBody>
-          <a:bodyPr rtlCol="0" anchor="ctr"/>
-          <a:lstStyle/>
-          <a:p>
-            <a:pPr algn="ctr"/>
-          </a:p>
-        </p:txBody>
-      </p:sp>
-      <p:sp>
-        <p:nvSpPr>
-          <p:cNvPr id="6" name="TextBox 5"/>
-          <p:cNvSpPr txBox="1"/>
-          <p:nvPr/>
-        </p:nvSpPr>
-        <p:spPr>
-          <a:xfrm>
-            <a:off x="11247120" y="6492240"/>
-            <a:ext cx="822960" cy="274320"/>
-          </a:xfrm>
-          <a:prstGeom prst="rect">
-            <a:avLst/>
-          </a:prstGeom>
-          <a:noFill/>
-        </p:spPr>
-        <p:txBody>
-          <a:bodyPr wrap="square">
-            <a:spAutoFit/>
-          </a:bodyPr>
-          <a:lstStyle/>
-          <a:p>
-            <a:pPr algn="ctr"/>
-            <a:r>
-              <a:rPr sz="1000" b="0">
-                <a:solidFill>
-                  <a:srgbClr val="9E9E9E"/>
-                </a:solidFill>
-              </a:rPr>
-              <a:t>7 / 13</a:t>
-            </a:r>
-          </a:p>
-        </p:txBody>
-      </p:sp>
-      <p:sp>
-        <p:nvSpPr>
-          <p:cNvPr id="7" name="Rectangle 6"/>
-          <p:cNvSpPr/>
-          <p:nvPr/>
-        </p:nvSpPr>
-        <p:spPr>
-          <a:xfrm>
-            <a:off x="457200" y="1097280"/>
-            <a:ext cx="11247120" cy="1920240"/>
-          </a:xfrm>
-          <a:prstGeom prst="rect">
-            <a:avLst/>
-          </a:prstGeom>
-          <a:noFill/>
-          <a:ln w="10160">
-            <a:solidFill>
-              <a:srgbClr val="E0E0E0"/>
-            </a:solidFill>
-          </a:ln>
-        </p:spPr>
-        <p:style>
-          <a:lnRef idx="1">
-            <a:schemeClr val="accent1"/>
-          </a:lnRef>
-          <a:fillRef idx="3">
-            <a:schemeClr val="accent1"/>
-          </a:fillRef>
-          <a:effectRef idx="2">
-            <a:schemeClr val="accent1"/>
-          </a:effectRef>
-          <a:fontRef idx="minor">
-            <a:schemeClr val="lt1"/>
-          </a:fontRef>
-        </p:style>
-        <p:txBody>
-          <a:bodyPr rtlCol="0" anchor="ctr"/>
-          <a:lstStyle/>
-          <a:p>
-            <a:pPr algn="ctr"/>
-          </a:p>
-        </p:txBody>
-      </p:sp>
-      <p:sp>
-        <p:nvSpPr>
-          <p:cNvPr id="8" name="Rectangle 7"/>
-          <p:cNvSpPr/>
-          <p:nvPr/>
-        </p:nvSpPr>
-        <p:spPr>
-          <a:xfrm>
-            <a:off x="457200" y="1097280"/>
-            <a:ext cx="54864" cy="1920240"/>
-          </a:xfrm>
-          <a:prstGeom prst="rect">
-            <a:avLst/>
-          </a:prstGeom>
-          <a:solidFill>
-            <a:srgbClr val="3F51B5"/>
-          </a:solidFill>
-          <a:ln>
-            <a:noFill/>
-          </a:ln>
-        </p:spPr>
-        <p:style>
-          <a:lnRef idx="1">
-            <a:schemeClr val="accent1"/>
-          </a:lnRef>
-          <a:fillRef idx="3">
-            <a:schemeClr val="accent1"/>
-          </a:fillRef>
-          <a:effectRef idx="2">
-            <a:schemeClr val="accent1"/>
-          </a:effectRef>
-          <a:fontRef idx="minor">
-            <a:schemeClr val="lt1"/>
-          </a:fontRef>
-        </p:style>
-        <p:txBody>
-          <a:bodyPr rtlCol="0" anchor="ctr"/>
-          <a:lstStyle/>
-          <a:p>
-            <a:pPr algn="ctr"/>
-          </a:p>
-        </p:txBody>
-      </p:sp>
-      <p:sp>
-        <p:nvSpPr>
-          <p:cNvPr id="9" name="Rectangle 8"/>
-          <p:cNvSpPr/>
-          <p:nvPr/>
-        </p:nvSpPr>
-        <p:spPr>
-          <a:xfrm>
-            <a:off x="457200" y="1097280"/>
-            <a:ext cx="11247120" cy="475488"/>
-          </a:xfrm>
-          <a:prstGeom prst="rect">
-            <a:avLst/>
-          </a:prstGeom>
-          <a:solidFill>
-            <a:srgbClr val="F5F5F5"/>
-          </a:solidFill>
-          <a:ln>
-            <a:noFill/>
-          </a:ln>
-        </p:spPr>
-        <p:style>
-          <a:lnRef idx="1">
-            <a:schemeClr val="accent1"/>
-          </a:lnRef>
-          <a:fillRef idx="3">
-            <a:schemeClr val="accent1"/>
-          </a:fillRef>
-          <a:effectRef idx="2">
-            <a:schemeClr val="accent1"/>
-          </a:effectRef>
-          <a:fontRef idx="minor">
-            <a:schemeClr val="lt1"/>
-          </a:fontRef>
-        </p:style>
-        <p:txBody>
-          <a:bodyPr rtlCol="0" anchor="ctr"/>
-          <a:lstStyle/>
-          <a:p>
-            <a:pPr algn="ctr"/>
-          </a:p>
-        </p:txBody>
-      </p:sp>
-      <p:sp>
-        <p:nvSpPr>
-          <p:cNvPr id="10" name="TextBox 9"/>
-          <p:cNvSpPr txBox="1"/>
-          <p:nvPr/>
-        </p:nvSpPr>
-        <p:spPr>
-          <a:xfrm>
-            <a:off x="658368" y="1188720"/>
-            <a:ext cx="1828800" cy="320040"/>
-          </a:xfrm>
-          <a:prstGeom prst="rect">
-            <a:avLst/>
-          </a:prstGeom>
-          <a:noFill/>
-        </p:spPr>
-        <p:txBody>
-          <a:bodyPr wrap="square">
-            <a:spAutoFit/>
-          </a:bodyPr>
-          <a:lstStyle/>
-          <a:p>
-            <a:pPr algn="l"/>
-            <a:r>
-              <a:rPr sz="1100" b="1">
-                <a:solidFill>
-                  <a:srgbClr val="3F51B5"/>
-                </a:solidFill>
-              </a:rPr>
-              <a:t>시나리오 A</a:t>
-            </a:r>
-          </a:p>
-        </p:txBody>
-      </p:sp>
-      <p:sp>
-        <p:nvSpPr>
-          <p:cNvPr id="11" name="TextBox 10"/>
-          <p:cNvSpPr txBox="1"/>
-          <p:nvPr/>
-        </p:nvSpPr>
-        <p:spPr>
-          <a:xfrm>
-            <a:off x="2606040" y="1188720"/>
-            <a:ext cx="8961120" cy="320040"/>
-          </a:xfrm>
-          <a:prstGeom prst="rect">
-            <a:avLst/>
-          </a:prstGeom>
-          <a:noFill/>
-        </p:spPr>
-        <p:txBody>
-          <a:bodyPr wrap="square">
-            <a:spAutoFit/>
-          </a:bodyPr>
-          <a:lstStyle/>
-          <a:p>
-            <a:pPr algn="l"/>
-            <a:r>
-              <a:rPr sz="1400" b="1">
-                <a:solidFill>
-                  <a:srgbClr val="212121"/>
-                </a:solidFill>
-              </a:rPr>
-              <a:t>계좌 관리 흐름</a:t>
-            </a:r>
-          </a:p>
-        </p:txBody>
-      </p:sp>
-      <p:sp>
-        <p:nvSpPr>
-          <p:cNvPr id="12" name="TextBox 11"/>
-          <p:cNvSpPr txBox="1"/>
-          <p:nvPr/>
-        </p:nvSpPr>
-        <p:spPr>
-          <a:xfrm>
-            <a:off x="658368" y="1737360"/>
-            <a:ext cx="10881360" cy="1097280"/>
-          </a:xfrm>
-          <a:prstGeom prst="rect">
-            <a:avLst/>
-          </a:prstGeom>
-          <a:noFill/>
-        </p:spPr>
-        <p:txBody>
-          <a:bodyPr wrap="square">
-            <a:spAutoFit/>
-          </a:bodyPr>
-          <a:lstStyle/>
-          <a:p>
-            <a:pPr algn="l"/>
-            <a:r>
-              <a:rPr sz="1300" b="0">
-                <a:solidFill>
-                  <a:srgbClr val="212121"/>
-                </a:solidFill>
-              </a:rPr>
-              <a:t>① 계좌 등록 (주식·코인 선택, 통화 선택)  → ② 입금 기록  → ③ 잔액 자동 계산 확인</a:t>
-            </a:r>
-          </a:p>
-        </p:txBody>
-      </p:sp>
-      <p:sp>
-        <p:nvSpPr>
-          <p:cNvPr id="13" name="Rectangle 12"/>
-          <p:cNvSpPr/>
-          <p:nvPr/>
-        </p:nvSpPr>
-        <p:spPr>
-          <a:xfrm>
-            <a:off x="457200" y="3383280"/>
-            <a:ext cx="11247120" cy="1920240"/>
-          </a:xfrm>
-          <a:prstGeom prst="rect">
-            <a:avLst/>
-          </a:prstGeom>
-          <a:noFill/>
-          <a:ln w="10160">
-            <a:solidFill>
-              <a:srgbClr val="E0E0E0"/>
-            </a:solidFill>
-          </a:ln>
-        </p:spPr>
-        <p:style>
-          <a:lnRef idx="1">
-            <a:schemeClr val="accent1"/>
-          </a:lnRef>
-          <a:fillRef idx="3">
-            <a:schemeClr val="accent1"/>
-          </a:fillRef>
-          <a:effectRef idx="2">
-            <a:schemeClr val="accent1"/>
-          </a:effectRef>
-          <a:fontRef idx="minor">
-            <a:schemeClr val="lt1"/>
-          </a:fontRef>
-        </p:style>
-        <p:txBody>
-          <a:bodyPr rtlCol="0" anchor="ctr"/>
-          <a:lstStyle/>
-          <a:p>
-            <a:pPr algn="ctr"/>
-          </a:p>
-        </p:txBody>
-      </p:sp>
-      <p:sp>
-        <p:nvSpPr>
-          <p:cNvPr id="14" name="Rectangle 13"/>
-          <p:cNvSpPr/>
-          <p:nvPr/>
-        </p:nvSpPr>
-        <p:spPr>
-          <a:xfrm>
-            <a:off x="457200" y="3383280"/>
-            <a:ext cx="54864" cy="1920240"/>
-          </a:xfrm>
-          <a:prstGeom prst="rect">
-            <a:avLst/>
-          </a:prstGeom>
-          <a:solidFill>
-            <a:srgbClr val="3F51B5"/>
-          </a:solidFill>
-          <a:ln>
-            <a:noFill/>
-          </a:ln>
-        </p:spPr>
-        <p:style>
-          <a:lnRef idx="1">
-            <a:schemeClr val="accent1"/>
-          </a:lnRef>
-          <a:fillRef idx="3">
-            <a:schemeClr val="accent1"/>
-          </a:fillRef>
-          <a:effectRef idx="2">
-            <a:schemeClr val="accent1"/>
-          </a:effectRef>
-          <a:fontRef idx="minor">
-            <a:schemeClr val="lt1"/>
-          </a:fontRef>
-        </p:style>
-        <p:txBody>
-          <a:bodyPr rtlCol="0" anchor="ctr"/>
-          <a:lstStyle/>
-          <a:p>
-            <a:pPr algn="ctr"/>
-          </a:p>
-        </p:txBody>
-      </p:sp>
-      <p:sp>
-        <p:nvSpPr>
-          <p:cNvPr id="15" name="Rectangle 14"/>
-          <p:cNvSpPr/>
-          <p:nvPr/>
-        </p:nvSpPr>
-        <p:spPr>
-          <a:xfrm>
-            <a:off x="457200" y="3383280"/>
-            <a:ext cx="11247120" cy="475488"/>
-          </a:xfrm>
-          <a:prstGeom prst="rect">
-            <a:avLst/>
-          </a:prstGeom>
-          <a:solidFill>
-            <a:srgbClr val="F5F5F5"/>
-          </a:solidFill>
-          <a:ln>
-            <a:noFill/>
-          </a:ln>
-        </p:spPr>
-        <p:style>
-          <a:lnRef idx="1">
-            <a:schemeClr val="accent1"/>
-          </a:lnRef>
-          <a:fillRef idx="3">
-            <a:schemeClr val="accent1"/>
-          </a:fillRef>
-          <a:effectRef idx="2">
-            <a:schemeClr val="accent1"/>
-          </a:effectRef>
-          <a:fontRef idx="minor">
-            <a:schemeClr val="lt1"/>
-          </a:fontRef>
-        </p:style>
-        <p:txBody>
-          <a:bodyPr rtlCol="0" anchor="ctr"/>
-          <a:lstStyle/>
-          <a:p>
-            <a:pPr algn="ctr"/>
-          </a:p>
-        </p:txBody>
-      </p:sp>
-      <p:sp>
-        <p:nvSpPr>
-          <p:cNvPr id="16" name="TextBox 15"/>
-          <p:cNvSpPr txBox="1"/>
-          <p:nvPr/>
-        </p:nvSpPr>
-        <p:spPr>
-          <a:xfrm>
-            <a:off x="658368" y="3474720"/>
-            <a:ext cx="1828800" cy="320040"/>
-          </a:xfrm>
-          <a:prstGeom prst="rect">
-            <a:avLst/>
-          </a:prstGeom>
-          <a:noFill/>
-        </p:spPr>
-        <p:txBody>
-          <a:bodyPr wrap="square">
-            <a:spAutoFit/>
-          </a:bodyPr>
-          <a:lstStyle/>
-          <a:p>
-            <a:pPr algn="l"/>
-            <a:r>
-              <a:rPr sz="1100" b="1">
-                <a:solidFill>
-                  <a:srgbClr val="3F51B5"/>
-                </a:solidFill>
-              </a:rPr>
-              <a:t>시나리오 B</a:t>
-            </a:r>
-          </a:p>
-        </p:txBody>
-      </p:sp>
-      <p:sp>
-        <p:nvSpPr>
-          <p:cNvPr id="17" name="TextBox 16"/>
-          <p:cNvSpPr txBox="1"/>
-          <p:nvPr/>
-        </p:nvSpPr>
-        <p:spPr>
-          <a:xfrm>
-            <a:off x="2606040" y="3474720"/>
-            <a:ext cx="8961120" cy="320040"/>
-          </a:xfrm>
-          <a:prstGeom prst="rect">
-            <a:avLst/>
-          </a:prstGeom>
-          <a:noFill/>
-        </p:spPr>
-        <p:txBody>
-          <a:bodyPr wrap="square">
-            <a:spAutoFit/>
-          </a:bodyPr>
-          <a:lstStyle/>
-          <a:p>
-            <a:pPr algn="l"/>
-            <a:r>
-              <a:rPr sz="1400" b="1">
-                <a:solidFill>
-                  <a:srgbClr val="212121"/>
-                </a:solidFill>
-              </a:rPr>
-              <a:t>포지션 기록 + 복기</a:t>
-            </a:r>
-          </a:p>
-        </p:txBody>
-      </p:sp>
-      <p:sp>
-        <p:nvSpPr>
-          <p:cNvPr id="18" name="TextBox 17"/>
-          <p:cNvSpPr txBox="1"/>
-          <p:nvPr/>
-        </p:nvSpPr>
-        <p:spPr>
-          <a:xfrm>
-            <a:off x="658368" y="4023360"/>
-            <a:ext cx="10881360" cy="1097280"/>
-          </a:xfrm>
-          <a:prstGeom prst="rect">
-            <a:avLst/>
-          </a:prstGeom>
-          <a:noFill/>
-        </p:spPr>
-        <p:txBody>
-          <a:bodyPr wrap="square">
-            <a:spAutoFit/>
-          </a:bodyPr>
-          <a:lstStyle/>
-          <a:p>
-            <a:pPr algn="l"/>
-            <a:r>
-              <a:rPr sz="1300" b="0">
-                <a:solidFill>
-                  <a:srgbClr val="212121"/>
-                </a:solidFill>
-              </a:rPr>
-              <a:t>① 포지션 진입 기록 (종목·진입가·수량·매수 근거)  → ② 포지션 정리 (매도가·손익·수익률 자동 계산)  → ③ 복기 메모 조회</a:t>
-            </a:r>
-          </a:p>
-        </p:txBody>
-      </p:sp>
-      <p:sp>
-        <p:nvSpPr>
-          <p:cNvPr id="19" name="Rectangle 18"/>
-          <p:cNvSpPr/>
-          <p:nvPr/>
-        </p:nvSpPr>
-        <p:spPr>
-          <a:xfrm>
-            <a:off x="457200" y="5806440"/>
-            <a:ext cx="11247120" cy="658368"/>
-          </a:xfrm>
-          <a:prstGeom prst="rect">
-            <a:avLst/>
-          </a:prstGeom>
-          <a:solidFill>
-            <a:srgbClr val="F5F5F5"/>
-          </a:solidFill>
-          <a:ln w="10160">
-            <a:solidFill>
-              <a:srgbClr val="E0E0E0"/>
-            </a:solidFill>
-          </a:ln>
-        </p:spPr>
-        <p:style>
-          <a:lnRef idx="1">
-            <a:schemeClr val="accent1"/>
-          </a:lnRef>
-          <a:fillRef idx="3">
-            <a:schemeClr val="accent1"/>
-          </a:fillRef>
-          <a:effectRef idx="2">
-            <a:schemeClr val="accent1"/>
-          </a:effectRef>
-          <a:fontRef idx="minor">
-            <a:schemeClr val="lt1"/>
-          </a:fontRef>
-        </p:style>
-        <p:txBody>
-          <a:bodyPr rtlCol="0" anchor="ctr"/>
-          <a:lstStyle/>
-          <a:p>
-            <a:pPr algn="ctr"/>
-          </a:p>
-        </p:txBody>
-      </p:sp>
-      <p:sp>
-        <p:nvSpPr>
-          <p:cNvPr id="20" name="TextBox 19"/>
-          <p:cNvSpPr txBox="1"/>
-          <p:nvPr/>
-        </p:nvSpPr>
-        <p:spPr>
-          <a:xfrm>
-            <a:off x="658368" y="5971032"/>
-            <a:ext cx="10972800" cy="411480"/>
-          </a:xfrm>
-          <a:prstGeom prst="rect">
-            <a:avLst/>
-          </a:prstGeom>
-          <a:noFill/>
-        </p:spPr>
-        <p:txBody>
-          <a:bodyPr wrap="square">
-            <a:spAutoFit/>
-          </a:bodyPr>
-          <a:lstStyle/>
-          <a:p>
-            <a:pPr algn="l"/>
-            <a:r>
-              <a:rPr sz="1200" b="0">
-                <a:solidFill>
-                  <a:srgbClr val="9E9E9E"/>
-                </a:solidFill>
-              </a:rPr>
-              <a:t>데모 백업  ·  Wi-Fi 없는 환경 대비 → 로컬 데이터 캐시 + 화면 녹화 영상 준비</a:t>
-            </a:r>
-          </a:p>
-        </p:txBody>
-      </p:sp>
+      <p:pic>
+        <p:nvPicPr>
+          <p:cNvPr id="2" name="Picture 1" descr="wbs.png"/>
+          <p:cNvPicPr>
+            <a:picLocks noChangeAspect="1"/>
+          </p:cNvPicPr>
+          <p:nvPr/>
+        </p:nvPicPr>
+        <p:blipFill>
+          <a:blip r:embed="rId2"/>
+          <a:stretch>
+            <a:fillRect/>
+          </a:stretch>
+        </p:blipFill>
+        <p:spPr>
+          <a:xfrm>
+            <a:off x="274320" y="274320"/>
+            <a:ext cx="11640312" cy="6309360"/>
+          </a:xfrm>
+          <a:prstGeom prst="rect">
+            <a:avLst/>
+          </a:prstGeom>
+        </p:spPr>
+      </p:pic>
     </p:spTree>
   </p:cSld>
   <p:clrMapOvr>

--- a/portfolio-tracker/presentation/portfolio-tracker.pptx
+++ b/portfolio-tracker/presentation/portfolio-tracker.pptx
@@ -10,15 +10,15 @@
     <p:sldId id="258" r:id="rId9"/>
     <p:sldId id="259" r:id="rId10"/>
     <p:sldId id="260" r:id="rId11"/>
+    <p:sldId id="261" r:id="rId12"/>
     <p:sldId id="262" r:id="rId13"/>
-    <p:sldId id="261" r:id="rId12"/>
-    <p:sldId id="269" r:id="rId20"/>
     <p:sldId id="263" r:id="rId14"/>
     <p:sldId id="264" r:id="rId15"/>
     <p:sldId id="265" r:id="rId16"/>
     <p:sldId id="266" r:id="rId17"/>
     <p:sldId id="267" r:id="rId18"/>
     <p:sldId id="268" r:id="rId19"/>
+    <p:sldId id="269" r:id="rId20"/>
   </p:sldIdLst>
   <p:sldSz cx="12188952" cy="6858000" type="screen4x3"/>
   <p:notesSz cx="6858000" cy="9144000"/>
@@ -3395,7 +3395,7 @@
                   <a:srgbClr val="9E9E9E"/>
                 </a:solidFill>
               </a:rPr>
-              <a:t/>
+              <a:t>Jooseonghyeon  ·  2026.05</a:t>
             </a:r>
           </a:p>
         </p:txBody>
@@ -3488,14 +3488,48 @@
                   <a:srgbClr val="3F51B5"/>
                 </a:solidFill>
               </a:rPr>
-              <a:t>8.  어려운 점 / 도움 요청</a:t>
-            </a:r>
-          </a:p>
-        </p:txBody>
-      </p:sp>
-      <p:sp>
-        <p:nvSpPr>
-          <p:cNvPr id="4" name="Rectangle 3"/>
+              <a:t>9.  개발 방식 — AI 워크플로우</a:t>
+            </a:r>
+          </a:p>
+        </p:txBody>
+      </p:sp>
+      <p:sp>
+        <p:nvSpPr>
+          <p:cNvPr id="4" name="TextBox 3"/>
+          <p:cNvSpPr txBox="1"/>
+          <p:nvPr/>
+        </p:nvSpPr>
+        <p:spPr>
+          <a:xfrm>
+            <a:off x="457200" y="621792"/>
+            <a:ext cx="10972800" cy="274320"/>
+          </a:xfrm>
+          <a:prstGeom prst="rect">
+            <a:avLst/>
+          </a:prstGeom>
+          <a:noFill/>
+        </p:spPr>
+        <p:txBody>
+          <a:bodyPr wrap="square">
+            <a:spAutoFit/>
+          </a:bodyPr>
+          <a:lstStyle/>
+          <a:p>
+            <a:pPr algn="l"/>
+            <a:r>
+              <a:rPr sz="1100" b="0">
+                <a:solidFill>
+                  <a:srgbClr val="9E9E9E"/>
+                </a:solidFill>
+              </a:rPr>
+              <a:t>본인만의 기법 구성</a:t>
+            </a:r>
+          </a:p>
+        </p:txBody>
+      </p:sp>
+      <p:sp>
+        <p:nvSpPr>
+          <p:cNvPr id="5" name="Rectangle 4"/>
           <p:cNvSpPr/>
           <p:nvPr/>
         </p:nvSpPr>
@@ -3538,7 +3572,7 @@
       </p:sp>
       <p:sp>
         <p:nvSpPr>
-          <p:cNvPr id="5" name="TextBox 4"/>
+          <p:cNvPr id="6" name="TextBox 5"/>
           <p:cNvSpPr txBox="1"/>
           <p:nvPr/>
         </p:nvSpPr>
@@ -3565,21 +3599,21 @@
                   <a:srgbClr val="9E9E9E"/>
                 </a:solidFill>
               </a:rPr>
-              <a:t>9 / 13</a:t>
-            </a:r>
-          </a:p>
-        </p:txBody>
-      </p:sp>
-      <p:sp>
-        <p:nvSpPr>
-          <p:cNvPr id="6" name="Rectangle 5"/>
+              <a:t>10 / 14</a:t>
+            </a:r>
+          </a:p>
+        </p:txBody>
+      </p:sp>
+      <p:sp>
+        <p:nvSpPr>
+          <p:cNvPr id="7" name="Rectangle 6"/>
           <p:cNvSpPr/>
           <p:nvPr/>
         </p:nvSpPr>
         <p:spPr>
           <a:xfrm>
             <a:off x="457200" y="1051560"/>
-            <a:ext cx="11247120" cy="1417320"/>
+            <a:ext cx="11247120" cy="1508760"/>
           </a:xfrm>
           <a:prstGeom prst="rect">
             <a:avLst/>
@@ -3615,20 +3649,20 @@
       </p:sp>
       <p:sp>
         <p:nvSpPr>
-          <p:cNvPr id="7" name="Rectangle 6"/>
+          <p:cNvPr id="8" name="Rectangle 7"/>
           <p:cNvSpPr/>
           <p:nvPr/>
         </p:nvSpPr>
         <p:spPr>
           <a:xfrm>
             <a:off x="457200" y="1051560"/>
-            <a:ext cx="54864" cy="1417320"/>
+            <a:ext cx="54864" cy="1508760"/>
           </a:xfrm>
           <a:prstGeom prst="rect">
             <a:avLst/>
           </a:prstGeom>
           <a:solidFill>
-            <a:srgbClr val="E65C00"/>
+            <a:srgbClr val="3F51B5"/>
           </a:solidFill>
           <a:ln>
             <a:noFill/>
@@ -3658,14 +3692,57 @@
       </p:sp>
       <p:sp>
         <p:nvSpPr>
-          <p:cNvPr id="8" name="TextBox 7"/>
-          <p:cNvSpPr txBox="1"/>
-          <p:nvPr/>
-        </p:nvSpPr>
-        <p:spPr>
-          <a:xfrm>
-            <a:off x="658368" y="1188719"/>
-            <a:ext cx="10972800" cy="411480"/>
+          <p:cNvPr id="9" name="Rectangle 8"/>
+          <p:cNvSpPr/>
+          <p:nvPr/>
+        </p:nvSpPr>
+        <p:spPr>
+          <a:xfrm>
+            <a:off x="457200" y="1051560"/>
+            <a:ext cx="11247120" cy="438912"/>
+          </a:xfrm>
+          <a:prstGeom prst="rect">
+            <a:avLst/>
+          </a:prstGeom>
+          <a:solidFill>
+            <a:srgbClr val="F5F5F5"/>
+          </a:solidFill>
+          <a:ln>
+            <a:noFill/>
+          </a:ln>
+        </p:spPr>
+        <p:style>
+          <a:lnRef idx="1">
+            <a:schemeClr val="accent1"/>
+          </a:lnRef>
+          <a:fillRef idx="3">
+            <a:schemeClr val="accent1"/>
+          </a:fillRef>
+          <a:effectRef idx="2">
+            <a:schemeClr val="accent1"/>
+          </a:effectRef>
+          <a:fontRef idx="minor">
+            <a:schemeClr val="lt1"/>
+          </a:fontRef>
+        </p:style>
+        <p:txBody>
+          <a:bodyPr rtlCol="0" anchor="ctr"/>
+          <a:lstStyle/>
+          <a:p>
+            <a:pPr algn="ctr"/>
+          </a:p>
+        </p:txBody>
+      </p:sp>
+      <p:sp>
+        <p:nvSpPr>
+          <p:cNvPr id="10" name="TextBox 9"/>
+          <p:cNvSpPr txBox="1"/>
+          <p:nvPr/>
+        </p:nvSpPr>
+        <p:spPr>
+          <a:xfrm>
+            <a:off x="658368" y="1124712"/>
+            <a:ext cx="10972800" cy="320040"/>
           </a:xfrm>
           <a:prstGeom prst="rect">
             <a:avLst/>
@@ -3680,61 +3757,61 @@
           <a:p>
             <a:pPr algn="l"/>
             <a:r>
-              <a:rPr sz="1400" b="1">
+              <a:rPr sz="1300" b="1">
+                <a:solidFill>
+                  <a:srgbClr val="3F51B5"/>
+                </a:solidFill>
+              </a:rPr>
+              <a:t>기법 1  —  단일 md 부트스트랩</a:t>
+            </a:r>
+          </a:p>
+        </p:txBody>
+      </p:sp>
+      <p:sp>
+        <p:nvSpPr>
+          <p:cNvPr id="11" name="TextBox 10"/>
+          <p:cNvSpPr txBox="1"/>
+          <p:nvPr/>
+        </p:nvSpPr>
+        <p:spPr>
+          <a:xfrm>
+            <a:off x="658368" y="1618488"/>
+            <a:ext cx="10789920" cy="841248"/>
+          </a:xfrm>
+          <a:prstGeom prst="rect">
+            <a:avLst/>
+          </a:prstGeom>
+          <a:noFill/>
+        </p:spPr>
+        <p:txBody>
+          <a:bodyPr wrap="square">
+            <a:spAutoFit/>
+          </a:bodyPr>
+          <a:lstStyle/>
+          <a:p>
+            <a:pPr algn="l"/>
+            <a:r>
+              <a:rPr sz="1200" b="0">
                 <a:solidFill>
                   <a:srgbClr val="212121"/>
                 </a:solidFill>
               </a:rPr>
-              <a:t>iOS 빌드 불가</a:t>
-            </a:r>
-          </a:p>
-        </p:txBody>
-      </p:sp>
-      <p:sp>
-        <p:nvSpPr>
-          <p:cNvPr id="9" name="TextBox 8"/>
-          <p:cNvSpPr txBox="1"/>
-          <p:nvPr/>
-        </p:nvSpPr>
-        <p:spPr>
-          <a:xfrm>
-            <a:off x="658368" y="1618488"/>
-            <a:ext cx="10789920" cy="749808"/>
-          </a:xfrm>
-          <a:prstGeom prst="rect">
-            <a:avLst/>
-          </a:prstGeom>
-          <a:noFill/>
-        </p:spPr>
-        <p:txBody>
-          <a:bodyPr wrap="square">
-            <a:spAutoFit/>
-          </a:bodyPr>
-          <a:lstStyle/>
-          <a:p>
-            <a:pPr algn="l"/>
-            <a:r>
-              <a:rPr sz="1300" b="0">
-                <a:solidFill>
-                  <a:srgbClr val="212121"/>
-                </a:solidFill>
-              </a:rPr>
-              <a:t>Mac 환경 없음 → iOS 시뮬레이터·실기기 테스트 불가
-Android APK만 제출 예정</a:t>
-            </a:r>
-          </a:p>
-        </p:txBody>
-      </p:sp>
-      <p:sp>
-        <p:nvSpPr>
-          <p:cNvPr id="10" name="Rectangle 9"/>
+              <a:t>AUTHORING.Jooseonghyeon.v0.1.0.md 하나로 Rules · Skills · Commands 전체를 자동 세팅
+새 프로젝트에 이 파일 하나만 전달하면 AI 운영 체계가 즉시 구성됨</a:t>
+            </a:r>
+          </a:p>
+        </p:txBody>
+      </p:sp>
+      <p:sp>
+        <p:nvSpPr>
+          <p:cNvPr id="12" name="Rectangle 11"/>
           <p:cNvSpPr/>
           <p:nvPr/>
         </p:nvSpPr>
         <p:spPr>
           <a:xfrm>
-            <a:off x="457200" y="2715768"/>
-            <a:ext cx="11247120" cy="1417320"/>
+            <a:off x="457200" y="2788920"/>
+            <a:ext cx="11247120" cy="1508760"/>
           </a:xfrm>
           <a:prstGeom prst="rect">
             <a:avLst/>
@@ -3770,20 +3847,20 @@
       </p:sp>
       <p:sp>
         <p:nvSpPr>
-          <p:cNvPr id="11" name="Rectangle 10"/>
+          <p:cNvPr id="13" name="Rectangle 12"/>
           <p:cNvSpPr/>
           <p:nvPr/>
         </p:nvSpPr>
         <p:spPr>
           <a:xfrm>
-            <a:off x="457200" y="2715768"/>
-            <a:ext cx="54864" cy="1417320"/>
+            <a:off x="457200" y="2788920"/>
+            <a:ext cx="54864" cy="1508760"/>
           </a:xfrm>
           <a:prstGeom prst="rect">
             <a:avLst/>
           </a:prstGeom>
           <a:solidFill>
-            <a:srgbClr val="E65C00"/>
+            <a:srgbClr val="3F51B5"/>
           </a:solidFill>
           <a:ln>
             <a:noFill/>
@@ -3813,83 +3890,126 @@
       </p:sp>
       <p:sp>
         <p:nvSpPr>
-          <p:cNvPr id="12" name="TextBox 11"/>
-          <p:cNvSpPr txBox="1"/>
-          <p:nvPr/>
-        </p:nvSpPr>
-        <p:spPr>
-          <a:xfrm>
-            <a:off x="658368" y="2852927"/>
-            <a:ext cx="10972800" cy="411480"/>
-          </a:xfrm>
-          <a:prstGeom prst="rect">
-            <a:avLst/>
-          </a:prstGeom>
-          <a:noFill/>
-        </p:spPr>
-        <p:txBody>
-          <a:bodyPr wrap="square">
-            <a:spAutoFit/>
-          </a:bodyPr>
-          <a:lstStyle/>
-          <a:p>
-            <a:pPr algn="l"/>
-            <a:r>
-              <a:rPr sz="1400" b="1">
-                <a:solidFill>
-                  <a:srgbClr val="212121"/>
-                </a:solidFill>
-              </a:rPr>
-              <a:t>Firebase Security Rules</a:t>
-            </a:r>
-          </a:p>
-        </p:txBody>
-      </p:sp>
-      <p:sp>
-        <p:nvSpPr>
-          <p:cNvPr id="13" name="TextBox 12"/>
-          <p:cNvSpPr txBox="1"/>
-          <p:nvPr/>
-        </p:nvSpPr>
-        <p:spPr>
-          <a:xfrm>
-            <a:off x="658368" y="3282696"/>
-            <a:ext cx="10789920" cy="749808"/>
-          </a:xfrm>
-          <a:prstGeom prst="rect">
-            <a:avLst/>
-          </a:prstGeom>
-          <a:noFill/>
-        </p:spPr>
-        <p:txBody>
-          <a:bodyPr wrap="square">
-            <a:spAutoFit/>
-          </a:bodyPr>
-          <a:lstStyle/>
-          <a:p>
-            <a:pPr algn="l"/>
-            <a:r>
-              <a:rPr sz="1300" b="0">
-                <a:solidFill>
-                  <a:srgbClr val="212121"/>
-                </a:solidFill>
-              </a:rPr>
-              <a:t>Firestore 보안 규칙 검증 어려움 — 다른 사용자가 타 계정 데이터에
-접근하지 못하도록 규칙을 작성했으나 침투 테스트 환경 없음</a:t>
-            </a:r>
-          </a:p>
-        </p:txBody>
-      </p:sp>
-      <p:sp>
-        <p:nvSpPr>
           <p:cNvPr id="14" name="Rectangle 13"/>
           <p:cNvSpPr/>
           <p:nvPr/>
         </p:nvSpPr>
         <p:spPr>
           <a:xfrm>
-            <a:off x="457200" y="4379976"/>
-            <a:ext cx="11247120" cy="1417320"/>
+            <a:off x="457200" y="2788920"/>
+            <a:ext cx="11247120" cy="438912"/>
+          </a:xfrm>
+          <a:prstGeom prst="rect">
+            <a:avLst/>
+          </a:prstGeom>
+          <a:solidFill>
+            <a:srgbClr val="F5F5F5"/>
+          </a:solidFill>
+          <a:ln>
+            <a:noFill/>
+          </a:ln>
+        </p:spPr>
+        <p:style>
+          <a:lnRef idx="1">
+            <a:schemeClr val="accent1"/>
+          </a:lnRef>
+          <a:fillRef idx="3">
+            <a:schemeClr val="accent1"/>
+          </a:fillRef>
+          <a:effectRef idx="2">
+            <a:schemeClr val="accent1"/>
+          </a:effectRef>
+          <a:fontRef idx="minor">
+            <a:schemeClr val="lt1"/>
+          </a:fontRef>
+        </p:style>
+        <p:txBody>
+          <a:bodyPr rtlCol="0" anchor="ctr"/>
+          <a:lstStyle/>
+          <a:p>
+            <a:pPr algn="ctr"/>
+          </a:p>
+        </p:txBody>
+      </p:sp>
+      <p:sp>
+        <p:nvSpPr>
+          <p:cNvPr id="15" name="TextBox 14"/>
+          <p:cNvSpPr txBox="1"/>
+          <p:nvPr/>
+        </p:nvSpPr>
+        <p:spPr>
+          <a:xfrm>
+            <a:off x="658368" y="2862072"/>
+            <a:ext cx="10972800" cy="320040"/>
+          </a:xfrm>
+          <a:prstGeom prst="rect">
+            <a:avLst/>
+          </a:prstGeom>
+          <a:noFill/>
+        </p:spPr>
+        <p:txBody>
+          <a:bodyPr wrap="square">
+            <a:spAutoFit/>
+          </a:bodyPr>
+          <a:lstStyle/>
+          <a:p>
+            <a:pPr algn="l"/>
+            <a:r>
+              <a:rPr sz="1300" b="1">
+                <a:solidFill>
+                  <a:srgbClr val="3F51B5"/>
+                </a:solidFill>
+              </a:rPr>
+              <a:t>기법 2  —  도메인 특화 서브에이전트</a:t>
+            </a:r>
+          </a:p>
+        </p:txBody>
+      </p:sp>
+      <p:sp>
+        <p:nvSpPr>
+          <p:cNvPr id="16" name="TextBox 15"/>
+          <p:cNvSpPr txBox="1"/>
+          <p:nvPr/>
+        </p:nvSpPr>
+        <p:spPr>
+          <a:xfrm>
+            <a:off x="658368" y="3355848"/>
+            <a:ext cx="10789920" cy="841248"/>
+          </a:xfrm>
+          <a:prstGeom prst="rect">
+            <a:avLst/>
+          </a:prstGeom>
+          <a:noFill/>
+        </p:spPr>
+        <p:txBody>
+          <a:bodyPr wrap="square">
+            <a:spAutoFit/>
+          </a:bodyPr>
+          <a:lstStyle/>
+          <a:p>
+            <a:pPr algn="l"/>
+            <a:r>
+              <a:rPr sz="1200" b="0">
+                <a:solidFill>
+                  <a:srgbClr val="212121"/>
+                </a:solidFill>
+              </a:rPr>
+              <a:t>feature-debugger (/dg) : 앱 기능 6개 영역 체크리스트 기반 정적 분석
+pre-presentation-checker (/pc) : 발표 전 점수 · 제출물 종합 점검</a:t>
+            </a:r>
+          </a:p>
+        </p:txBody>
+      </p:sp>
+      <p:sp>
+        <p:nvSpPr>
+          <p:cNvPr id="17" name="Rectangle 16"/>
+          <p:cNvSpPr/>
+          <p:nvPr/>
+        </p:nvSpPr>
+        <p:spPr>
+          <a:xfrm>
+            <a:off x="457200" y="4526279"/>
+            <a:ext cx="11247120" cy="1508760"/>
           </a:xfrm>
           <a:prstGeom prst="rect">
             <a:avLst/>
@@ -3925,20 +4045,20 @@
       </p:sp>
       <p:sp>
         <p:nvSpPr>
-          <p:cNvPr id="15" name="Rectangle 14"/>
+          <p:cNvPr id="18" name="Rectangle 17"/>
           <p:cNvSpPr/>
           <p:nvPr/>
         </p:nvSpPr>
         <p:spPr>
           <a:xfrm>
-            <a:off x="457200" y="4379976"/>
-            <a:ext cx="54864" cy="1417320"/>
+            <a:off x="457200" y="4526279"/>
+            <a:ext cx="54864" cy="1508760"/>
           </a:xfrm>
           <a:prstGeom prst="rect">
             <a:avLst/>
           </a:prstGeom>
           <a:solidFill>
-            <a:srgbClr val="E65C00"/>
+            <a:srgbClr val="3F51B5"/>
           </a:solidFill>
           <a:ln>
             <a:noFill/>
@@ -3968,14 +4088,57 @@
       </p:sp>
       <p:sp>
         <p:nvSpPr>
-          <p:cNvPr id="16" name="TextBox 15"/>
-          <p:cNvSpPr txBox="1"/>
-          <p:nvPr/>
-        </p:nvSpPr>
-        <p:spPr>
-          <a:xfrm>
-            <a:off x="658368" y="4517136"/>
-            <a:ext cx="10972800" cy="411480"/>
+          <p:cNvPr id="19" name="Rectangle 18"/>
+          <p:cNvSpPr/>
+          <p:nvPr/>
+        </p:nvSpPr>
+        <p:spPr>
+          <a:xfrm>
+            <a:off x="457200" y="4526279"/>
+            <a:ext cx="11247120" cy="438912"/>
+          </a:xfrm>
+          <a:prstGeom prst="rect">
+            <a:avLst/>
+          </a:prstGeom>
+          <a:solidFill>
+            <a:srgbClr val="F5F5F5"/>
+          </a:solidFill>
+          <a:ln>
+            <a:noFill/>
+          </a:ln>
+        </p:spPr>
+        <p:style>
+          <a:lnRef idx="1">
+            <a:schemeClr val="accent1"/>
+          </a:lnRef>
+          <a:fillRef idx="3">
+            <a:schemeClr val="accent1"/>
+          </a:fillRef>
+          <a:effectRef idx="2">
+            <a:schemeClr val="accent1"/>
+          </a:effectRef>
+          <a:fontRef idx="minor">
+            <a:schemeClr val="lt1"/>
+          </a:fontRef>
+        </p:style>
+        <p:txBody>
+          <a:bodyPr rtlCol="0" anchor="ctr"/>
+          <a:lstStyle/>
+          <a:p>
+            <a:pPr algn="ctr"/>
+          </a:p>
+        </p:txBody>
+      </p:sp>
+      <p:sp>
+        <p:nvSpPr>
+          <p:cNvPr id="20" name="TextBox 19"/>
+          <p:cNvSpPr txBox="1"/>
+          <p:nvPr/>
+        </p:nvSpPr>
+        <p:spPr>
+          <a:xfrm>
+            <a:off x="658368" y="4599431"/>
+            <a:ext cx="10972800" cy="320040"/>
           </a:xfrm>
           <a:prstGeom prst="rect">
             <a:avLst/>
@@ -3990,47 +4153,47 @@
           <a:p>
             <a:pPr algn="l"/>
             <a:r>
-              <a:rPr sz="1400" b="1">
+              <a:rPr sz="1300" b="1">
+                <a:solidFill>
+                  <a:srgbClr val="3F51B5"/>
+                </a:solidFill>
+              </a:rPr>
+              <a:t>기법 3  —  단계별 개발 계획 · 진행</a:t>
+            </a:r>
+          </a:p>
+        </p:txBody>
+      </p:sp>
+      <p:sp>
+        <p:nvSpPr>
+          <p:cNvPr id="21" name="TextBox 20"/>
+          <p:cNvSpPr txBox="1"/>
+          <p:nvPr/>
+        </p:nvSpPr>
+        <p:spPr>
+          <a:xfrm>
+            <a:off x="658368" y="5093207"/>
+            <a:ext cx="10789920" cy="841248"/>
+          </a:xfrm>
+          <a:prstGeom prst="rect">
+            <a:avLst/>
+          </a:prstGeom>
+          <a:noFill/>
+        </p:spPr>
+        <p:txBody>
+          <a:bodyPr wrap="square">
+            <a:spAutoFit/>
+          </a:bodyPr>
+          <a:lstStyle/>
+          <a:p>
+            <a:pPr algn="l"/>
+            <a:r>
+              <a:rPr sz="1200" b="0">
                 <a:solidFill>
                   <a:srgbClr val="212121"/>
                 </a:solidFill>
               </a:rPr>
-              <a:t>앱 배포 경험 없음</a:t>
-            </a:r>
-          </a:p>
-        </p:txBody>
-      </p:sp>
-      <p:sp>
-        <p:nvSpPr>
-          <p:cNvPr id="17" name="TextBox 16"/>
-          <p:cNvSpPr txBox="1"/>
-          <p:nvPr/>
-        </p:nvSpPr>
-        <p:spPr>
-          <a:xfrm>
-            <a:off x="658368" y="4946904"/>
-            <a:ext cx="10789920" cy="749808"/>
-          </a:xfrm>
-          <a:prstGeom prst="rect">
-            <a:avLst/>
-          </a:prstGeom>
-          <a:noFill/>
-        </p:spPr>
-        <p:txBody>
-          <a:bodyPr wrap="square">
-            <a:spAutoFit/>
-          </a:bodyPr>
-          <a:lstStyle/>
-          <a:p>
-            <a:pPr algn="l"/>
-            <a:r>
-              <a:rPr sz="1300" b="0">
-                <a:solidFill>
-                  <a:srgbClr val="212121"/>
-                </a:solidFill>
-              </a:rPr>
-              <a:t>Google Play Console 등록 절차 및 APK 서명 과정 첫 시도
-배포 오류 발생 시 대응 방법 조언 필요</a:t>
+              <a:t>개발 전 단계별 계획 수립 → AI로 구현 → 직접 점검 · 이해 후 다음 단계 진행
+AI 의존 개발에서 코드 이해도를 유지하기 위한 개인 워크플로우</a:t>
             </a:r>
           </a:p>
         </p:txBody>
@@ -4200,7 +4363,7 @@
                   <a:srgbClr val="9E9E9E"/>
                 </a:solidFill>
               </a:rPr>
-              <a:t>10 / 13</a:t>
+              <a:t>11 / 14</a:t>
             </a:r>
           </a:p>
         </p:txBody>
@@ -4712,7 +4875,7 @@
                   <a:srgbClr val="9E9E9E"/>
                 </a:solidFill>
               </a:rPr>
-              <a:t>11 / 13</a:t>
+              <a:t>12 / 14</a:t>
             </a:r>
           </a:p>
         </p:txBody>
@@ -6443,7 +6606,7 @@
                   <a:srgbClr val="9E9E9E"/>
                 </a:solidFill>
               </a:rPr>
-              <a:t>12 / 13</a:t>
+              <a:t>13 / 14</a:t>
             </a:r>
           </a:p>
         </p:txBody>
@@ -7034,7 +7197,7 @@
                   <a:srgbClr val="9E9E9E"/>
                 </a:solidFill>
               </a:rPr>
-              <a:t>13 / 13</a:t>
+              <a:t>14 / 14</a:t>
             </a:r>
           </a:p>
         </p:txBody>
@@ -7238,7 +7401,7 @@
                   <a:srgbClr val="9E9E9E"/>
                 </a:solidFill>
               </a:rPr>
-              <a:t>2 / 13</a:t>
+              <a:t>2 / 14</a:t>
             </a:r>
           </a:p>
         </p:txBody>
@@ -8026,7 +8189,7 @@
                   <a:srgbClr val="9E9E9E"/>
                 </a:solidFill>
               </a:rPr>
-              <a:t>3 / 13</a:t>
+              <a:t>3 / 14</a:t>
             </a:r>
           </a:p>
         </p:txBody>
@@ -9484,7 +9647,7 @@
                   <a:srgbClr val="9E9E9E"/>
                 </a:solidFill>
               </a:rPr>
-              <a:t>4 / 13</a:t>
+              <a:t>4 / 14</a:t>
             </a:r>
           </a:p>
         </p:txBody>
@@ -10666,7 +10829,7 @@
                   <a:srgbClr val="9E9E9E"/>
                 </a:solidFill>
               </a:rPr>
-              <a:t>5 / 13</a:t>
+              <a:t>5 / 14</a:t>
             </a:r>
           </a:p>
         </p:txBody>
@@ -12065,7 +12228,7 @@
                   <a:srgbClr val="3F51B5"/>
                 </a:solidFill>
               </a:rPr>
-              <a:t>5.  데모</a:t>
+              <a:t>5.  진행 상황</a:t>
             </a:r>
           </a:p>
         </p:txBody>
@@ -12099,7 +12262,7 @@
                   <a:srgbClr val="9E9E9E"/>
                 </a:solidFill>
               </a:rPr>
-              <a:t>라이브 시연 — 핵심 화면 2가지</a:t>
+              <a:t>Must 기능 기준 진척도</a:t>
             </a:r>
           </a:p>
         </p:txBody>
@@ -12176,7 +12339,7 @@
                   <a:srgbClr val="9E9E9E"/>
                 </a:solidFill>
               </a:rPr>
-              <a:t>7 / 13</a:t>
+              <a:t>6 / 14</a:t>
             </a:r>
           </a:p>
         </p:txBody>
@@ -12189,8 +12352,8 @@
         </p:nvSpPr>
         <p:spPr>
           <a:xfrm>
-            <a:off x="457200" y="1097280"/>
-            <a:ext cx="11247120" cy="1920240"/>
+            <a:off x="457200" y="1051560"/>
+            <a:ext cx="11247120" cy="621792"/>
           </a:xfrm>
           <a:prstGeom prst="rect">
             <a:avLst/>
@@ -12232,14 +12395,14 @@
         </p:nvSpPr>
         <p:spPr>
           <a:xfrm>
-            <a:off x="457200" y="1097280"/>
-            <a:ext cx="54864" cy="1920240"/>
+            <a:off x="457200" y="1051560"/>
+            <a:ext cx="54864" cy="621792"/>
           </a:xfrm>
           <a:prstGeom prst="rect">
             <a:avLst/>
           </a:prstGeom>
           <a:solidFill>
-            <a:srgbClr val="3F51B5"/>
+            <a:srgbClr val="2E7D32"/>
           </a:solidFill>
           <a:ln>
             <a:noFill/>
@@ -12269,23 +12432,125 @@
       </p:sp>
       <p:sp>
         <p:nvSpPr>
-          <p:cNvPr id="9" name="Rectangle 8"/>
+          <p:cNvPr id="9" name="TextBox 8"/>
+          <p:cNvSpPr txBox="1"/>
+          <p:nvPr/>
+        </p:nvSpPr>
+        <p:spPr>
+          <a:xfrm>
+            <a:off x="594360" y="1197863"/>
+            <a:ext cx="1188720" cy="347472"/>
+          </a:xfrm>
+          <a:prstGeom prst="rect">
+            <a:avLst/>
+          </a:prstGeom>
+          <a:noFill/>
+        </p:spPr>
+        <p:txBody>
+          <a:bodyPr wrap="square">
+            <a:spAutoFit/>
+          </a:bodyPr>
+          <a:lstStyle/>
+          <a:p>
+            <a:pPr algn="l"/>
+            <a:r>
+              <a:rPr sz="1100" b="0">
+                <a:solidFill>
+                  <a:srgbClr val="2E7D32"/>
+                </a:solidFill>
+              </a:rPr>
+              <a:t>✅ 완료</a:t>
+            </a:r>
+          </a:p>
+        </p:txBody>
+      </p:sp>
+      <p:sp>
+        <p:nvSpPr>
+          <p:cNvPr id="10" name="TextBox 9"/>
+          <p:cNvSpPr txBox="1"/>
+          <p:nvPr/>
+        </p:nvSpPr>
+        <p:spPr>
+          <a:xfrm>
+            <a:off x="1920240" y="1197863"/>
+            <a:ext cx="2103120" cy="347472"/>
+          </a:xfrm>
+          <a:prstGeom prst="rect">
+            <a:avLst/>
+          </a:prstGeom>
+          <a:noFill/>
+        </p:spPr>
+        <p:txBody>
+          <a:bodyPr wrap="square">
+            <a:spAutoFit/>
+          </a:bodyPr>
+          <a:lstStyle/>
+          <a:p>
+            <a:pPr algn="l"/>
+            <a:r>
+              <a:rPr sz="1200" b="1">
+                <a:solidFill>
+                  <a:srgbClr val="212121"/>
+                </a:solidFill>
+              </a:rPr>
+              <a:t>인증</a:t>
+            </a:r>
+          </a:p>
+        </p:txBody>
+      </p:sp>
+      <p:sp>
+        <p:nvSpPr>
+          <p:cNvPr id="11" name="TextBox 10"/>
+          <p:cNvSpPr txBox="1"/>
+          <p:nvPr/>
+        </p:nvSpPr>
+        <p:spPr>
+          <a:xfrm>
+            <a:off x="4114800" y="1197863"/>
+            <a:ext cx="7406640" cy="347472"/>
+          </a:xfrm>
+          <a:prstGeom prst="rect">
+            <a:avLst/>
+          </a:prstGeom>
+          <a:noFill/>
+        </p:spPr>
+        <p:txBody>
+          <a:bodyPr wrap="square">
+            <a:spAutoFit/>
+          </a:bodyPr>
+          <a:lstStyle/>
+          <a:p>
+            <a:pPr algn="l"/>
+            <a:r>
+              <a:rPr sz="1200" b="0">
+                <a:solidFill>
+                  <a:srgbClr val="212121"/>
+                </a:solidFill>
+              </a:rPr>
+              <a:t>회원가입 / 로그인 / 자동 로그인</a:t>
+            </a:r>
+          </a:p>
+        </p:txBody>
+      </p:sp>
+      <p:sp>
+        <p:nvSpPr>
+          <p:cNvPr id="12" name="Rectangle 11"/>
           <p:cNvSpPr/>
           <p:nvPr/>
         </p:nvSpPr>
         <p:spPr>
           <a:xfrm>
-            <a:off x="457200" y="1097280"/>
-            <a:ext cx="11247120" cy="475488"/>
-          </a:xfrm>
-          <a:prstGeom prst="rect">
-            <a:avLst/>
-          </a:prstGeom>
-          <a:solidFill>
-            <a:srgbClr val="F5F5F5"/>
-          </a:solidFill>
-          <a:ln>
-            <a:noFill/>
+            <a:off x="457200" y="1783080"/>
+            <a:ext cx="11247120" cy="621792"/>
+          </a:xfrm>
+          <a:prstGeom prst="rect">
+            <a:avLst/>
+          </a:prstGeom>
+          <a:noFill/>
+          <a:ln w="10160">
+            <a:solidFill>
+              <a:srgbClr val="E0E0E0"/>
+            </a:solidFill>
           </a:ln>
         </p:spPr>
         <p:style>
@@ -12312,116 +12577,159 @@
       </p:sp>
       <p:sp>
         <p:nvSpPr>
-          <p:cNvPr id="10" name="TextBox 9"/>
-          <p:cNvSpPr txBox="1"/>
-          <p:nvPr/>
-        </p:nvSpPr>
-        <p:spPr>
-          <a:xfrm>
-            <a:off x="658368" y="1188720"/>
-            <a:ext cx="1828800" cy="320040"/>
-          </a:xfrm>
-          <a:prstGeom prst="rect">
-            <a:avLst/>
-          </a:prstGeom>
-          <a:noFill/>
-        </p:spPr>
-        <p:txBody>
-          <a:bodyPr wrap="square">
-            <a:spAutoFit/>
-          </a:bodyPr>
-          <a:lstStyle/>
-          <a:p>
-            <a:pPr algn="l"/>
-            <a:r>
-              <a:rPr sz="1100" b="1">
-                <a:solidFill>
-                  <a:srgbClr val="3F51B5"/>
-                </a:solidFill>
-              </a:rPr>
-              <a:t>시나리오 A</a:t>
-            </a:r>
-          </a:p>
-        </p:txBody>
-      </p:sp>
-      <p:sp>
-        <p:nvSpPr>
-          <p:cNvPr id="11" name="TextBox 10"/>
-          <p:cNvSpPr txBox="1"/>
-          <p:nvPr/>
-        </p:nvSpPr>
-        <p:spPr>
-          <a:xfrm>
-            <a:off x="2606040" y="1188720"/>
-            <a:ext cx="8961120" cy="320040"/>
-          </a:xfrm>
-          <a:prstGeom prst="rect">
-            <a:avLst/>
-          </a:prstGeom>
-          <a:noFill/>
-        </p:spPr>
-        <p:txBody>
-          <a:bodyPr wrap="square">
-            <a:spAutoFit/>
-          </a:bodyPr>
-          <a:lstStyle/>
-          <a:p>
-            <a:pPr algn="l"/>
-            <a:r>
-              <a:rPr sz="1400" b="1">
-                <a:solidFill>
-                  <a:srgbClr val="212121"/>
-                </a:solidFill>
-              </a:rPr>
-              <a:t>계좌 관리 흐름</a:t>
-            </a:r>
-          </a:p>
-        </p:txBody>
-      </p:sp>
-      <p:sp>
-        <p:nvSpPr>
-          <p:cNvPr id="12" name="TextBox 11"/>
-          <p:cNvSpPr txBox="1"/>
-          <p:nvPr/>
-        </p:nvSpPr>
-        <p:spPr>
-          <a:xfrm>
-            <a:off x="658368" y="1737360"/>
-            <a:ext cx="10881360" cy="1097280"/>
-          </a:xfrm>
-          <a:prstGeom prst="rect">
-            <a:avLst/>
-          </a:prstGeom>
-          <a:noFill/>
-        </p:spPr>
-        <p:txBody>
-          <a:bodyPr wrap="square">
-            <a:spAutoFit/>
-          </a:bodyPr>
-          <a:lstStyle/>
-          <a:p>
-            <a:pPr algn="l"/>
-            <a:r>
-              <a:rPr sz="1300" b="0">
-                <a:solidFill>
-                  <a:srgbClr val="212121"/>
-                </a:solidFill>
-              </a:rPr>
-              <a:t>① 계좌 등록 (주식·코인 선택, 통화 선택)  → ② 입금 기록  → ③ 잔액 자동 계산 확인</a:t>
-            </a:r>
-          </a:p>
-        </p:txBody>
-      </p:sp>
-      <p:sp>
-        <p:nvSpPr>
           <p:cNvPr id="13" name="Rectangle 12"/>
           <p:cNvSpPr/>
           <p:nvPr/>
         </p:nvSpPr>
         <p:spPr>
           <a:xfrm>
-            <a:off x="457200" y="3383280"/>
-            <a:ext cx="11247120" cy="1920240"/>
+            <a:off x="457200" y="1783080"/>
+            <a:ext cx="54864" cy="621792"/>
+          </a:xfrm>
+          <a:prstGeom prst="rect">
+            <a:avLst/>
+          </a:prstGeom>
+          <a:solidFill>
+            <a:srgbClr val="2E7D32"/>
+          </a:solidFill>
+          <a:ln>
+            <a:noFill/>
+          </a:ln>
+        </p:spPr>
+        <p:style>
+          <a:lnRef idx="1">
+            <a:schemeClr val="accent1"/>
+          </a:lnRef>
+          <a:fillRef idx="3">
+            <a:schemeClr val="accent1"/>
+          </a:fillRef>
+          <a:effectRef idx="2">
+            <a:schemeClr val="accent1"/>
+          </a:effectRef>
+          <a:fontRef idx="minor">
+            <a:schemeClr val="lt1"/>
+          </a:fontRef>
+        </p:style>
+        <p:txBody>
+          <a:bodyPr rtlCol="0" anchor="ctr"/>
+          <a:lstStyle/>
+          <a:p>
+            <a:pPr algn="ctr"/>
+          </a:p>
+        </p:txBody>
+      </p:sp>
+      <p:sp>
+        <p:nvSpPr>
+          <p:cNvPr id="14" name="TextBox 13"/>
+          <p:cNvSpPr txBox="1"/>
+          <p:nvPr/>
+        </p:nvSpPr>
+        <p:spPr>
+          <a:xfrm>
+            <a:off x="594360" y="1929384"/>
+            <a:ext cx="1188720" cy="347472"/>
+          </a:xfrm>
+          <a:prstGeom prst="rect">
+            <a:avLst/>
+          </a:prstGeom>
+          <a:noFill/>
+        </p:spPr>
+        <p:txBody>
+          <a:bodyPr wrap="square">
+            <a:spAutoFit/>
+          </a:bodyPr>
+          <a:lstStyle/>
+          <a:p>
+            <a:pPr algn="l"/>
+            <a:r>
+              <a:rPr sz="1100" b="0">
+                <a:solidFill>
+                  <a:srgbClr val="2E7D32"/>
+                </a:solidFill>
+              </a:rPr>
+              <a:t>✅ 완료</a:t>
+            </a:r>
+          </a:p>
+        </p:txBody>
+      </p:sp>
+      <p:sp>
+        <p:nvSpPr>
+          <p:cNvPr id="15" name="TextBox 14"/>
+          <p:cNvSpPr txBox="1"/>
+          <p:nvPr/>
+        </p:nvSpPr>
+        <p:spPr>
+          <a:xfrm>
+            <a:off x="1920240" y="1929384"/>
+            <a:ext cx="2103120" cy="347472"/>
+          </a:xfrm>
+          <a:prstGeom prst="rect">
+            <a:avLst/>
+          </a:prstGeom>
+          <a:noFill/>
+        </p:spPr>
+        <p:txBody>
+          <a:bodyPr wrap="square">
+            <a:spAutoFit/>
+          </a:bodyPr>
+          <a:lstStyle/>
+          <a:p>
+            <a:pPr algn="l"/>
+            <a:r>
+              <a:rPr sz="1200" b="1">
+                <a:solidFill>
+                  <a:srgbClr val="212121"/>
+                </a:solidFill>
+              </a:rPr>
+              <a:t>계좌 관리</a:t>
+            </a:r>
+          </a:p>
+        </p:txBody>
+      </p:sp>
+      <p:sp>
+        <p:nvSpPr>
+          <p:cNvPr id="16" name="TextBox 15"/>
+          <p:cNvSpPr txBox="1"/>
+          <p:nvPr/>
+        </p:nvSpPr>
+        <p:spPr>
+          <a:xfrm>
+            <a:off x="4114800" y="1929384"/>
+            <a:ext cx="7406640" cy="347472"/>
+          </a:xfrm>
+          <a:prstGeom prst="rect">
+            <a:avLst/>
+          </a:prstGeom>
+          <a:noFill/>
+        </p:spPr>
+        <p:txBody>
+          <a:bodyPr wrap="square">
+            <a:spAutoFit/>
+          </a:bodyPr>
+          <a:lstStyle/>
+          <a:p>
+            <a:pPr algn="l"/>
+            <a:r>
+              <a:rPr sz="1200" b="0">
+                <a:solidFill>
+                  <a:srgbClr val="212121"/>
+                </a:solidFill>
+              </a:rPr>
+              <a:t>계좌 등록 / 입출금 기록 / 잔액 자동 계산</a:t>
+            </a:r>
+          </a:p>
+        </p:txBody>
+      </p:sp>
+      <p:sp>
+        <p:nvSpPr>
+          <p:cNvPr id="17" name="Rectangle 16"/>
+          <p:cNvSpPr/>
+          <p:nvPr/>
+        </p:nvSpPr>
+        <p:spPr>
+          <a:xfrm>
+            <a:off x="457200" y="2514600"/>
+            <a:ext cx="11247120" cy="621792"/>
           </a:xfrm>
           <a:prstGeom prst="rect">
             <a:avLst/>
@@ -12457,20 +12765,20 @@
       </p:sp>
       <p:sp>
         <p:nvSpPr>
-          <p:cNvPr id="14" name="Rectangle 13"/>
+          <p:cNvPr id="18" name="Rectangle 17"/>
           <p:cNvSpPr/>
           <p:nvPr/>
         </p:nvSpPr>
         <p:spPr>
           <a:xfrm>
-            <a:off x="457200" y="3383280"/>
-            <a:ext cx="54864" cy="1920240"/>
+            <a:off x="457200" y="2514600"/>
+            <a:ext cx="54864" cy="621792"/>
           </a:xfrm>
           <a:prstGeom prst="rect">
             <a:avLst/>
           </a:prstGeom>
           <a:solidFill>
-            <a:srgbClr val="3F51B5"/>
+            <a:srgbClr val="2E7D32"/>
           </a:solidFill>
           <a:ln>
             <a:noFill/>
@@ -12500,23 +12808,125 @@
       </p:sp>
       <p:sp>
         <p:nvSpPr>
-          <p:cNvPr id="15" name="Rectangle 14"/>
+          <p:cNvPr id="19" name="TextBox 18"/>
+          <p:cNvSpPr txBox="1"/>
+          <p:nvPr/>
+        </p:nvSpPr>
+        <p:spPr>
+          <a:xfrm>
+            <a:off x="594360" y="2660904"/>
+            <a:ext cx="1188720" cy="347472"/>
+          </a:xfrm>
+          <a:prstGeom prst="rect">
+            <a:avLst/>
+          </a:prstGeom>
+          <a:noFill/>
+        </p:spPr>
+        <p:txBody>
+          <a:bodyPr wrap="square">
+            <a:spAutoFit/>
+          </a:bodyPr>
+          <a:lstStyle/>
+          <a:p>
+            <a:pPr algn="l"/>
+            <a:r>
+              <a:rPr sz="1100" b="0">
+                <a:solidFill>
+                  <a:srgbClr val="2E7D32"/>
+                </a:solidFill>
+              </a:rPr>
+              <a:t>✅ 완료</a:t>
+            </a:r>
+          </a:p>
+        </p:txBody>
+      </p:sp>
+      <p:sp>
+        <p:nvSpPr>
+          <p:cNvPr id="20" name="TextBox 19"/>
+          <p:cNvSpPr txBox="1"/>
+          <p:nvPr/>
+        </p:nvSpPr>
+        <p:spPr>
+          <a:xfrm>
+            <a:off x="1920240" y="2660904"/>
+            <a:ext cx="2103120" cy="347472"/>
+          </a:xfrm>
+          <a:prstGeom prst="rect">
+            <a:avLst/>
+          </a:prstGeom>
+          <a:noFill/>
+        </p:spPr>
+        <p:txBody>
+          <a:bodyPr wrap="square">
+            <a:spAutoFit/>
+          </a:bodyPr>
+          <a:lstStyle/>
+          <a:p>
+            <a:pPr algn="l"/>
+            <a:r>
+              <a:rPr sz="1200" b="1">
+                <a:solidFill>
+                  <a:srgbClr val="212121"/>
+                </a:solidFill>
+              </a:rPr>
+              <a:t>포지션 관리</a:t>
+            </a:r>
+          </a:p>
+        </p:txBody>
+      </p:sp>
+      <p:sp>
+        <p:nvSpPr>
+          <p:cNvPr id="21" name="TextBox 20"/>
+          <p:cNvSpPr txBox="1"/>
+          <p:nvPr/>
+        </p:nvSpPr>
+        <p:spPr>
+          <a:xfrm>
+            <a:off x="4114800" y="2660904"/>
+            <a:ext cx="7406640" cy="347472"/>
+          </a:xfrm>
+          <a:prstGeom prst="rect">
+            <a:avLst/>
+          </a:prstGeom>
+          <a:noFill/>
+        </p:spPr>
+        <p:txBody>
+          <a:bodyPr wrap="square">
+            <a:spAutoFit/>
+          </a:bodyPr>
+          <a:lstStyle/>
+          <a:p>
+            <a:pPr algn="l"/>
+            <a:r>
+              <a:rPr sz="1200" b="0">
+                <a:solidFill>
+                  <a:srgbClr val="212121"/>
+                </a:solidFill>
+              </a:rPr>
+              <a:t>진입·정리 / 수익률·손익 계산 / 복기 메모</a:t>
+            </a:r>
+          </a:p>
+        </p:txBody>
+      </p:sp>
+      <p:sp>
+        <p:nvSpPr>
+          <p:cNvPr id="22" name="Rectangle 21"/>
           <p:cNvSpPr/>
           <p:nvPr/>
         </p:nvSpPr>
         <p:spPr>
           <a:xfrm>
-            <a:off x="457200" y="3383280"/>
-            <a:ext cx="11247120" cy="475488"/>
-          </a:xfrm>
-          <a:prstGeom prst="rect">
-            <a:avLst/>
-          </a:prstGeom>
-          <a:solidFill>
-            <a:srgbClr val="F5F5F5"/>
-          </a:solidFill>
-          <a:ln>
-            <a:noFill/>
+            <a:off x="457200" y="3246120"/>
+            <a:ext cx="11247120" cy="621792"/>
+          </a:xfrm>
+          <a:prstGeom prst="rect">
+            <a:avLst/>
+          </a:prstGeom>
+          <a:noFill/>
+          <a:ln w="10160">
+            <a:solidFill>
+              <a:srgbClr val="E0E0E0"/>
+            </a:solidFill>
           </a:ln>
         </p:spPr>
         <p:style>
@@ -12543,14 +12953,57 @@
       </p:sp>
       <p:sp>
         <p:nvSpPr>
-          <p:cNvPr id="16" name="TextBox 15"/>
-          <p:cNvSpPr txBox="1"/>
-          <p:nvPr/>
-        </p:nvSpPr>
-        <p:spPr>
-          <a:xfrm>
-            <a:off x="658368" y="3474720"/>
-            <a:ext cx="1828800" cy="320040"/>
+          <p:cNvPr id="23" name="Rectangle 22"/>
+          <p:cNvSpPr/>
+          <p:nvPr/>
+        </p:nvSpPr>
+        <p:spPr>
+          <a:xfrm>
+            <a:off x="457200" y="3246120"/>
+            <a:ext cx="54864" cy="621792"/>
+          </a:xfrm>
+          <a:prstGeom prst="rect">
+            <a:avLst/>
+          </a:prstGeom>
+          <a:solidFill>
+            <a:srgbClr val="2E7D32"/>
+          </a:solidFill>
+          <a:ln>
+            <a:noFill/>
+          </a:ln>
+        </p:spPr>
+        <p:style>
+          <a:lnRef idx="1">
+            <a:schemeClr val="accent1"/>
+          </a:lnRef>
+          <a:fillRef idx="3">
+            <a:schemeClr val="accent1"/>
+          </a:fillRef>
+          <a:effectRef idx="2">
+            <a:schemeClr val="accent1"/>
+          </a:effectRef>
+          <a:fontRef idx="minor">
+            <a:schemeClr val="lt1"/>
+          </a:fontRef>
+        </p:style>
+        <p:txBody>
+          <a:bodyPr rtlCol="0" anchor="ctr"/>
+          <a:lstStyle/>
+          <a:p>
+            <a:pPr algn="ctr"/>
+          </a:p>
+        </p:txBody>
+      </p:sp>
+      <p:sp>
+        <p:nvSpPr>
+          <p:cNvPr id="24" name="TextBox 23"/>
+          <p:cNvSpPr txBox="1"/>
+          <p:nvPr/>
+        </p:nvSpPr>
+        <p:spPr>
+          <a:xfrm>
+            <a:off x="594360" y="3392424"/>
+            <a:ext cx="1188720" cy="347472"/>
           </a:xfrm>
           <a:prstGeom prst="rect">
             <a:avLst/>
@@ -12565,26 +13018,26 @@
           <a:p>
             <a:pPr algn="l"/>
             <a:r>
-              <a:rPr sz="1100" b="1">
-                <a:solidFill>
-                  <a:srgbClr val="3F51B5"/>
-                </a:solidFill>
-              </a:rPr>
-              <a:t>시나리오 B</a:t>
-            </a:r>
-          </a:p>
-        </p:txBody>
-      </p:sp>
-      <p:sp>
-        <p:nvSpPr>
-          <p:cNvPr id="17" name="TextBox 16"/>
-          <p:cNvSpPr txBox="1"/>
-          <p:nvPr/>
-        </p:nvSpPr>
-        <p:spPr>
-          <a:xfrm>
-            <a:off x="2606040" y="3474720"/>
-            <a:ext cx="8961120" cy="320040"/>
+              <a:rPr sz="1100" b="0">
+                <a:solidFill>
+                  <a:srgbClr val="2E7D32"/>
+                </a:solidFill>
+              </a:rPr>
+              <a:t>✅ 완료</a:t>
+            </a:r>
+          </a:p>
+        </p:txBody>
+      </p:sp>
+      <p:sp>
+        <p:nvSpPr>
+          <p:cNvPr id="25" name="TextBox 24"/>
+          <p:cNvSpPr txBox="1"/>
+          <p:nvPr/>
+        </p:nvSpPr>
+        <p:spPr>
+          <a:xfrm>
+            <a:off x="1920240" y="3392424"/>
+            <a:ext cx="2103120" cy="347472"/>
           </a:xfrm>
           <a:prstGeom prst="rect">
             <a:avLst/>
@@ -12599,26 +13052,26 @@
           <a:p>
             <a:pPr algn="l"/>
             <a:r>
-              <a:rPr sz="1400" b="1">
+              <a:rPr sz="1200" b="1">
                 <a:solidFill>
                   <a:srgbClr val="212121"/>
                 </a:solidFill>
               </a:rPr>
-              <a:t>포지션 기록 + 복기</a:t>
-            </a:r>
-          </a:p>
-        </p:txBody>
-      </p:sp>
-      <p:sp>
-        <p:nvSpPr>
-          <p:cNvPr id="18" name="TextBox 17"/>
-          <p:cNvSpPr txBox="1"/>
-          <p:nvPr/>
-        </p:nvSpPr>
-        <p:spPr>
-          <a:xfrm>
-            <a:off x="658368" y="4023360"/>
-            <a:ext cx="10881360" cy="1097280"/>
+              <a:t>시각화</a:t>
+            </a:r>
+          </a:p>
+        </p:txBody>
+      </p:sp>
+      <p:sp>
+        <p:nvSpPr>
+          <p:cNvPr id="26" name="TextBox 25"/>
+          <p:cNvSpPr txBox="1"/>
+          <p:nvPr/>
+        </p:nvSpPr>
+        <p:spPr>
+          <a:xfrm>
+            <a:off x="4114800" y="3392424"/>
+            <a:ext cx="7406640" cy="347472"/>
           </a:xfrm>
           <a:prstGeom prst="rect">
             <a:avLst/>
@@ -12633,26 +13086,590 @@
           <a:p>
             <a:pPr algn="l"/>
             <a:r>
-              <a:rPr sz="1300" b="0">
+              <a:rPr sz="1200" b="0">
                 <a:solidFill>
                   <a:srgbClr val="212121"/>
                 </a:solidFill>
               </a:rPr>
-              <a:t>① 포지션 진입 기록 (종목·진입가·수량·매수 근거)  → ② 포지션 정리 (매도가·손익·수익률 자동 계산)  → ③ 복기 메모 조회</a:t>
-            </a:r>
-          </a:p>
-        </p:txBody>
-      </p:sp>
-      <p:sp>
-        <p:nvSpPr>
-          <p:cNvPr id="19" name="Rectangle 18"/>
+              <a:t>수익률 막대 차트 / 누적 손익 라인 차트 / 기간 필터</a:t>
+            </a:r>
+          </a:p>
+        </p:txBody>
+      </p:sp>
+      <p:sp>
+        <p:nvSpPr>
+          <p:cNvPr id="27" name="Rectangle 26"/>
           <p:cNvSpPr/>
           <p:nvPr/>
         </p:nvSpPr>
         <p:spPr>
           <a:xfrm>
-            <a:off x="457200" y="5806440"/>
-            <a:ext cx="11247120" cy="658368"/>
+            <a:off x="457200" y="3977639"/>
+            <a:ext cx="11247120" cy="621792"/>
+          </a:xfrm>
+          <a:prstGeom prst="rect">
+            <a:avLst/>
+          </a:prstGeom>
+          <a:noFill/>
+          <a:ln w="10160">
+            <a:solidFill>
+              <a:srgbClr val="E0E0E0"/>
+            </a:solidFill>
+          </a:ln>
+        </p:spPr>
+        <p:style>
+          <a:lnRef idx="1">
+            <a:schemeClr val="accent1"/>
+          </a:lnRef>
+          <a:fillRef idx="3">
+            <a:schemeClr val="accent1"/>
+          </a:fillRef>
+          <a:effectRef idx="2">
+            <a:schemeClr val="accent1"/>
+          </a:effectRef>
+          <a:fontRef idx="minor">
+            <a:schemeClr val="lt1"/>
+          </a:fontRef>
+        </p:style>
+        <p:txBody>
+          <a:bodyPr rtlCol="0" anchor="ctr"/>
+          <a:lstStyle/>
+          <a:p>
+            <a:pPr algn="ctr"/>
+          </a:p>
+        </p:txBody>
+      </p:sp>
+      <p:sp>
+        <p:nvSpPr>
+          <p:cNvPr id="28" name="Rectangle 27"/>
+          <p:cNvSpPr/>
+          <p:nvPr/>
+        </p:nvSpPr>
+        <p:spPr>
+          <a:xfrm>
+            <a:off x="457200" y="3977639"/>
+            <a:ext cx="54864" cy="621792"/>
+          </a:xfrm>
+          <a:prstGeom prst="rect">
+            <a:avLst/>
+          </a:prstGeom>
+          <a:solidFill>
+            <a:srgbClr val="2E7D32"/>
+          </a:solidFill>
+          <a:ln>
+            <a:noFill/>
+          </a:ln>
+        </p:spPr>
+        <p:style>
+          <a:lnRef idx="1">
+            <a:schemeClr val="accent1"/>
+          </a:lnRef>
+          <a:fillRef idx="3">
+            <a:schemeClr val="accent1"/>
+          </a:fillRef>
+          <a:effectRef idx="2">
+            <a:schemeClr val="accent1"/>
+          </a:effectRef>
+          <a:fontRef idx="minor">
+            <a:schemeClr val="lt1"/>
+          </a:fontRef>
+        </p:style>
+        <p:txBody>
+          <a:bodyPr rtlCol="0" anchor="ctr"/>
+          <a:lstStyle/>
+          <a:p>
+            <a:pPr algn="ctr"/>
+          </a:p>
+        </p:txBody>
+      </p:sp>
+      <p:sp>
+        <p:nvSpPr>
+          <p:cNvPr id="29" name="TextBox 28"/>
+          <p:cNvSpPr txBox="1"/>
+          <p:nvPr/>
+        </p:nvSpPr>
+        <p:spPr>
+          <a:xfrm>
+            <a:off x="594360" y="4123944"/>
+            <a:ext cx="1188720" cy="347472"/>
+          </a:xfrm>
+          <a:prstGeom prst="rect">
+            <a:avLst/>
+          </a:prstGeom>
+          <a:noFill/>
+        </p:spPr>
+        <p:txBody>
+          <a:bodyPr wrap="square">
+            <a:spAutoFit/>
+          </a:bodyPr>
+          <a:lstStyle/>
+          <a:p>
+            <a:pPr algn="l"/>
+            <a:r>
+              <a:rPr sz="1100" b="0">
+                <a:solidFill>
+                  <a:srgbClr val="2E7D32"/>
+                </a:solidFill>
+              </a:rPr>
+              <a:t>✅ 완료</a:t>
+            </a:r>
+          </a:p>
+        </p:txBody>
+      </p:sp>
+      <p:sp>
+        <p:nvSpPr>
+          <p:cNvPr id="30" name="TextBox 29"/>
+          <p:cNvSpPr txBox="1"/>
+          <p:nvPr/>
+        </p:nvSpPr>
+        <p:spPr>
+          <a:xfrm>
+            <a:off x="1920240" y="4123944"/>
+            <a:ext cx="2103120" cy="347472"/>
+          </a:xfrm>
+          <a:prstGeom prst="rect">
+            <a:avLst/>
+          </a:prstGeom>
+          <a:noFill/>
+        </p:spPr>
+        <p:txBody>
+          <a:bodyPr wrap="square">
+            <a:spAutoFit/>
+          </a:bodyPr>
+          <a:lstStyle/>
+          <a:p>
+            <a:pPr algn="l"/>
+            <a:r>
+              <a:rPr sz="1200" b="1">
+                <a:solidFill>
+                  <a:srgbClr val="212121"/>
+                </a:solidFill>
+              </a:rPr>
+              <a:t>대시보드</a:t>
+            </a:r>
+          </a:p>
+        </p:txBody>
+      </p:sp>
+      <p:sp>
+        <p:nvSpPr>
+          <p:cNvPr id="31" name="TextBox 30"/>
+          <p:cNvSpPr txBox="1"/>
+          <p:nvPr/>
+        </p:nvSpPr>
+        <p:spPr>
+          <a:xfrm>
+            <a:off x="4114800" y="4123944"/>
+            <a:ext cx="7406640" cy="347472"/>
+          </a:xfrm>
+          <a:prstGeom prst="rect">
+            <a:avLst/>
+          </a:prstGeom>
+          <a:noFill/>
+        </p:spPr>
+        <p:txBody>
+          <a:bodyPr wrap="square">
+            <a:spAutoFit/>
+          </a:bodyPr>
+          <a:lstStyle/>
+          <a:p>
+            <a:pPr algn="l"/>
+            <a:r>
+              <a:rPr sz="1200" b="0">
+                <a:solidFill>
+                  <a:srgbClr val="212121"/>
+                </a:solidFill>
+              </a:rPr>
+              <a:t>총 잔액 / 누적 손익 / 승률 / 최근 포지션 목록</a:t>
+            </a:r>
+          </a:p>
+        </p:txBody>
+      </p:sp>
+      <p:sp>
+        <p:nvSpPr>
+          <p:cNvPr id="32" name="Rectangle 31"/>
+          <p:cNvSpPr/>
+          <p:nvPr/>
+        </p:nvSpPr>
+        <p:spPr>
+          <a:xfrm>
+            <a:off x="457200" y="4709160"/>
+            <a:ext cx="11247120" cy="621792"/>
+          </a:xfrm>
+          <a:prstGeom prst="rect">
+            <a:avLst/>
+          </a:prstGeom>
+          <a:noFill/>
+          <a:ln w="10160">
+            <a:solidFill>
+              <a:srgbClr val="E0E0E0"/>
+            </a:solidFill>
+          </a:ln>
+        </p:spPr>
+        <p:style>
+          <a:lnRef idx="1">
+            <a:schemeClr val="accent1"/>
+          </a:lnRef>
+          <a:fillRef idx="3">
+            <a:schemeClr val="accent1"/>
+          </a:fillRef>
+          <a:effectRef idx="2">
+            <a:schemeClr val="accent1"/>
+          </a:effectRef>
+          <a:fontRef idx="minor">
+            <a:schemeClr val="lt1"/>
+          </a:fontRef>
+        </p:style>
+        <p:txBody>
+          <a:bodyPr rtlCol="0" anchor="ctr"/>
+          <a:lstStyle/>
+          <a:p>
+            <a:pPr algn="ctr"/>
+          </a:p>
+        </p:txBody>
+      </p:sp>
+      <p:sp>
+        <p:nvSpPr>
+          <p:cNvPr id="33" name="Rectangle 32"/>
+          <p:cNvSpPr/>
+          <p:nvPr/>
+        </p:nvSpPr>
+        <p:spPr>
+          <a:xfrm>
+            <a:off x="457200" y="4709160"/>
+            <a:ext cx="54864" cy="621792"/>
+          </a:xfrm>
+          <a:prstGeom prst="rect">
+            <a:avLst/>
+          </a:prstGeom>
+          <a:solidFill>
+            <a:srgbClr val="E65C00"/>
+          </a:solidFill>
+          <a:ln>
+            <a:noFill/>
+          </a:ln>
+        </p:spPr>
+        <p:style>
+          <a:lnRef idx="1">
+            <a:schemeClr val="accent1"/>
+          </a:lnRef>
+          <a:fillRef idx="3">
+            <a:schemeClr val="accent1"/>
+          </a:fillRef>
+          <a:effectRef idx="2">
+            <a:schemeClr val="accent1"/>
+          </a:effectRef>
+          <a:fontRef idx="minor">
+            <a:schemeClr val="lt1"/>
+          </a:fontRef>
+        </p:style>
+        <p:txBody>
+          <a:bodyPr rtlCol="0" anchor="ctr"/>
+          <a:lstStyle/>
+          <a:p>
+            <a:pPr algn="ctr"/>
+          </a:p>
+        </p:txBody>
+      </p:sp>
+      <p:sp>
+        <p:nvSpPr>
+          <p:cNvPr id="34" name="TextBox 33"/>
+          <p:cNvSpPr txBox="1"/>
+          <p:nvPr/>
+        </p:nvSpPr>
+        <p:spPr>
+          <a:xfrm>
+            <a:off x="594360" y="4855464"/>
+            <a:ext cx="1188720" cy="347472"/>
+          </a:xfrm>
+          <a:prstGeom prst="rect">
+            <a:avLst/>
+          </a:prstGeom>
+          <a:noFill/>
+        </p:spPr>
+        <p:txBody>
+          <a:bodyPr wrap="square">
+            <a:spAutoFit/>
+          </a:bodyPr>
+          <a:lstStyle/>
+          <a:p>
+            <a:pPr algn="l"/>
+            <a:r>
+              <a:rPr sz="1100" b="0">
+                <a:solidFill>
+                  <a:srgbClr val="E65C00"/>
+                </a:solidFill>
+              </a:rPr>
+              <a:t>🚧 진행</a:t>
+            </a:r>
+          </a:p>
+        </p:txBody>
+      </p:sp>
+      <p:sp>
+        <p:nvSpPr>
+          <p:cNvPr id="35" name="TextBox 34"/>
+          <p:cNvSpPr txBox="1"/>
+          <p:nvPr/>
+        </p:nvSpPr>
+        <p:spPr>
+          <a:xfrm>
+            <a:off x="1920240" y="4855464"/>
+            <a:ext cx="2103120" cy="347472"/>
+          </a:xfrm>
+          <a:prstGeom prst="rect">
+            <a:avLst/>
+          </a:prstGeom>
+          <a:noFill/>
+        </p:spPr>
+        <p:txBody>
+          <a:bodyPr wrap="square">
+            <a:spAutoFit/>
+          </a:bodyPr>
+          <a:lstStyle/>
+          <a:p>
+            <a:pPr algn="l"/>
+            <a:r>
+              <a:rPr sz="1200" b="1">
+                <a:solidFill>
+                  <a:srgbClr val="212121"/>
+                </a:solidFill>
+              </a:rPr>
+              <a:t>문서·배포</a:t>
+            </a:r>
+          </a:p>
+        </p:txBody>
+      </p:sp>
+      <p:sp>
+        <p:nvSpPr>
+          <p:cNvPr id="36" name="TextBox 35"/>
+          <p:cNvSpPr txBox="1"/>
+          <p:nvPr/>
+        </p:nvSpPr>
+        <p:spPr>
+          <a:xfrm>
+            <a:off x="4114800" y="4855464"/>
+            <a:ext cx="7406640" cy="347472"/>
+          </a:xfrm>
+          <a:prstGeom prst="rect">
+            <a:avLst/>
+          </a:prstGeom>
+          <a:noFill/>
+        </p:spPr>
+        <p:txBody>
+          <a:bodyPr wrap="square">
+            <a:spAutoFit/>
+          </a:bodyPr>
+          <a:lstStyle/>
+          <a:p>
+            <a:pPr algn="l"/>
+            <a:r>
+              <a:rPr sz="1200" b="0">
+                <a:solidFill>
+                  <a:srgbClr val="212121"/>
+                </a:solidFill>
+              </a:rPr>
+              <a:t>setup·testing 문서 / README 완비</a:t>
+            </a:r>
+          </a:p>
+        </p:txBody>
+      </p:sp>
+      <p:sp>
+        <p:nvSpPr>
+          <p:cNvPr id="37" name="Rectangle 36"/>
+          <p:cNvSpPr/>
+          <p:nvPr/>
+        </p:nvSpPr>
+        <p:spPr>
+          <a:xfrm>
+            <a:off x="457200" y="5440680"/>
+            <a:ext cx="11247120" cy="621792"/>
+          </a:xfrm>
+          <a:prstGeom prst="rect">
+            <a:avLst/>
+          </a:prstGeom>
+          <a:noFill/>
+          <a:ln w="10160">
+            <a:solidFill>
+              <a:srgbClr val="E0E0E0"/>
+            </a:solidFill>
+          </a:ln>
+        </p:spPr>
+        <p:style>
+          <a:lnRef idx="1">
+            <a:schemeClr val="accent1"/>
+          </a:lnRef>
+          <a:fillRef idx="3">
+            <a:schemeClr val="accent1"/>
+          </a:fillRef>
+          <a:effectRef idx="2">
+            <a:schemeClr val="accent1"/>
+          </a:effectRef>
+          <a:fontRef idx="minor">
+            <a:schemeClr val="lt1"/>
+          </a:fontRef>
+        </p:style>
+        <p:txBody>
+          <a:bodyPr rtlCol="0" anchor="ctr"/>
+          <a:lstStyle/>
+          <a:p>
+            <a:pPr algn="ctr"/>
+          </a:p>
+        </p:txBody>
+      </p:sp>
+      <p:sp>
+        <p:nvSpPr>
+          <p:cNvPr id="38" name="Rectangle 37"/>
+          <p:cNvSpPr/>
+          <p:nvPr/>
+        </p:nvSpPr>
+        <p:spPr>
+          <a:xfrm>
+            <a:off x="457200" y="5440680"/>
+            <a:ext cx="54864" cy="621792"/>
+          </a:xfrm>
+          <a:prstGeom prst="rect">
+            <a:avLst/>
+          </a:prstGeom>
+          <a:solidFill>
+            <a:srgbClr val="9E9E9E"/>
+          </a:solidFill>
+          <a:ln>
+            <a:noFill/>
+          </a:ln>
+        </p:spPr>
+        <p:style>
+          <a:lnRef idx="1">
+            <a:schemeClr val="accent1"/>
+          </a:lnRef>
+          <a:fillRef idx="3">
+            <a:schemeClr val="accent1"/>
+          </a:fillRef>
+          <a:effectRef idx="2">
+            <a:schemeClr val="accent1"/>
+          </a:effectRef>
+          <a:fontRef idx="minor">
+            <a:schemeClr val="lt1"/>
+          </a:fontRef>
+        </p:style>
+        <p:txBody>
+          <a:bodyPr rtlCol="0" anchor="ctr"/>
+          <a:lstStyle/>
+          <a:p>
+            <a:pPr algn="ctr"/>
+          </a:p>
+        </p:txBody>
+      </p:sp>
+      <p:sp>
+        <p:nvSpPr>
+          <p:cNvPr id="39" name="TextBox 38"/>
+          <p:cNvSpPr txBox="1"/>
+          <p:nvPr/>
+        </p:nvSpPr>
+        <p:spPr>
+          <a:xfrm>
+            <a:off x="594360" y="5586984"/>
+            <a:ext cx="1188720" cy="347472"/>
+          </a:xfrm>
+          <a:prstGeom prst="rect">
+            <a:avLst/>
+          </a:prstGeom>
+          <a:noFill/>
+        </p:spPr>
+        <p:txBody>
+          <a:bodyPr wrap="square">
+            <a:spAutoFit/>
+          </a:bodyPr>
+          <a:lstStyle/>
+          <a:p>
+            <a:pPr algn="l"/>
+            <a:r>
+              <a:rPr sz="1100" b="0">
+                <a:solidFill>
+                  <a:srgbClr val="9E9E9E"/>
+                </a:solidFill>
+              </a:rPr>
+              <a:t>⏳ 예정</a:t>
+            </a:r>
+          </a:p>
+        </p:txBody>
+      </p:sp>
+      <p:sp>
+        <p:nvSpPr>
+          <p:cNvPr id="40" name="TextBox 39"/>
+          <p:cNvSpPr txBox="1"/>
+          <p:nvPr/>
+        </p:nvSpPr>
+        <p:spPr>
+          <a:xfrm>
+            <a:off x="1920240" y="5586984"/>
+            <a:ext cx="2103120" cy="347472"/>
+          </a:xfrm>
+          <a:prstGeom prst="rect">
+            <a:avLst/>
+          </a:prstGeom>
+          <a:noFill/>
+        </p:spPr>
+        <p:txBody>
+          <a:bodyPr wrap="square">
+            <a:spAutoFit/>
+          </a:bodyPr>
+          <a:lstStyle/>
+          <a:p>
+            <a:pPr algn="l"/>
+            <a:r>
+              <a:rPr sz="1200" b="1">
+                <a:solidFill>
+                  <a:srgbClr val="212121"/>
+                </a:solidFill>
+              </a:rPr>
+              <a:t>앱 빌드</a:t>
+            </a:r>
+          </a:p>
+        </p:txBody>
+      </p:sp>
+      <p:sp>
+        <p:nvSpPr>
+          <p:cNvPr id="41" name="TextBox 40"/>
+          <p:cNvSpPr txBox="1"/>
+          <p:nvPr/>
+        </p:nvSpPr>
+        <p:spPr>
+          <a:xfrm>
+            <a:off x="4114800" y="5586984"/>
+            <a:ext cx="7406640" cy="347472"/>
+          </a:xfrm>
+          <a:prstGeom prst="rect">
+            <a:avLst/>
+          </a:prstGeom>
+          <a:noFill/>
+        </p:spPr>
+        <p:txBody>
+          <a:bodyPr wrap="square">
+            <a:spAutoFit/>
+          </a:bodyPr>
+          <a:lstStyle/>
+          <a:p>
+            <a:pPr algn="l"/>
+            <a:r>
+              <a:rPr sz="1200" b="0">
+                <a:solidFill>
+                  <a:srgbClr val="212121"/>
+                </a:solidFill>
+              </a:rPr>
+              <a:t>Android APK 빌드 및 설치 파일 생성</a:t>
+            </a:r>
+          </a:p>
+        </p:txBody>
+      </p:sp>
+      <p:sp>
+        <p:nvSpPr>
+          <p:cNvPr id="42" name="Rectangle 41"/>
+          <p:cNvSpPr/>
+          <p:nvPr/>
+        </p:nvSpPr>
+        <p:spPr>
+          <a:xfrm>
+            <a:off x="457200" y="5605272"/>
+            <a:ext cx="11247120" cy="566928"/>
           </a:xfrm>
           <a:prstGeom prst="rect">
             <a:avLst/>
@@ -12690,14 +13707,14 @@
       </p:sp>
       <p:sp>
         <p:nvSpPr>
-          <p:cNvPr id="20" name="TextBox 19"/>
-          <p:cNvSpPr txBox="1"/>
-          <p:nvPr/>
-        </p:nvSpPr>
-        <p:spPr>
-          <a:xfrm>
-            <a:off x="658368" y="5971032"/>
-            <a:ext cx="10972800" cy="411480"/>
+          <p:cNvPr id="43" name="TextBox 42"/>
+          <p:cNvSpPr txBox="1"/>
+          <p:nvPr/>
+        </p:nvSpPr>
+        <p:spPr>
+          <a:xfrm>
+            <a:off x="658368" y="5760720"/>
+            <a:ext cx="10972800" cy="384048"/>
           </a:xfrm>
           <a:prstGeom prst="rect">
             <a:avLst/>
@@ -12712,12 +13729,12 @@
           <a:p>
             <a:pPr algn="l"/>
             <a:r>
-              <a:rPr sz="1200" b="0">
-                <a:solidFill>
-                  <a:srgbClr val="9E9E9E"/>
-                </a:solidFill>
-              </a:rPr>
-              <a:t>데모 백업  ·  Wi-Fi 없는 환경 대비 → 로컬 데이터 캐시 + 화면 녹화 영상 준비</a:t>
+              <a:rPr sz="1300" b="1">
+                <a:solidFill>
+                  <a:srgbClr val="3F51B5"/>
+                </a:solidFill>
+              </a:rPr>
+              <a:t>전체 진척  ·  Must 기능 95% 완료  (5단계 구현 완료 / 문서·배포 진행 중)</a:t>
             </a:r>
           </a:p>
         </p:txBody>
@@ -12810,7 +13827,7 @@
                   <a:srgbClr val="3F51B5"/>
                 </a:solidFill>
               </a:rPr>
-              <a:t>6.  진행 상황</a:t>
+              <a:t>6.  데모</a:t>
             </a:r>
           </a:p>
         </p:txBody>
@@ -12844,7 +13861,7 @@
                   <a:srgbClr val="9E9E9E"/>
                 </a:solidFill>
               </a:rPr>
-              <a:t>Must 기능 기준 진척도</a:t>
+              <a:t>라이브 시연 — 핵심 화면 2가지</a:t>
             </a:r>
           </a:p>
         </p:txBody>
@@ -12921,7 +13938,7 @@
                   <a:srgbClr val="9E9E9E"/>
                 </a:solidFill>
               </a:rPr>
-              <a:t>6 / 13</a:t>
+              <a:t>7 / 14</a:t>
             </a:r>
           </a:p>
         </p:txBody>
@@ -12934,8 +13951,8 @@
         </p:nvSpPr>
         <p:spPr>
           <a:xfrm>
-            <a:off x="457200" y="1051560"/>
-            <a:ext cx="11247120" cy="621792"/>
+            <a:off x="457200" y="1097280"/>
+            <a:ext cx="11247120" cy="1920240"/>
           </a:xfrm>
           <a:prstGeom prst="rect">
             <a:avLst/>
@@ -12977,14 +13994,14 @@
         </p:nvSpPr>
         <p:spPr>
           <a:xfrm>
-            <a:off x="457200" y="1051560"/>
-            <a:ext cx="54864" cy="621792"/>
+            <a:off x="457200" y="1097280"/>
+            <a:ext cx="54864" cy="1920240"/>
           </a:xfrm>
           <a:prstGeom prst="rect">
             <a:avLst/>
           </a:prstGeom>
           <a:solidFill>
-            <a:srgbClr val="2E7D32"/>
+            <a:srgbClr val="3F51B5"/>
           </a:solidFill>
           <a:ln>
             <a:noFill/>
@@ -13014,14 +14031,57 @@
       </p:sp>
       <p:sp>
         <p:nvSpPr>
-          <p:cNvPr id="9" name="TextBox 8"/>
-          <p:cNvSpPr txBox="1"/>
-          <p:nvPr/>
-        </p:nvSpPr>
-        <p:spPr>
-          <a:xfrm>
-            <a:off x="594360" y="1197863"/>
-            <a:ext cx="1188720" cy="347472"/>
+          <p:cNvPr id="9" name="Rectangle 8"/>
+          <p:cNvSpPr/>
+          <p:nvPr/>
+        </p:nvSpPr>
+        <p:spPr>
+          <a:xfrm>
+            <a:off x="457200" y="1097280"/>
+            <a:ext cx="11247120" cy="475488"/>
+          </a:xfrm>
+          <a:prstGeom prst="rect">
+            <a:avLst/>
+          </a:prstGeom>
+          <a:solidFill>
+            <a:srgbClr val="F5F5F5"/>
+          </a:solidFill>
+          <a:ln>
+            <a:noFill/>
+          </a:ln>
+        </p:spPr>
+        <p:style>
+          <a:lnRef idx="1">
+            <a:schemeClr val="accent1"/>
+          </a:lnRef>
+          <a:fillRef idx="3">
+            <a:schemeClr val="accent1"/>
+          </a:fillRef>
+          <a:effectRef idx="2">
+            <a:schemeClr val="accent1"/>
+          </a:effectRef>
+          <a:fontRef idx="minor">
+            <a:schemeClr val="lt1"/>
+          </a:fontRef>
+        </p:style>
+        <p:txBody>
+          <a:bodyPr rtlCol="0" anchor="ctr"/>
+          <a:lstStyle/>
+          <a:p>
+            <a:pPr algn="ctr"/>
+          </a:p>
+        </p:txBody>
+      </p:sp>
+      <p:sp>
+        <p:nvSpPr>
+          <p:cNvPr id="10" name="TextBox 9"/>
+          <p:cNvSpPr txBox="1"/>
+          <p:nvPr/>
+        </p:nvSpPr>
+        <p:spPr>
+          <a:xfrm>
+            <a:off x="658368" y="1188720"/>
+            <a:ext cx="1828800" cy="320040"/>
           </a:xfrm>
           <a:prstGeom prst="rect">
             <a:avLst/>
@@ -13036,26 +14096,26 @@
           <a:p>
             <a:pPr algn="l"/>
             <a:r>
-              <a:rPr sz="1100" b="0">
-                <a:solidFill>
-                  <a:srgbClr val="2E7D32"/>
-                </a:solidFill>
-              </a:rPr>
-              <a:t>✅ 완료</a:t>
-            </a:r>
-          </a:p>
-        </p:txBody>
-      </p:sp>
-      <p:sp>
-        <p:nvSpPr>
-          <p:cNvPr id="10" name="TextBox 9"/>
-          <p:cNvSpPr txBox="1"/>
-          <p:nvPr/>
-        </p:nvSpPr>
-        <p:spPr>
-          <a:xfrm>
-            <a:off x="1920240" y="1197863"/>
-            <a:ext cx="2103120" cy="347472"/>
+              <a:rPr sz="1100" b="1">
+                <a:solidFill>
+                  <a:srgbClr val="3F51B5"/>
+                </a:solidFill>
+              </a:rPr>
+              <a:t>시나리오 A</a:t>
+            </a:r>
+          </a:p>
+        </p:txBody>
+      </p:sp>
+      <p:sp>
+        <p:nvSpPr>
+          <p:cNvPr id="11" name="TextBox 10"/>
+          <p:cNvSpPr txBox="1"/>
+          <p:nvPr/>
+        </p:nvSpPr>
+        <p:spPr>
+          <a:xfrm>
+            <a:off x="2606040" y="1188720"/>
+            <a:ext cx="8961120" cy="320040"/>
           </a:xfrm>
           <a:prstGeom prst="rect">
             <a:avLst/>
@@ -13070,26 +14130,26 @@
           <a:p>
             <a:pPr algn="l"/>
             <a:r>
-              <a:rPr sz="1200" b="1">
+              <a:rPr sz="1400" b="1">
                 <a:solidFill>
                   <a:srgbClr val="212121"/>
                 </a:solidFill>
               </a:rPr>
-              <a:t>인증</a:t>
-            </a:r>
-          </a:p>
-        </p:txBody>
-      </p:sp>
-      <p:sp>
-        <p:nvSpPr>
-          <p:cNvPr id="11" name="TextBox 10"/>
-          <p:cNvSpPr txBox="1"/>
-          <p:nvPr/>
-        </p:nvSpPr>
-        <p:spPr>
-          <a:xfrm>
-            <a:off x="4114800" y="1197863"/>
-            <a:ext cx="7406640" cy="347472"/>
+              <a:t>계좌 관리 흐름</a:t>
+            </a:r>
+          </a:p>
+        </p:txBody>
+      </p:sp>
+      <p:sp>
+        <p:nvSpPr>
+          <p:cNvPr id="12" name="TextBox 11"/>
+          <p:cNvSpPr txBox="1"/>
+          <p:nvPr/>
+        </p:nvSpPr>
+        <p:spPr>
+          <a:xfrm>
+            <a:off x="658368" y="1737360"/>
+            <a:ext cx="10881360" cy="1097280"/>
           </a:xfrm>
           <a:prstGeom prst="rect">
             <a:avLst/>
@@ -13104,26 +14164,26 @@
           <a:p>
             <a:pPr algn="l"/>
             <a:r>
-              <a:rPr sz="1200" b="0">
+              <a:rPr sz="1300" b="0">
                 <a:solidFill>
                   <a:srgbClr val="212121"/>
                 </a:solidFill>
               </a:rPr>
-              <a:t>회원가입 / 로그인 / 자동 로그인</a:t>
-            </a:r>
-          </a:p>
-        </p:txBody>
-      </p:sp>
-      <p:sp>
-        <p:nvSpPr>
-          <p:cNvPr id="12" name="Rectangle 11"/>
+              <a:t>① 계좌 등록 (주식·코인 선택, 통화 선택)  → ② 입금 기록  → ③ 잔액 자동 계산 확인</a:t>
+            </a:r>
+          </a:p>
+        </p:txBody>
+      </p:sp>
+      <p:sp>
+        <p:nvSpPr>
+          <p:cNvPr id="13" name="Rectangle 12"/>
           <p:cNvSpPr/>
           <p:nvPr/>
         </p:nvSpPr>
         <p:spPr>
           <a:xfrm>
-            <a:off x="457200" y="1783080"/>
-            <a:ext cx="11247120" cy="621792"/>
+            <a:off x="457200" y="3383280"/>
+            <a:ext cx="11247120" cy="1920240"/>
           </a:xfrm>
           <a:prstGeom prst="rect">
             <a:avLst/>
@@ -13159,20 +14219,20 @@
       </p:sp>
       <p:sp>
         <p:nvSpPr>
-          <p:cNvPr id="13" name="Rectangle 12"/>
+          <p:cNvPr id="14" name="Rectangle 13"/>
           <p:cNvSpPr/>
           <p:nvPr/>
         </p:nvSpPr>
         <p:spPr>
           <a:xfrm>
-            <a:off x="457200" y="1783080"/>
-            <a:ext cx="54864" cy="621792"/>
+            <a:off x="457200" y="3383280"/>
+            <a:ext cx="54864" cy="1920240"/>
           </a:xfrm>
           <a:prstGeom prst="rect">
             <a:avLst/>
           </a:prstGeom>
           <a:solidFill>
-            <a:srgbClr val="2E7D32"/>
+            <a:srgbClr val="3F51B5"/>
           </a:solidFill>
           <a:ln>
             <a:noFill/>
@@ -13202,125 +14262,23 @@
       </p:sp>
       <p:sp>
         <p:nvSpPr>
-          <p:cNvPr id="14" name="TextBox 13"/>
-          <p:cNvSpPr txBox="1"/>
-          <p:nvPr/>
-        </p:nvSpPr>
-        <p:spPr>
-          <a:xfrm>
-            <a:off x="594360" y="1929384"/>
-            <a:ext cx="1188720" cy="347472"/>
-          </a:xfrm>
-          <a:prstGeom prst="rect">
-            <a:avLst/>
-          </a:prstGeom>
-          <a:noFill/>
-        </p:spPr>
-        <p:txBody>
-          <a:bodyPr wrap="square">
-            <a:spAutoFit/>
-          </a:bodyPr>
-          <a:lstStyle/>
-          <a:p>
-            <a:pPr algn="l"/>
-            <a:r>
-              <a:rPr sz="1100" b="0">
-                <a:solidFill>
-                  <a:srgbClr val="2E7D32"/>
-                </a:solidFill>
-              </a:rPr>
-              <a:t>✅ 완료</a:t>
-            </a:r>
-          </a:p>
-        </p:txBody>
-      </p:sp>
-      <p:sp>
-        <p:nvSpPr>
-          <p:cNvPr id="15" name="TextBox 14"/>
-          <p:cNvSpPr txBox="1"/>
-          <p:nvPr/>
-        </p:nvSpPr>
-        <p:spPr>
-          <a:xfrm>
-            <a:off x="1920240" y="1929384"/>
-            <a:ext cx="2103120" cy="347472"/>
-          </a:xfrm>
-          <a:prstGeom prst="rect">
-            <a:avLst/>
-          </a:prstGeom>
-          <a:noFill/>
-        </p:spPr>
-        <p:txBody>
-          <a:bodyPr wrap="square">
-            <a:spAutoFit/>
-          </a:bodyPr>
-          <a:lstStyle/>
-          <a:p>
-            <a:pPr algn="l"/>
-            <a:r>
-              <a:rPr sz="1200" b="1">
-                <a:solidFill>
-                  <a:srgbClr val="212121"/>
-                </a:solidFill>
-              </a:rPr>
-              <a:t>계좌 관리</a:t>
-            </a:r>
-          </a:p>
-        </p:txBody>
-      </p:sp>
-      <p:sp>
-        <p:nvSpPr>
-          <p:cNvPr id="16" name="TextBox 15"/>
-          <p:cNvSpPr txBox="1"/>
-          <p:nvPr/>
-        </p:nvSpPr>
-        <p:spPr>
-          <a:xfrm>
-            <a:off x="4114800" y="1929384"/>
-            <a:ext cx="7406640" cy="347472"/>
-          </a:xfrm>
-          <a:prstGeom prst="rect">
-            <a:avLst/>
-          </a:prstGeom>
-          <a:noFill/>
-        </p:spPr>
-        <p:txBody>
-          <a:bodyPr wrap="square">
-            <a:spAutoFit/>
-          </a:bodyPr>
-          <a:lstStyle/>
-          <a:p>
-            <a:pPr algn="l"/>
-            <a:r>
-              <a:rPr sz="1200" b="0">
-                <a:solidFill>
-                  <a:srgbClr val="212121"/>
-                </a:solidFill>
-              </a:rPr>
-              <a:t>계좌 등록 / 입출금 기록 / 잔액 자동 계산</a:t>
-            </a:r>
-          </a:p>
-        </p:txBody>
-      </p:sp>
-      <p:sp>
-        <p:nvSpPr>
-          <p:cNvPr id="17" name="Rectangle 16"/>
+          <p:cNvPr id="15" name="Rectangle 14"/>
           <p:cNvSpPr/>
           <p:nvPr/>
         </p:nvSpPr>
         <p:spPr>
           <a:xfrm>
-            <a:off x="457200" y="2514600"/>
-            <a:ext cx="11247120" cy="621792"/>
-          </a:xfrm>
-          <a:prstGeom prst="rect">
-            <a:avLst/>
-          </a:prstGeom>
-          <a:noFill/>
-          <a:ln w="10160">
-            <a:solidFill>
-              <a:srgbClr val="E0E0E0"/>
-            </a:solidFill>
+            <a:off x="457200" y="3383280"/>
+            <a:ext cx="11247120" cy="475488"/>
+          </a:xfrm>
+          <a:prstGeom prst="rect">
+            <a:avLst/>
+          </a:prstGeom>
+          <a:solidFill>
+            <a:srgbClr val="F5F5F5"/>
+          </a:solidFill>
+          <a:ln>
+            <a:noFill/>
           </a:ln>
         </p:spPr>
         <p:style>
@@ -13347,911 +14305,116 @@
       </p:sp>
       <p:sp>
         <p:nvSpPr>
-          <p:cNvPr id="18" name="Rectangle 17"/>
+          <p:cNvPr id="16" name="TextBox 15"/>
+          <p:cNvSpPr txBox="1"/>
+          <p:nvPr/>
+        </p:nvSpPr>
+        <p:spPr>
+          <a:xfrm>
+            <a:off x="658368" y="3474720"/>
+            <a:ext cx="1828800" cy="320040"/>
+          </a:xfrm>
+          <a:prstGeom prst="rect">
+            <a:avLst/>
+          </a:prstGeom>
+          <a:noFill/>
+        </p:spPr>
+        <p:txBody>
+          <a:bodyPr wrap="square">
+            <a:spAutoFit/>
+          </a:bodyPr>
+          <a:lstStyle/>
+          <a:p>
+            <a:pPr algn="l"/>
+            <a:r>
+              <a:rPr sz="1100" b="1">
+                <a:solidFill>
+                  <a:srgbClr val="3F51B5"/>
+                </a:solidFill>
+              </a:rPr>
+              <a:t>시나리오 B</a:t>
+            </a:r>
+          </a:p>
+        </p:txBody>
+      </p:sp>
+      <p:sp>
+        <p:nvSpPr>
+          <p:cNvPr id="17" name="TextBox 16"/>
+          <p:cNvSpPr txBox="1"/>
+          <p:nvPr/>
+        </p:nvSpPr>
+        <p:spPr>
+          <a:xfrm>
+            <a:off x="2606040" y="3474720"/>
+            <a:ext cx="8961120" cy="320040"/>
+          </a:xfrm>
+          <a:prstGeom prst="rect">
+            <a:avLst/>
+          </a:prstGeom>
+          <a:noFill/>
+        </p:spPr>
+        <p:txBody>
+          <a:bodyPr wrap="square">
+            <a:spAutoFit/>
+          </a:bodyPr>
+          <a:lstStyle/>
+          <a:p>
+            <a:pPr algn="l"/>
+            <a:r>
+              <a:rPr sz="1400" b="1">
+                <a:solidFill>
+                  <a:srgbClr val="212121"/>
+                </a:solidFill>
+              </a:rPr>
+              <a:t>포지션 기록 + 복기</a:t>
+            </a:r>
+          </a:p>
+        </p:txBody>
+      </p:sp>
+      <p:sp>
+        <p:nvSpPr>
+          <p:cNvPr id="18" name="TextBox 17"/>
+          <p:cNvSpPr txBox="1"/>
+          <p:nvPr/>
+        </p:nvSpPr>
+        <p:spPr>
+          <a:xfrm>
+            <a:off x="658368" y="4023360"/>
+            <a:ext cx="10881360" cy="1097280"/>
+          </a:xfrm>
+          <a:prstGeom prst="rect">
+            <a:avLst/>
+          </a:prstGeom>
+          <a:noFill/>
+        </p:spPr>
+        <p:txBody>
+          <a:bodyPr wrap="square">
+            <a:spAutoFit/>
+          </a:bodyPr>
+          <a:lstStyle/>
+          <a:p>
+            <a:pPr algn="l"/>
+            <a:r>
+              <a:rPr sz="1300" b="0">
+                <a:solidFill>
+                  <a:srgbClr val="212121"/>
+                </a:solidFill>
+              </a:rPr>
+              <a:t>① 포지션 진입 기록 (종목·진입가·수량·매수 근거)  → ② 포지션 정리 (매도가·손익·수익률 자동 계산)  → ③ 복기 메모 조회</a:t>
+            </a:r>
+          </a:p>
+        </p:txBody>
+      </p:sp>
+      <p:sp>
+        <p:nvSpPr>
+          <p:cNvPr id="19" name="Rectangle 18"/>
           <p:cNvSpPr/>
           <p:nvPr/>
         </p:nvSpPr>
         <p:spPr>
           <a:xfrm>
-            <a:off x="457200" y="2514600"/>
-            <a:ext cx="54864" cy="621792"/>
-          </a:xfrm>
-          <a:prstGeom prst="rect">
-            <a:avLst/>
-          </a:prstGeom>
-          <a:solidFill>
-            <a:srgbClr val="2E7D32"/>
-          </a:solidFill>
-          <a:ln>
-            <a:noFill/>
-          </a:ln>
-        </p:spPr>
-        <p:style>
-          <a:lnRef idx="1">
-            <a:schemeClr val="accent1"/>
-          </a:lnRef>
-          <a:fillRef idx="3">
-            <a:schemeClr val="accent1"/>
-          </a:fillRef>
-          <a:effectRef idx="2">
-            <a:schemeClr val="accent1"/>
-          </a:effectRef>
-          <a:fontRef idx="minor">
-            <a:schemeClr val="lt1"/>
-          </a:fontRef>
-        </p:style>
-        <p:txBody>
-          <a:bodyPr rtlCol="0" anchor="ctr"/>
-          <a:lstStyle/>
-          <a:p>
-            <a:pPr algn="ctr"/>
-          </a:p>
-        </p:txBody>
-      </p:sp>
-      <p:sp>
-        <p:nvSpPr>
-          <p:cNvPr id="19" name="TextBox 18"/>
-          <p:cNvSpPr txBox="1"/>
-          <p:nvPr/>
-        </p:nvSpPr>
-        <p:spPr>
-          <a:xfrm>
-            <a:off x="594360" y="2660904"/>
-            <a:ext cx="1188720" cy="347472"/>
-          </a:xfrm>
-          <a:prstGeom prst="rect">
-            <a:avLst/>
-          </a:prstGeom>
-          <a:noFill/>
-        </p:spPr>
-        <p:txBody>
-          <a:bodyPr wrap="square">
-            <a:spAutoFit/>
-          </a:bodyPr>
-          <a:lstStyle/>
-          <a:p>
-            <a:pPr algn="l"/>
-            <a:r>
-              <a:rPr sz="1100" b="0">
-                <a:solidFill>
-                  <a:srgbClr val="2E7D32"/>
-                </a:solidFill>
-              </a:rPr>
-              <a:t>✅ 완료</a:t>
-            </a:r>
-          </a:p>
-        </p:txBody>
-      </p:sp>
-      <p:sp>
-        <p:nvSpPr>
-          <p:cNvPr id="20" name="TextBox 19"/>
-          <p:cNvSpPr txBox="1"/>
-          <p:nvPr/>
-        </p:nvSpPr>
-        <p:spPr>
-          <a:xfrm>
-            <a:off x="1920240" y="2660904"/>
-            <a:ext cx="2103120" cy="347472"/>
-          </a:xfrm>
-          <a:prstGeom prst="rect">
-            <a:avLst/>
-          </a:prstGeom>
-          <a:noFill/>
-        </p:spPr>
-        <p:txBody>
-          <a:bodyPr wrap="square">
-            <a:spAutoFit/>
-          </a:bodyPr>
-          <a:lstStyle/>
-          <a:p>
-            <a:pPr algn="l"/>
-            <a:r>
-              <a:rPr sz="1200" b="1">
-                <a:solidFill>
-                  <a:srgbClr val="212121"/>
-                </a:solidFill>
-              </a:rPr>
-              <a:t>포지션 관리</a:t>
-            </a:r>
-          </a:p>
-        </p:txBody>
-      </p:sp>
-      <p:sp>
-        <p:nvSpPr>
-          <p:cNvPr id="21" name="TextBox 20"/>
-          <p:cNvSpPr txBox="1"/>
-          <p:nvPr/>
-        </p:nvSpPr>
-        <p:spPr>
-          <a:xfrm>
-            <a:off x="4114800" y="2660904"/>
-            <a:ext cx="7406640" cy="347472"/>
-          </a:xfrm>
-          <a:prstGeom prst="rect">
-            <a:avLst/>
-          </a:prstGeom>
-          <a:noFill/>
-        </p:spPr>
-        <p:txBody>
-          <a:bodyPr wrap="square">
-            <a:spAutoFit/>
-          </a:bodyPr>
-          <a:lstStyle/>
-          <a:p>
-            <a:pPr algn="l"/>
-            <a:r>
-              <a:rPr sz="1200" b="0">
-                <a:solidFill>
-                  <a:srgbClr val="212121"/>
-                </a:solidFill>
-              </a:rPr>
-              <a:t>진입·정리 / 수익률·손익 계산 / 복기 메모</a:t>
-            </a:r>
-          </a:p>
-        </p:txBody>
-      </p:sp>
-      <p:sp>
-        <p:nvSpPr>
-          <p:cNvPr id="22" name="Rectangle 21"/>
-          <p:cNvSpPr/>
-          <p:nvPr/>
-        </p:nvSpPr>
-        <p:spPr>
-          <a:xfrm>
-            <a:off x="457200" y="3246120"/>
-            <a:ext cx="11247120" cy="621792"/>
-          </a:xfrm>
-          <a:prstGeom prst="rect">
-            <a:avLst/>
-          </a:prstGeom>
-          <a:noFill/>
-          <a:ln w="10160">
-            <a:solidFill>
-              <a:srgbClr val="E0E0E0"/>
-            </a:solidFill>
-          </a:ln>
-        </p:spPr>
-        <p:style>
-          <a:lnRef idx="1">
-            <a:schemeClr val="accent1"/>
-          </a:lnRef>
-          <a:fillRef idx="3">
-            <a:schemeClr val="accent1"/>
-          </a:fillRef>
-          <a:effectRef idx="2">
-            <a:schemeClr val="accent1"/>
-          </a:effectRef>
-          <a:fontRef idx="minor">
-            <a:schemeClr val="lt1"/>
-          </a:fontRef>
-        </p:style>
-        <p:txBody>
-          <a:bodyPr rtlCol="0" anchor="ctr"/>
-          <a:lstStyle/>
-          <a:p>
-            <a:pPr algn="ctr"/>
-          </a:p>
-        </p:txBody>
-      </p:sp>
-      <p:sp>
-        <p:nvSpPr>
-          <p:cNvPr id="23" name="Rectangle 22"/>
-          <p:cNvSpPr/>
-          <p:nvPr/>
-        </p:nvSpPr>
-        <p:spPr>
-          <a:xfrm>
-            <a:off x="457200" y="3246120"/>
-            <a:ext cx="54864" cy="621792"/>
-          </a:xfrm>
-          <a:prstGeom prst="rect">
-            <a:avLst/>
-          </a:prstGeom>
-          <a:solidFill>
-            <a:srgbClr val="2E7D32"/>
-          </a:solidFill>
-          <a:ln>
-            <a:noFill/>
-          </a:ln>
-        </p:spPr>
-        <p:style>
-          <a:lnRef idx="1">
-            <a:schemeClr val="accent1"/>
-          </a:lnRef>
-          <a:fillRef idx="3">
-            <a:schemeClr val="accent1"/>
-          </a:fillRef>
-          <a:effectRef idx="2">
-            <a:schemeClr val="accent1"/>
-          </a:effectRef>
-          <a:fontRef idx="minor">
-            <a:schemeClr val="lt1"/>
-          </a:fontRef>
-        </p:style>
-        <p:txBody>
-          <a:bodyPr rtlCol="0" anchor="ctr"/>
-          <a:lstStyle/>
-          <a:p>
-            <a:pPr algn="ctr"/>
-          </a:p>
-        </p:txBody>
-      </p:sp>
-      <p:sp>
-        <p:nvSpPr>
-          <p:cNvPr id="24" name="TextBox 23"/>
-          <p:cNvSpPr txBox="1"/>
-          <p:nvPr/>
-        </p:nvSpPr>
-        <p:spPr>
-          <a:xfrm>
-            <a:off x="594360" y="3392424"/>
-            <a:ext cx="1188720" cy="347472"/>
-          </a:xfrm>
-          <a:prstGeom prst="rect">
-            <a:avLst/>
-          </a:prstGeom>
-          <a:noFill/>
-        </p:spPr>
-        <p:txBody>
-          <a:bodyPr wrap="square">
-            <a:spAutoFit/>
-          </a:bodyPr>
-          <a:lstStyle/>
-          <a:p>
-            <a:pPr algn="l"/>
-            <a:r>
-              <a:rPr sz="1100" b="0">
-                <a:solidFill>
-                  <a:srgbClr val="2E7D32"/>
-                </a:solidFill>
-              </a:rPr>
-              <a:t>✅ 완료</a:t>
-            </a:r>
-          </a:p>
-        </p:txBody>
-      </p:sp>
-      <p:sp>
-        <p:nvSpPr>
-          <p:cNvPr id="25" name="TextBox 24"/>
-          <p:cNvSpPr txBox="1"/>
-          <p:nvPr/>
-        </p:nvSpPr>
-        <p:spPr>
-          <a:xfrm>
-            <a:off x="1920240" y="3392424"/>
-            <a:ext cx="2103120" cy="347472"/>
-          </a:xfrm>
-          <a:prstGeom prst="rect">
-            <a:avLst/>
-          </a:prstGeom>
-          <a:noFill/>
-        </p:spPr>
-        <p:txBody>
-          <a:bodyPr wrap="square">
-            <a:spAutoFit/>
-          </a:bodyPr>
-          <a:lstStyle/>
-          <a:p>
-            <a:pPr algn="l"/>
-            <a:r>
-              <a:rPr sz="1200" b="1">
-                <a:solidFill>
-                  <a:srgbClr val="212121"/>
-                </a:solidFill>
-              </a:rPr>
-              <a:t>시각화</a:t>
-            </a:r>
-          </a:p>
-        </p:txBody>
-      </p:sp>
-      <p:sp>
-        <p:nvSpPr>
-          <p:cNvPr id="26" name="TextBox 25"/>
-          <p:cNvSpPr txBox="1"/>
-          <p:nvPr/>
-        </p:nvSpPr>
-        <p:spPr>
-          <a:xfrm>
-            <a:off x="4114800" y="3392424"/>
-            <a:ext cx="7406640" cy="347472"/>
-          </a:xfrm>
-          <a:prstGeom prst="rect">
-            <a:avLst/>
-          </a:prstGeom>
-          <a:noFill/>
-        </p:spPr>
-        <p:txBody>
-          <a:bodyPr wrap="square">
-            <a:spAutoFit/>
-          </a:bodyPr>
-          <a:lstStyle/>
-          <a:p>
-            <a:pPr algn="l"/>
-            <a:r>
-              <a:rPr sz="1200" b="0">
-                <a:solidFill>
-                  <a:srgbClr val="212121"/>
-                </a:solidFill>
-              </a:rPr>
-              <a:t>수익률 막대 차트 / 누적 손익 라인 차트 / 기간 필터</a:t>
-            </a:r>
-          </a:p>
-        </p:txBody>
-      </p:sp>
-      <p:sp>
-        <p:nvSpPr>
-          <p:cNvPr id="27" name="Rectangle 26"/>
-          <p:cNvSpPr/>
-          <p:nvPr/>
-        </p:nvSpPr>
-        <p:spPr>
-          <a:xfrm>
-            <a:off x="457200" y="3977639"/>
-            <a:ext cx="11247120" cy="621792"/>
-          </a:xfrm>
-          <a:prstGeom prst="rect">
-            <a:avLst/>
-          </a:prstGeom>
-          <a:noFill/>
-          <a:ln w="10160">
-            <a:solidFill>
-              <a:srgbClr val="E0E0E0"/>
-            </a:solidFill>
-          </a:ln>
-        </p:spPr>
-        <p:style>
-          <a:lnRef idx="1">
-            <a:schemeClr val="accent1"/>
-          </a:lnRef>
-          <a:fillRef idx="3">
-            <a:schemeClr val="accent1"/>
-          </a:fillRef>
-          <a:effectRef idx="2">
-            <a:schemeClr val="accent1"/>
-          </a:effectRef>
-          <a:fontRef idx="minor">
-            <a:schemeClr val="lt1"/>
-          </a:fontRef>
-        </p:style>
-        <p:txBody>
-          <a:bodyPr rtlCol="0" anchor="ctr"/>
-          <a:lstStyle/>
-          <a:p>
-            <a:pPr algn="ctr"/>
-          </a:p>
-        </p:txBody>
-      </p:sp>
-      <p:sp>
-        <p:nvSpPr>
-          <p:cNvPr id="28" name="Rectangle 27"/>
-          <p:cNvSpPr/>
-          <p:nvPr/>
-        </p:nvSpPr>
-        <p:spPr>
-          <a:xfrm>
-            <a:off x="457200" y="3977639"/>
-            <a:ext cx="54864" cy="621792"/>
-          </a:xfrm>
-          <a:prstGeom prst="rect">
-            <a:avLst/>
-          </a:prstGeom>
-          <a:solidFill>
-            <a:srgbClr val="2E7D32"/>
-          </a:solidFill>
-          <a:ln>
-            <a:noFill/>
-          </a:ln>
-        </p:spPr>
-        <p:style>
-          <a:lnRef idx="1">
-            <a:schemeClr val="accent1"/>
-          </a:lnRef>
-          <a:fillRef idx="3">
-            <a:schemeClr val="accent1"/>
-          </a:fillRef>
-          <a:effectRef idx="2">
-            <a:schemeClr val="accent1"/>
-          </a:effectRef>
-          <a:fontRef idx="minor">
-            <a:schemeClr val="lt1"/>
-          </a:fontRef>
-        </p:style>
-        <p:txBody>
-          <a:bodyPr rtlCol="0" anchor="ctr"/>
-          <a:lstStyle/>
-          <a:p>
-            <a:pPr algn="ctr"/>
-          </a:p>
-        </p:txBody>
-      </p:sp>
-      <p:sp>
-        <p:nvSpPr>
-          <p:cNvPr id="29" name="TextBox 28"/>
-          <p:cNvSpPr txBox="1"/>
-          <p:nvPr/>
-        </p:nvSpPr>
-        <p:spPr>
-          <a:xfrm>
-            <a:off x="594360" y="4123944"/>
-            <a:ext cx="1188720" cy="347472"/>
-          </a:xfrm>
-          <a:prstGeom prst="rect">
-            <a:avLst/>
-          </a:prstGeom>
-          <a:noFill/>
-        </p:spPr>
-        <p:txBody>
-          <a:bodyPr wrap="square">
-            <a:spAutoFit/>
-          </a:bodyPr>
-          <a:lstStyle/>
-          <a:p>
-            <a:pPr algn="l"/>
-            <a:r>
-              <a:rPr sz="1100" b="0">
-                <a:solidFill>
-                  <a:srgbClr val="2E7D32"/>
-                </a:solidFill>
-              </a:rPr>
-              <a:t>✅ 완료</a:t>
-            </a:r>
-          </a:p>
-        </p:txBody>
-      </p:sp>
-      <p:sp>
-        <p:nvSpPr>
-          <p:cNvPr id="30" name="TextBox 29"/>
-          <p:cNvSpPr txBox="1"/>
-          <p:nvPr/>
-        </p:nvSpPr>
-        <p:spPr>
-          <a:xfrm>
-            <a:off x="1920240" y="4123944"/>
-            <a:ext cx="2103120" cy="347472"/>
-          </a:xfrm>
-          <a:prstGeom prst="rect">
-            <a:avLst/>
-          </a:prstGeom>
-          <a:noFill/>
-        </p:spPr>
-        <p:txBody>
-          <a:bodyPr wrap="square">
-            <a:spAutoFit/>
-          </a:bodyPr>
-          <a:lstStyle/>
-          <a:p>
-            <a:pPr algn="l"/>
-            <a:r>
-              <a:rPr sz="1200" b="1">
-                <a:solidFill>
-                  <a:srgbClr val="212121"/>
-                </a:solidFill>
-              </a:rPr>
-              <a:t>대시보드</a:t>
-            </a:r>
-          </a:p>
-        </p:txBody>
-      </p:sp>
-      <p:sp>
-        <p:nvSpPr>
-          <p:cNvPr id="31" name="TextBox 30"/>
-          <p:cNvSpPr txBox="1"/>
-          <p:nvPr/>
-        </p:nvSpPr>
-        <p:spPr>
-          <a:xfrm>
-            <a:off x="4114800" y="4123944"/>
-            <a:ext cx="7406640" cy="347472"/>
-          </a:xfrm>
-          <a:prstGeom prst="rect">
-            <a:avLst/>
-          </a:prstGeom>
-          <a:noFill/>
-        </p:spPr>
-        <p:txBody>
-          <a:bodyPr wrap="square">
-            <a:spAutoFit/>
-          </a:bodyPr>
-          <a:lstStyle/>
-          <a:p>
-            <a:pPr algn="l"/>
-            <a:r>
-              <a:rPr sz="1200" b="0">
-                <a:solidFill>
-                  <a:srgbClr val="212121"/>
-                </a:solidFill>
-              </a:rPr>
-              <a:t>총 잔액 / 누적 손익 / 승률 / 최근 포지션 목록</a:t>
-            </a:r>
-          </a:p>
-        </p:txBody>
-      </p:sp>
-      <p:sp>
-        <p:nvSpPr>
-          <p:cNvPr id="32" name="Rectangle 31"/>
-          <p:cNvSpPr/>
-          <p:nvPr/>
-        </p:nvSpPr>
-        <p:spPr>
-          <a:xfrm>
-            <a:off x="457200" y="4709160"/>
-            <a:ext cx="11247120" cy="621792"/>
-          </a:xfrm>
-          <a:prstGeom prst="rect">
-            <a:avLst/>
-          </a:prstGeom>
-          <a:noFill/>
-          <a:ln w="10160">
-            <a:solidFill>
-              <a:srgbClr val="E0E0E0"/>
-            </a:solidFill>
-          </a:ln>
-        </p:spPr>
-        <p:style>
-          <a:lnRef idx="1">
-            <a:schemeClr val="accent1"/>
-          </a:lnRef>
-          <a:fillRef idx="3">
-            <a:schemeClr val="accent1"/>
-          </a:fillRef>
-          <a:effectRef idx="2">
-            <a:schemeClr val="accent1"/>
-          </a:effectRef>
-          <a:fontRef idx="minor">
-            <a:schemeClr val="lt1"/>
-          </a:fontRef>
-        </p:style>
-        <p:txBody>
-          <a:bodyPr rtlCol="0" anchor="ctr"/>
-          <a:lstStyle/>
-          <a:p>
-            <a:pPr algn="ctr"/>
-          </a:p>
-        </p:txBody>
-      </p:sp>
-      <p:sp>
-        <p:nvSpPr>
-          <p:cNvPr id="33" name="Rectangle 32"/>
-          <p:cNvSpPr/>
-          <p:nvPr/>
-        </p:nvSpPr>
-        <p:spPr>
-          <a:xfrm>
-            <a:off x="457200" y="4709160"/>
-            <a:ext cx="54864" cy="621792"/>
-          </a:xfrm>
-          <a:prstGeom prst="rect">
-            <a:avLst/>
-          </a:prstGeom>
-          <a:solidFill>
-            <a:srgbClr val="E65C00"/>
-          </a:solidFill>
-          <a:ln>
-            <a:noFill/>
-          </a:ln>
-        </p:spPr>
-        <p:style>
-          <a:lnRef idx="1">
-            <a:schemeClr val="accent1"/>
-          </a:lnRef>
-          <a:fillRef idx="3">
-            <a:schemeClr val="accent1"/>
-          </a:fillRef>
-          <a:effectRef idx="2">
-            <a:schemeClr val="accent1"/>
-          </a:effectRef>
-          <a:fontRef idx="minor">
-            <a:schemeClr val="lt1"/>
-          </a:fontRef>
-        </p:style>
-        <p:txBody>
-          <a:bodyPr rtlCol="0" anchor="ctr"/>
-          <a:lstStyle/>
-          <a:p>
-            <a:pPr algn="ctr"/>
-          </a:p>
-        </p:txBody>
-      </p:sp>
-      <p:sp>
-        <p:nvSpPr>
-          <p:cNvPr id="34" name="TextBox 33"/>
-          <p:cNvSpPr txBox="1"/>
-          <p:nvPr/>
-        </p:nvSpPr>
-        <p:spPr>
-          <a:xfrm>
-            <a:off x="594360" y="4855464"/>
-            <a:ext cx="1188720" cy="347472"/>
-          </a:xfrm>
-          <a:prstGeom prst="rect">
-            <a:avLst/>
-          </a:prstGeom>
-          <a:noFill/>
-        </p:spPr>
-        <p:txBody>
-          <a:bodyPr wrap="square">
-            <a:spAutoFit/>
-          </a:bodyPr>
-          <a:lstStyle/>
-          <a:p>
-            <a:pPr algn="l"/>
-            <a:r>
-              <a:rPr sz="1100" b="0">
-                <a:solidFill>
-                  <a:srgbClr val="E65C00"/>
-                </a:solidFill>
-              </a:rPr>
-              <a:t>🚧 진행</a:t>
-            </a:r>
-          </a:p>
-        </p:txBody>
-      </p:sp>
-      <p:sp>
-        <p:nvSpPr>
-          <p:cNvPr id="35" name="TextBox 34"/>
-          <p:cNvSpPr txBox="1"/>
-          <p:nvPr/>
-        </p:nvSpPr>
-        <p:spPr>
-          <a:xfrm>
-            <a:off x="1920240" y="4855464"/>
-            <a:ext cx="2103120" cy="347472"/>
-          </a:xfrm>
-          <a:prstGeom prst="rect">
-            <a:avLst/>
-          </a:prstGeom>
-          <a:noFill/>
-        </p:spPr>
-        <p:txBody>
-          <a:bodyPr wrap="square">
-            <a:spAutoFit/>
-          </a:bodyPr>
-          <a:lstStyle/>
-          <a:p>
-            <a:pPr algn="l"/>
-            <a:r>
-              <a:rPr sz="1200" b="1">
-                <a:solidFill>
-                  <a:srgbClr val="212121"/>
-                </a:solidFill>
-              </a:rPr>
-              <a:t>문서·배포</a:t>
-            </a:r>
-          </a:p>
-        </p:txBody>
-      </p:sp>
-      <p:sp>
-        <p:nvSpPr>
-          <p:cNvPr id="36" name="TextBox 35"/>
-          <p:cNvSpPr txBox="1"/>
-          <p:nvPr/>
-        </p:nvSpPr>
-        <p:spPr>
-          <a:xfrm>
-            <a:off x="4114800" y="4855464"/>
-            <a:ext cx="7406640" cy="347472"/>
-          </a:xfrm>
-          <a:prstGeom prst="rect">
-            <a:avLst/>
-          </a:prstGeom>
-          <a:noFill/>
-        </p:spPr>
-        <p:txBody>
-          <a:bodyPr wrap="square">
-            <a:spAutoFit/>
-          </a:bodyPr>
-          <a:lstStyle/>
-          <a:p>
-            <a:pPr algn="l"/>
-            <a:r>
-              <a:rPr sz="1200" b="0">
-                <a:solidFill>
-                  <a:srgbClr val="212121"/>
-                </a:solidFill>
-              </a:rPr>
-              <a:t>setup·testing 문서 / README 완비</a:t>
-            </a:r>
-          </a:p>
-        </p:txBody>
-      </p:sp>
-      <p:sp>
-        <p:nvSpPr>
-          <p:cNvPr id="37" name="Rectangle 36"/>
-          <p:cNvSpPr/>
-          <p:nvPr/>
-        </p:nvSpPr>
-        <p:spPr>
-          <a:xfrm>
-            <a:off x="457200" y="5440680"/>
-            <a:ext cx="11247120" cy="621792"/>
-          </a:xfrm>
-          <a:prstGeom prst="rect">
-            <a:avLst/>
-          </a:prstGeom>
-          <a:noFill/>
-          <a:ln w="10160">
-            <a:solidFill>
-              <a:srgbClr val="E0E0E0"/>
-            </a:solidFill>
-          </a:ln>
-        </p:spPr>
-        <p:style>
-          <a:lnRef idx="1">
-            <a:schemeClr val="accent1"/>
-          </a:lnRef>
-          <a:fillRef idx="3">
-            <a:schemeClr val="accent1"/>
-          </a:fillRef>
-          <a:effectRef idx="2">
-            <a:schemeClr val="accent1"/>
-          </a:effectRef>
-          <a:fontRef idx="minor">
-            <a:schemeClr val="lt1"/>
-          </a:fontRef>
-        </p:style>
-        <p:txBody>
-          <a:bodyPr rtlCol="0" anchor="ctr"/>
-          <a:lstStyle/>
-          <a:p>
-            <a:pPr algn="ctr"/>
-          </a:p>
-        </p:txBody>
-      </p:sp>
-      <p:sp>
-        <p:nvSpPr>
-          <p:cNvPr id="38" name="Rectangle 37"/>
-          <p:cNvSpPr/>
-          <p:nvPr/>
-        </p:nvSpPr>
-        <p:spPr>
-          <a:xfrm>
-            <a:off x="457200" y="5440680"/>
-            <a:ext cx="54864" cy="621792"/>
-          </a:xfrm>
-          <a:prstGeom prst="rect">
-            <a:avLst/>
-          </a:prstGeom>
-          <a:solidFill>
-            <a:srgbClr val="9E9E9E"/>
-          </a:solidFill>
-          <a:ln>
-            <a:noFill/>
-          </a:ln>
-        </p:spPr>
-        <p:style>
-          <a:lnRef idx="1">
-            <a:schemeClr val="accent1"/>
-          </a:lnRef>
-          <a:fillRef idx="3">
-            <a:schemeClr val="accent1"/>
-          </a:fillRef>
-          <a:effectRef idx="2">
-            <a:schemeClr val="accent1"/>
-          </a:effectRef>
-          <a:fontRef idx="minor">
-            <a:schemeClr val="lt1"/>
-          </a:fontRef>
-        </p:style>
-        <p:txBody>
-          <a:bodyPr rtlCol="0" anchor="ctr"/>
-          <a:lstStyle/>
-          <a:p>
-            <a:pPr algn="ctr"/>
-          </a:p>
-        </p:txBody>
-      </p:sp>
-      <p:sp>
-        <p:nvSpPr>
-          <p:cNvPr id="39" name="TextBox 38"/>
-          <p:cNvSpPr txBox="1"/>
-          <p:nvPr/>
-        </p:nvSpPr>
-        <p:spPr>
-          <a:xfrm>
-            <a:off x="594360" y="5586984"/>
-            <a:ext cx="1188720" cy="347472"/>
-          </a:xfrm>
-          <a:prstGeom prst="rect">
-            <a:avLst/>
-          </a:prstGeom>
-          <a:noFill/>
-        </p:spPr>
-        <p:txBody>
-          <a:bodyPr wrap="square">
-            <a:spAutoFit/>
-          </a:bodyPr>
-          <a:lstStyle/>
-          <a:p>
-            <a:pPr algn="l"/>
-            <a:r>
-              <a:rPr sz="1100" b="0">
-                <a:solidFill>
-                  <a:srgbClr val="9E9E9E"/>
-                </a:solidFill>
-              </a:rPr>
-              <a:t>⏳ 예정</a:t>
-            </a:r>
-          </a:p>
-        </p:txBody>
-      </p:sp>
-      <p:sp>
-        <p:nvSpPr>
-          <p:cNvPr id="40" name="TextBox 39"/>
-          <p:cNvSpPr txBox="1"/>
-          <p:nvPr/>
-        </p:nvSpPr>
-        <p:spPr>
-          <a:xfrm>
-            <a:off x="1920240" y="5586984"/>
-            <a:ext cx="2103120" cy="347472"/>
-          </a:xfrm>
-          <a:prstGeom prst="rect">
-            <a:avLst/>
-          </a:prstGeom>
-          <a:noFill/>
-        </p:spPr>
-        <p:txBody>
-          <a:bodyPr wrap="square">
-            <a:spAutoFit/>
-          </a:bodyPr>
-          <a:lstStyle/>
-          <a:p>
-            <a:pPr algn="l"/>
-            <a:r>
-              <a:rPr sz="1200" b="1">
-                <a:solidFill>
-                  <a:srgbClr val="212121"/>
-                </a:solidFill>
-              </a:rPr>
-              <a:t>앱 빌드</a:t>
-            </a:r>
-          </a:p>
-        </p:txBody>
-      </p:sp>
-      <p:sp>
-        <p:nvSpPr>
-          <p:cNvPr id="41" name="TextBox 40"/>
-          <p:cNvSpPr txBox="1"/>
-          <p:nvPr/>
-        </p:nvSpPr>
-        <p:spPr>
-          <a:xfrm>
-            <a:off x="4114800" y="5586984"/>
-            <a:ext cx="7406640" cy="347472"/>
-          </a:xfrm>
-          <a:prstGeom prst="rect">
-            <a:avLst/>
-          </a:prstGeom>
-          <a:noFill/>
-        </p:spPr>
-        <p:txBody>
-          <a:bodyPr wrap="square">
-            <a:spAutoFit/>
-          </a:bodyPr>
-          <a:lstStyle/>
-          <a:p>
-            <a:pPr algn="l"/>
-            <a:r>
-              <a:rPr sz="1200" b="0">
-                <a:solidFill>
-                  <a:srgbClr val="212121"/>
-                </a:solidFill>
-              </a:rPr>
-              <a:t>Android APK 빌드 및 설치 파일 생성</a:t>
-            </a:r>
-          </a:p>
-        </p:txBody>
-      </p:sp>
-      <p:sp>
-        <p:nvSpPr>
-          <p:cNvPr id="42" name="Rectangle 41"/>
-          <p:cNvSpPr/>
-          <p:nvPr/>
-        </p:nvSpPr>
-        <p:spPr>
-          <a:xfrm>
-            <a:off x="457200" y="5605272"/>
-            <a:ext cx="11247120" cy="566928"/>
+            <a:off x="457200" y="5806440"/>
+            <a:ext cx="11247120" cy="658368"/>
           </a:xfrm>
           <a:prstGeom prst="rect">
             <a:avLst/>
@@ -14289,14 +14452,14 @@
       </p:sp>
       <p:sp>
         <p:nvSpPr>
-          <p:cNvPr id="43" name="TextBox 42"/>
-          <p:cNvSpPr txBox="1"/>
-          <p:nvPr/>
-        </p:nvSpPr>
-        <p:spPr>
-          <a:xfrm>
-            <a:off x="658368" y="5760720"/>
-            <a:ext cx="10972800" cy="384048"/>
+          <p:cNvPr id="20" name="TextBox 19"/>
+          <p:cNvSpPr txBox="1"/>
+          <p:nvPr/>
+        </p:nvSpPr>
+        <p:spPr>
+          <a:xfrm>
+            <a:off x="658368" y="5971032"/>
+            <a:ext cx="10972800" cy="411480"/>
           </a:xfrm>
           <a:prstGeom prst="rect">
             <a:avLst/>
@@ -14311,12 +14474,12 @@
           <a:p>
             <a:pPr algn="l"/>
             <a:r>
-              <a:rPr sz="1300" b="1">
-                <a:solidFill>
-                  <a:srgbClr val="3F51B5"/>
-                </a:solidFill>
-              </a:rPr>
-              <a:t>전체 진척  ·  Must 기능 95% 완료  (5단계 구현 완료 / 문서·배포 진행 중)</a:t>
+              <a:rPr sz="1200" b="0">
+                <a:solidFill>
+                  <a:srgbClr val="9E9E9E"/>
+                </a:solidFill>
+              </a:rPr>
+              <a:t>데모 백업  ·  Wi-Fi 없는 환경 대비 → 로컬 데이터 캐시 + 화면 녹화 영상 준비</a:t>
             </a:r>
           </a:p>
         </p:txBody>
@@ -14339,30 +14502,758 @@
         <p:nvPr/>
       </p:nvGrpSpPr>
       <p:grpSpPr/>
-      <p:pic>
-        <p:nvPicPr>
-          <p:cNvPr id="2" name="Picture 1" descr="wbs.png"/>
-          <p:cNvPicPr>
-            <a:picLocks noChangeAspect="1"/>
-          </p:cNvPicPr>
-          <p:nvPr/>
-        </p:nvPicPr>
-        <p:blipFill>
-          <a:blip r:embed="rId2"/>
-          <a:stretch>
-            <a:fillRect/>
-          </a:stretch>
-        </p:blipFill>
-        <p:spPr>
-          <a:xfrm>
-            <a:off x="274320" y="274320"/>
-            <a:ext cx="11640312" cy="6309360"/>
-          </a:xfrm>
-          <a:prstGeom prst="rect">
-            <a:avLst/>
-          </a:prstGeom>
-        </p:spPr>
-      </p:pic>
+      <p:sp>
+        <p:nvSpPr>
+          <p:cNvPr id="2" name="Rectangle 1"/>
+          <p:cNvSpPr/>
+          <p:nvPr/>
+        </p:nvSpPr>
+        <p:spPr>
+          <a:xfrm>
+            <a:off x="0" y="0"/>
+            <a:ext cx="12188952" cy="914400"/>
+          </a:xfrm>
+          <a:prstGeom prst="rect">
+            <a:avLst/>
+          </a:prstGeom>
+          <a:noFill/>
+          <a:ln>
+            <a:noFill/>
+          </a:ln>
+        </p:spPr>
+        <p:style>
+          <a:lnRef idx="1">
+            <a:schemeClr val="accent1"/>
+          </a:lnRef>
+          <a:fillRef idx="3">
+            <a:schemeClr val="accent1"/>
+          </a:fillRef>
+          <a:effectRef idx="2">
+            <a:schemeClr val="accent1"/>
+          </a:effectRef>
+          <a:fontRef idx="minor">
+            <a:schemeClr val="lt1"/>
+          </a:fontRef>
+        </p:style>
+        <p:txBody>
+          <a:bodyPr rtlCol="0" anchor="ctr"/>
+          <a:lstStyle/>
+          <a:p>
+            <a:pPr algn="ctr"/>
+          </a:p>
+        </p:txBody>
+      </p:sp>
+      <p:sp>
+        <p:nvSpPr>
+          <p:cNvPr id="3" name="TextBox 2"/>
+          <p:cNvSpPr txBox="1"/>
+          <p:nvPr/>
+        </p:nvSpPr>
+        <p:spPr>
+          <a:xfrm>
+            <a:off x="457200" y="73152"/>
+            <a:ext cx="10972800" cy="566928"/>
+          </a:xfrm>
+          <a:prstGeom prst="rect">
+            <a:avLst/>
+          </a:prstGeom>
+          <a:noFill/>
+        </p:spPr>
+        <p:txBody>
+          <a:bodyPr wrap="square">
+            <a:spAutoFit/>
+          </a:bodyPr>
+          <a:lstStyle/>
+          <a:p>
+            <a:pPr algn="l"/>
+            <a:r>
+              <a:rPr sz="2400" b="1">
+                <a:solidFill>
+                  <a:srgbClr val="3F51B5"/>
+                </a:solidFill>
+              </a:rPr>
+              <a:t>7.  남은 일정</a:t>
+            </a:r>
+          </a:p>
+        </p:txBody>
+      </p:sp>
+      <p:sp>
+        <p:nvSpPr>
+          <p:cNvPr id="4" name="TextBox 3"/>
+          <p:cNvSpPr txBox="1"/>
+          <p:nvPr/>
+        </p:nvSpPr>
+        <p:spPr>
+          <a:xfrm>
+            <a:off x="457200" y="621792"/>
+            <a:ext cx="10972800" cy="274320"/>
+          </a:xfrm>
+          <a:prstGeom prst="rect">
+            <a:avLst/>
+          </a:prstGeom>
+          <a:noFill/>
+        </p:spPr>
+        <p:txBody>
+          <a:bodyPr wrap="square">
+            <a:spAutoFit/>
+          </a:bodyPr>
+          <a:lstStyle/>
+          <a:p>
+            <a:pPr algn="l"/>
+            <a:r>
+              <a:rPr sz="1100" b="0">
+                <a:solidFill>
+                  <a:srgbClr val="9E9E9E"/>
+                </a:solidFill>
+              </a:rPr>
+              <a:t>13 ~ 15주차 우선순위</a:t>
+            </a:r>
+          </a:p>
+        </p:txBody>
+      </p:sp>
+      <p:sp>
+        <p:nvSpPr>
+          <p:cNvPr id="5" name="Rectangle 4"/>
+          <p:cNvSpPr/>
+          <p:nvPr/>
+        </p:nvSpPr>
+        <p:spPr>
+          <a:xfrm>
+            <a:off x="0" y="868680"/>
+            <a:ext cx="12188952" cy="45720"/>
+          </a:xfrm>
+          <a:prstGeom prst="rect">
+            <a:avLst/>
+          </a:prstGeom>
+          <a:solidFill>
+            <a:srgbClr val="3F51B5"/>
+          </a:solidFill>
+          <a:ln>
+            <a:noFill/>
+          </a:ln>
+        </p:spPr>
+        <p:style>
+          <a:lnRef idx="1">
+            <a:schemeClr val="accent1"/>
+          </a:lnRef>
+          <a:fillRef idx="3">
+            <a:schemeClr val="accent1"/>
+          </a:fillRef>
+          <a:effectRef idx="2">
+            <a:schemeClr val="accent1"/>
+          </a:effectRef>
+          <a:fontRef idx="minor">
+            <a:schemeClr val="lt1"/>
+          </a:fontRef>
+        </p:style>
+        <p:txBody>
+          <a:bodyPr rtlCol="0" anchor="ctr"/>
+          <a:lstStyle/>
+          <a:p>
+            <a:pPr algn="ctr"/>
+          </a:p>
+        </p:txBody>
+      </p:sp>
+      <p:sp>
+        <p:nvSpPr>
+          <p:cNvPr id="6" name="TextBox 5"/>
+          <p:cNvSpPr txBox="1"/>
+          <p:nvPr/>
+        </p:nvSpPr>
+        <p:spPr>
+          <a:xfrm>
+            <a:off x="11247120" y="6492240"/>
+            <a:ext cx="822960" cy="274320"/>
+          </a:xfrm>
+          <a:prstGeom prst="rect">
+            <a:avLst/>
+          </a:prstGeom>
+          <a:noFill/>
+        </p:spPr>
+        <p:txBody>
+          <a:bodyPr wrap="square">
+            <a:spAutoFit/>
+          </a:bodyPr>
+          <a:lstStyle/>
+          <a:p>
+            <a:pPr algn="ctr"/>
+            <a:r>
+              <a:rPr sz="1000" b="0">
+                <a:solidFill>
+                  <a:srgbClr val="9E9E9E"/>
+                </a:solidFill>
+              </a:rPr>
+              <a:t>8 / 14</a:t>
+            </a:r>
+          </a:p>
+        </p:txBody>
+      </p:sp>
+      <p:sp>
+        <p:nvSpPr>
+          <p:cNvPr id="7" name="Rectangle 6"/>
+          <p:cNvSpPr/>
+          <p:nvPr/>
+        </p:nvSpPr>
+        <p:spPr>
+          <a:xfrm>
+            <a:off x="457200" y="1097280"/>
+            <a:ext cx="11247120" cy="1417320"/>
+          </a:xfrm>
+          <a:prstGeom prst="rect">
+            <a:avLst/>
+          </a:prstGeom>
+          <a:noFill/>
+          <a:ln w="10160">
+            <a:solidFill>
+              <a:srgbClr val="E0E0E0"/>
+            </a:solidFill>
+          </a:ln>
+        </p:spPr>
+        <p:style>
+          <a:lnRef idx="1">
+            <a:schemeClr val="accent1"/>
+          </a:lnRef>
+          <a:fillRef idx="3">
+            <a:schemeClr val="accent1"/>
+          </a:fillRef>
+          <a:effectRef idx="2">
+            <a:schemeClr val="accent1"/>
+          </a:effectRef>
+          <a:fontRef idx="minor">
+            <a:schemeClr val="lt1"/>
+          </a:fontRef>
+        </p:style>
+        <p:txBody>
+          <a:bodyPr rtlCol="0" anchor="ctr"/>
+          <a:lstStyle/>
+          <a:p>
+            <a:pPr algn="ctr"/>
+          </a:p>
+        </p:txBody>
+      </p:sp>
+      <p:sp>
+        <p:nvSpPr>
+          <p:cNvPr id="8" name="Rectangle 7"/>
+          <p:cNvSpPr/>
+          <p:nvPr/>
+        </p:nvSpPr>
+        <p:spPr>
+          <a:xfrm>
+            <a:off x="457200" y="1097280"/>
+            <a:ext cx="2560320" cy="1417320"/>
+          </a:xfrm>
+          <a:prstGeom prst="rect">
+            <a:avLst/>
+          </a:prstGeom>
+          <a:solidFill>
+            <a:srgbClr val="3F51B5"/>
+          </a:solidFill>
+          <a:ln>
+            <a:noFill/>
+          </a:ln>
+        </p:spPr>
+        <p:style>
+          <a:lnRef idx="1">
+            <a:schemeClr val="accent1"/>
+          </a:lnRef>
+          <a:fillRef idx="3">
+            <a:schemeClr val="accent1"/>
+          </a:fillRef>
+          <a:effectRef idx="2">
+            <a:schemeClr val="accent1"/>
+          </a:effectRef>
+          <a:fontRef idx="minor">
+            <a:schemeClr val="lt1"/>
+          </a:fontRef>
+        </p:style>
+        <p:txBody>
+          <a:bodyPr rtlCol="0" anchor="ctr"/>
+          <a:lstStyle/>
+          <a:p>
+            <a:pPr algn="ctr"/>
+          </a:p>
+        </p:txBody>
+      </p:sp>
+      <p:sp>
+        <p:nvSpPr>
+          <p:cNvPr id="9" name="TextBox 8"/>
+          <p:cNvSpPr txBox="1"/>
+          <p:nvPr/>
+        </p:nvSpPr>
+        <p:spPr>
+          <a:xfrm>
+            <a:off x="621792" y="1298448"/>
+            <a:ext cx="2240280" cy="475488"/>
+          </a:xfrm>
+          <a:prstGeom prst="rect">
+            <a:avLst/>
+          </a:prstGeom>
+          <a:noFill/>
+        </p:spPr>
+        <p:txBody>
+          <a:bodyPr wrap="square">
+            <a:spAutoFit/>
+          </a:bodyPr>
+          <a:lstStyle/>
+          <a:p>
+            <a:pPr algn="ctr"/>
+            <a:r>
+              <a:rPr sz="1800" b="1">
+                <a:solidFill>
+                  <a:srgbClr val="FFFFFF"/>
+                </a:solidFill>
+              </a:rPr>
+              <a:t>13주차</a:t>
+            </a:r>
+          </a:p>
+        </p:txBody>
+      </p:sp>
+      <p:sp>
+        <p:nvSpPr>
+          <p:cNvPr id="10" name="TextBox 9"/>
+          <p:cNvSpPr txBox="1"/>
+          <p:nvPr/>
+        </p:nvSpPr>
+        <p:spPr>
+          <a:xfrm>
+            <a:off x="621792" y="1810512"/>
+            <a:ext cx="2240280" cy="347472"/>
+          </a:xfrm>
+          <a:prstGeom prst="rect">
+            <a:avLst/>
+          </a:prstGeom>
+          <a:noFill/>
+        </p:spPr>
+        <p:txBody>
+          <a:bodyPr wrap="square">
+            <a:spAutoFit/>
+          </a:bodyPr>
+          <a:lstStyle/>
+          <a:p>
+            <a:pPr algn="ctr"/>
+            <a:r>
+              <a:rPr sz="1000" b="0">
+                <a:solidFill>
+                  <a:srgbClr val="C5CAE9"/>
+                </a:solidFill>
+              </a:rPr>
+              <a:t>2026-05-26 ~ 05-30</a:t>
+            </a:r>
+          </a:p>
+        </p:txBody>
+      </p:sp>
+      <p:sp>
+        <p:nvSpPr>
+          <p:cNvPr id="11" name="TextBox 10"/>
+          <p:cNvSpPr txBox="1"/>
+          <p:nvPr/>
+        </p:nvSpPr>
+        <p:spPr>
+          <a:xfrm>
+            <a:off x="3200400" y="1353312"/>
+            <a:ext cx="8229600" cy="914400"/>
+          </a:xfrm>
+          <a:prstGeom prst="rect">
+            <a:avLst/>
+          </a:prstGeom>
+          <a:noFill/>
+        </p:spPr>
+        <p:txBody>
+          <a:bodyPr wrap="square">
+            <a:spAutoFit/>
+          </a:bodyPr>
+          <a:lstStyle/>
+          <a:p>
+            <a:pPr algn="l"/>
+            <a:r>
+              <a:rPr sz="1400" b="0">
+                <a:solidFill>
+                  <a:srgbClr val="212121"/>
+                </a:solidFill>
+              </a:rPr>
+              <a:t>setup.md / deploy.md / testing.md 문서 완성
+README 최종 완비</a:t>
+            </a:r>
+          </a:p>
+        </p:txBody>
+      </p:sp>
+      <p:sp>
+        <p:nvSpPr>
+          <p:cNvPr id="12" name="Rectangle 11"/>
+          <p:cNvSpPr/>
+          <p:nvPr/>
+        </p:nvSpPr>
+        <p:spPr>
+          <a:xfrm>
+            <a:off x="457200" y="2743200"/>
+            <a:ext cx="11247120" cy="1417320"/>
+          </a:xfrm>
+          <a:prstGeom prst="rect">
+            <a:avLst/>
+          </a:prstGeom>
+          <a:noFill/>
+          <a:ln w="10160">
+            <a:solidFill>
+              <a:srgbClr val="E0E0E0"/>
+            </a:solidFill>
+          </a:ln>
+        </p:spPr>
+        <p:style>
+          <a:lnRef idx="1">
+            <a:schemeClr val="accent1"/>
+          </a:lnRef>
+          <a:fillRef idx="3">
+            <a:schemeClr val="accent1"/>
+          </a:fillRef>
+          <a:effectRef idx="2">
+            <a:schemeClr val="accent1"/>
+          </a:effectRef>
+          <a:fontRef idx="minor">
+            <a:schemeClr val="lt1"/>
+          </a:fontRef>
+        </p:style>
+        <p:txBody>
+          <a:bodyPr rtlCol="0" anchor="ctr"/>
+          <a:lstStyle/>
+          <a:p>
+            <a:pPr algn="ctr"/>
+          </a:p>
+        </p:txBody>
+      </p:sp>
+      <p:sp>
+        <p:nvSpPr>
+          <p:cNvPr id="13" name="Rectangle 12"/>
+          <p:cNvSpPr/>
+          <p:nvPr/>
+        </p:nvSpPr>
+        <p:spPr>
+          <a:xfrm>
+            <a:off x="457200" y="2743200"/>
+            <a:ext cx="2560320" cy="1417320"/>
+          </a:xfrm>
+          <a:prstGeom prst="rect">
+            <a:avLst/>
+          </a:prstGeom>
+          <a:solidFill>
+            <a:srgbClr val="3F51B5"/>
+          </a:solidFill>
+          <a:ln>
+            <a:noFill/>
+          </a:ln>
+        </p:spPr>
+        <p:style>
+          <a:lnRef idx="1">
+            <a:schemeClr val="accent1"/>
+          </a:lnRef>
+          <a:fillRef idx="3">
+            <a:schemeClr val="accent1"/>
+          </a:fillRef>
+          <a:effectRef idx="2">
+            <a:schemeClr val="accent1"/>
+          </a:effectRef>
+          <a:fontRef idx="minor">
+            <a:schemeClr val="lt1"/>
+          </a:fontRef>
+        </p:style>
+        <p:txBody>
+          <a:bodyPr rtlCol="0" anchor="ctr"/>
+          <a:lstStyle/>
+          <a:p>
+            <a:pPr algn="ctr"/>
+          </a:p>
+        </p:txBody>
+      </p:sp>
+      <p:sp>
+        <p:nvSpPr>
+          <p:cNvPr id="14" name="TextBox 13"/>
+          <p:cNvSpPr txBox="1"/>
+          <p:nvPr/>
+        </p:nvSpPr>
+        <p:spPr>
+          <a:xfrm>
+            <a:off x="621792" y="2944368"/>
+            <a:ext cx="2240280" cy="475488"/>
+          </a:xfrm>
+          <a:prstGeom prst="rect">
+            <a:avLst/>
+          </a:prstGeom>
+          <a:noFill/>
+        </p:spPr>
+        <p:txBody>
+          <a:bodyPr wrap="square">
+            <a:spAutoFit/>
+          </a:bodyPr>
+          <a:lstStyle/>
+          <a:p>
+            <a:pPr algn="ctr"/>
+            <a:r>
+              <a:rPr sz="1800" b="1">
+                <a:solidFill>
+                  <a:srgbClr val="FFFFFF"/>
+                </a:solidFill>
+              </a:rPr>
+              <a:t>14주차</a:t>
+            </a:r>
+          </a:p>
+        </p:txBody>
+      </p:sp>
+      <p:sp>
+        <p:nvSpPr>
+          <p:cNvPr id="15" name="TextBox 14"/>
+          <p:cNvSpPr txBox="1"/>
+          <p:nvPr/>
+        </p:nvSpPr>
+        <p:spPr>
+          <a:xfrm>
+            <a:off x="621792" y="3456432"/>
+            <a:ext cx="2240280" cy="347472"/>
+          </a:xfrm>
+          <a:prstGeom prst="rect">
+            <a:avLst/>
+          </a:prstGeom>
+          <a:noFill/>
+        </p:spPr>
+        <p:txBody>
+          <a:bodyPr wrap="square">
+            <a:spAutoFit/>
+          </a:bodyPr>
+          <a:lstStyle/>
+          <a:p>
+            <a:pPr algn="ctr"/>
+            <a:r>
+              <a:rPr sz="1000" b="0">
+                <a:solidFill>
+                  <a:srgbClr val="C5CAE9"/>
+                </a:solidFill>
+              </a:rPr>
+              <a:t>2026-06-02 ~ 06-06</a:t>
+            </a:r>
+          </a:p>
+        </p:txBody>
+      </p:sp>
+      <p:sp>
+        <p:nvSpPr>
+          <p:cNvPr id="16" name="TextBox 15"/>
+          <p:cNvSpPr txBox="1"/>
+          <p:nvPr/>
+        </p:nvSpPr>
+        <p:spPr>
+          <a:xfrm>
+            <a:off x="3200400" y="2999232"/>
+            <a:ext cx="8229600" cy="914400"/>
+          </a:xfrm>
+          <a:prstGeom prst="rect">
+            <a:avLst/>
+          </a:prstGeom>
+          <a:noFill/>
+        </p:spPr>
+        <p:txBody>
+          <a:bodyPr wrap="square">
+            <a:spAutoFit/>
+          </a:bodyPr>
+          <a:lstStyle/>
+          <a:p>
+            <a:pPr algn="l"/>
+            <a:r>
+              <a:rPr sz="1400" b="0">
+                <a:solidFill>
+                  <a:srgbClr val="212121"/>
+                </a:solidFill>
+              </a:rPr>
+              <a:t>Android APK 빌드 및 설치 테스트
+최종 발표 슬라이드 완성</a:t>
+            </a:r>
+          </a:p>
+        </p:txBody>
+      </p:sp>
+      <p:sp>
+        <p:nvSpPr>
+          <p:cNvPr id="17" name="Rectangle 16"/>
+          <p:cNvSpPr/>
+          <p:nvPr/>
+        </p:nvSpPr>
+        <p:spPr>
+          <a:xfrm>
+            <a:off x="457200" y="4389120"/>
+            <a:ext cx="11247120" cy="1417320"/>
+          </a:xfrm>
+          <a:prstGeom prst="rect">
+            <a:avLst/>
+          </a:prstGeom>
+          <a:noFill/>
+          <a:ln w="10160">
+            <a:solidFill>
+              <a:srgbClr val="E0E0E0"/>
+            </a:solidFill>
+          </a:ln>
+        </p:spPr>
+        <p:style>
+          <a:lnRef idx="1">
+            <a:schemeClr val="accent1"/>
+          </a:lnRef>
+          <a:fillRef idx="3">
+            <a:schemeClr val="accent1"/>
+          </a:fillRef>
+          <a:effectRef idx="2">
+            <a:schemeClr val="accent1"/>
+          </a:effectRef>
+          <a:fontRef idx="minor">
+            <a:schemeClr val="lt1"/>
+          </a:fontRef>
+        </p:style>
+        <p:txBody>
+          <a:bodyPr rtlCol="0" anchor="ctr"/>
+          <a:lstStyle/>
+          <a:p>
+            <a:pPr algn="ctr"/>
+          </a:p>
+        </p:txBody>
+      </p:sp>
+      <p:sp>
+        <p:nvSpPr>
+          <p:cNvPr id="18" name="Rectangle 17"/>
+          <p:cNvSpPr/>
+          <p:nvPr/>
+        </p:nvSpPr>
+        <p:spPr>
+          <a:xfrm>
+            <a:off x="457200" y="4389120"/>
+            <a:ext cx="2560320" cy="1417320"/>
+          </a:xfrm>
+          <a:prstGeom prst="rect">
+            <a:avLst/>
+          </a:prstGeom>
+          <a:solidFill>
+            <a:srgbClr val="3F51B5"/>
+          </a:solidFill>
+          <a:ln>
+            <a:noFill/>
+          </a:ln>
+        </p:spPr>
+        <p:style>
+          <a:lnRef idx="1">
+            <a:schemeClr val="accent1"/>
+          </a:lnRef>
+          <a:fillRef idx="3">
+            <a:schemeClr val="accent1"/>
+          </a:fillRef>
+          <a:effectRef idx="2">
+            <a:schemeClr val="accent1"/>
+          </a:effectRef>
+          <a:fontRef idx="minor">
+            <a:schemeClr val="lt1"/>
+          </a:fontRef>
+        </p:style>
+        <p:txBody>
+          <a:bodyPr rtlCol="0" anchor="ctr"/>
+          <a:lstStyle/>
+          <a:p>
+            <a:pPr algn="ctr"/>
+          </a:p>
+        </p:txBody>
+      </p:sp>
+      <p:sp>
+        <p:nvSpPr>
+          <p:cNvPr id="19" name="TextBox 18"/>
+          <p:cNvSpPr txBox="1"/>
+          <p:nvPr/>
+        </p:nvSpPr>
+        <p:spPr>
+          <a:xfrm>
+            <a:off x="621792" y="4590288"/>
+            <a:ext cx="2240280" cy="475488"/>
+          </a:xfrm>
+          <a:prstGeom prst="rect">
+            <a:avLst/>
+          </a:prstGeom>
+          <a:noFill/>
+        </p:spPr>
+        <p:txBody>
+          <a:bodyPr wrap="square">
+            <a:spAutoFit/>
+          </a:bodyPr>
+          <a:lstStyle/>
+          <a:p>
+            <a:pPr algn="ctr"/>
+            <a:r>
+              <a:rPr sz="1800" b="1">
+                <a:solidFill>
+                  <a:srgbClr val="FFFFFF"/>
+                </a:solidFill>
+              </a:rPr>
+              <a:t>15주차</a:t>
+            </a:r>
+          </a:p>
+        </p:txBody>
+      </p:sp>
+      <p:sp>
+        <p:nvSpPr>
+          <p:cNvPr id="20" name="TextBox 19"/>
+          <p:cNvSpPr txBox="1"/>
+          <p:nvPr/>
+        </p:nvSpPr>
+        <p:spPr>
+          <a:xfrm>
+            <a:off x="621792" y="5102352"/>
+            <a:ext cx="2240280" cy="347472"/>
+          </a:xfrm>
+          <a:prstGeom prst="rect">
+            <a:avLst/>
+          </a:prstGeom>
+          <a:noFill/>
+        </p:spPr>
+        <p:txBody>
+          <a:bodyPr wrap="square">
+            <a:spAutoFit/>
+          </a:bodyPr>
+          <a:lstStyle/>
+          <a:p>
+            <a:pPr algn="ctr"/>
+            <a:r>
+              <a:rPr sz="1000" b="0">
+                <a:solidFill>
+                  <a:srgbClr val="C5CAE9"/>
+                </a:solidFill>
+              </a:rPr>
+              <a:t>2026-06-09 ~ 06-13</a:t>
+            </a:r>
+          </a:p>
+        </p:txBody>
+      </p:sp>
+      <p:sp>
+        <p:nvSpPr>
+          <p:cNvPr id="21" name="TextBox 20"/>
+          <p:cNvSpPr txBox="1"/>
+          <p:nvPr/>
+        </p:nvSpPr>
+        <p:spPr>
+          <a:xfrm>
+            <a:off x="3200400" y="4645152"/>
+            <a:ext cx="8229600" cy="914400"/>
+          </a:xfrm>
+          <a:prstGeom prst="rect">
+            <a:avLst/>
+          </a:prstGeom>
+          <a:noFill/>
+        </p:spPr>
+        <p:txBody>
+          <a:bodyPr wrap="square">
+            <a:spAutoFit/>
+          </a:bodyPr>
+          <a:lstStyle/>
+          <a:p>
+            <a:pPr algn="l"/>
+            <a:r>
+              <a:rPr sz="1400" b="0">
+                <a:solidFill>
+                  <a:srgbClr val="212121"/>
+                </a:solidFill>
+              </a:rPr>
+              <a:t>최종 발표</a:t>
+            </a:r>
+          </a:p>
+        </p:txBody>
+      </p:sp>
     </p:spTree>
   </p:cSld>
   <p:clrMapOvr>
@@ -14451,48 +15342,14 @@
                   <a:srgbClr val="3F51B5"/>
                 </a:solidFill>
               </a:rPr>
-              <a:t>7.  남은 일정</a:t>
-            </a:r>
-          </a:p>
-        </p:txBody>
-      </p:sp>
-      <p:sp>
-        <p:nvSpPr>
-          <p:cNvPr id="4" name="TextBox 3"/>
-          <p:cNvSpPr txBox="1"/>
-          <p:nvPr/>
-        </p:nvSpPr>
-        <p:spPr>
-          <a:xfrm>
-            <a:off x="457200" y="621792"/>
-            <a:ext cx="10972800" cy="274320"/>
-          </a:xfrm>
-          <a:prstGeom prst="rect">
-            <a:avLst/>
-          </a:prstGeom>
-          <a:noFill/>
-        </p:spPr>
-        <p:txBody>
-          <a:bodyPr wrap="square">
-            <a:spAutoFit/>
-          </a:bodyPr>
-          <a:lstStyle/>
-          <a:p>
-            <a:pPr algn="l"/>
-            <a:r>
-              <a:rPr sz="1100" b="0">
-                <a:solidFill>
-                  <a:srgbClr val="9E9E9E"/>
-                </a:solidFill>
-              </a:rPr>
-              <a:t>13 ~ 15주차 우선순위</a:t>
-            </a:r>
-          </a:p>
-        </p:txBody>
-      </p:sp>
-      <p:sp>
-        <p:nvSpPr>
-          <p:cNvPr id="5" name="Rectangle 4"/>
+              <a:t>8.  어려운 점 / 도움 요청</a:t>
+            </a:r>
+          </a:p>
+        </p:txBody>
+      </p:sp>
+      <p:sp>
+        <p:nvSpPr>
+          <p:cNvPr id="4" name="Rectangle 3"/>
           <p:cNvSpPr/>
           <p:nvPr/>
         </p:nvSpPr>
@@ -14535,7 +15392,7 @@
       </p:sp>
       <p:sp>
         <p:nvSpPr>
-          <p:cNvPr id="6" name="TextBox 5"/>
+          <p:cNvPr id="5" name="TextBox 4"/>
           <p:cNvSpPr txBox="1"/>
           <p:nvPr/>
         </p:nvSpPr>
@@ -14562,20 +15419,20 @@
                   <a:srgbClr val="9E9E9E"/>
                 </a:solidFill>
               </a:rPr>
-              <a:t>8 / 13</a:t>
-            </a:r>
-          </a:p>
-        </p:txBody>
-      </p:sp>
-      <p:sp>
-        <p:nvSpPr>
-          <p:cNvPr id="7" name="Rectangle 6"/>
+              <a:t>9 / 14</a:t>
+            </a:r>
+          </a:p>
+        </p:txBody>
+      </p:sp>
+      <p:sp>
+        <p:nvSpPr>
+          <p:cNvPr id="6" name="Rectangle 5"/>
           <p:cNvSpPr/>
           <p:nvPr/>
         </p:nvSpPr>
         <p:spPr>
           <a:xfrm>
-            <a:off x="457200" y="1097280"/>
+            <a:off x="457200" y="1051560"/>
             <a:ext cx="11247120" cy="1417320"/>
           </a:xfrm>
           <a:prstGeom prst="rect">
@@ -14612,20 +15469,20 @@
       </p:sp>
       <p:sp>
         <p:nvSpPr>
-          <p:cNvPr id="8" name="Rectangle 7"/>
+          <p:cNvPr id="7" name="Rectangle 6"/>
           <p:cNvSpPr/>
           <p:nvPr/>
         </p:nvSpPr>
         <p:spPr>
           <a:xfrm>
-            <a:off x="457200" y="1097280"/>
-            <a:ext cx="2560320" cy="1417320"/>
+            <a:off x="457200" y="1051560"/>
+            <a:ext cx="54864" cy="1417320"/>
           </a:xfrm>
           <a:prstGeom prst="rect">
             <a:avLst/>
           </a:prstGeom>
           <a:solidFill>
-            <a:srgbClr val="3F51B5"/>
+            <a:srgbClr val="E65C00"/>
           </a:solidFill>
           <a:ln>
             <a:noFill/>
@@ -14655,82 +15512,48 @@
       </p:sp>
       <p:sp>
         <p:nvSpPr>
+          <p:cNvPr id="8" name="TextBox 7"/>
+          <p:cNvSpPr txBox="1"/>
+          <p:nvPr/>
+        </p:nvSpPr>
+        <p:spPr>
+          <a:xfrm>
+            <a:off x="658368" y="1188719"/>
+            <a:ext cx="10972800" cy="411480"/>
+          </a:xfrm>
+          <a:prstGeom prst="rect">
+            <a:avLst/>
+          </a:prstGeom>
+          <a:noFill/>
+        </p:spPr>
+        <p:txBody>
+          <a:bodyPr wrap="square">
+            <a:spAutoFit/>
+          </a:bodyPr>
+          <a:lstStyle/>
+          <a:p>
+            <a:pPr algn="l"/>
+            <a:r>
+              <a:rPr sz="1400" b="1">
+                <a:solidFill>
+                  <a:srgbClr val="212121"/>
+                </a:solidFill>
+              </a:rPr>
+              <a:t>iOS 빌드 불가</a:t>
+            </a:r>
+          </a:p>
+        </p:txBody>
+      </p:sp>
+      <p:sp>
+        <p:nvSpPr>
           <p:cNvPr id="9" name="TextBox 8"/>
           <p:cNvSpPr txBox="1"/>
           <p:nvPr/>
         </p:nvSpPr>
         <p:spPr>
           <a:xfrm>
-            <a:off x="621792" y="1298448"/>
-            <a:ext cx="2240280" cy="475488"/>
-          </a:xfrm>
-          <a:prstGeom prst="rect">
-            <a:avLst/>
-          </a:prstGeom>
-          <a:noFill/>
-        </p:spPr>
-        <p:txBody>
-          <a:bodyPr wrap="square">
-            <a:spAutoFit/>
-          </a:bodyPr>
-          <a:lstStyle/>
-          <a:p>
-            <a:pPr algn="ctr"/>
-            <a:r>
-              <a:rPr sz="1800" b="1">
-                <a:solidFill>
-                  <a:srgbClr val="FFFFFF"/>
-                </a:solidFill>
-              </a:rPr>
-              <a:t>13주차</a:t>
-            </a:r>
-          </a:p>
-        </p:txBody>
-      </p:sp>
-      <p:sp>
-        <p:nvSpPr>
-          <p:cNvPr id="10" name="TextBox 9"/>
-          <p:cNvSpPr txBox="1"/>
-          <p:nvPr/>
-        </p:nvSpPr>
-        <p:spPr>
-          <a:xfrm>
-            <a:off x="621792" y="1810512"/>
-            <a:ext cx="2240280" cy="347472"/>
-          </a:xfrm>
-          <a:prstGeom prst="rect">
-            <a:avLst/>
-          </a:prstGeom>
-          <a:noFill/>
-        </p:spPr>
-        <p:txBody>
-          <a:bodyPr wrap="square">
-            <a:spAutoFit/>
-          </a:bodyPr>
-          <a:lstStyle/>
-          <a:p>
-            <a:pPr algn="ctr"/>
-            <a:r>
-              <a:rPr sz="1000" b="0">
-                <a:solidFill>
-                  <a:srgbClr val="C5CAE9"/>
-                </a:solidFill>
-              </a:rPr>
-              <a:t>2026-05-26 ~ 05-30</a:t>
-            </a:r>
-          </a:p>
-        </p:txBody>
-      </p:sp>
-      <p:sp>
-        <p:nvSpPr>
-          <p:cNvPr id="11" name="TextBox 10"/>
-          <p:cNvSpPr txBox="1"/>
-          <p:nvPr/>
-        </p:nvSpPr>
-        <p:spPr>
-          <a:xfrm>
-            <a:off x="3200400" y="1353312"/>
-            <a:ext cx="8229600" cy="914400"/>
+            <a:off x="658368" y="1618488"/>
+            <a:ext cx="10789920" cy="749808"/>
           </a:xfrm>
           <a:prstGeom prst="rect">
             <a:avLst/>
@@ -14745,26 +15568,26 @@
           <a:p>
             <a:pPr algn="l"/>
             <a:r>
-              <a:rPr sz="1400" b="0">
+              <a:rPr sz="1300" b="0">
                 <a:solidFill>
                   <a:srgbClr val="212121"/>
                 </a:solidFill>
               </a:rPr>
-              <a:t>setup.md / deploy.md / testing.md 문서 완성
-README 최종 완비</a:t>
-            </a:r>
-          </a:p>
-        </p:txBody>
-      </p:sp>
-      <p:sp>
-        <p:nvSpPr>
-          <p:cNvPr id="12" name="Rectangle 11"/>
+              <a:t>Mac 환경 없음 → iOS 시뮬레이터·실기기 테스트 불가
+Android APK만 제출 예정</a:t>
+            </a:r>
+          </a:p>
+        </p:txBody>
+      </p:sp>
+      <p:sp>
+        <p:nvSpPr>
+          <p:cNvPr id="10" name="Rectangle 9"/>
           <p:cNvSpPr/>
           <p:nvPr/>
         </p:nvSpPr>
         <p:spPr>
           <a:xfrm>
-            <a:off x="457200" y="2743200"/>
+            <a:off x="457200" y="2715768"/>
             <a:ext cx="11247120" cy="1417320"/>
           </a:xfrm>
           <a:prstGeom prst="rect">
@@ -14801,20 +15624,20 @@
       </p:sp>
       <p:sp>
         <p:nvSpPr>
-          <p:cNvPr id="13" name="Rectangle 12"/>
+          <p:cNvPr id="11" name="Rectangle 10"/>
           <p:cNvSpPr/>
           <p:nvPr/>
         </p:nvSpPr>
         <p:spPr>
           <a:xfrm>
-            <a:off x="457200" y="2743200"/>
-            <a:ext cx="2560320" cy="1417320"/>
+            <a:off x="457200" y="2715768"/>
+            <a:ext cx="54864" cy="1417320"/>
           </a:xfrm>
           <a:prstGeom prst="rect">
             <a:avLst/>
           </a:prstGeom>
           <a:solidFill>
-            <a:srgbClr val="3F51B5"/>
+            <a:srgbClr val="E65C00"/>
           </a:solidFill>
           <a:ln>
             <a:noFill/>
@@ -14844,82 +15667,14 @@
       </p:sp>
       <p:sp>
         <p:nvSpPr>
-          <p:cNvPr id="14" name="TextBox 13"/>
-          <p:cNvSpPr txBox="1"/>
-          <p:nvPr/>
-        </p:nvSpPr>
-        <p:spPr>
-          <a:xfrm>
-            <a:off x="621792" y="2944368"/>
-            <a:ext cx="2240280" cy="475488"/>
-          </a:xfrm>
-          <a:prstGeom prst="rect">
-            <a:avLst/>
-          </a:prstGeom>
-          <a:noFill/>
-        </p:spPr>
-        <p:txBody>
-          <a:bodyPr wrap="square">
-            <a:spAutoFit/>
-          </a:bodyPr>
-          <a:lstStyle/>
-          <a:p>
-            <a:pPr algn="ctr"/>
-            <a:r>
-              <a:rPr sz="1800" b="1">
-                <a:solidFill>
-                  <a:srgbClr val="FFFFFF"/>
-                </a:solidFill>
-              </a:rPr>
-              <a:t>14주차</a:t>
-            </a:r>
-          </a:p>
-        </p:txBody>
-      </p:sp>
-      <p:sp>
-        <p:nvSpPr>
-          <p:cNvPr id="15" name="TextBox 14"/>
-          <p:cNvSpPr txBox="1"/>
-          <p:nvPr/>
-        </p:nvSpPr>
-        <p:spPr>
-          <a:xfrm>
-            <a:off x="621792" y="3456432"/>
-            <a:ext cx="2240280" cy="347472"/>
-          </a:xfrm>
-          <a:prstGeom prst="rect">
-            <a:avLst/>
-          </a:prstGeom>
-          <a:noFill/>
-        </p:spPr>
-        <p:txBody>
-          <a:bodyPr wrap="square">
-            <a:spAutoFit/>
-          </a:bodyPr>
-          <a:lstStyle/>
-          <a:p>
-            <a:pPr algn="ctr"/>
-            <a:r>
-              <a:rPr sz="1000" b="0">
-                <a:solidFill>
-                  <a:srgbClr val="C5CAE9"/>
-                </a:solidFill>
-              </a:rPr>
-              <a:t>2026-06-02 ~ 06-06</a:t>
-            </a:r>
-          </a:p>
-        </p:txBody>
-      </p:sp>
-      <p:sp>
-        <p:nvSpPr>
-          <p:cNvPr id="16" name="TextBox 15"/>
-          <p:cNvSpPr txBox="1"/>
-          <p:nvPr/>
-        </p:nvSpPr>
-        <p:spPr>
-          <a:xfrm>
-            <a:off x="3200400" y="2999232"/>
-            <a:ext cx="8229600" cy="914400"/>
+          <p:cNvPr id="12" name="TextBox 11"/>
+          <p:cNvSpPr txBox="1"/>
+          <p:nvPr/>
+        </p:nvSpPr>
+        <p:spPr>
+          <a:xfrm>
+            <a:off x="658368" y="2852927"/>
+            <a:ext cx="10972800" cy="411480"/>
           </a:xfrm>
           <a:prstGeom prst="rect">
             <a:avLst/>
@@ -14934,26 +15689,60 @@
           <a:p>
             <a:pPr algn="l"/>
             <a:r>
-              <a:rPr sz="1400" b="0">
+              <a:rPr sz="1400" b="1">
                 <a:solidFill>
                   <a:srgbClr val="212121"/>
                 </a:solidFill>
               </a:rPr>
-              <a:t>Android APK 빌드 및 설치 테스트
-최종 발표 슬라이드 완성</a:t>
-            </a:r>
-          </a:p>
-        </p:txBody>
-      </p:sp>
-      <p:sp>
-        <p:nvSpPr>
-          <p:cNvPr id="17" name="Rectangle 16"/>
+              <a:t>Firebase Security Rules</a:t>
+            </a:r>
+          </a:p>
+        </p:txBody>
+      </p:sp>
+      <p:sp>
+        <p:nvSpPr>
+          <p:cNvPr id="13" name="TextBox 12"/>
+          <p:cNvSpPr txBox="1"/>
+          <p:nvPr/>
+        </p:nvSpPr>
+        <p:spPr>
+          <a:xfrm>
+            <a:off x="658368" y="3282696"/>
+            <a:ext cx="10789920" cy="749808"/>
+          </a:xfrm>
+          <a:prstGeom prst="rect">
+            <a:avLst/>
+          </a:prstGeom>
+          <a:noFill/>
+        </p:spPr>
+        <p:txBody>
+          <a:bodyPr wrap="square">
+            <a:spAutoFit/>
+          </a:bodyPr>
+          <a:lstStyle/>
+          <a:p>
+            <a:pPr algn="l"/>
+            <a:r>
+              <a:rPr sz="1300" b="0">
+                <a:solidFill>
+                  <a:srgbClr val="212121"/>
+                </a:solidFill>
+              </a:rPr>
+              <a:t>Firestore 보안 규칙 검증 어려움 — 다른 사용자가 타 계정 데이터에
+접근하지 못하도록 규칙을 작성했으나 침투 테스트 환경 없음</a:t>
+            </a:r>
+          </a:p>
+        </p:txBody>
+      </p:sp>
+      <p:sp>
+        <p:nvSpPr>
+          <p:cNvPr id="14" name="Rectangle 13"/>
           <p:cNvSpPr/>
           <p:nvPr/>
         </p:nvSpPr>
         <p:spPr>
           <a:xfrm>
-            <a:off x="457200" y="4389120"/>
+            <a:off x="457200" y="4379976"/>
             <a:ext cx="11247120" cy="1417320"/>
           </a:xfrm>
           <a:prstGeom prst="rect">
@@ -14990,20 +15779,20 @@
       </p:sp>
       <p:sp>
         <p:nvSpPr>
-          <p:cNvPr id="18" name="Rectangle 17"/>
+          <p:cNvPr id="15" name="Rectangle 14"/>
           <p:cNvSpPr/>
           <p:nvPr/>
         </p:nvSpPr>
         <p:spPr>
           <a:xfrm>
-            <a:off x="457200" y="4389120"/>
-            <a:ext cx="2560320" cy="1417320"/>
+            <a:off x="457200" y="4379976"/>
+            <a:ext cx="54864" cy="1417320"/>
           </a:xfrm>
           <a:prstGeom prst="rect">
             <a:avLst/>
           </a:prstGeom>
           <a:solidFill>
-            <a:srgbClr val="3F51B5"/>
+            <a:srgbClr val="E65C00"/>
           </a:solidFill>
           <a:ln>
             <a:noFill/>
@@ -15033,82 +15822,14 @@
       </p:sp>
       <p:sp>
         <p:nvSpPr>
-          <p:cNvPr id="19" name="TextBox 18"/>
-          <p:cNvSpPr txBox="1"/>
-          <p:nvPr/>
-        </p:nvSpPr>
-        <p:spPr>
-          <a:xfrm>
-            <a:off x="621792" y="4590288"/>
-            <a:ext cx="2240280" cy="475488"/>
-          </a:xfrm>
-          <a:prstGeom prst="rect">
-            <a:avLst/>
-          </a:prstGeom>
-          <a:noFill/>
-        </p:spPr>
-        <p:txBody>
-          <a:bodyPr wrap="square">
-            <a:spAutoFit/>
-          </a:bodyPr>
-          <a:lstStyle/>
-          <a:p>
-            <a:pPr algn="ctr"/>
-            <a:r>
-              <a:rPr sz="1800" b="1">
-                <a:solidFill>
-                  <a:srgbClr val="FFFFFF"/>
-                </a:solidFill>
-              </a:rPr>
-              <a:t>15주차</a:t>
-            </a:r>
-          </a:p>
-        </p:txBody>
-      </p:sp>
-      <p:sp>
-        <p:nvSpPr>
-          <p:cNvPr id="20" name="TextBox 19"/>
-          <p:cNvSpPr txBox="1"/>
-          <p:nvPr/>
-        </p:nvSpPr>
-        <p:spPr>
-          <a:xfrm>
-            <a:off x="621792" y="5102352"/>
-            <a:ext cx="2240280" cy="347472"/>
-          </a:xfrm>
-          <a:prstGeom prst="rect">
-            <a:avLst/>
-          </a:prstGeom>
-          <a:noFill/>
-        </p:spPr>
-        <p:txBody>
-          <a:bodyPr wrap="square">
-            <a:spAutoFit/>
-          </a:bodyPr>
-          <a:lstStyle/>
-          <a:p>
-            <a:pPr algn="ctr"/>
-            <a:r>
-              <a:rPr sz="1000" b="0">
-                <a:solidFill>
-                  <a:srgbClr val="C5CAE9"/>
-                </a:solidFill>
-              </a:rPr>
-              <a:t>2026-06-09 ~ 06-13</a:t>
-            </a:r>
-          </a:p>
-        </p:txBody>
-      </p:sp>
-      <p:sp>
-        <p:nvSpPr>
-          <p:cNvPr id="21" name="TextBox 20"/>
-          <p:cNvSpPr txBox="1"/>
-          <p:nvPr/>
-        </p:nvSpPr>
-        <p:spPr>
-          <a:xfrm>
-            <a:off x="3200400" y="4645152"/>
-            <a:ext cx="8229600" cy="914400"/>
+          <p:cNvPr id="16" name="TextBox 15"/>
+          <p:cNvSpPr txBox="1"/>
+          <p:nvPr/>
+        </p:nvSpPr>
+        <p:spPr>
+          <a:xfrm>
+            <a:off x="658368" y="4517136"/>
+            <a:ext cx="10972800" cy="411480"/>
           </a:xfrm>
           <a:prstGeom prst="rect">
             <a:avLst/>
@@ -15123,12 +15844,47 @@
           <a:p>
             <a:pPr algn="l"/>
             <a:r>
-              <a:rPr sz="1400" b="0">
+              <a:rPr sz="1400" b="1">
                 <a:solidFill>
                   <a:srgbClr val="212121"/>
                 </a:solidFill>
               </a:rPr>
-              <a:t>최종 발표</a:t>
+              <a:t>앱 배포 경험 없음</a:t>
+            </a:r>
+          </a:p>
+        </p:txBody>
+      </p:sp>
+      <p:sp>
+        <p:nvSpPr>
+          <p:cNvPr id="17" name="TextBox 16"/>
+          <p:cNvSpPr txBox="1"/>
+          <p:nvPr/>
+        </p:nvSpPr>
+        <p:spPr>
+          <a:xfrm>
+            <a:off x="658368" y="4946904"/>
+            <a:ext cx="10789920" cy="749808"/>
+          </a:xfrm>
+          <a:prstGeom prst="rect">
+            <a:avLst/>
+          </a:prstGeom>
+          <a:noFill/>
+        </p:spPr>
+        <p:txBody>
+          <a:bodyPr wrap="square">
+            <a:spAutoFit/>
+          </a:bodyPr>
+          <a:lstStyle/>
+          <a:p>
+            <a:pPr algn="l"/>
+            <a:r>
+              <a:rPr sz="1300" b="0">
+                <a:solidFill>
+                  <a:srgbClr val="212121"/>
+                </a:solidFill>
+              </a:rPr>
+              <a:t>Google Play Console 등록 절차 및 APK 서명 과정 첫 시도
+배포 오류 발생 시 대응 방법 조언 필요</a:t>
             </a:r>
           </a:p>
         </p:txBody>
